--- a/en/files/slides/Session_4_EN.pptx
+++ b/en/files/slides/Session_4_EN.pptx
@@ -738,7 +738,7 @@
           <a:p>
             <a:r>
               <a:rPr lang="en-US" sz="1400" b="0" dirty="0"/>
-              <a:t>SESSION 4 OPENING (0:00). Yesterday we chose HOW to answer a question. Today two questions about any result: can we TRUST it (bias, confounding, causation) and how BIG is it (risk, RR, OR, RD, NNT)? Then we look beyond single studies: diagnostic tests, meta-analysis and appraisal tools.</a:t>
+              <a:t>SESSION 4 OPENING (0:00). Last Saturday we chose HOW to answer a question. Today two questions about any result: can we TRUST it (bias, confounding, causation) and how BIG is it (risk, RR, OR, RD, NNT)? Then we look beyond single studies: diagnostic tests, meta-analysis and appraisal tools.</a:t>
             </a:r>
           </a:p>
           <a:p>
@@ -3231,7 +3231,7 @@
           <a:p>
             <a:r>
               <a:rPr lang="en-US" sz="1400" b="0" dirty="0"/>
-              <a:t>During the break, walk past the groups and check that each has its Part 2a from yesterday - they will need it in the proposal builder.</a:t>
+              <a:t>During the break, walk past the groups and check that each has its Part 2a from last Saturday - they will need it in the proposal builder.</a:t>
             </a:r>
           </a:p>
           <a:p>
@@ -4860,7 +4860,7 @@
           <a:p>
             <a:r>
               <a:rPr lang="en-US" sz="1400" b="0" dirty="0"/>
-              <a:t>This also closes Weekend 2: the proposal now has its question (Part 1) and its design (Part 2).</a:t>
+              <a:t>This also closes Weeks 3-4: the proposal now has its question (Part 1) and its design (Part 2).</a:t>
             </a:r>
           </a:p>
           <a:p>
@@ -4953,7 +4953,7 @@
           <a:p>
             <a:r>
               <a:rPr lang="en-US" sz="1400" b="0" dirty="0"/>
-              <a:t>Preview: in Weekend 3 we turn the design into data - variables, data collection forms - and the course dataset FLUID-ICU, a simulated cohort that answers the observational version of our fluid question.</a:t>
+              <a:t>Preview: in Weeks 5-6 we turn the design into data - variables, data collection forms - and the course dataset FLUID-ICU, a simulated cohort that answers the observational version of our fluid question.</a:t>
             </a:r>
           </a:p>
           <a:p>
@@ -9134,7 +9134,7 @@
                 <a:latin typeface="Century Gothic"/>
                 <a:cs typeface="Century Gothic"/>
               </a:rPr>
-              <a:t>Weekend 2 · Sunday</a:t>
+              <a:t>Week 4 · Saturday</a:t>
             </a:r>
           </a:p>
           <a:p>
@@ -25196,7 +25196,7 @@
                 <a:latin typeface="Century Gothic"/>
                 <a:cs typeface="Century Gothic"/>
               </a:rPr>
-              <a:t>Next weekend (Sessions 5-6): data - the FLUID-ICU course dataset</a:t>
+              <a:t>Next two Saturdays (Sessions 5-6): data - the FLUID-ICU course dataset</a:t>
             </a:r>
           </a:p>
         </p:txBody>

--- a/en/files/slides/Session_4_EN.pptx
+++ b/en/files/slides/Session_4_EN.pptx
@@ -744,7 +744,7 @@
           <a:p>
             <a:r>
               <a:rPr lang="en-US" sz="1400" b="0" dirty="0"/>
-              <a:t>Read three exit-question sticky notes from Session 3 first (the flu-vaccine cohort) - it leads straight into confounding.</a:t>
+              <a:t>Read three exit-question sticky notes from Session 3 first (the flu-vaccine cohort). It leads straight into confounding.</a:t>
             </a:r>
           </a:p>
           <a:p>
@@ -837,7 +837,7 @@
           <a:p>
             <a:r>
               <a:rPr lang="en-US" sz="1400" b="0" dirty="0"/>
-              <a:t>Hypothetical numbers, chosen to make the point. All patients together: 42% of high-fluid patients die versus 18% of low-fluid patients - a crude RR of 2.33. It looks as if fluid kills.</a:t>
+              <a:t>Hypothetical numbers, chosen to make the point. All patients together: 42% of high-fluid patients die versus 18% of low-fluid patients, a crude RR of 2.33. It looks as if fluid kills.</a:t>
             </a:r>
           </a:p>
           <a:p>
@@ -849,25 +849,25 @@
           <a:p>
             <a:r>
               <a:rPr lang="en-US" sz="1400" b="0" dirty="0"/>
-              <a:t>Why? 80 of the 100 high-fluid patients were severely ill, but only 20 of the 100 low-fluid patients. Severity, not fluid, explained the crude difference.</a:t>
+              <a:t>The reason: 80 of the 100 high-fluid patients were severely ill, but only 20 of the 100 low-fluid patients. Severity, not fluid, explained the crude difference.</a:t>
             </a:r>
           </a:p>
           <a:p>
             <a:r>
               <a:rPr lang="en-US" sz="1400" b="0" dirty="0"/>
-              <a:t>Teaching point: this is what 'adjusting for severity' does - it compares like with like. Session 6 shows how papers and models report it. Next slide: what it means when the strata do NOT agree.</a:t>
+              <a:t>Teaching point: this is what 'adjusting for severity' does: it compares like with like. Session 6 shows how papers and models report it. Next slide: what it means when the strata do NOT agree.</a:t>
             </a:r>
           </a:p>
           <a:p>
             <a:r>
               <a:rPr lang="en-US" sz="1400" b="0" dirty="0"/>
-              <a:t>Misconception: 'after adjustment the remaining association is causal'. Only if every important confounder was measured well - which is never guaranteed in observational data.</a:t>
+              <a:t>Misconception: 'after adjustment the remaining association is causal'. Only if every important confounder was measured well, which is never guaranteed in observational data.</a:t>
             </a:r>
           </a:p>
           <a:p>
             <a:r>
               <a:rPr lang="en-US" sz="1400" b="0" dirty="0"/>
-              <a:t>Ask the room: what would you need to measure at baseline in your own observational study to do this? Expected answer: the main severity markers - for sepsis SOFA, lactate, vasopressor dose, age, comorbidity.</a:t>
+              <a:t>Ask the room: what would you need to measure at baseline in your own observational study to do this? Expected answer: the main severity markers. For sepsis: SOFA, lactate, vasopressor dose, age, comorbidity.</a:t>
             </a:r>
           </a:p>
           <a:p>
@@ -966,7 +966,7 @@
           <a:p>
             <a:r>
               <a:rPr lang="en-US" sz="1400" b="0" dirty="0"/>
-              <a:t>Card 3 is deliberately mixed: vasopressors can cause arrhythmia, AND shock severity drives both. Real associations are often a mixture of a true effect and confounding - which is why adjustment, or randomisation, is needed to separate them.</a:t>
+              <a:t>Card 3 is deliberately mixed: vasopressors can cause arrhythmia, AND shock severity drives both. Real associations are often a mixture of a true effect and confounding. That is why adjustment, or randomisation, is needed to separate them.</a:t>
             </a:r>
           </a:p>
           <a:p>
@@ -1065,13 +1065,13 @@
           <a:p>
             <a:r>
               <a:rPr lang="en-US" sz="1400" b="0" dirty="0"/>
-              <a:t>Left - confounding (our fluid example): the strata agree with EACH OTHER (RR 1.0 and 1.0) but differ from the crude result (2.33). The third factor (severity) created a false association. Fix: adjust, and report the adjusted estimate.</a:t>
+              <a:t>On the left, confounding (our fluid example): the strata agree with EACH OTHER (RR 1.0 and 1.0) but differ from the crude result (2.33). The third factor (severity) created a false association. Fix: adjust, and report the adjusted estimate.</a:t>
             </a:r>
           </a:p>
           <a:p>
             <a:r>
               <a:rPr lang="en-US" sz="1400" b="0" dirty="0"/>
-              <a:t>Right - effect modification, also called interaction (hypothetical): a restrictive strategy might help patients with ARDS (RR 0.60) but make no difference without ARDS (RR 1.00). The strata differ from EACH OTHER. This is real biology, not bias: report each subgroup; do not average it away.</a:t>
+              <a:t>On the right, effect modification, also called interaction (hypothetical): a restrictive strategy might help patients with ARDS (RR 0.60) but make no difference without ARDS (RR 1.00). The strata differ from EACH OTHER. This is real biology, not bias: report each subgroup; do not average it away.</a:t>
             </a:r>
           </a:p>
           <a:p>
@@ -1194,7 +1194,7 @@
           <a:p>
             <a:r>
               <a:rPr lang="en-US" sz="1400" b="0" dirty="0"/>
-              <a:t>Misconception: 'propensity score matching is as good as randomisation'. It is matching on measured factors - clever, but still limited to the measured ones.</a:t>
+              <a:t>Misconception: 'propensity score matching is as good as randomisation'. It is matching on measured factors: clever, but still limited to the measured ones.</a:t>
             </a:r>
           </a:p>
           <a:p>
@@ -1287,7 +1287,7 @@
           <a:p>
             <a:r>
               <a:rPr lang="en-US" sz="1400" b="0" dirty="0"/>
-              <a:t>The red figures are severely ill patients (a known confounder). The gold stars are a hidden factor nobody measured - a genetic trait, frailty, a clinician's gut feeling.</a:t>
+              <a:t>The red figures are severely ill patients (a known confounder). The gold stars are a hidden factor nobody measured: a genetic trait, frailty, a clinician's gut feeling.</a:t>
             </a:r>
           </a:p>
           <a:p>
@@ -1299,7 +1299,7 @@
           <a:p>
             <a:r>
               <a:rPr lang="en-US" sz="1400" b="0" dirty="0"/>
-              <a:t>Teaching point: balance is on average; with very small trials chance imbalances happen. Boulet found baseline creatinine higher in the intervention group - with 24 per arm that is not surprising.</a:t>
+              <a:t>Teaching point: balance is on average; with very small trials chance imbalances happen. Boulet found baseline creatinine higher in the intervention group. With 24 per arm that is not surprising.</a:t>
             </a:r>
           </a:p>
           <a:p>
@@ -1398,13 +1398,13 @@
           <a:p>
             <a:r>
               <a:rPr lang="en-US" sz="1400" b="0" dirty="0"/>
-              <a:t>Allocation concealment happens BEFORE randomisation: the person recruiting cannot know or predict the next allocation (central computer, not envelopes on the desk). Without it, a clinician could steer sicker patients away from the new treatment - selection bias inside a trial.</a:t>
+              <a:t>Allocation concealment happens BEFORE randomisation: the person recruiting cannot know or predict the next allocation (central computer, not envelopes on the desk). Without it, a clinician could steer sicker patients away from the new treatment: selection bias inside a trial.</a:t>
             </a:r>
           </a:p>
           <a:p>
             <a:r>
               <a:rPr lang="en-US" sz="1400" b="0" dirty="0"/>
-              <a:t>Blinding happens AFTER: who knows the group? In Boulet the patients and the statisticians were blinded, the clinicians and investigators were not - hence 'single-blind'.</a:t>
+              <a:t>Blinding happens AFTER: who knows the group? In Boulet the patients and the statisticians were blinded, the clinicians and investigators were not, hence 'single-blind'.</a:t>
             </a:r>
           </a:p>
           <a:p>
@@ -1416,13 +1416,13 @@
           <a:p>
             <a:r>
               <a:rPr lang="en-US" sz="1400" b="0" dirty="0"/>
-              <a:t>Misconception: 'single, double, triple blind' have fixed meanings. They do not - papers should state exactly WHO was blinded.</a:t>
+              <a:t>Misconception: 'single, double, triple blind' have fixed meanings. They do not. Papers should state exactly WHO was blinded.</a:t>
             </a:r>
           </a:p>
           <a:p>
             <a:r>
               <a:rPr lang="en-US" sz="1400" b="0" dirty="0"/>
-              <a:t>Ask the room: is concealment possible when blinding is not? Expected answer: yes - concealment is always possible and always required.</a:t>
+              <a:t>Ask the room: is concealment possible when blinding is not? Expected answer: yes. Concealment is always possible and always required.</a:t>
             </a:r>
           </a:p>
           <a:p>
@@ -1527,7 +1527,7 @@
           <a:p>
             <a:r>
               <a:rPr lang="en-US" sz="1400" b="0" dirty="0"/>
-              <a:t>Misconception: 'matched groups are as good as randomised groups'. Check Table 1 - and then ask what is not in Table 1.</a:t>
+              <a:t>Misconception: 'matched groups are as good as randomised groups'. Check Table 1, then ask what is not in Table 1.</a:t>
             </a:r>
           </a:p>
           <a:p>
@@ -1761,7 +1761,7 @@
           <a:p>
             <a:r>
               <a:rPr lang="en-US" sz="1400" b="0" dirty="0"/>
-              <a:t>Ask the room: delirious patients receive more antipsychotics. Which way could the arrow run? Expected answer: both ways - the drugs might cause harm, but delirium is the reason they are prescribed.</a:t>
+              <a:t>Ask the room: delirious patients receive more antipsychotics. Which way could the arrow run? Expected answer: both ways. The drugs might cause harm, but delirium is the reason they are prescribed.</a:t>
             </a:r>
           </a:p>
           <a:p>
@@ -1854,13 +1854,13 @@
           <a:p>
             <a:r>
               <a:rPr lang="en-US" sz="1400" b="0" dirty="0"/>
-              <a:t>Strength (a big RR is harder to explain by confounding), consistency (seen in other studies and settings), specificity (the weakest), temporality (the cause must come first - the only essential one), dose-response (more exposure, more effect), plausibility (a mechanism), coherence (fits with what is known), experiment (removing the exposure reduces the outcome - an RCT is the strongest form), analogy.</a:t>
+              <a:t>Strength (a big RR is harder to explain by confounding), consistency (seen in other studies and settings), specificity (the weakest), temporality (the cause must come first, and this is the only essential one), dose-response (more exposure, more effect), plausibility (a mechanism), coherence (fits with what is known), experiment (removing the exposure reduces the outcome, and an RCT is the strongest form), analogy.</a:t>
             </a:r>
           </a:p>
           <a:p>
             <a:r>
               <a:rPr lang="en-US" sz="1400" b="0" dirty="0"/>
-              <a:t>Apply to Hyun: strength moderate (HR about 1.6-2.1); consistency with other cohorts yes; temporality - balance measured before death, but reverse causation is possible; dose-response not shown; experiment - trials such as Boulet have not shown a mortality effect. Conclusion: possible, not proven.</a:t>
+              <a:t>Apply to Hyun: strength moderate (HR about 1.6-2.1); consistency with other cohorts yes; temporality: balance measured before death, but reverse causation is possible; dose-response not shown; experiment: trials such as Boulet have not shown a mortality effect. Conclusion: possible, not proven.</a:t>
             </a:r>
           </a:p>
           <a:p>
@@ -1959,7 +1959,7 @@
           <a:p>
             <a:r>
               <a:rPr lang="en-US" sz="1400" b="0" dirty="0"/>
-              <a:t>Answers. Q1: case-control (chosen by outcome, look back for exposure). Q2: a cluster randomised trial. Q3: non-inferior - the whole CI stays below the +4 margin (it crosses 0, so it is not superior).</a:t>
+              <a:t>Answers. Q1: case-control (chosen by outcome, look back for exposure). Q2: a cluster randomised trial. Q3: non-inferior. The whole CI stays below the +4 margin (it crosses 0, so it is not superior).</a:t>
             </a:r>
           </a:p>
           <a:p>
@@ -2058,7 +2058,7 @@
           <a:p>
             <a:r>
               <a:rPr lang="en-US" sz="1400" b="0" dirty="0"/>
-              <a:t>Answers. 1: recall bias - fix: record exposure before the outcome is known (prescription records), ask cases and controls in the same structured way. 2: observer bias - fix: blinded assessor, objective discharge criteria. 3: selection bias (and loss to follow-up) - fix: contact all survivors, report non-responders. 4: confounding by indication - fix: randomise, or measure lactate and other severity markers and adjust/match.</a:t>
+              <a:t>Answers. 1: recall bias. Fix: record exposure before the outcome is known (prescription records), ask cases and controls in the same structured way. 2: observer bias. Fix: blinded assessor, objective discharge criteria. 3: selection bias (and loss to follow-up). Fix: contact all survivors, report non-responders. 4: confounding by indication. Fix: randomise, or measure lactate and other severity markers and adjust/match.</a:t>
             </a:r>
           </a:p>
           <a:p>
@@ -2070,7 +2070,7 @@
           <a:p>
             <a:r>
               <a:rPr lang="en-US" sz="1400" b="0" dirty="0"/>
-              <a:t>Timing: 4 minutes. Keep it fast - this is a check, not a lecture.</a:t>
+              <a:t>Timing: 4 minutes. Keep it fast: this is a check, not a lecture.</a:t>
             </a:r>
           </a:p>
         </p:txBody>
@@ -2268,7 +2268,7 @@
           <a:p>
             <a:r>
               <a:rPr lang="en-US" sz="1400" b="0" dirty="0"/>
-              <a:t>Ask the room: if we get better at keeping patients alive with a chronic disease but no better at preventing it, what happens to prevalence? Expected answer: it rises - the drain slows down.</a:t>
+              <a:t>Ask the room: if we get better at keeping patients alive with a chronic disease but no better at preventing it, what happens to prevalence? Expected answer: it rises, because the drain slows down.</a:t>
             </a:r>
           </a:p>
           <a:p>
@@ -2355,7 +2355,7 @@
           <a:p>
             <a:r>
               <a:rPr lang="en-US" sz="1400" b="0" dirty="0"/>
-              <a:t>A hypothetical, larger trial of our running question - not Boulet's data. 100 patients per arm. Restrictive: 20 die by day 28. Usual care: 30 die.</a:t>
+              <a:t>A hypothetical, larger trial of our running question, not Boulet's data. 100 patients per arm. Restrictive: 20 die by day 28. Usual care: 30 die.</a:t>
             </a:r>
           </a:p>
           <a:p>
@@ -2484,7 +2484,7 @@
           <a:p>
             <a:r>
               <a:rPr lang="en-US" sz="1400" b="0" dirty="0"/>
-              <a:t>Misconception: swapping rows and columns. Many errors in student work come from a table drawn the other way round - check the layout before calculating.</a:t>
+              <a:t>Misconception: swapping rows and columns. Many errors in student work come from a table drawn the other way round. Check the layout before calculating.</a:t>
             </a:r>
           </a:p>
           <a:p>
@@ -2601,7 +2601,7 @@
           <a:p>
             <a:r>
               <a:rPr lang="en-US" sz="1400" b="0" dirty="0"/>
-              <a:t>OR = (20 x 70) / (80 x 30) = 1400 / 2400 = 0.58. Further from 1 than the RR - next slides explain why.</a:t>
+              <a:t>OR = (20 x 70) / (80 x 30) = 1400 / 2400 = 0.58. Further from 1 than the RR. The next slides explain why.</a:t>
             </a:r>
           </a:p>
           <a:p>
@@ -2706,7 +2706,7 @@
           <a:p>
             <a:r>
               <a:rPr lang="en-US" sz="1400" b="0" dirty="0"/>
-              <a:t>Teaching point: the other 9 either survived anyway or died anyway - they bore the burden of the treatment without benefit. That is why NNT is a powerful conversation tool with patients, managers and pharmacy.</a:t>
+              <a:t>Teaching point: the other 9 either survived anyway or died anyway. They bore the burden of the treatment without benefit. That is why NNT is a useful conversation tool with patients, managers and pharmacy.</a:t>
             </a:r>
           </a:p>
           <a:p>
@@ -2718,7 +2718,7 @@
           <a:p>
             <a:r>
               <a:rPr lang="en-US" sz="1400" b="0" dirty="0"/>
-              <a:t>Ask the room: which is better, an NNT of 5 or of 50? Expected answer: 5 - fewer patients need treating for one to benefit (but always weigh against harms and cost).</a:t>
+              <a:t>Ask the room: which is better, an NNT of 5 or of 50? Expected answer: 5. Fewer patients need treating for one to benefit (but always weigh against harms and cost).</a:t>
             </a:r>
           </a:p>
           <a:p>
@@ -2811,7 +2811,7 @@
           <a:p>
             <a:r>
               <a:rPr lang="en-US" sz="1400" b="0" dirty="0"/>
-              <a:t>When the outcome is rare (left, shaded), OR is about 2.1 - practically the same as RR. At a baseline risk of 20%, OR = 2.7. At 40%, OR = 6. The OR always lies further from 1 than the RR.</a:t>
+              <a:t>When the outcome is rare (left, shaded), OR is about 2.1, practically the same as RR. At a baseline risk of 20%, OR = 2.7. At 40%, OR = 6. The OR always lies further from 1 than the RR.</a:t>
             </a:r>
           </a:p>
           <a:p>
@@ -3027,19 +3027,19 @@
           <a:p>
             <a:r>
               <a:rPr lang="en-US" sz="1400" b="0" dirty="0"/>
-              <a:t>Key moment: change a to 2 and c to 3 (b = 98, d = 97). RR stays 0.67 but OR is now 0.66 - almost identical. The NNT jumps to 100. Same relative effect, very different absolute effect.</a:t>
+              <a:t>Key moment: change a to 2 and c to 3 (b = 98, d = 97). RR stays 0.67 but OR is now 0.66, almost identical. The NNT jumps to 100. Same relative effect, very different absolute effect.</a:t>
             </a:r>
           </a:p>
           <a:p>
             <a:r>
               <a:rPr lang="en-US" sz="1400" b="0" dirty="0"/>
-              <a:t>Fallback if the laptop fails: draw the 2x2 table on the whiteboard and calculate RR and NNT by hand with the room - the numbers are chosen to be easy.</a:t>
+              <a:t>Fallback if the laptop fails: draw the 2x2 table on the whiteboard and calculate RR and NNT by hand with the room. The numbers are chosen to be easy.</a:t>
             </a:r>
           </a:p>
           <a:p>
             <a:r>
               <a:rPr lang="en-US" sz="1400" b="0" dirty="0"/>
-              <a:t>Misconception to raise: the calculator will happily give a 'risk' for case-control data. It is meaningless there - only the OR is valid.</a:t>
+              <a:t>Misconception to raise: the calculator will happily give a 'risk' for case-control data. It is meaningless there: only the OR is valid.</a:t>
             </a:r>
           </a:p>
           <a:p>
@@ -3231,7 +3231,7 @@
           <a:p>
             <a:r>
               <a:rPr lang="en-US" sz="1400" b="0" dirty="0"/>
-              <a:t>During the break, walk past the groups and check that each has its Part 2a from last Saturday - they will need it in the proposal builder.</a:t>
+              <a:t>During the break, walk past the groups and check that each has its Part 2a from last Saturday. They will need it in the proposal builder.</a:t>
             </a:r>
           </a:p>
           <a:p>
@@ -3330,7 +3330,7 @@
           <a:p>
             <a:r>
               <a:rPr lang="en-US" sz="1400" b="0" dirty="0"/>
-              <a:t>Circulate and check the tables are drawn the right way round - most mistakes are layout, not arithmetic.</a:t>
+              <a:t>Circulate and check the tables are drawn the right way round. Most mistakes are layout, not arithmetic.</a:t>
             </a:r>
           </a:p>
           <a:p>
@@ -3429,7 +3429,7 @@
           <a:p>
             <a:r>
               <a:rPr lang="en-US" sz="1400" b="0" dirty="0"/>
-              <a:t>Teaching point: everything here is about judging evidence - the skills participants will use in Session 8 in 'Be the reviewer'.</a:t>
+              <a:t>Teaching point: everything here is about judging evidence, the skills participants will use in Session 8 in 'Be the reviewer'.</a:t>
             </a:r>
           </a:p>
           <a:p>
@@ -3534,19 +3534,19 @@
           <a:p>
             <a:r>
               <a:rPr lang="en-US" sz="1400" b="0" dirty="0"/>
-              <a:t>Preview of the next slide: of the 34 positive tests, only 18 truly have the disease - a positive predictive value of 53%. PPV depends on how common the disease is.</a:t>
+              <a:t>Preview of the next slide: of the 34 positive tests, only 18 truly have the disease, a positive predictive value of 53%. PPV depends on how common the disease is.</a:t>
             </a:r>
           </a:p>
           <a:p>
             <a:r>
               <a:rPr lang="en-US" sz="1400" b="0" dirty="0"/>
-              <a:t>Misconception: 'a 90% sensitive test means a positive patient has a 90% chance of disease'. No - that is PPV, which here is only 53%.</a:t>
+              <a:t>Misconception: 'a 90% sensitive test means a positive patient has a 90% chance of disease'. No. That is PPV, which here is only 53%.</a:t>
             </a:r>
           </a:p>
           <a:p>
             <a:r>
               <a:rPr lang="en-US" sz="1400" b="0" dirty="0"/>
-              <a:t>Ask the room: for a screening test you do not want to miss sepsis - sensitivity or specificity first? Expected answer: sensitivity.</a:t>
+              <a:t>Ask the room: for a screening test that must not miss sepsis, which comes first: sensitivity or specificity? Expected answer: sensitivity.</a:t>
             </a:r>
           </a:p>
           <a:p>
@@ -3639,13 +3639,13 @@
           <a:p>
             <a:r>
               <a:rPr lang="en-US" sz="1400" b="0" dirty="0"/>
-              <a:t>ICU, where 20% have the disease: 90 true positives, 80 false positives - a positive result is right 90 / 170 = 53% of the time.</a:t>
+              <a:t>ICU, where 20% have the disease: 90 true positives, 80 false positives, so a positive result is right 90 / 170 = 53% of the time.</a:t>
             </a:r>
           </a:p>
           <a:p>
             <a:r>
               <a:rPr lang="en-US" sz="1400" b="0" dirty="0"/>
-              <a:t>Screening, where 2% have it: 9 true positives but 98 false positives - PPV 9 / 107 = 8%. More than 9 in 10 positives are false alarms. Meanwhile the NPV rises to 99.7%.</a:t>
+              <a:t>Screening, where 2% have it: 9 true positives but 98 false positives: PPV 9 / 107 = 8%. More than 9 in 10 positives are false alarms. Meanwhile the NPV rises to 99.7%.</a:t>
             </a:r>
           </a:p>
           <a:p>
@@ -3657,7 +3657,7 @@
           <a:p>
             <a:r>
               <a:rPr lang="en-US" sz="1400" b="0" dirty="0"/>
-              <a:t>Misconception: 'a good test is good everywhere'. Screening healthy populations with a moderately specific test creates many false positives - and many unnecessary investigations.</a:t>
+              <a:t>Misconception: 'a good test is good everywhere'. Screening healthy populations with a moderately specific test creates many false positives and many unnecessary investigations.</a:t>
             </a:r>
           </a:p>
           <a:p>
@@ -3669,7 +3669,7 @@
           <a:p>
             <a:r>
               <a:rPr lang="en-US" sz="1400" b="0" dirty="0"/>
-              <a:t>Optional (1 minute): show the 'PPV at another prevalence' box on the Diagnostic sheet of the 2x2 calculator - type 2% and 20%.</a:t>
+              <a:t>Optional (1 minute): show the 'PPV at another prevalence' box on the Diagnostic sheet of the 2x2 calculator, then type 2% and 20%.</a:t>
             </a:r>
           </a:p>
           <a:p>
@@ -3780,7 +3780,7 @@
           <a:p>
             <a:r>
               <a:rPr lang="en-US" sz="1400" b="0" dirty="0"/>
-              <a:t>Ask the room: for ruling out sepsis at triage, would you choose a low or high cut-off? Expected answer: low - high sensitivity, accepting more false alarms.</a:t>
+              <a:t>Ask the room: for ruling out sepsis at triage, would you choose a low or high cut-off? Expected answer: low, for high sensitivity, accepting more false alarms.</a:t>
             </a:r>
           </a:p>
           <a:p>
@@ -3879,7 +3879,7 @@
           <a:p>
             <a:r>
               <a:rPr lang="en-US" sz="1400" b="0" dirty="0"/>
-              <a:t>Screening: 1,000 titles and abstracts screened, 920 excluded; 80 full texts read, 71 excluded with reasons (38 not RCTs, 21 wrong population, 12 no mortality data - which add up to 71).</a:t>
+              <a:t>Screening: 1,000 titles and abstracts screened, 920 excluded; 80 full texts read, 71 excluded with reasons (38 not RCTs, 21 wrong population, 12 no mortality data, which add up to 71).</a:t>
             </a:r>
           </a:p>
           <a:p>
@@ -3903,7 +3903,7 @@
           <a:p>
             <a:r>
               <a:rPr lang="en-US" sz="1400" b="0" dirty="0"/>
-              <a:t>Ask the room: why search trial registers and not only PubMed? Expected answer: to find unpublished or negative trials - publication bias (Session 2, grey literature).</a:t>
+              <a:t>Ask the room: why search trial registers and not only PubMed? Expected answer: to find unpublished or negative trials, because of publication bias (Session 2, grey literature).</a:t>
             </a:r>
           </a:p>
           <a:p>
@@ -3990,13 +3990,13 @@
           <a:p>
             <a:r>
               <a:rPr lang="en-US" sz="1400" b="0" dirty="0"/>
-              <a:t>Hypothetical trials, fixed-effect (inverse-variance) pooling. Read it in four steps. (1) Find the vertical line of no effect: RR = 1. Left of it favours restrictive fluids; right favours usual care. (2) Each square is one study's RR; its size shows its weight (Trial 4 is largest, 38%). (3) Each horizontal line is that study's 95% CI - if it crosses 1, that study alone is inconclusive. Here every single trial crosses 1. (4) The diamond is the pooled estimate: RR 0.79 (95% CI 0.64-0.98). Its width is the CI; it does not cross 1.</a:t>
+              <a:t>Hypothetical trials, fixed-effect (inverse-variance) pooling. Read it in four steps. (1) Find the vertical line of no effect: RR = 1. Left of it favours restrictive fluids; right favours usual care. (2) Each square is one study's RR; its size shows its weight (Trial 4 is largest, 38%). (3) Each horizontal line is that study's 95% CI. If it crosses 1, that study alone is inconclusive. Here every single trial crosses 1. (4) The diamond is the pooled estimate: RR 0.79 (95% CI 0.64-0.98). Its width is the CI; it does not cross 1.</a:t>
             </a:r>
           </a:p>
           <a:p>
             <a:r>
               <a:rPr lang="en-US" sz="1400" b="0" dirty="0"/>
-              <a:t>Teaching point: pooling several inconclusive trials can give a precise answer - that is the power of meta-analysis. In words: about 21% lower relative risk of death, though the upper limit (0.98) is close to no effect.</a:t>
+              <a:t>Teaching point: pooling several inconclusive trials can give a precise answer. That is the strength of meta-analysis. In words: about 21% lower relative risk of death, though the upper limit (0.98) is close to no effect.</a:t>
             </a:r>
           </a:p>
           <a:p>
@@ -4008,7 +4008,7 @@
           <a:p>
             <a:r>
               <a:rPr lang="en-US" sz="1400" b="0" dirty="0"/>
-              <a:t>Ask the room: which trial contributes most, and why? Expected answer: Trial 4 - the largest, with the most events, so the narrowest CI.</a:t>
+              <a:t>Ask the room: which trial contributes most, and why? Expected answer: Trial 4, the largest, with the most events, so the narrowest CI.</a:t>
             </a:r>
           </a:p>
           <a:p>
@@ -4101,7 +4101,7 @@
           <a:p>
             <a:r>
               <a:rPr lang="en-US" sz="1400" b="0" dirty="0"/>
-              <a:t>Right: six other hypothetical trials disagree - some clearly favour restriction, others point the other way. I-squared = 80%: about 80% of the variation between studies reflects real differences rather than chance. The random-effects diamond is wide and crosses 1 (RR 0.74, 95% CI 0.47-1.15).</a:t>
+              <a:t>Right: six other hypothetical trials disagree. Some clearly favour restriction, others point the other way. I-squared = 80%: about 80% of the variation between studies reflects real differences rather than chance. The random-effects diamond is wide and crosses 1 (RR 0.74, 95% CI 0.47-1.15).</a:t>
             </a:r>
           </a:p>
           <a:p>
@@ -4113,7 +4113,7 @@
           <a:p>
             <a:r>
               <a:rPr lang="en-US" sz="1400" b="0" dirty="0"/>
-              <a:t>Teaching point: with high heterogeneity the most useful question is WHY - different patients, doses, timing, outcome definitions or risk of bias? A single pooled number may hide this.</a:t>
+              <a:t>Teaching point: with high heterogeneity the most useful question is WHY: different patients, doses, timing, outcome definitions or risk of bias? A single pooled number may hide this.</a:t>
             </a:r>
           </a:p>
           <a:p>
@@ -4218,13 +4218,13 @@
           <a:p>
             <a:r>
               <a:rPr lang="en-US" sz="1400" b="0" dirty="0"/>
-              <a:t>Randomised trials: RoB 2 (Cochrane) - Boulet. Non-randomised studies of interventions (before-after, cohorts comparing treatments): ROBINS-I. Cohort and case-control studies of exposures: the Newcastle-Ottawa Scale is still widely used; ROBINS-E is its newer, more rigorous alternative - Hyun. Diagnostic accuracy studies: QUADAS-2. Systematic reviews themselves: AMSTAR 2.</a:t>
+              <a:t>Randomised trials: RoB 2 (Cochrane), used for Boulet. Non-randomised studies of interventions (before-after, cohorts comparing treatments): ROBINS-I. Cohort and case-control studies of exposures: the Newcastle-Ottawa Scale is still widely used; ROBINS-E is its newer, more rigorous alternative (used for Hyun). Diagnostic accuracy studies: QUADAS-2. Systematic reviews themselves: AMSTAR 2.</a:t>
             </a:r>
           </a:p>
           <a:p>
             <a:r>
               <a:rPr lang="en-US" sz="1400" b="0" dirty="0"/>
-              <a:t>The right-hand column links back: each design also has a reporting guideline (CONSORT, TREND/STROBE, STROBE, STARD, PRISMA) - covered in Session 8.</a:t>
+              <a:t>The right-hand column links back: each design also has a reporting guideline (CONSORT, TREND/STROBE, STROBE, STARD, PRISMA), covered in Session 8.</a:t>
             </a:r>
           </a:p>
           <a:p>
@@ -4428,7 +4428,7 @@
           <a:p>
             <a:r>
               <a:rPr lang="en-US" sz="1400" b="0" dirty="0"/>
-              <a:t>Words vs design: Boulet's conclusion ('did not reduce the overall fluid balance at day 5') matches its pilot RCT design. Hyun's abstract says 'associated', but its title says 'Impact' - a stronger word than a cohort supports.</a:t>
+              <a:t>Words vs design: Boulet's conclusion ('did not reduce the overall fluid balance at day 5') matches its pilot RCT design. Hyun's abstract says 'associated', but its title says 'Impact', a stronger word than a cohort supports.</a:t>
             </a:r>
           </a:p>
           <a:p>
@@ -4539,7 +4539,7 @@
           <a:p>
             <a:r>
               <a:rPr lang="en-US" sz="1400" b="0" dirty="0"/>
-              <a:t>Answers: Trial 4 has the most weight (38%). No single trial excludes RR = 1 - all CIs cross it. The diamond (RR 0.79, 95% CI 0.64-0.98) does not cross 1: pooled, restriction was associated with about 21% lower relative risk of death in these (hypothetical) trials, with the upper limit close to no effect. Tools: Boulet - RoB 2; Hyun - Newcastle-Ottawa (or ROBINS-E); a review - AMSTAR 2.</a:t>
+              <a:t>Answers: Trial 4 has the most weight (38%). No single trial excludes RR = 1: all CIs cross it. The diamond (RR 0.79, 95% CI 0.64-0.98) does not cross 1: pooled, restriction was associated with about 21% lower relative risk of death in these (hypothetical) trials, with the upper limit close to no effect. Tools: RoB 2 for Boulet; Newcastle-Ottawa (or ROBINS-E) for Hyun; AMSTAR 2 for a review.</a:t>
             </a:r>
           </a:p>
           <a:p>
@@ -4551,7 +4551,7 @@
           <a:p>
             <a:r>
               <a:rPr lang="en-US" sz="1400" b="0" dirty="0"/>
-              <a:t>Common error: reading the diamond's centre without its width - always say the CI.</a:t>
+              <a:t>Common error: reading the diamond's centre without its width. Always say the CI.</a:t>
             </a:r>
           </a:p>
           <a:p>
@@ -4644,19 +4644,19 @@
           <a:p>
             <a:r>
               <a:rPr lang="en-US" sz="1400" b="0" dirty="0"/>
-              <a:t>The primary outcome is the ONE result the study is designed and sized for. Define it three ways: WHAT (death from any cause - not 'mortality improved'), HOW (hospital record; a phone call if discharged), WHEN (day 28 after ICU admission). Secondary outcomes get the same three parts.</a:t>
+              <a:t>The primary outcome is the ONE result the study is designed and sized for. Define it three ways: WHAT (death from any cause, not 'mortality improved'), HOW (hospital record; a phone call if discharged), WHEN (day 28 after ICU admission). Secondary outcomes get the same three parts.</a:t>
             </a:r>
           </a:p>
           <a:p>
             <a:r>
               <a:rPr lang="en-US" sz="1400" b="0" dirty="0"/>
-              <a:t>Boulet's primary outcome: cumulative fluid balance (ml/kg) at day 5 - clear what, how and when. Hyun's: mortality at day 28.</a:t>
+              <a:t>Boulet's primary outcome: cumulative fluid balance (ml/kg) at day 5: clear what, how and when. Hyun's: mortality at day 28.</a:t>
             </a:r>
           </a:p>
           <a:p>
             <a:r>
               <a:rPr lang="en-US" sz="1400" b="0" dirty="0"/>
-              <a:t>Misconception: 'more primary outcomes = more chances of a result'. That is exactly the problem - multiple primaries invite cherry-picking (spin, Session 2).</a:t>
+              <a:t>Misconception: 'more primary outcomes = more chances of a result'. That is exactly the problem: multiple primaries invite cherry-picking (spin, Session 2).</a:t>
             </a:r>
           </a:p>
           <a:p>
@@ -4761,7 +4761,7 @@
           <a:p>
             <a:r>
               <a:rPr lang="en-US" sz="1400" b="0" dirty="0"/>
-              <a:t>Model answer for the running example (observational version): exposure - positive cumulative fluid balance (ml/kg) at 72 h after ICU admission; comparator - zero or negative balance; primary outcome - death from any cause by day 28 (hospital record); secondary - AKI (KDIGO) by day 7, ventilator-free days to day 28, ICU length of stay; biases - confounding by severity (record SOFA, lactate, vasopressor dose and adjust or match), selection (consecutive patients, report exclusions), information (pre-defined fluid definitions, double-check 10% of charts); claim - 'associated with'.</a:t>
+              <a:t>Model answer for the running example (observational version): exposure: positive cumulative fluid balance (ml/kg) at 72 h after ICU admission; comparator: zero or negative balance; primary outcome: death from any cause by day 28 (hospital record); secondary: AKI (KDIGO) by day 7, ventilator-free days to day 28, ICU length of stay; biases: confounding by severity (record SOFA, lactate, vasopressor dose and adjust or match), selection (consecutive patients, report exclusions), information (pre-defined fluid definitions, double-check 10% of charts); claim: 'associated with'.</a:t>
             </a:r>
           </a:p>
           <a:p>
@@ -4953,7 +4953,7 @@
           <a:p>
             <a:r>
               <a:rPr lang="en-US" sz="1400" b="0" dirty="0"/>
-              <a:t>Preview: in Weeks 5-6 we turn the design into data - variables, data collection forms - and the course dataset FLUID-ICU, a simulated cohort that answers the observational version of our fluid question.</a:t>
+              <a:t>Preview: in Weeks 5-6 we turn the design into data (variables, data collection forms) and meet the course dataset FLUID-ICU, a simulated cohort that answers the observational version of our fluid question.</a:t>
             </a:r>
           </a:p>
           <a:p>
@@ -5145,7 +5145,7 @@
           <a:p>
             <a:r>
               <a:rPr lang="en-US" sz="1400" b="0" dirty="0"/>
-              <a:t>Reporting: STARD (30 items and a participant flow diagram). Appraisal: QUADAS-2. Watch for spectrum bias - a test evaluated in very sick patients versus healthy volunteers looks better than it will in real, mixed patients.</a:t>
+              <a:t>Reporting: STARD (30 items and a participant flow diagram). Appraisal: QUADAS-2. Watch for spectrum bias: a test evaluated in very sick patients versus healthy volunteers looks better than it will in real, mixed patients.</a:t>
             </a:r>
           </a:p>
           <a:p>
@@ -5244,7 +5244,7 @@
           <a:p>
             <a:r>
               <a:rPr lang="en-US" sz="1400" b="0" dirty="0"/>
-              <a:t>Each domain is judged low risk (green +), some concerns (yellow -) or high risk (red x). The overall judgement is driven by the worst domain - Trial C is high risk because of D2.</a:t>
+              <a:t>Each domain is judged low risk (green +), some concerns (yellow -) or high risk (red x). The overall judgement is driven by the worst domain: Trial C is high risk because of D2.</a:t>
             </a:r>
           </a:p>
           <a:p>
@@ -5442,7 +5442,7 @@
           <a:p>
             <a:r>
               <a:rPr lang="en-US" sz="1400" b="0" dirty="0"/>
-              <a:t>Use the dartboard. Left: what we want - close to the truth and tightly grouped. Middle: random error - centred on the truth but scattered; a larger sample pulls the darts together. Right: bias - tightly grouped but in the wrong place; a larger sample just makes us more confident in the wrong answer.</a:t>
+              <a:t>Use the dartboard. Left: what we want, close to the truth and tightly grouped. Middle: random error, centred on the truth but scattered. A larger sample pulls the darts together. Right: bias, tightly grouped but in the wrong place. A larger sample just makes us more confident in the wrong answer.</a:t>
             </a:r>
           </a:p>
           <a:p>
@@ -5460,7 +5460,7 @@
           <a:p>
             <a:r>
               <a:rPr lang="en-US" sz="1400" b="0" dirty="0"/>
-              <a:t>Ask the room: which of the two papers is more at risk of random error, and which of bias? Expected answer: Boulet (48 patients) - random error; Hyun (observational) - bias, especially confounding.</a:t>
+              <a:t>Ask the room: which of the two papers is more at risk of random error, and which of bias? Expected answer: Boulet (48 patients) for random error; Hyun (observational) for bias, especially confounding.</a:t>
             </a:r>
           </a:p>
           <a:p>
@@ -5547,7 +5547,7 @@
           <a:p>
             <a:r>
               <a:rPr lang="en-US" sz="1400" b="0" dirty="0"/>
-              <a:t>Copyright slide - leave on screen while participants leave.</a:t>
+              <a:t>Copyright slide. Leave on screen while participants leave.</a:t>
             </a:r>
           </a:p>
         </p:txBody>
@@ -5652,7 +5652,7 @@
           <a:p>
             <a:r>
               <a:rPr lang="en-US" sz="1400" b="0" dirty="0"/>
-              <a:t>Ask the room: in Boulet, 1,201 patients were screened and 50 included. What does that tell you? Expected answer: trial patients were highly selected - check whether they look like your patients before applying the result.</a:t>
+              <a:t>Ask the room: in Boulet, 1,201 patients were screened and 50 included. What does that tell you? Expected answer: trial patients were highly selected. Check whether they look like your patients before applying the result.</a:t>
             </a:r>
           </a:p>
           <a:p>
@@ -5751,7 +5751,7 @@
           <a:p>
             <a:r>
               <a:rPr lang="en-US" sz="1400" b="0" dirty="0"/>
-              <a:t>Observer bias: an assessor who knows the group may judge a soft outcome differently - for example 'ready for discharge' or 'delirium present'. In Boulet clinicians knew the allocation.</a:t>
+              <a:t>Observer bias: an assessor who knows the group may judge a soft outcome differently, for example 'ready for discharge' or 'delirium present'. In Boulet clinicians knew the allocation.</a:t>
             </a:r>
           </a:p>
           <a:p>
@@ -5763,7 +5763,7 @@
           <a:p>
             <a:r>
               <a:rPr lang="en-US" sz="1400" b="0" dirty="0"/>
-              <a:t>Misconception: 'hard outcomes like death are immune'. Death is robust, but the timing and cause of death can still be misclassified.</a:t>
+              <a:t>Misconception: 'hard outcomes like death are immune'. Death is reliably recorded, but the timing and cause of death can still be misclassified.</a:t>
             </a:r>
           </a:p>
           <a:p>
@@ -5862,7 +5862,7 @@
           <a:p>
             <a:r>
               <a:rPr lang="en-US" sz="1400" b="0" dirty="0"/>
-              <a:t>Answers. A: selection bias - the sickest patients (who died) are missing, so the sample is not the population. B: observer bias (information bias) - a subjective score assessed by someone who knows the group. C: measurement bias (information bias) - and because it affects one ward only, it distorts the comparison between wards.</a:t>
+              <a:t>Answers. A: selection bias. The sickest patients (who died) are missing, so the sample is not the population. B: observer bias (information bias): a subjective score assessed by someone who knows the group. C: measurement bias (information bias). Because it affects one ward only, it distorts the comparison between wards.</a:t>
             </a:r>
           </a:p>
           <a:p>
@@ -5955,7 +5955,7 @@
           <a:p>
             <a:r>
               <a:rPr lang="en-US" sz="1400" b="0" dirty="0"/>
-              <a:t>Severity of illness pushes clinicians to give more fluid (left arrow). Severity also causes death (right arrow). So patients who got more fluid die more often - even if the fluid itself did nothing.</a:t>
+              <a:t>Severity of illness pushes clinicians to give more fluid (left arrow). Severity also causes death (right arrow). So patients who got more fluid die more often, even if the fluid itself did nothing.</a:t>
             </a:r>
           </a:p>
           <a:p>
@@ -9216,7 +9216,7 @@
                 <a:latin typeface="Century Gothic"/>
                 <a:cs typeface="Century Gothic"/>
               </a:rPr>
-              <a:t>Break (15 min) - then two 2x2 calculations (20 min)</a:t>
+              <a:t>Break (15 min), then two 2x2 calculations (20 min)</a:t>
             </a:r>
           </a:p>
           <a:p>
@@ -9254,7 +9254,7 @@
                 <a:latin typeface="Century Gothic"/>
                 <a:cs typeface="Century Gothic"/>
               </a:rPr>
-              <a:t>Proposal builder 4: exposure, outcomes, biases (30 min) - wrap-up</a:t>
+              <a:t>Proposal builder 4: exposure, outcomes, biases (30 min), then wrap-up</a:t>
             </a:r>
           </a:p>
         </p:txBody>
@@ -9895,7 +9895,7 @@
                 <a:latin typeface="Century Gothic"/>
                 <a:cs typeface="Century Gothic"/>
               </a:rPr>
-              <a:t>More antibiotics -&gt; more deaths?</a:t>
+              <a:t>More antibiotics → more deaths?</a:t>
             </a:r>
           </a:p>
           <a:p>
@@ -10029,7 +10029,7 @@
                 <a:latin typeface="Century Gothic"/>
                 <a:cs typeface="Century Gothic"/>
               </a:rPr>
-              <a:t>Seen by dietitian -&gt; more weight loss?</a:t>
+              <a:t>Seen by dietitian → more weight loss?</a:t>
             </a:r>
           </a:p>
           <a:p>
@@ -10163,7 +10163,7 @@
                 <a:latin typeface="Century Gothic"/>
                 <a:cs typeface="Century Gothic"/>
               </a:rPr>
-              <a:t>Vasopressors -&gt; more arrhythmia?</a:t>
+              <a:t>Vasopressors → more arrhythmia?</a:t>
             </a:r>
           </a:p>
           <a:p>
@@ -11562,7 +11562,7 @@
                 <a:latin typeface="Century Gothic"/>
                 <a:cs typeface="Century Gothic"/>
               </a:rPr>
-              <a:t>By chance, both groups get a similar mix - even of factors nobody measured.</a:t>
+              <a:t>By chance, both groups get a similar mix, even of factors nobody measured.</a:t>
             </a:r>
           </a:p>
         </p:txBody>
@@ -12005,7 +12005,7 @@
                 <a:latin typeface="Century Gothic"/>
                 <a:cs typeface="Century Gothic"/>
               </a:rPr>
-              <a:t>Matching helps - but only for what was measured</a:t>
+              <a:t>Matching helps, but only for what was measured</a:t>
             </a:r>
           </a:p>
         </p:txBody>
@@ -12280,7 +12280,7 @@
                 <a:latin typeface="Century Gothic"/>
                 <a:cs typeface="Century Gothic"/>
               </a:rPr>
-              <a:t>Internal and external validity</a:t>
+              <a:t>Internal validity first, then external validity</a:t>
             </a:r>
           </a:p>
         </p:txBody>
@@ -13324,7 +13324,7 @@
                 <a:latin typeface="Century Gothic"/>
                 <a:cs typeface="Century Gothic"/>
               </a:rPr>
-              <a:t>Groups: re-read your Proposal Part 2a (design, setting, population) - 2 min</a:t>
+              <a:t>Groups: re-read your Proposal Part 2a (design, setting, population): 2 min</a:t>
             </a:r>
           </a:p>
         </p:txBody>
@@ -17098,7 +17098,7 @@
                 <a:latin typeface="Century Gothic"/>
                 <a:cs typeface="Century Gothic"/>
               </a:rPr>
-              <a:t>Risks, RR, RD and NNT - answers in the notes</a:t>
+              <a:t>Risks, RR, RD and NNT (answers in the notes)</a:t>
             </a:r>
           </a:p>
         </p:txBody>
@@ -17392,7 +17392,7 @@
                 <a:latin typeface="Century Gothic"/>
                 <a:cs typeface="Century Gothic"/>
               </a:rPr>
-              <a:t>Open 2x2_calculator.xlsx - sheet Association</a:t>
+              <a:t>Open 2x2_calculator.xlsx, sheet Association</a:t>
             </a:r>
           </a:p>
           <a:p>
@@ -17454,7 +17454,7 @@
                 <a:latin typeface="Century Gothic"/>
                 <a:cs typeface="Century Gothic"/>
               </a:rPr>
-              <a:t>Read risks, RR, RD, NNT and OR - and the plain-language lines</a:t>
+              <a:t>Read risks, RR, RD, NNT and OR, and the plain-language lines</a:t>
             </a:r>
           </a:p>
           <a:p>
@@ -17919,7 +17919,7 @@
                 <a:latin typeface="Century Gothic"/>
                 <a:cs typeface="Century Gothic"/>
               </a:rPr>
-              <a:t>Today's vocabulary - definitions come with a picture</a:t>
+              <a:t>Today's vocabulary. Each definition comes with a picture</a:t>
             </a:r>
           </a:p>
         </p:txBody>
@@ -18793,7 +18793,7 @@
                 <a:latin typeface="Century Gothic"/>
                 <a:cs typeface="Century Gothic"/>
               </a:rPr>
-              <a:t>After the break: two 2x2 calculations - have a pen ready</a:t>
+              <a:t>After the break: two 2x2 calculations, so have a pen ready</a:t>
             </a:r>
           </a:p>
           <a:p>
@@ -19149,7 +19149,7 @@
                 <a:latin typeface="Century Gothic"/>
                 <a:cs typeface="Century Gothic"/>
               </a:rPr>
-              <a:t>Calculation 1 (trial): risks, RR, RD, NNT, OR - and one sentence</a:t>
+              <a:t>Calculation 1 (trial): risks, RR, RD, NNT, OR, and one sentence</a:t>
             </a:r>
           </a:p>
           <a:p>
@@ -19180,7 +19180,7 @@
                 <a:latin typeface="Century Gothic"/>
                 <a:cs typeface="Century Gothic"/>
               </a:rPr>
-              <a:t>Calculation 2 (case-control): OR only - and say why not RR</a:t>
+              <a:t>Calculation 2 (case-control): OR only, and say why not RR</a:t>
             </a:r>
           </a:p>
           <a:p>
@@ -20757,7 +20757,7 @@
                 <a:latin typeface="Century Gothic"/>
                 <a:cs typeface="Century Gothic"/>
               </a:rPr>
-              <a:t>A PRISMA flow shows how studies were found, screened and excluded - with reasons.</a:t>
+              <a:t>A PRISMA flow shows how studies were found, screened and excluded, with reasons.</a:t>
             </a:r>
           </a:p>
         </p:txBody>
@@ -21582,7 +21582,7 @@
                 <a:latin typeface="Century Gothic"/>
                 <a:cs typeface="Century Gothic"/>
               </a:rPr>
-              <a:t>Match the appraisal tool to the design - and the reporting guideline too.</a:t>
+              <a:t>Match the appraisal tool to the design, and the reporting guideline too.</a:t>
             </a:r>
           </a:p>
         </p:txBody>
@@ -21838,7 +21838,7 @@
                 <a:latin typeface="Century Gothic"/>
                 <a:cs typeface="Century Gothic"/>
               </a:rPr>
-              <a:t>Selection, information, confounding, effect modification - and from association to causation. (40 minutes)</a:t>
+              <a:t>Selection, information, confounding, effect modification, and from association to causation. (40 minutes)</a:t>
             </a:r>
           </a:p>
         </p:txBody>
@@ -22530,7 +22530,7 @@
                 <a:latin typeface="Century Gothic"/>
                 <a:cs typeface="Century Gothic"/>
               </a:rPr>
-              <a:t>Read the conclusion last - and check it against the design and the numbers.</a:t>
+              <a:t>Read the conclusion last, and check it against the design and the numbers.</a:t>
             </a:r>
           </a:p>
         </p:txBody>
@@ -23986,7 +23986,7 @@
                 <a:latin typeface="Century Gothic"/>
                 <a:cs typeface="Century Gothic"/>
               </a:rPr>
-              <a:t>Bias -&gt; concrete mitigation?</a:t>
+              <a:t>A concrete fix for each bias?</a:t>
             </a:r>
           </a:p>
         </p:txBody>
@@ -24809,7 +24809,7 @@
                 <a:latin typeface="Century Gothic"/>
                 <a:cs typeface="Century Gothic"/>
               </a:rPr>
-              <a:t>Trust first, then size - and check that the words match the design.</a:t>
+              <a:t>Trust first, then size, and check that the words match the design.</a:t>
             </a:r>
           </a:p>
         </p:txBody>
@@ -25196,7 +25196,7 @@
                 <a:latin typeface="Century Gothic"/>
                 <a:cs typeface="Century Gothic"/>
               </a:rPr>
-              <a:t>Next two Saturdays (Sessions 5-6): data - the FLUID-ICU course dataset</a:t>
+              <a:t>Next two Saturdays (Sessions 5-6): data and the FLUID-ICU course dataset</a:t>
             </a:r>
           </a:p>
         </p:txBody>
@@ -25421,7 +25421,7 @@
                 <a:latin typeface="Century Gothic"/>
                 <a:cs typeface="Century Gothic"/>
               </a:rPr>
-              <a:t>Extra slides - Session 4</a:t>
+              <a:t>Extra slides: Session 4</a:t>
             </a:r>
           </a:p>
         </p:txBody>
@@ -25491,7 +25491,7 @@
                 <a:latin typeface="Century Gothic"/>
                 <a:cs typeface="Century Gothic"/>
               </a:rPr>
-              <a:t>Extra slides - Session 4</a:t>
+              <a:t>Extra slides: Session 4</a:t>
             </a:r>
           </a:p>
           <a:p>
@@ -28770,7 +28770,7 @@
                 <a:latin typeface="Century Gothic"/>
                 <a:cs typeface="Century Gothic"/>
               </a:rPr>
-              <a:t>One bias for each - answers in the notes</a:t>
+              <a:t>One bias for each (answers in the notes)</a:t>
             </a:r>
           </a:p>
         </p:txBody>

--- a/en/files/slides/Session_4_EN.pptx
+++ b/en/files/slides/Session_4_EN.pptx
@@ -9063,8 +9063,8 @@
                 <a:solidFill>
                   <a:srgbClr val="0D7377"/>
                 </a:solidFill>
-                <a:latin typeface="Century Gothic"/>
-                <a:cs typeface="Century Gothic"/>
+                <a:latin typeface="Arial"/>
+                <a:cs typeface="Arial"/>
               </a:rPr>
               <a:t>Session 4 · Bias &amp; effect: can we trust it, how big is it?</a:t>
             </a:r>
@@ -9131,8 +9131,8 @@
                 <a:solidFill>
                   <a:srgbClr val="0070C0"/>
                 </a:solidFill>
-                <a:latin typeface="Century Gothic"/>
-                <a:cs typeface="Century Gothic"/>
+                <a:latin typeface="Arial"/>
+                <a:cs typeface="Arial"/>
               </a:rPr>
               <a:t>Week 4 · Saturday</a:t>
             </a:r>
@@ -9156,8 +9156,8 @@
                 <a:solidFill>
                   <a:srgbClr val="000000"/>
                 </a:solidFill>
-                <a:latin typeface="Century Gothic"/>
-                <a:cs typeface="Century Gothic"/>
+                <a:latin typeface="Arial"/>
+                <a:cs typeface="Arial"/>
               </a:rPr>
               <a:t>Recap quiz on Session 3 (10 min)</a:t>
             </a:r>
@@ -9175,8 +9175,8 @@
                 <a:solidFill>
                   <a:srgbClr val="000000"/>
                 </a:solidFill>
-                <a:latin typeface="Century Gothic"/>
-                <a:cs typeface="Century Gothic"/>
+                <a:latin typeface="Arial"/>
+                <a:cs typeface="Arial"/>
               </a:rPr>
               <a:t>4.1  Bias, confounding and causation (40 min)</a:t>
             </a:r>
@@ -9194,8 +9194,8 @@
                 <a:solidFill>
                   <a:srgbClr val="000000"/>
                 </a:solidFill>
-                <a:latin typeface="Century Gothic"/>
-                <a:cs typeface="Century Gothic"/>
+                <a:latin typeface="Arial"/>
+                <a:cs typeface="Arial"/>
               </a:rPr>
               <a:t>4.2  Measuring disease and association + live 2x2 demo (30 min)</a:t>
             </a:r>
@@ -9213,8 +9213,8 @@
                 <a:solidFill>
                   <a:srgbClr val="000000"/>
                 </a:solidFill>
-                <a:latin typeface="Century Gothic"/>
-                <a:cs typeface="Century Gothic"/>
+                <a:latin typeface="Arial"/>
+                <a:cs typeface="Arial"/>
               </a:rPr>
               <a:t>Break (15 min), then two 2x2 calculations (20 min)</a:t>
             </a:r>
@@ -9232,8 +9232,8 @@
                 <a:solidFill>
                   <a:srgbClr val="000000"/>
                 </a:solidFill>
-                <a:latin typeface="Century Gothic"/>
-                <a:cs typeface="Century Gothic"/>
+                <a:latin typeface="Arial"/>
+                <a:cs typeface="Arial"/>
               </a:rPr>
               <a:t>4.3  Beyond single studies: tests, meta-analysis, appraisal (30 min)</a:t>
             </a:r>
@@ -9251,8 +9251,8 @@
                 <a:solidFill>
                   <a:srgbClr val="000000"/>
                 </a:solidFill>
-                <a:latin typeface="Century Gothic"/>
-                <a:cs typeface="Century Gothic"/>
+                <a:latin typeface="Arial"/>
+                <a:cs typeface="Arial"/>
               </a:rPr>
               <a:t>Proposal builder 4: exposure, outcomes, biases (30 min), then wrap-up</a:t>
             </a:r>
@@ -9289,7 +9289,7 @@
                     <a:lumMod val="50000"/>
                   </a:schemeClr>
                 </a:solidFill>
-                <a:latin typeface="Verdana"/>
+                <a:latin typeface="Arial"/>
               </a:rPr>
               <a:t>Neudata | #ClearDataClearImpact</a:t>
             </a:r>
@@ -9419,8 +9419,8 @@
                 <a:solidFill>
                   <a:srgbClr val="0D7377"/>
                 </a:solidFill>
-                <a:latin typeface="Century Gothic"/>
-                <a:cs typeface="Century Gothic"/>
+                <a:latin typeface="Arial"/>
+                <a:cs typeface="Arial"/>
               </a:rPr>
               <a:t>Confounding in numbers: the association disappears</a:t>
             </a:r>
@@ -9510,8 +9510,8 @@
                 <a:solidFill>
                   <a:srgbClr val="595959"/>
                 </a:solidFill>
-                <a:latin typeface="Century Gothic"/>
-                <a:cs typeface="Century Gothic"/>
+                <a:latin typeface="Arial"/>
+                <a:cs typeface="Arial"/>
               </a:rPr>
               <a:t>Hypothetical data for teaching</a:t>
             </a:r>
@@ -9555,8 +9555,8 @@
                 <a:solidFill>
                   <a:srgbClr val="FFFFFF"/>
                 </a:solidFill>
-                <a:latin typeface="Century Gothic"/>
-                <a:cs typeface="Century Gothic"/>
+                <a:latin typeface="Arial"/>
+                <a:cs typeface="Arial"/>
               </a:rPr>
               <a:t>KEY MESSAGE   </a:t>
             </a:r>
@@ -9565,8 +9565,8 @@
                 <a:solidFill>
                   <a:srgbClr val="FFFFFF"/>
                 </a:solidFill>
-                <a:latin typeface="Century Gothic"/>
-                <a:cs typeface="Century Gothic"/>
+                <a:latin typeface="Arial"/>
+                <a:cs typeface="Arial"/>
               </a:rPr>
               <a:t>Compare like with like: within each severity level, fluid makes no difference.</a:t>
             </a:r>
@@ -9603,7 +9603,7 @@
                     <a:lumMod val="50000"/>
                   </a:schemeClr>
                 </a:solidFill>
-                <a:latin typeface="Verdana"/>
+                <a:latin typeface="Arial"/>
               </a:rPr>
               <a:t>Neudata | #ClearDataClearImpact</a:t>
             </a:r>
@@ -9733,8 +9733,8 @@
                 <a:solidFill>
                   <a:srgbClr val="0D7377"/>
                 </a:solidFill>
-                <a:latin typeface="Century Gothic"/>
-                <a:cs typeface="Century Gothic"/>
+                <a:latin typeface="Arial"/>
+                <a:cs typeface="Arial"/>
               </a:rPr>
               <a:t>Worked examples: find the confounder</a:t>
             </a:r>
@@ -9800,8 +9800,8 @@
                 <a:solidFill>
                   <a:srgbClr val="595959"/>
                 </a:solidFill>
-                <a:latin typeface="Century Gothic"/>
-                <a:cs typeface="Century Gothic"/>
+                <a:latin typeface="Arial"/>
+                <a:cs typeface="Arial"/>
               </a:rPr>
               <a:t>In each, a third factor drives both the exposure and the outcome</a:t>
             </a:r>
@@ -9843,8 +9843,8 @@
                 <a:solidFill>
                   <a:srgbClr val="FFFFFF"/>
                 </a:solidFill>
-                <a:latin typeface="Century Gothic"/>
-                <a:cs typeface="Century Gothic"/>
+                <a:latin typeface="Arial"/>
+                <a:cs typeface="Arial"/>
               </a:rPr>
               <a:t>Antibiotics and death</a:t>
             </a:r>
@@ -9892,8 +9892,8 @@
                 <a:solidFill>
                   <a:srgbClr val="000000"/>
                 </a:solidFill>
-                <a:latin typeface="Century Gothic"/>
-                <a:cs typeface="Century Gothic"/>
+                <a:latin typeface="Arial"/>
+                <a:cs typeface="Arial"/>
               </a:rPr>
               <a:t>More antibiotics → more deaths?</a:t>
             </a:r>
@@ -9913,8 +9913,8 @@
                 <a:solidFill>
                   <a:srgbClr val="000000"/>
                 </a:solidFill>
-                <a:latin typeface="Century Gothic"/>
-                <a:cs typeface="Century Gothic"/>
+                <a:latin typeface="Arial"/>
+                <a:cs typeface="Arial"/>
               </a:rPr>
               <a:t>Confounder: severity of infection</a:t>
             </a:r>
@@ -9934,8 +9934,8 @@
                 <a:solidFill>
                   <a:srgbClr val="000000"/>
                 </a:solidFill>
-                <a:latin typeface="Century Gothic"/>
-                <a:cs typeface="Century Gothic"/>
+                <a:latin typeface="Arial"/>
+                <a:cs typeface="Arial"/>
               </a:rPr>
               <a:t>Sicker patients get more drugs</a:t>
             </a:r>
@@ -9977,8 +9977,8 @@
                 <a:solidFill>
                   <a:srgbClr val="FFFFFF"/>
                 </a:solidFill>
-                <a:latin typeface="Century Gothic"/>
-                <a:cs typeface="Century Gothic"/>
+                <a:latin typeface="Arial"/>
+                <a:cs typeface="Arial"/>
               </a:rPr>
               <a:t>Dietitian and weight loss</a:t>
             </a:r>
@@ -10026,8 +10026,8 @@
                 <a:solidFill>
                   <a:srgbClr val="000000"/>
                 </a:solidFill>
-                <a:latin typeface="Century Gothic"/>
-                <a:cs typeface="Century Gothic"/>
+                <a:latin typeface="Arial"/>
+                <a:cs typeface="Arial"/>
               </a:rPr>
               <a:t>Seen by dietitian → more weight loss?</a:t>
             </a:r>
@@ -10047,8 +10047,8 @@
                 <a:solidFill>
                   <a:srgbClr val="000000"/>
                 </a:solidFill>
-                <a:latin typeface="Century Gothic"/>
-                <a:cs typeface="Century Gothic"/>
+                <a:latin typeface="Arial"/>
+                <a:cs typeface="Arial"/>
               </a:rPr>
               <a:t>Confounder: malnutrition at admission</a:t>
             </a:r>
@@ -10068,8 +10068,8 @@
                 <a:solidFill>
                   <a:srgbClr val="000000"/>
                 </a:solidFill>
-                <a:latin typeface="Century Gothic"/>
-                <a:cs typeface="Century Gothic"/>
+                <a:latin typeface="Arial"/>
+                <a:cs typeface="Arial"/>
               </a:rPr>
               <a:t>The reason for referral</a:t>
             </a:r>
@@ -10111,8 +10111,8 @@
                 <a:solidFill>
                   <a:srgbClr val="FFFFFF"/>
                 </a:solidFill>
-                <a:latin typeface="Century Gothic"/>
-                <a:cs typeface="Century Gothic"/>
+                <a:latin typeface="Arial"/>
+                <a:cs typeface="Arial"/>
               </a:rPr>
               <a:t>Vasopressors and arrhythmia</a:t>
             </a:r>
@@ -10160,8 +10160,8 @@
                 <a:solidFill>
                   <a:srgbClr val="000000"/>
                 </a:solidFill>
-                <a:latin typeface="Century Gothic"/>
-                <a:cs typeface="Century Gothic"/>
+                <a:latin typeface="Arial"/>
+                <a:cs typeface="Arial"/>
               </a:rPr>
               <a:t>Vasopressors → more arrhythmia?</a:t>
             </a:r>
@@ -10181,8 +10181,8 @@
                 <a:solidFill>
                   <a:srgbClr val="000000"/>
                 </a:solidFill>
-                <a:latin typeface="Century Gothic"/>
-                <a:cs typeface="Century Gothic"/>
+                <a:latin typeface="Arial"/>
+                <a:cs typeface="Arial"/>
               </a:rPr>
               <a:t>Confounder: depth of shock</a:t>
             </a:r>
@@ -10202,8 +10202,8 @@
                 <a:solidFill>
                   <a:srgbClr val="000000"/>
                 </a:solidFill>
-                <a:latin typeface="Century Gothic"/>
-                <a:cs typeface="Century Gothic"/>
+                <a:latin typeface="Arial"/>
+                <a:cs typeface="Arial"/>
               </a:rPr>
               <a:t>Partly a drug effect too</a:t>
             </a:r>
@@ -10247,8 +10247,8 @@
                 <a:solidFill>
                   <a:srgbClr val="FFFFFF"/>
                 </a:solidFill>
-                <a:latin typeface="Century Gothic"/>
-                <a:cs typeface="Century Gothic"/>
+                <a:latin typeface="Arial"/>
+                <a:cs typeface="Arial"/>
               </a:rPr>
               <a:t>KEY MESSAGE   </a:t>
             </a:r>
@@ -10257,8 +10257,8 @@
                 <a:solidFill>
                   <a:srgbClr val="FFFFFF"/>
                 </a:solidFill>
-                <a:latin typeface="Century Gothic"/>
-                <a:cs typeface="Century Gothic"/>
+                <a:latin typeface="Arial"/>
+                <a:cs typeface="Arial"/>
               </a:rPr>
               <a:t>Ask: why did these patients receive the exposure? That reason may be the confounder.</a:t>
             </a:r>
@@ -10295,7 +10295,7 @@
                     <a:lumMod val="50000"/>
                   </a:schemeClr>
                 </a:solidFill>
-                <a:latin typeface="Verdana"/>
+                <a:latin typeface="Arial"/>
               </a:rPr>
               <a:t>Neudata | #ClearDataClearImpact</a:t>
             </a:r>
@@ -10425,8 +10425,8 @@
                 <a:solidFill>
                   <a:srgbClr val="0D7377"/>
                 </a:solidFill>
-                <a:latin typeface="Century Gothic"/>
-                <a:cs typeface="Century Gothic"/>
+                <a:latin typeface="Arial"/>
+                <a:cs typeface="Arial"/>
               </a:rPr>
               <a:t>Confounding or effect modification?</a:t>
             </a:r>
@@ -10516,8 +10516,8 @@
                 <a:solidFill>
                   <a:srgbClr val="595959"/>
                 </a:solidFill>
-                <a:latin typeface="Century Gothic"/>
-                <a:cs typeface="Century Gothic"/>
+                <a:latin typeface="Arial"/>
+                <a:cs typeface="Arial"/>
               </a:rPr>
               <a:t>Hypothetical data for teaching</a:t>
             </a:r>
@@ -10561,8 +10561,8 @@
                 <a:solidFill>
                   <a:srgbClr val="FFFFFF"/>
                 </a:solidFill>
-                <a:latin typeface="Century Gothic"/>
-                <a:cs typeface="Century Gothic"/>
+                <a:latin typeface="Arial"/>
+                <a:cs typeface="Arial"/>
               </a:rPr>
               <a:t>KEY MESSAGE   </a:t>
             </a:r>
@@ -10571,8 +10571,8 @@
                 <a:solidFill>
                   <a:srgbClr val="FFFFFF"/>
                 </a:solidFill>
-                <a:latin typeface="Century Gothic"/>
-                <a:cs typeface="Century Gothic"/>
+                <a:latin typeface="Arial"/>
+                <a:cs typeface="Arial"/>
               </a:rPr>
               <a:t>Confounding is a bias to remove; effect modification is a finding to report.</a:t>
             </a:r>
@@ -10609,7 +10609,7 @@
                     <a:lumMod val="50000"/>
                   </a:schemeClr>
                 </a:solidFill>
-                <a:latin typeface="Verdana"/>
+                <a:latin typeface="Arial"/>
               </a:rPr>
               <a:t>Neudata | #ClearDataClearImpact</a:t>
             </a:r>
@@ -10739,8 +10739,8 @@
                 <a:solidFill>
                   <a:srgbClr val="0D7377"/>
                 </a:solidFill>
-                <a:latin typeface="Century Gothic"/>
-                <a:cs typeface="Century Gothic"/>
+                <a:latin typeface="Arial"/>
+                <a:cs typeface="Arial"/>
               </a:rPr>
               <a:t>How designs fight bias</a:t>
             </a:r>
@@ -10806,8 +10806,8 @@
                 <a:solidFill>
                   <a:srgbClr val="595959"/>
                 </a:solidFill>
-                <a:latin typeface="Century Gothic"/>
-                <a:cs typeface="Century Gothic"/>
+                <a:latin typeface="Arial"/>
+                <a:cs typeface="Arial"/>
               </a:rPr>
               <a:t>Build the protection into the design; repair what is left in the analysis.</a:t>
             </a:r>
@@ -10849,8 +10849,8 @@
                 <a:solidFill>
                   <a:srgbClr val="FFFFFF"/>
                 </a:solidFill>
-                <a:latin typeface="Century Gothic"/>
-                <a:cs typeface="Century Gothic"/>
+                <a:latin typeface="Arial"/>
+                <a:cs typeface="Arial"/>
               </a:rPr>
               <a:t>Randomise + conceal</a:t>
             </a:r>
@@ -10898,8 +10898,8 @@
                 <a:solidFill>
                   <a:srgbClr val="000000"/>
                 </a:solidFill>
-                <a:latin typeface="Century Gothic"/>
-                <a:cs typeface="Century Gothic"/>
+                <a:latin typeface="Arial"/>
+                <a:cs typeface="Arial"/>
               </a:rPr>
               <a:t>Chance decides the group</a:t>
             </a:r>
@@ -10919,8 +10919,8 @@
                 <a:solidFill>
                   <a:srgbClr val="000000"/>
                 </a:solidFill>
-                <a:latin typeface="Century Gothic"/>
-                <a:cs typeface="Century Gothic"/>
+                <a:latin typeface="Arial"/>
+                <a:cs typeface="Arial"/>
               </a:rPr>
               <a:t>Balances known AND unknown confounders</a:t>
             </a:r>
@@ -10940,8 +10940,8 @@
                 <a:solidFill>
                   <a:srgbClr val="000000"/>
                 </a:solidFill>
-                <a:latin typeface="Century Gothic"/>
-                <a:cs typeface="Century Gothic"/>
+                <a:latin typeface="Arial"/>
+                <a:cs typeface="Arial"/>
               </a:rPr>
               <a:t>Nobody can predict the next allocation</a:t>
             </a:r>
@@ -10983,8 +10983,8 @@
                 <a:solidFill>
                   <a:srgbClr val="FFFFFF"/>
                 </a:solidFill>
-                <a:latin typeface="Century Gothic"/>
-                <a:cs typeface="Century Gothic"/>
+                <a:latin typeface="Arial"/>
+                <a:cs typeface="Arial"/>
               </a:rPr>
               <a:t>Blind</a:t>
             </a:r>
@@ -11032,8 +11032,8 @@
                 <a:solidFill>
                   <a:srgbClr val="000000"/>
                 </a:solidFill>
-                <a:latin typeface="Century Gothic"/>
-                <a:cs typeface="Century Gothic"/>
+                <a:latin typeface="Arial"/>
+                <a:cs typeface="Arial"/>
               </a:rPr>
               <a:t>Patients, clinicians, assessors, analysts</a:t>
             </a:r>
@@ -11053,8 +11053,8 @@
                 <a:solidFill>
                   <a:srgbClr val="000000"/>
                 </a:solidFill>
-                <a:latin typeface="Century Gothic"/>
-                <a:cs typeface="Century Gothic"/>
+                <a:latin typeface="Arial"/>
+                <a:cs typeface="Arial"/>
               </a:rPr>
               <a:t>Protects how outcomes are measured</a:t>
             </a:r>
@@ -11074,8 +11074,8 @@
                 <a:solidFill>
                   <a:srgbClr val="000000"/>
                 </a:solidFill>
-                <a:latin typeface="Century Gothic"/>
-                <a:cs typeface="Century Gothic"/>
+                <a:latin typeface="Arial"/>
+                <a:cs typeface="Arial"/>
               </a:rPr>
               <a:t>If impossible: blind the assessor</a:t>
             </a:r>
@@ -11117,8 +11117,8 @@
                 <a:solidFill>
                   <a:srgbClr val="FFFFFF"/>
                 </a:solidFill>
-                <a:latin typeface="Century Gothic"/>
-                <a:cs typeface="Century Gothic"/>
+                <a:latin typeface="Arial"/>
+                <a:cs typeface="Arial"/>
               </a:rPr>
               <a:t>Restrict, match, adjust</a:t>
             </a:r>
@@ -11166,8 +11166,8 @@
                 <a:solidFill>
                   <a:srgbClr val="000000"/>
                 </a:solidFill>
-                <a:latin typeface="Century Gothic"/>
-                <a:cs typeface="Century Gothic"/>
+                <a:latin typeface="Arial"/>
+                <a:cs typeface="Arial"/>
               </a:rPr>
               <a:t>Restrict: narrow eligibility</a:t>
             </a:r>
@@ -11187,8 +11187,8 @@
                 <a:solidFill>
                   <a:srgbClr val="000000"/>
                 </a:solidFill>
-                <a:latin typeface="Century Gothic"/>
-                <a:cs typeface="Century Gothic"/>
+                <a:latin typeface="Arial"/>
+                <a:cs typeface="Arial"/>
               </a:rPr>
               <a:t>Match: pair similar patients</a:t>
             </a:r>
@@ -11208,8 +11208,8 @@
                 <a:solidFill>
                   <a:srgbClr val="000000"/>
                 </a:solidFill>
-                <a:latin typeface="Century Gothic"/>
-                <a:cs typeface="Century Gothic"/>
+                <a:latin typeface="Arial"/>
+                <a:cs typeface="Arial"/>
               </a:rPr>
               <a:t>Adjust: statistics in the analysis</a:t>
             </a:r>
@@ -11229,8 +11229,8 @@
                 <a:solidFill>
                   <a:srgbClr val="B23B2E"/>
                 </a:solidFill>
-                <a:latin typeface="Century Gothic"/>
-                <a:cs typeface="Century Gothic"/>
+                <a:latin typeface="Arial"/>
+                <a:cs typeface="Arial"/>
               </a:rPr>
               <a:t>Measured confounders only</a:t>
             </a:r>
@@ -11274,8 +11274,8 @@
                 <a:solidFill>
                   <a:srgbClr val="FFFFFF"/>
                 </a:solidFill>
-                <a:latin typeface="Century Gothic"/>
-                <a:cs typeface="Century Gothic"/>
+                <a:latin typeface="Arial"/>
+                <a:cs typeface="Arial"/>
               </a:rPr>
               <a:t>KEY MESSAGE   </a:t>
             </a:r>
@@ -11284,8 +11284,8 @@
                 <a:solidFill>
                   <a:srgbClr val="FFFFFF"/>
                 </a:solidFill>
-                <a:latin typeface="Century Gothic"/>
-                <a:cs typeface="Century Gothic"/>
+                <a:latin typeface="Arial"/>
+                <a:cs typeface="Arial"/>
               </a:rPr>
               <a:t>Only randomisation protects against confounders you never measured.</a:t>
             </a:r>
@@ -11322,7 +11322,7 @@
                     <a:lumMod val="50000"/>
                   </a:schemeClr>
                 </a:solidFill>
-                <a:latin typeface="Verdana"/>
+                <a:latin typeface="Arial"/>
               </a:rPr>
               <a:t>Neudata | #ClearDataClearImpact</a:t>
             </a:r>
@@ -11452,8 +11452,8 @@
                 <a:solidFill>
                   <a:srgbClr val="0D7377"/>
                 </a:solidFill>
-                <a:latin typeface="Century Gothic"/>
-                <a:cs typeface="Century Gothic"/>
+                <a:latin typeface="Arial"/>
+                <a:cs typeface="Arial"/>
               </a:rPr>
               <a:t>Randomisation balances what we know and what we do not</a:t>
             </a:r>
@@ -11549,8 +11549,8 @@
                 <a:solidFill>
                   <a:srgbClr val="FFFFFF"/>
                 </a:solidFill>
-                <a:latin typeface="Century Gothic"/>
-                <a:cs typeface="Century Gothic"/>
+                <a:latin typeface="Arial"/>
+                <a:cs typeface="Arial"/>
               </a:rPr>
               <a:t>KEY MESSAGE   </a:t>
             </a:r>
@@ -11559,8 +11559,8 @@
                 <a:solidFill>
                   <a:srgbClr val="FFFFFF"/>
                 </a:solidFill>
-                <a:latin typeface="Century Gothic"/>
-                <a:cs typeface="Century Gothic"/>
+                <a:latin typeface="Arial"/>
+                <a:cs typeface="Arial"/>
               </a:rPr>
               <a:t>By chance, both groups get a similar mix, even of factors nobody measured.</a:t>
             </a:r>
@@ -11597,7 +11597,7 @@
                     <a:lumMod val="50000"/>
                   </a:schemeClr>
                 </a:solidFill>
-                <a:latin typeface="Verdana"/>
+                <a:latin typeface="Arial"/>
               </a:rPr>
               <a:t>Neudata | #ClearDataClearImpact</a:t>
             </a:r>
@@ -11727,8 +11727,8 @@
                 <a:solidFill>
                   <a:srgbClr val="0D7377"/>
                 </a:solidFill>
-                <a:latin typeface="Century Gothic"/>
-                <a:cs typeface="Century Gothic"/>
+                <a:latin typeface="Arial"/>
+                <a:cs typeface="Arial"/>
               </a:rPr>
               <a:t>Concealment before, blinding after</a:t>
             </a:r>
@@ -11824,8 +11824,8 @@
                 <a:solidFill>
                   <a:srgbClr val="FFFFFF"/>
                 </a:solidFill>
-                <a:latin typeface="Century Gothic"/>
-                <a:cs typeface="Century Gothic"/>
+                <a:latin typeface="Arial"/>
+                <a:cs typeface="Arial"/>
               </a:rPr>
               <a:t>KEY MESSAGE   </a:t>
             </a:r>
@@ -11834,8 +11834,8 @@
                 <a:solidFill>
                   <a:srgbClr val="FFFFFF"/>
                 </a:solidFill>
-                <a:latin typeface="Century Gothic"/>
-                <a:cs typeface="Century Gothic"/>
+                <a:latin typeface="Arial"/>
+                <a:cs typeface="Arial"/>
               </a:rPr>
               <a:t>Concealment protects WHO gets in; blinding protects HOW outcomes are measured.</a:t>
             </a:r>
@@ -11872,7 +11872,7 @@
                     <a:lumMod val="50000"/>
                   </a:schemeClr>
                 </a:solidFill>
-                <a:latin typeface="Verdana"/>
+                <a:latin typeface="Arial"/>
               </a:rPr>
               <a:t>Neudata | #ClearDataClearImpact</a:t>
             </a:r>
@@ -12002,8 +12002,8 @@
                 <a:solidFill>
                   <a:srgbClr val="0D7377"/>
                 </a:solidFill>
-                <a:latin typeface="Century Gothic"/>
-                <a:cs typeface="Century Gothic"/>
+                <a:latin typeface="Arial"/>
+                <a:cs typeface="Arial"/>
               </a:rPr>
               <a:t>Matching helps, but only for what was measured</a:t>
             </a:r>
@@ -12099,8 +12099,8 @@
                 <a:solidFill>
                   <a:srgbClr val="FFFFFF"/>
                 </a:solidFill>
-                <a:latin typeface="Century Gothic"/>
-                <a:cs typeface="Century Gothic"/>
+                <a:latin typeface="Arial"/>
+                <a:cs typeface="Arial"/>
               </a:rPr>
               <a:t>KEY MESSAGE   </a:t>
             </a:r>
@@ -12109,8 +12109,8 @@
                 <a:solidFill>
                   <a:srgbClr val="FFFFFF"/>
                 </a:solidFill>
-                <a:latin typeface="Century Gothic"/>
-                <a:cs typeface="Century Gothic"/>
+                <a:latin typeface="Arial"/>
+                <a:cs typeface="Arial"/>
               </a:rPr>
               <a:t>Matching and adjustment cannot balance what nobody recorded.</a:t>
             </a:r>
@@ -12147,7 +12147,7 @@
                     <a:lumMod val="50000"/>
                   </a:schemeClr>
                 </a:solidFill>
-                <a:latin typeface="Verdana"/>
+                <a:latin typeface="Arial"/>
               </a:rPr>
               <a:t>Neudata | #ClearDataClearImpact</a:t>
             </a:r>
@@ -12277,8 +12277,8 @@
                 <a:solidFill>
                   <a:srgbClr val="0D7377"/>
                 </a:solidFill>
-                <a:latin typeface="Century Gothic"/>
-                <a:cs typeface="Century Gothic"/>
+                <a:latin typeface="Arial"/>
+                <a:cs typeface="Arial"/>
               </a:rPr>
               <a:t>Internal validity first, then external validity</a:t>
             </a:r>
@@ -12374,8 +12374,8 @@
                 <a:solidFill>
                   <a:srgbClr val="FFFFFF"/>
                 </a:solidFill>
-                <a:latin typeface="Century Gothic"/>
-                <a:cs typeface="Century Gothic"/>
+                <a:latin typeface="Arial"/>
+                <a:cs typeface="Arial"/>
               </a:rPr>
               <a:t>KEY MESSAGE   </a:t>
             </a:r>
@@ -12384,8 +12384,8 @@
                 <a:solidFill>
                   <a:srgbClr val="FFFFFF"/>
                 </a:solidFill>
-                <a:latin typeface="Century Gothic"/>
-                <a:cs typeface="Century Gothic"/>
+                <a:latin typeface="Arial"/>
+                <a:cs typeface="Arial"/>
               </a:rPr>
               <a:t>First: is it right for the people studied? Then: does it apply to mine?</a:t>
             </a:r>
@@ -12422,7 +12422,7 @@
                     <a:lumMod val="50000"/>
                   </a:schemeClr>
                 </a:solidFill>
-                <a:latin typeface="Verdana"/>
+                <a:latin typeface="Arial"/>
               </a:rPr>
               <a:t>Neudata | #ClearDataClearImpact</a:t>
             </a:r>
@@ -12552,8 +12552,8 @@
                 <a:solidFill>
                   <a:srgbClr val="0D7377"/>
                 </a:solidFill>
-                <a:latin typeface="Century Gothic"/>
-                <a:cs typeface="Century Gothic"/>
+                <a:latin typeface="Arial"/>
+                <a:cs typeface="Arial"/>
               </a:rPr>
               <a:t>Reverse causation: which came first?</a:t>
             </a:r>
@@ -12649,8 +12649,8 @@
                 <a:solidFill>
                   <a:srgbClr val="FFFFFF"/>
                 </a:solidFill>
-                <a:latin typeface="Century Gothic"/>
-                <a:cs typeface="Century Gothic"/>
+                <a:latin typeface="Arial"/>
+                <a:cs typeface="Arial"/>
               </a:rPr>
               <a:t>KEY MESSAGE   </a:t>
             </a:r>
@@ -12659,8 +12659,8 @@
                 <a:solidFill>
                   <a:srgbClr val="FFFFFF"/>
                 </a:solidFill>
-                <a:latin typeface="Century Gothic"/>
-                <a:cs typeface="Century Gothic"/>
+                <a:latin typeface="Arial"/>
+                <a:cs typeface="Arial"/>
               </a:rPr>
               <a:t>Before claiming X causes Y, make sure Y did not cause X.</a:t>
             </a:r>
@@ -12697,7 +12697,7 @@
                     <a:lumMod val="50000"/>
                   </a:schemeClr>
                 </a:solidFill>
-                <a:latin typeface="Verdana"/>
+                <a:latin typeface="Arial"/>
               </a:rPr>
               <a:t>Neudata | #ClearDataClearImpact</a:t>
             </a:r>
@@ -12827,8 +12827,8 @@
                 <a:solidFill>
                   <a:srgbClr val="0D7377"/>
                 </a:solidFill>
-                <a:latin typeface="Century Gothic"/>
-                <a:cs typeface="Century Gothic"/>
+                <a:latin typeface="Arial"/>
+                <a:cs typeface="Arial"/>
               </a:rPr>
               <a:t>From association to causation: Bradford Hill in pictures</a:t>
             </a:r>
@@ -12924,8 +12924,8 @@
                 <a:solidFill>
                   <a:srgbClr val="FFFFFF"/>
                 </a:solidFill>
-                <a:latin typeface="Century Gothic"/>
-                <a:cs typeface="Century Gothic"/>
+                <a:latin typeface="Arial"/>
+                <a:cs typeface="Arial"/>
               </a:rPr>
               <a:t>KEY MESSAGE   </a:t>
             </a:r>
@@ -12934,8 +12934,8 @@
                 <a:solidFill>
                   <a:srgbClr val="FFFFFF"/>
                 </a:solidFill>
-                <a:latin typeface="Century Gothic"/>
-                <a:cs typeface="Century Gothic"/>
+                <a:latin typeface="Arial"/>
+                <a:cs typeface="Arial"/>
               </a:rPr>
               <a:t>Causation is a judgement built from many clues; temporality is the only must.</a:t>
             </a:r>
@@ -12972,7 +12972,7 @@
                     <a:lumMod val="50000"/>
                   </a:schemeClr>
                 </a:solidFill>
-                <a:latin typeface="Verdana"/>
+                <a:latin typeface="Arial"/>
               </a:rPr>
               <a:t>Neudata | #ClearDataClearImpact</a:t>
             </a:r>
@@ -13102,8 +13102,8 @@
                 <a:solidFill>
                   <a:srgbClr val="0D7377"/>
                 </a:solidFill>
-                <a:latin typeface="Century Gothic"/>
-                <a:cs typeface="Century Gothic"/>
+                <a:latin typeface="Arial"/>
+                <a:cs typeface="Arial"/>
               </a:rPr>
               <a:t>Recap quiz: three questions on Session 3</a:t>
             </a:r>
@@ -13173,8 +13173,8 @@
                 <a:solidFill>
                   <a:srgbClr val="FFFFFF"/>
                 </a:solidFill>
-                <a:latin typeface="Century Gothic"/>
-                <a:cs typeface="Century Gothic"/>
+                <a:latin typeface="Arial"/>
+                <a:cs typeface="Arial"/>
               </a:rPr>
               <a:t>QUICK QUIZ   |   10 min</a:t>
             </a:r>
@@ -13211,25 +13211,19 @@
               <a:spcBef>
                 <a:spcPts val="450"/>
               </a:spcBef>
-              <a:buNone/>
-            </a:pPr>
-            <a:r>
-              <a:rPr lang="en-US" sz="1650" b="1" dirty="0">
-                <a:solidFill>
-                  <a:srgbClr val="6C3483"/>
-                </a:solidFill>
-                <a:latin typeface="Century Gothic"/>
-                <a:cs typeface="Century Gothic"/>
-              </a:rPr>
-              <a:t>1.  </a:t>
-            </a:r>
+              <a:buClr>
+                <a:srgbClr val="6C3483"/>
+              </a:buClr>
+              <a:buFont typeface="Arial"/>
+              <a:buChar char="•"/>
+            </a:pPr>
             <a:r>
               <a:rPr lang="en-US" sz="1650" dirty="0">
                 <a:solidFill>
                   <a:srgbClr val="000000"/>
                 </a:solidFill>
-                <a:latin typeface="Century Gothic"/>
-                <a:cs typeface="Century Gothic"/>
+                <a:latin typeface="Arial"/>
+                <a:cs typeface="Arial"/>
               </a:rPr>
               <a:t>Q1. ICU patients with delirium are compared with patients without delirium for earlier benzodiazepine use. Design?</a:t>
             </a:r>
@@ -13242,25 +13236,19 @@
               <a:spcBef>
                 <a:spcPts val="450"/>
               </a:spcBef>
-              <a:buNone/>
-            </a:pPr>
-            <a:r>
-              <a:rPr lang="en-US" sz="1650" b="1" dirty="0">
-                <a:solidFill>
-                  <a:srgbClr val="6C3483"/>
-                </a:solidFill>
-                <a:latin typeface="Century Gothic"/>
-                <a:cs typeface="Century Gothic"/>
-              </a:rPr>
-              <a:t>2.  </a:t>
-            </a:r>
+              <a:buClr>
+                <a:srgbClr val="6C3483"/>
+              </a:buClr>
+              <a:buFont typeface="Arial"/>
+              <a:buChar char="•"/>
+            </a:pPr>
             <a:r>
               <a:rPr lang="en-US" sz="1650" dirty="0">
                 <a:solidFill>
                   <a:srgbClr val="000000"/>
                 </a:solidFill>
-                <a:latin typeface="Century Gothic"/>
-                <a:cs typeface="Century Gothic"/>
+                <a:latin typeface="Arial"/>
+                <a:cs typeface="Arial"/>
               </a:rPr>
               <a:t>Q2. Which design randomises whole wards instead of patients?</a:t>
             </a:r>
@@ -13273,25 +13261,19 @@
               <a:spcBef>
                 <a:spcPts val="450"/>
               </a:spcBef>
-              <a:buNone/>
-            </a:pPr>
-            <a:r>
-              <a:rPr lang="en-US" sz="1650" b="1" dirty="0">
-                <a:solidFill>
-                  <a:srgbClr val="6C3483"/>
-                </a:solidFill>
-                <a:latin typeface="Century Gothic"/>
-                <a:cs typeface="Century Gothic"/>
-              </a:rPr>
-              <a:t>3.  </a:t>
-            </a:r>
+              <a:buClr>
+                <a:srgbClr val="6C3483"/>
+              </a:buClr>
+              <a:buFont typeface="Arial"/>
+              <a:buChar char="•"/>
+            </a:pPr>
             <a:r>
               <a:rPr lang="en-US" sz="1650" dirty="0">
                 <a:solidFill>
                   <a:srgbClr val="000000"/>
                 </a:solidFill>
-                <a:latin typeface="Century Gothic"/>
-                <a:cs typeface="Century Gothic"/>
+                <a:latin typeface="Arial"/>
+                <a:cs typeface="Arial"/>
               </a:rPr>
               <a:t>Q3. New vs old strategy, mortality difference 95% CI -1 to +3 points; margin +4 points. Result?</a:t>
             </a:r>
@@ -13304,25 +13286,19 @@
               <a:spcBef>
                 <a:spcPts val="450"/>
               </a:spcBef>
-              <a:buNone/>
-            </a:pPr>
-            <a:r>
-              <a:rPr lang="en-US" sz="1650" b="1" dirty="0">
-                <a:solidFill>
-                  <a:srgbClr val="6C3483"/>
-                </a:solidFill>
-                <a:latin typeface="Century Gothic"/>
-                <a:cs typeface="Century Gothic"/>
-              </a:rPr>
-              <a:t>4.  </a:t>
-            </a:r>
+              <a:buClr>
+                <a:srgbClr val="6C3483"/>
+              </a:buClr>
+              <a:buFont typeface="Arial"/>
+              <a:buChar char="•"/>
+            </a:pPr>
             <a:r>
               <a:rPr lang="en-US" sz="1650" dirty="0">
                 <a:solidFill>
                   <a:srgbClr val="000000"/>
                 </a:solidFill>
-                <a:latin typeface="Century Gothic"/>
-                <a:cs typeface="Century Gothic"/>
+                <a:latin typeface="Arial"/>
+                <a:cs typeface="Arial"/>
               </a:rPr>
               <a:t>Groups: re-read your Proposal Part 2a (design, setting, population): 2 min</a:t>
             </a:r>
@@ -13366,8 +13342,8 @@
                 <a:solidFill>
                   <a:srgbClr val="6C3483"/>
                 </a:solidFill>
-                <a:latin typeface="Century Gothic"/>
-                <a:cs typeface="Century Gothic"/>
+                <a:latin typeface="Arial"/>
+                <a:cs typeface="Arial"/>
               </a:rPr>
               <a:t>How we run it</a:t>
             </a:r>
@@ -13388,8 +13364,8 @@
                 <a:solidFill>
                   <a:srgbClr val="000000"/>
                 </a:solidFill>
-                <a:latin typeface="Century Gothic"/>
-                <a:cs typeface="Century Gothic"/>
+                <a:latin typeface="Arial"/>
+                <a:cs typeface="Arial"/>
               </a:rPr>
               <a:t>Answer alone first</a:t>
             </a:r>
@@ -13410,8 +13386,8 @@
                 <a:solidFill>
                   <a:srgbClr val="000000"/>
                 </a:solidFill>
-                <a:latin typeface="Century Gothic"/>
-                <a:cs typeface="Century Gothic"/>
+                <a:latin typeface="Arial"/>
+                <a:cs typeface="Arial"/>
               </a:rPr>
               <a:t>Show of hands, then reveal</a:t>
             </a:r>
@@ -13432,8 +13408,8 @@
                 <a:solidFill>
                   <a:srgbClr val="000000"/>
                 </a:solidFill>
-                <a:latin typeface="Century Gothic"/>
-                <a:cs typeface="Century Gothic"/>
+                <a:latin typeface="Arial"/>
+                <a:cs typeface="Arial"/>
               </a:rPr>
               <a:t>Ask one person to explain</a:t>
             </a:r>
@@ -13479,8 +13455,8 @@
                 <a:solidFill>
                   <a:srgbClr val="6C3483"/>
                 </a:solidFill>
-                <a:latin typeface="Century Gothic"/>
-                <a:cs typeface="Century Gothic"/>
+                <a:latin typeface="Arial"/>
+                <a:cs typeface="Arial"/>
               </a:rPr>
               <a:t>OUTPUT   </a:t>
             </a:r>
@@ -13489,8 +13465,8 @@
                 <a:solidFill>
                   <a:srgbClr val="000000"/>
                 </a:solidFill>
-                <a:latin typeface="Century Gothic"/>
-                <a:cs typeface="Century Gothic"/>
+                <a:latin typeface="Arial"/>
+                <a:cs typeface="Arial"/>
               </a:rPr>
               <a:t>Each group's Part 2a re-read and ready to extend</a:t>
             </a:r>
@@ -13527,7 +13503,7 @@
                     <a:lumMod val="50000"/>
                   </a:schemeClr>
                 </a:solidFill>
-                <a:latin typeface="Verdana"/>
+                <a:latin typeface="Arial"/>
               </a:rPr>
               <a:t>Neudata | #ClearDataClearImpact</a:t>
             </a:r>
@@ -13657,8 +13633,8 @@
                 <a:solidFill>
                   <a:srgbClr val="0D7377"/>
                 </a:solidFill>
-                <a:latin typeface="Century Gothic"/>
-                <a:cs typeface="Century Gothic"/>
+                <a:latin typeface="Arial"/>
+                <a:cs typeface="Arial"/>
               </a:rPr>
               <a:t>Quick quiz: Spot the bias</a:t>
             </a:r>
@@ -13728,8 +13704,8 @@
                 <a:solidFill>
                   <a:srgbClr val="FFFFFF"/>
                 </a:solidFill>
-                <a:latin typeface="Century Gothic"/>
-                <a:cs typeface="Century Gothic"/>
+                <a:latin typeface="Arial"/>
+                <a:cs typeface="Arial"/>
               </a:rPr>
               <a:t>QUICK QUIZ   |   4 min</a:t>
             </a:r>
@@ -13766,25 +13742,19 @@
               <a:spcBef>
                 <a:spcPts val="450"/>
               </a:spcBef>
-              <a:buNone/>
-            </a:pPr>
-            <a:r>
-              <a:rPr lang="en-US" sz="1650" b="1" dirty="0">
-                <a:solidFill>
-                  <a:srgbClr val="6C3483"/>
-                </a:solidFill>
-                <a:latin typeface="Century Gothic"/>
-                <a:cs typeface="Century Gothic"/>
-              </a:rPr>
-              <a:t>1.  </a:t>
-            </a:r>
+              <a:buClr>
+                <a:srgbClr val="6C3483"/>
+              </a:buClr>
+              <a:buFont typeface="Arial"/>
+              <a:buChar char="•"/>
+            </a:pPr>
             <a:r>
               <a:rPr lang="en-US" sz="1650" dirty="0">
                 <a:solidFill>
                   <a:srgbClr val="000000"/>
                 </a:solidFill>
-                <a:latin typeface="Century Gothic"/>
-                <a:cs typeface="Century Gothic"/>
+                <a:latin typeface="Arial"/>
+                <a:cs typeface="Arial"/>
               </a:rPr>
               <a:t>Mothers of babies with a birth defect recall medicines in pregnancy better than other mothers</a:t>
             </a:r>
@@ -13797,25 +13767,19 @@
               <a:spcBef>
                 <a:spcPts val="450"/>
               </a:spcBef>
-              <a:buNone/>
-            </a:pPr>
-            <a:r>
-              <a:rPr lang="en-US" sz="1650" b="1" dirty="0">
-                <a:solidFill>
-                  <a:srgbClr val="6C3483"/>
-                </a:solidFill>
-                <a:latin typeface="Century Gothic"/>
-                <a:cs typeface="Century Gothic"/>
-              </a:rPr>
-              <a:t>2.  </a:t>
-            </a:r>
+              <a:buClr>
+                <a:srgbClr val="6C3483"/>
+              </a:buClr>
+              <a:buFont typeface="Arial"/>
+              <a:buChar char="•"/>
+            </a:pPr>
             <a:r>
               <a:rPr lang="en-US" sz="1650" dirty="0">
                 <a:solidFill>
                   <a:srgbClr val="000000"/>
                 </a:solidFill>
-                <a:latin typeface="Century Gothic"/>
-                <a:cs typeface="Century Gothic"/>
+                <a:latin typeface="Arial"/>
+                <a:cs typeface="Arial"/>
               </a:rPr>
               <a:t>A trial nurse who knows the group scores 'ready for discharge'</a:t>
             </a:r>
@@ -13828,25 +13792,19 @@
               <a:spcBef>
                 <a:spcPts val="450"/>
               </a:spcBef>
-              <a:buNone/>
-            </a:pPr>
-            <a:r>
-              <a:rPr lang="en-US" sz="1650" b="1" dirty="0">
-                <a:solidFill>
-                  <a:srgbClr val="6C3483"/>
-                </a:solidFill>
-                <a:latin typeface="Century Gothic"/>
-                <a:cs typeface="Century Gothic"/>
-              </a:rPr>
-              <a:t>3.  </a:t>
-            </a:r>
+              <a:buClr>
+                <a:srgbClr val="6C3483"/>
+              </a:buClr>
+              <a:buFont typeface="Arial"/>
+              <a:buChar char="•"/>
+            </a:pPr>
             <a:r>
               <a:rPr lang="en-US" sz="1650" dirty="0">
                 <a:solidFill>
                   <a:srgbClr val="000000"/>
                 </a:solidFill>
-                <a:latin typeface="Century Gothic"/>
-                <a:cs typeface="Century Gothic"/>
+                <a:latin typeface="Arial"/>
+                <a:cs typeface="Arial"/>
               </a:rPr>
               <a:t>A survey of ICU survivors' quality of life recruits only those who attend clinic</a:t>
             </a:r>
@@ -13859,25 +13817,19 @@
               <a:spcBef>
                 <a:spcPts val="450"/>
               </a:spcBef>
-              <a:buNone/>
-            </a:pPr>
-            <a:r>
-              <a:rPr lang="en-US" sz="1650" b="1" dirty="0">
-                <a:solidFill>
-                  <a:srgbClr val="6C3483"/>
-                </a:solidFill>
-                <a:latin typeface="Century Gothic"/>
-                <a:cs typeface="Century Gothic"/>
-              </a:rPr>
-              <a:t>4.  </a:t>
-            </a:r>
+              <a:buClr>
+                <a:srgbClr val="6C3483"/>
+              </a:buClr>
+              <a:buFont typeface="Arial"/>
+              <a:buChar char="•"/>
+            </a:pPr>
             <a:r>
               <a:rPr lang="en-US" sz="1650" dirty="0">
                 <a:solidFill>
                   <a:srgbClr val="000000"/>
                 </a:solidFill>
-                <a:latin typeface="Century Gothic"/>
-                <a:cs typeface="Century Gothic"/>
+                <a:latin typeface="Arial"/>
+                <a:cs typeface="Arial"/>
               </a:rPr>
               <a:t>Patients with higher lactate get more fluid and die more often</a:t>
             </a:r>
@@ -13921,8 +13873,8 @@
                 <a:solidFill>
                   <a:srgbClr val="6C3483"/>
                 </a:solidFill>
-                <a:latin typeface="Century Gothic"/>
-                <a:cs typeface="Century Gothic"/>
+                <a:latin typeface="Arial"/>
+                <a:cs typeface="Arial"/>
               </a:rPr>
               <a:t>Choose one</a:t>
             </a:r>
@@ -13943,8 +13895,8 @@
                 <a:solidFill>
                   <a:srgbClr val="000000"/>
                 </a:solidFill>
-                <a:latin typeface="Century Gothic"/>
-                <a:cs typeface="Century Gothic"/>
+                <a:latin typeface="Arial"/>
+                <a:cs typeface="Arial"/>
               </a:rPr>
               <a:t>Selection bias</a:t>
             </a:r>
@@ -13965,8 +13917,8 @@
                 <a:solidFill>
                   <a:srgbClr val="000000"/>
                 </a:solidFill>
-                <a:latin typeface="Century Gothic"/>
-                <a:cs typeface="Century Gothic"/>
+                <a:latin typeface="Arial"/>
+                <a:cs typeface="Arial"/>
               </a:rPr>
               <a:t>Recall bias</a:t>
             </a:r>
@@ -13987,8 +13939,8 @@
                 <a:solidFill>
                   <a:srgbClr val="000000"/>
                 </a:solidFill>
-                <a:latin typeface="Century Gothic"/>
-                <a:cs typeface="Century Gothic"/>
+                <a:latin typeface="Arial"/>
+                <a:cs typeface="Arial"/>
               </a:rPr>
               <a:t>Observer bias</a:t>
             </a:r>
@@ -14009,8 +13961,8 @@
                 <a:solidFill>
                   <a:srgbClr val="000000"/>
                 </a:solidFill>
-                <a:latin typeface="Century Gothic"/>
-                <a:cs typeface="Century Gothic"/>
+                <a:latin typeface="Arial"/>
+                <a:cs typeface="Arial"/>
               </a:rPr>
               <a:t>Confounding</a:t>
             </a:r>
@@ -14056,8 +14008,8 @@
                 <a:solidFill>
                   <a:srgbClr val="6C3483"/>
                 </a:solidFill>
-                <a:latin typeface="Century Gothic"/>
-                <a:cs typeface="Century Gothic"/>
+                <a:latin typeface="Arial"/>
+                <a:cs typeface="Arial"/>
               </a:rPr>
               <a:t>OUTPUT   </a:t>
             </a:r>
@@ -14066,8 +14018,8 @@
                 <a:solidFill>
                   <a:srgbClr val="000000"/>
                 </a:solidFill>
-                <a:latin typeface="Century Gothic"/>
-                <a:cs typeface="Century Gothic"/>
+                <a:latin typeface="Arial"/>
+                <a:cs typeface="Arial"/>
               </a:rPr>
               <a:t>One bias named for each scenario, with one fix</a:t>
             </a:r>
@@ -14104,7 +14056,7 @@
                     <a:lumMod val="50000"/>
                   </a:schemeClr>
                 </a:solidFill>
-                <a:latin typeface="Verdana"/>
+                <a:latin typeface="Arial"/>
               </a:rPr>
               <a:t>Neudata | #ClearDataClearImpact</a:t>
             </a:r>
@@ -14234,8 +14186,8 @@
                 <a:solidFill>
                   <a:srgbClr val="0D7377"/>
                 </a:solidFill>
-                <a:latin typeface="Century Gothic"/>
-                <a:cs typeface="Century Gothic"/>
+                <a:latin typeface="Arial"/>
+                <a:cs typeface="Arial"/>
               </a:rPr>
               <a:t>4.2  Measuring disease and association</a:t>
             </a:r>
@@ -14304,8 +14256,8 @@
                 <a:solidFill>
                   <a:srgbClr val="0D7377"/>
                 </a:solidFill>
-                <a:latin typeface="Century Gothic"/>
-                <a:cs typeface="Century Gothic"/>
+                <a:latin typeface="Arial"/>
+                <a:cs typeface="Arial"/>
               </a:rPr>
               <a:t>How common? How much more likely?</a:t>
             </a:r>
@@ -14322,8 +14274,8 @@
                 <a:solidFill>
                   <a:srgbClr val="595959"/>
                 </a:solidFill>
-                <a:latin typeface="Century Gothic"/>
-                <a:cs typeface="Century Gothic"/>
+                <a:latin typeface="Arial"/>
+                <a:cs typeface="Arial"/>
               </a:rPr>
               <a:t>Prevalence, incidence, risk, and the 2x2 table behind RR, OR, RD and NNT. (30 minutes)</a:t>
             </a:r>
@@ -14360,7 +14312,7 @@
                     <a:lumMod val="50000"/>
                   </a:schemeClr>
                 </a:solidFill>
-                <a:latin typeface="Verdana"/>
+                <a:latin typeface="Arial"/>
               </a:rPr>
               <a:t>Neudata | #ClearDataClearImpact</a:t>
             </a:r>
@@ -14490,8 +14442,8 @@
                 <a:solidFill>
                   <a:srgbClr val="0D7377"/>
                 </a:solidFill>
-                <a:latin typeface="Century Gothic"/>
-                <a:cs typeface="Century Gothic"/>
+                <a:latin typeface="Arial"/>
+                <a:cs typeface="Arial"/>
               </a:rPr>
               <a:t>Prevalence and incidence: the bathtub</a:t>
             </a:r>
@@ -14587,8 +14539,8 @@
                 <a:solidFill>
                   <a:srgbClr val="FFFFFF"/>
                 </a:solidFill>
-                <a:latin typeface="Century Gothic"/>
-                <a:cs typeface="Century Gothic"/>
+                <a:latin typeface="Arial"/>
+                <a:cs typeface="Arial"/>
               </a:rPr>
               <a:t>KEY MESSAGE   </a:t>
             </a:r>
@@ -14597,8 +14549,8 @@
                 <a:solidFill>
                   <a:srgbClr val="FFFFFF"/>
                 </a:solidFill>
-                <a:latin typeface="Century Gothic"/>
-                <a:cs typeface="Century Gothic"/>
+                <a:latin typeface="Arial"/>
+                <a:cs typeface="Arial"/>
               </a:rPr>
               <a:t>Prevalence = how many have it now; incidence = how many new cases over time.</a:t>
             </a:r>
@@ -14635,7 +14587,7 @@
                     <a:lumMod val="50000"/>
                   </a:schemeClr>
                 </a:solidFill>
-                <a:latin typeface="Verdana"/>
+                <a:latin typeface="Arial"/>
               </a:rPr>
               <a:t>Neudata | #ClearDataClearImpact</a:t>
             </a:r>
@@ -14765,8 +14717,8 @@
                 <a:solidFill>
                   <a:srgbClr val="0D7377"/>
                 </a:solidFill>
-                <a:latin typeface="Century Gothic"/>
-                <a:cs typeface="Century Gothic"/>
+                <a:latin typeface="Arial"/>
+                <a:cs typeface="Arial"/>
               </a:rPr>
               <a:t>Risk in two groups, as pictures</a:t>
             </a:r>
@@ -14856,8 +14808,8 @@
                 <a:solidFill>
                   <a:srgbClr val="595959"/>
                 </a:solidFill>
-                <a:latin typeface="Century Gothic"/>
-                <a:cs typeface="Century Gothic"/>
+                <a:latin typeface="Arial"/>
+                <a:cs typeface="Arial"/>
               </a:rPr>
               <a:t>Hypothetical trial for teaching: 100 patients per group</a:t>
             </a:r>
@@ -14901,8 +14853,8 @@
                 <a:solidFill>
                   <a:srgbClr val="FFFFFF"/>
                 </a:solidFill>
-                <a:latin typeface="Century Gothic"/>
-                <a:cs typeface="Century Gothic"/>
+                <a:latin typeface="Arial"/>
+                <a:cs typeface="Arial"/>
               </a:rPr>
               <a:t>KEY MESSAGE   </a:t>
             </a:r>
@@ -14911,8 +14863,8 @@
                 <a:solidFill>
                   <a:srgbClr val="FFFFFF"/>
                 </a:solidFill>
-                <a:latin typeface="Century Gothic"/>
-                <a:cs typeface="Century Gothic"/>
+                <a:latin typeface="Arial"/>
+                <a:cs typeface="Arial"/>
               </a:rPr>
               <a:t>Risk = people with the outcome / people in the group.</a:t>
             </a:r>
@@ -14949,7 +14901,7 @@
                     <a:lumMod val="50000"/>
                   </a:schemeClr>
                 </a:solidFill>
-                <a:latin typeface="Verdana"/>
+                <a:latin typeface="Arial"/>
               </a:rPr>
               <a:t>Neudata | #ClearDataClearImpact</a:t>
             </a:r>
@@ -15079,8 +15031,8 @@
                 <a:solidFill>
                   <a:srgbClr val="0D7377"/>
                 </a:solidFill>
-                <a:latin typeface="Century Gothic"/>
-                <a:cs typeface="Century Gothic"/>
+                <a:latin typeface="Arial"/>
+                <a:cs typeface="Arial"/>
               </a:rPr>
               <a:t>The 2x2 table: one tool for every measure</a:t>
             </a:r>
@@ -15176,8 +15128,8 @@
                 <a:solidFill>
                   <a:srgbClr val="FFFFFF"/>
                 </a:solidFill>
-                <a:latin typeface="Century Gothic"/>
-                <a:cs typeface="Century Gothic"/>
+                <a:latin typeface="Arial"/>
+                <a:cs typeface="Arial"/>
               </a:rPr>
               <a:t>KEY MESSAGE   </a:t>
             </a:r>
@@ -15186,8 +15138,8 @@
                 <a:solidFill>
                   <a:srgbClr val="FFFFFF"/>
                 </a:solidFill>
-                <a:latin typeface="Century Gothic"/>
-                <a:cs typeface="Century Gothic"/>
+                <a:latin typeface="Arial"/>
+                <a:cs typeface="Arial"/>
               </a:rPr>
               <a:t>Exposure in rows, outcome in columns: a, b, c, d.</a:t>
             </a:r>
@@ -15224,7 +15176,7 @@
                     <a:lumMod val="50000"/>
                   </a:schemeClr>
                 </a:solidFill>
-                <a:latin typeface="Verdana"/>
+                <a:latin typeface="Arial"/>
               </a:rPr>
               <a:t>Neudata | #ClearDataClearImpact</a:t>
             </a:r>
@@ -15354,8 +15306,8 @@
                 <a:solidFill>
                   <a:srgbClr val="0D7377"/>
                 </a:solidFill>
-                <a:latin typeface="Century Gothic"/>
-                <a:cs typeface="Century Gothic"/>
+                <a:latin typeface="Arial"/>
+                <a:cs typeface="Arial"/>
               </a:rPr>
               <a:t>Four measures from one 2x2 table</a:t>
             </a:r>
@@ -15421,8 +15373,8 @@
                 <a:solidFill>
                   <a:srgbClr val="595959"/>
                 </a:solidFill>
-                <a:latin typeface="Century Gothic"/>
-                <a:cs typeface="Century Gothic"/>
+                <a:latin typeface="Arial"/>
+                <a:cs typeface="Arial"/>
               </a:rPr>
               <a:t>Worked example: restrictive 20/100 died, usual care 30/100 died</a:t>
             </a:r>
@@ -15464,8 +15416,8 @@
                 <a:solidFill>
                   <a:srgbClr val="FFFFFF"/>
                 </a:solidFill>
-                <a:latin typeface="Century Gothic"/>
-                <a:cs typeface="Century Gothic"/>
+                <a:latin typeface="Arial"/>
+                <a:cs typeface="Arial"/>
               </a:rPr>
               <a:t>Risk ratio (RR)</a:t>
             </a:r>
@@ -15513,8 +15465,8 @@
                 <a:solidFill>
                   <a:srgbClr val="000000"/>
                 </a:solidFill>
-                <a:latin typeface="Century Gothic"/>
-                <a:cs typeface="Century Gothic"/>
+                <a:latin typeface="Arial"/>
+                <a:cs typeface="Arial"/>
               </a:rPr>
               <a:t>[a/(a+b)] / [c/(c+d)]</a:t>
             </a:r>
@@ -15534,8 +15486,8 @@
                 <a:solidFill>
                   <a:srgbClr val="000000"/>
                 </a:solidFill>
-                <a:latin typeface="Century Gothic"/>
-                <a:cs typeface="Century Gothic"/>
+                <a:latin typeface="Arial"/>
+                <a:cs typeface="Arial"/>
               </a:rPr>
               <a:t>20% / 30% = 0.67</a:t>
             </a:r>
@@ -15555,8 +15507,8 @@
                 <a:solidFill>
                   <a:srgbClr val="000000"/>
                 </a:solidFill>
-                <a:latin typeface="Century Gothic"/>
-                <a:cs typeface="Century Gothic"/>
+                <a:latin typeface="Arial"/>
+                <a:cs typeface="Arial"/>
               </a:rPr>
               <a:t>risk is one third lower</a:t>
             </a:r>
@@ -15598,8 +15550,8 @@
                 <a:solidFill>
                   <a:srgbClr val="FFFFFF"/>
                 </a:solidFill>
-                <a:latin typeface="Century Gothic"/>
-                <a:cs typeface="Century Gothic"/>
+                <a:latin typeface="Arial"/>
+                <a:cs typeface="Arial"/>
               </a:rPr>
               <a:t>Risk difference</a:t>
             </a:r>
@@ -15647,8 +15599,8 @@
                 <a:solidFill>
                   <a:srgbClr val="000000"/>
                 </a:solidFill>
-                <a:latin typeface="Century Gothic"/>
-                <a:cs typeface="Century Gothic"/>
+                <a:latin typeface="Arial"/>
+                <a:cs typeface="Arial"/>
               </a:rPr>
               <a:t>a/(a+b) - c/(c+d)</a:t>
             </a:r>
@@ -15668,8 +15620,8 @@
                 <a:solidFill>
                   <a:srgbClr val="000000"/>
                 </a:solidFill>
-                <a:latin typeface="Century Gothic"/>
-                <a:cs typeface="Century Gothic"/>
+                <a:latin typeface="Arial"/>
+                <a:cs typeface="Arial"/>
               </a:rPr>
               <a:t>20% - 30% = -10 points</a:t>
             </a:r>
@@ -15689,8 +15641,8 @@
                 <a:solidFill>
                   <a:srgbClr val="000000"/>
                 </a:solidFill>
-                <a:latin typeface="Century Gothic"/>
-                <a:cs typeface="Century Gothic"/>
+                <a:latin typeface="Arial"/>
+                <a:cs typeface="Arial"/>
               </a:rPr>
               <a:t>10 fewer deaths per 100</a:t>
             </a:r>
@@ -15732,8 +15684,8 @@
                 <a:solidFill>
                   <a:srgbClr val="FFFFFF"/>
                 </a:solidFill>
-                <a:latin typeface="Century Gothic"/>
-                <a:cs typeface="Century Gothic"/>
+                <a:latin typeface="Arial"/>
+                <a:cs typeface="Arial"/>
               </a:rPr>
               <a:t>NNT</a:t>
             </a:r>
@@ -15781,8 +15733,8 @@
                 <a:solidFill>
                   <a:srgbClr val="000000"/>
                 </a:solidFill>
-                <a:latin typeface="Century Gothic"/>
-                <a:cs typeface="Century Gothic"/>
+                <a:latin typeface="Arial"/>
+                <a:cs typeface="Arial"/>
               </a:rPr>
               <a:t>1 / |risk difference|</a:t>
             </a:r>
@@ -15802,8 +15754,8 @@
                 <a:solidFill>
                   <a:srgbClr val="000000"/>
                 </a:solidFill>
-                <a:latin typeface="Century Gothic"/>
-                <a:cs typeface="Century Gothic"/>
+                <a:latin typeface="Arial"/>
+                <a:cs typeface="Arial"/>
               </a:rPr>
               <a:t>1 / 0.10 = 10</a:t>
             </a:r>
@@ -15823,8 +15775,8 @@
                 <a:solidFill>
                   <a:srgbClr val="000000"/>
                 </a:solidFill>
-                <a:latin typeface="Century Gothic"/>
-                <a:cs typeface="Century Gothic"/>
+                <a:latin typeface="Arial"/>
+                <a:cs typeface="Arial"/>
               </a:rPr>
               <a:t>treat 10 to prevent 1 death</a:t>
             </a:r>
@@ -15866,8 +15818,8 @@
                 <a:solidFill>
                   <a:srgbClr val="FFFFFF"/>
                 </a:solidFill>
-                <a:latin typeface="Century Gothic"/>
-                <a:cs typeface="Century Gothic"/>
+                <a:latin typeface="Arial"/>
+                <a:cs typeface="Arial"/>
               </a:rPr>
               <a:t>Odds ratio (OR)</a:t>
             </a:r>
@@ -15915,8 +15867,8 @@
                 <a:solidFill>
                   <a:srgbClr val="000000"/>
                 </a:solidFill>
-                <a:latin typeface="Century Gothic"/>
-                <a:cs typeface="Century Gothic"/>
+                <a:latin typeface="Arial"/>
+                <a:cs typeface="Arial"/>
               </a:rPr>
               <a:t>(a x d) / (b x c)</a:t>
             </a:r>
@@ -15936,8 +15888,8 @@
                 <a:solidFill>
                   <a:srgbClr val="000000"/>
                 </a:solidFill>
-                <a:latin typeface="Century Gothic"/>
-                <a:cs typeface="Century Gothic"/>
+                <a:latin typeface="Arial"/>
+                <a:cs typeface="Arial"/>
               </a:rPr>
               <a:t>(20x70)/(80x30) = 0.58</a:t>
             </a:r>
@@ -15957,8 +15909,8 @@
                 <a:solidFill>
                   <a:srgbClr val="000000"/>
                 </a:solidFill>
-                <a:latin typeface="Century Gothic"/>
-                <a:cs typeface="Century Gothic"/>
+                <a:latin typeface="Arial"/>
+                <a:cs typeface="Arial"/>
               </a:rPr>
               <a:t>odds, not risk</a:t>
             </a:r>
@@ -16002,8 +15954,8 @@
                 <a:solidFill>
                   <a:srgbClr val="FFFFFF"/>
                 </a:solidFill>
-                <a:latin typeface="Century Gothic"/>
-                <a:cs typeface="Century Gothic"/>
+                <a:latin typeface="Arial"/>
+                <a:cs typeface="Arial"/>
               </a:rPr>
               <a:t>KEY MESSAGE   </a:t>
             </a:r>
@@ -16012,8 +15964,8 @@
                 <a:solidFill>
                   <a:srgbClr val="FFFFFF"/>
                 </a:solidFill>
-                <a:latin typeface="Century Gothic"/>
-                <a:cs typeface="Century Gothic"/>
+                <a:latin typeface="Arial"/>
+                <a:cs typeface="Arial"/>
               </a:rPr>
               <a:t>Ratios tell you how strong; differences tell you how many patients.</a:t>
             </a:r>
@@ -16050,7 +16002,7 @@
                     <a:lumMod val="50000"/>
                   </a:schemeClr>
                 </a:solidFill>
-                <a:latin typeface="Verdana"/>
+                <a:latin typeface="Arial"/>
               </a:rPr>
               <a:t>Neudata | #ClearDataClearImpact</a:t>
             </a:r>
@@ -16180,8 +16132,8 @@
                 <a:solidFill>
                   <a:srgbClr val="0D7377"/>
                 </a:solidFill>
-                <a:latin typeface="Century Gothic"/>
-                <a:cs typeface="Century Gothic"/>
+                <a:latin typeface="Arial"/>
+                <a:cs typeface="Arial"/>
               </a:rPr>
               <a:t>NNT in pictures</a:t>
             </a:r>
@@ -16277,8 +16229,8 @@
                 <a:solidFill>
                   <a:srgbClr val="FFFFFF"/>
                 </a:solidFill>
-                <a:latin typeface="Century Gothic"/>
-                <a:cs typeface="Century Gothic"/>
+                <a:latin typeface="Arial"/>
+                <a:cs typeface="Arial"/>
               </a:rPr>
               <a:t>KEY MESSAGE   </a:t>
             </a:r>
@@ -16287,8 +16239,8 @@
                 <a:solidFill>
                   <a:srgbClr val="FFFFFF"/>
                 </a:solidFill>
-                <a:latin typeface="Century Gothic"/>
-                <a:cs typeface="Century Gothic"/>
+                <a:latin typeface="Arial"/>
+                <a:cs typeface="Arial"/>
               </a:rPr>
               <a:t>NNT = 1 / risk difference: how many to treat for one to benefit.</a:t>
             </a:r>
@@ -16325,7 +16277,7 @@
                     <a:lumMod val="50000"/>
                   </a:schemeClr>
                 </a:solidFill>
-                <a:latin typeface="Verdana"/>
+                <a:latin typeface="Arial"/>
               </a:rPr>
               <a:t>Neudata | #ClearDataClearImpact</a:t>
             </a:r>
@@ -16455,8 +16407,8 @@
                 <a:solidFill>
                   <a:srgbClr val="0D7377"/>
                 </a:solidFill>
-                <a:latin typeface="Century Gothic"/>
-                <a:cs typeface="Century Gothic"/>
+                <a:latin typeface="Arial"/>
+                <a:cs typeface="Arial"/>
               </a:rPr>
               <a:t>When is the odds ratio close to the risk ratio?</a:t>
             </a:r>
@@ -16552,8 +16504,8 @@
                 <a:solidFill>
                   <a:srgbClr val="FFFFFF"/>
                 </a:solidFill>
-                <a:latin typeface="Century Gothic"/>
-                <a:cs typeface="Century Gothic"/>
+                <a:latin typeface="Arial"/>
+                <a:cs typeface="Arial"/>
               </a:rPr>
               <a:t>KEY MESSAGE   </a:t>
             </a:r>
@@ -16562,8 +16514,8 @@
                 <a:solidFill>
                   <a:srgbClr val="FFFFFF"/>
                 </a:solidFill>
-                <a:latin typeface="Century Gothic"/>
-                <a:cs typeface="Century Gothic"/>
+                <a:latin typeface="Arial"/>
+                <a:cs typeface="Arial"/>
               </a:rPr>
               <a:t>OR is close to RR only when the outcome is rare (under about 10%).</a:t>
             </a:r>
@@ -16600,7 +16552,7 @@
                     <a:lumMod val="50000"/>
                   </a:schemeClr>
                 </a:solidFill>
-                <a:latin typeface="Verdana"/>
+                <a:latin typeface="Arial"/>
               </a:rPr>
               <a:t>Neudata | #ClearDataClearImpact</a:t>
             </a:r>
@@ -16730,8 +16682,8 @@
                 <a:solidFill>
                   <a:srgbClr val="0D7377"/>
                 </a:solidFill>
-                <a:latin typeface="Century Gothic"/>
-                <a:cs typeface="Century Gothic"/>
+                <a:latin typeface="Arial"/>
+                <a:cs typeface="Arial"/>
               </a:rPr>
               <a:t>Check your understanding: one more 2x2</a:t>
             </a:r>
@@ -16801,8 +16753,8 @@
                 <a:solidFill>
                   <a:srgbClr val="FFFFFF"/>
                 </a:solidFill>
-                <a:latin typeface="Century Gothic"/>
-                <a:cs typeface="Century Gothic"/>
+                <a:latin typeface="Arial"/>
+                <a:cs typeface="Arial"/>
               </a:rPr>
               <a:t>QUICK QUIZ   |   3 min</a:t>
             </a:r>
@@ -16839,25 +16791,19 @@
               <a:spcBef>
                 <a:spcPts val="450"/>
               </a:spcBef>
-              <a:buNone/>
-            </a:pPr>
-            <a:r>
-              <a:rPr lang="en-US" sz="1650" b="1" dirty="0">
-                <a:solidFill>
-                  <a:srgbClr val="6C3483"/>
-                </a:solidFill>
-                <a:latin typeface="Century Gothic"/>
-                <a:cs typeface="Century Gothic"/>
-              </a:rPr>
-              <a:t>1.  </a:t>
-            </a:r>
+              <a:buClr>
+                <a:srgbClr val="6C3483"/>
+              </a:buClr>
+              <a:buFont typeface="Arial"/>
+              <a:buChar char="•"/>
+            </a:pPr>
             <a:r>
               <a:rPr lang="en-US" sz="1650" dirty="0">
                 <a:solidFill>
                   <a:srgbClr val="000000"/>
                 </a:solidFill>
-                <a:latin typeface="Century Gothic"/>
-                <a:cs typeface="Century Gothic"/>
+                <a:latin typeface="Arial"/>
+                <a:cs typeface="Arial"/>
               </a:rPr>
               <a:t>200 patients per group: 20 die with the new treatment, 30 with usual care</a:t>
             </a:r>
@@ -16870,25 +16816,19 @@
               <a:spcBef>
                 <a:spcPts val="450"/>
               </a:spcBef>
-              <a:buNone/>
-            </a:pPr>
-            <a:r>
-              <a:rPr lang="en-US" sz="1650" b="1" dirty="0">
-                <a:solidFill>
-                  <a:srgbClr val="6C3483"/>
-                </a:solidFill>
-                <a:latin typeface="Century Gothic"/>
-                <a:cs typeface="Century Gothic"/>
-              </a:rPr>
-              <a:t>2.  </a:t>
-            </a:r>
+              <a:buClr>
+                <a:srgbClr val="6C3483"/>
+              </a:buClr>
+              <a:buFont typeface="Arial"/>
+              <a:buChar char="•"/>
+            </a:pPr>
             <a:r>
               <a:rPr lang="en-US" sz="1650" dirty="0">
                 <a:solidFill>
                   <a:srgbClr val="000000"/>
                 </a:solidFill>
-                <a:latin typeface="Century Gothic"/>
-                <a:cs typeface="Century Gothic"/>
+                <a:latin typeface="Arial"/>
+                <a:cs typeface="Arial"/>
               </a:rPr>
               <a:t>Risk in each group?</a:t>
             </a:r>
@@ -16901,25 +16841,19 @@
               <a:spcBef>
                 <a:spcPts val="450"/>
               </a:spcBef>
-              <a:buNone/>
-            </a:pPr>
-            <a:r>
-              <a:rPr lang="en-US" sz="1650" b="1" dirty="0">
-                <a:solidFill>
-                  <a:srgbClr val="6C3483"/>
-                </a:solidFill>
-                <a:latin typeface="Century Gothic"/>
-                <a:cs typeface="Century Gothic"/>
-              </a:rPr>
-              <a:t>3.  </a:t>
-            </a:r>
+              <a:buClr>
+                <a:srgbClr val="6C3483"/>
+              </a:buClr>
+              <a:buFont typeface="Arial"/>
+              <a:buChar char="•"/>
+            </a:pPr>
             <a:r>
               <a:rPr lang="en-US" sz="1650" dirty="0">
                 <a:solidFill>
                   <a:srgbClr val="000000"/>
                 </a:solidFill>
-                <a:latin typeface="Century Gothic"/>
-                <a:cs typeface="Century Gothic"/>
+                <a:latin typeface="Arial"/>
+                <a:cs typeface="Arial"/>
               </a:rPr>
               <a:t>RR? Risk difference? NNT?</a:t>
             </a:r>
@@ -16932,25 +16866,19 @@
               <a:spcBef>
                 <a:spcPts val="450"/>
               </a:spcBef>
-              <a:buNone/>
-            </a:pPr>
-            <a:r>
-              <a:rPr lang="en-US" sz="1650" b="1" dirty="0">
-                <a:solidFill>
-                  <a:srgbClr val="6C3483"/>
-                </a:solidFill>
-                <a:latin typeface="Century Gothic"/>
-                <a:cs typeface="Century Gothic"/>
-              </a:rPr>
-              <a:t>4.  </a:t>
-            </a:r>
+              <a:buClr>
+                <a:srgbClr val="6C3483"/>
+              </a:buClr>
+              <a:buFont typeface="Arial"/>
+              <a:buChar char="•"/>
+            </a:pPr>
             <a:r>
               <a:rPr lang="en-US" sz="1650" dirty="0">
                 <a:solidFill>
                   <a:srgbClr val="000000"/>
                 </a:solidFill>
-                <a:latin typeface="Century Gothic"/>
-                <a:cs typeface="Century Gothic"/>
+                <a:latin typeface="Arial"/>
+                <a:cs typeface="Arial"/>
               </a:rPr>
               <a:t>Bonus: OR = (a x d) / (b x c)?</a:t>
             </a:r>
@@ -16994,8 +16922,8 @@
                 <a:solidFill>
                   <a:srgbClr val="6C3483"/>
                 </a:solidFill>
-                <a:latin typeface="Century Gothic"/>
-                <a:cs typeface="Century Gothic"/>
+                <a:latin typeface="Arial"/>
+                <a:cs typeface="Arial"/>
               </a:rPr>
               <a:t>Table</a:t>
             </a:r>
@@ -17016,8 +16944,8 @@
                 <a:solidFill>
                   <a:srgbClr val="000000"/>
                 </a:solidFill>
-                <a:latin typeface="Century Gothic"/>
-                <a:cs typeface="Century Gothic"/>
+                <a:latin typeface="Arial"/>
+                <a:cs typeface="Arial"/>
               </a:rPr>
               <a:t>a = 20, b = 180</a:t>
             </a:r>
@@ -17038,8 +16966,8 @@
                 <a:solidFill>
                   <a:srgbClr val="000000"/>
                 </a:solidFill>
-                <a:latin typeface="Century Gothic"/>
-                <a:cs typeface="Century Gothic"/>
+                <a:latin typeface="Arial"/>
+                <a:cs typeface="Arial"/>
               </a:rPr>
               <a:t>c = 30, d = 170</a:t>
             </a:r>
@@ -17085,8 +17013,8 @@
                 <a:solidFill>
                   <a:srgbClr val="6C3483"/>
                 </a:solidFill>
-                <a:latin typeface="Century Gothic"/>
-                <a:cs typeface="Century Gothic"/>
+                <a:latin typeface="Arial"/>
+                <a:cs typeface="Arial"/>
               </a:rPr>
               <a:t>OUTPUT   </a:t>
             </a:r>
@@ -17095,8 +17023,8 @@
                 <a:solidFill>
                   <a:srgbClr val="000000"/>
                 </a:solidFill>
-                <a:latin typeface="Century Gothic"/>
-                <a:cs typeface="Century Gothic"/>
+                <a:latin typeface="Arial"/>
+                <a:cs typeface="Arial"/>
               </a:rPr>
               <a:t>Risks, RR, RD and NNT (answers in the notes)</a:t>
             </a:r>
@@ -17133,7 +17061,7 @@
                     <a:lumMod val="50000"/>
                   </a:schemeClr>
                 </a:solidFill>
-                <a:latin typeface="Verdana"/>
+                <a:latin typeface="Arial"/>
               </a:rPr>
               <a:t>Neudata | #ClearDataClearImpact</a:t>
             </a:r>
@@ -17263,8 +17191,8 @@
                 <a:solidFill>
                   <a:srgbClr val="0D7377"/>
                 </a:solidFill>
-                <a:latin typeface="Century Gothic"/>
-                <a:cs typeface="Century Gothic"/>
+                <a:latin typeface="Arial"/>
+                <a:cs typeface="Arial"/>
               </a:rPr>
               <a:t>Live demo: the 2x2 calculator</a:t>
             </a:r>
@@ -17334,8 +17262,8 @@
                 <a:solidFill>
                   <a:srgbClr val="FFFFFF"/>
                 </a:solidFill>
-                <a:latin typeface="Century Gothic"/>
-                <a:cs typeface="Century Gothic"/>
+                <a:latin typeface="Arial"/>
+                <a:cs typeface="Arial"/>
               </a:rPr>
               <a:t>LIVE DEMO   |   8 min</a:t>
             </a:r>
@@ -17372,25 +17300,19 @@
               <a:spcBef>
                 <a:spcPts val="450"/>
               </a:spcBef>
-              <a:buNone/>
-            </a:pPr>
-            <a:r>
-              <a:rPr lang="en-US" sz="1650" b="1" dirty="0">
-                <a:solidFill>
-                  <a:srgbClr val="B5651D"/>
-                </a:solidFill>
-                <a:latin typeface="Century Gothic"/>
-                <a:cs typeface="Century Gothic"/>
-              </a:rPr>
-              <a:t>1.  </a:t>
-            </a:r>
+              <a:buClr>
+                <a:srgbClr val="B5651D"/>
+              </a:buClr>
+              <a:buFont typeface="Arial"/>
+              <a:buChar char="•"/>
+            </a:pPr>
             <a:r>
               <a:rPr lang="en-US" sz="1650" dirty="0">
                 <a:solidFill>
                   <a:srgbClr val="000000"/>
                 </a:solidFill>
-                <a:latin typeface="Century Gothic"/>
-                <a:cs typeface="Century Gothic"/>
+                <a:latin typeface="Arial"/>
+                <a:cs typeface="Arial"/>
               </a:rPr>
               <a:t>Open 2x2_calculator.xlsx, sheet Association</a:t>
             </a:r>
@@ -17403,25 +17325,19 @@
               <a:spcBef>
                 <a:spcPts val="450"/>
               </a:spcBef>
-              <a:buNone/>
-            </a:pPr>
-            <a:r>
-              <a:rPr lang="en-US" sz="1650" b="1" dirty="0">
-                <a:solidFill>
-                  <a:srgbClr val="B5651D"/>
-                </a:solidFill>
-                <a:latin typeface="Century Gothic"/>
-                <a:cs typeface="Century Gothic"/>
-              </a:rPr>
-              <a:t>2.  </a:t>
-            </a:r>
+              <a:buClr>
+                <a:srgbClr val="B5651D"/>
+              </a:buClr>
+              <a:buFont typeface="Arial"/>
+              <a:buChar char="•"/>
+            </a:pPr>
             <a:r>
               <a:rPr lang="en-US" sz="1650" dirty="0">
                 <a:solidFill>
                   <a:srgbClr val="000000"/>
                 </a:solidFill>
-                <a:latin typeface="Century Gothic"/>
-                <a:cs typeface="Century Gothic"/>
+                <a:latin typeface="Arial"/>
+                <a:cs typeface="Arial"/>
               </a:rPr>
               <a:t>Enter a, b, c, d from the worked example: 20, 80, 30, 70</a:t>
             </a:r>
@@ -17434,25 +17350,19 @@
               <a:spcBef>
                 <a:spcPts val="450"/>
               </a:spcBef>
-              <a:buNone/>
-            </a:pPr>
-            <a:r>
-              <a:rPr lang="en-US" sz="1650" b="1" dirty="0">
-                <a:solidFill>
-                  <a:srgbClr val="B5651D"/>
-                </a:solidFill>
-                <a:latin typeface="Century Gothic"/>
-                <a:cs typeface="Century Gothic"/>
-              </a:rPr>
-              <a:t>3.  </a:t>
-            </a:r>
+              <a:buClr>
+                <a:srgbClr val="B5651D"/>
+              </a:buClr>
+              <a:buFont typeface="Arial"/>
+              <a:buChar char="•"/>
+            </a:pPr>
             <a:r>
               <a:rPr lang="en-US" sz="1650" dirty="0">
                 <a:solidFill>
                   <a:srgbClr val="000000"/>
                 </a:solidFill>
-                <a:latin typeface="Century Gothic"/>
-                <a:cs typeface="Century Gothic"/>
+                <a:latin typeface="Arial"/>
+                <a:cs typeface="Arial"/>
               </a:rPr>
               <a:t>Read risks, RR, RD, NNT and OR, and the plain-language lines</a:t>
             </a:r>
@@ -17465,25 +17375,19 @@
               <a:spcBef>
                 <a:spcPts val="450"/>
               </a:spcBef>
-              <a:buNone/>
-            </a:pPr>
-            <a:r>
-              <a:rPr lang="en-US" sz="1650" b="1" dirty="0">
-                <a:solidFill>
-                  <a:srgbClr val="B5651D"/>
-                </a:solidFill>
-                <a:latin typeface="Century Gothic"/>
-                <a:cs typeface="Century Gothic"/>
-              </a:rPr>
-              <a:t>4.  </a:t>
-            </a:r>
+              <a:buClr>
+                <a:srgbClr val="B5651D"/>
+              </a:buClr>
+              <a:buFont typeface="Arial"/>
+              <a:buChar char="•"/>
+            </a:pPr>
             <a:r>
               <a:rPr lang="en-US" sz="1650" dirty="0">
                 <a:solidFill>
                   <a:srgbClr val="000000"/>
                 </a:solidFill>
-                <a:latin typeface="Century Gothic"/>
-                <a:cs typeface="Century Gothic"/>
+                <a:latin typeface="Arial"/>
+                <a:cs typeface="Arial"/>
               </a:rPr>
               <a:t>Change the deaths to 2 and 3 of 100: watch OR approach RR</a:t>
             </a:r>
@@ -17496,25 +17400,19 @@
               <a:spcBef>
                 <a:spcPts val="450"/>
               </a:spcBef>
-              <a:buNone/>
-            </a:pPr>
-            <a:r>
-              <a:rPr lang="en-US" sz="1650" b="1" dirty="0">
-                <a:solidFill>
-                  <a:srgbClr val="B5651D"/>
-                </a:solidFill>
-                <a:latin typeface="Century Gothic"/>
-                <a:cs typeface="Century Gothic"/>
-              </a:rPr>
-              <a:t>5.  </a:t>
-            </a:r>
+              <a:buClr>
+                <a:srgbClr val="B5651D"/>
+              </a:buClr>
+              <a:buFont typeface="Arial"/>
+              <a:buChar char="•"/>
+            </a:pPr>
             <a:r>
               <a:rPr lang="en-US" sz="1650" dirty="0">
                 <a:solidFill>
                   <a:srgbClr val="000000"/>
                 </a:solidFill>
-                <a:latin typeface="Century Gothic"/>
-                <a:cs typeface="Century Gothic"/>
+                <a:latin typeface="Arial"/>
+                <a:cs typeface="Arial"/>
               </a:rPr>
               <a:t>Point at the red line: case-control data give an OR only</a:t>
             </a:r>
@@ -17558,8 +17456,8 @@
                 <a:solidFill>
                   <a:srgbClr val="B5651D"/>
                 </a:solidFill>
-                <a:latin typeface="Century Gothic"/>
-                <a:cs typeface="Century Gothic"/>
+                <a:latin typeface="Arial"/>
+                <a:cs typeface="Arial"/>
               </a:rPr>
               <a:t>Watch for</a:t>
             </a:r>
@@ -17580,8 +17478,8 @@
                 <a:solidFill>
                   <a:srgbClr val="000000"/>
                 </a:solidFill>
-                <a:latin typeface="Century Gothic"/>
-                <a:cs typeface="Century Gothic"/>
+                <a:latin typeface="Arial"/>
+                <a:cs typeface="Arial"/>
               </a:rPr>
               <a:t>Same layout as the slide</a:t>
             </a:r>
@@ -17602,8 +17500,8 @@
                 <a:solidFill>
                   <a:srgbClr val="000000"/>
                 </a:solidFill>
-                <a:latin typeface="Century Gothic"/>
-                <a:cs typeface="Century Gothic"/>
+                <a:latin typeface="Arial"/>
+                <a:cs typeface="Arial"/>
               </a:rPr>
               <a:t>Relative vs absolute effect</a:t>
             </a:r>
@@ -17624,8 +17522,8 @@
                 <a:solidFill>
                   <a:srgbClr val="000000"/>
                 </a:solidFill>
-                <a:latin typeface="Century Gothic"/>
-                <a:cs typeface="Century Gothic"/>
+                <a:latin typeface="Arial"/>
+                <a:cs typeface="Arial"/>
               </a:rPr>
               <a:t>Rare outcome: OR close to RR</a:t>
             </a:r>
@@ -17671,8 +17569,8 @@
                 <a:solidFill>
                   <a:srgbClr val="B5651D"/>
                 </a:solidFill>
-                <a:latin typeface="Century Gothic"/>
-                <a:cs typeface="Century Gothic"/>
+                <a:latin typeface="Arial"/>
+                <a:cs typeface="Arial"/>
               </a:rPr>
               <a:t>OUTPUT   </a:t>
             </a:r>
@@ -17681,8 +17579,8 @@
                 <a:solidFill>
                   <a:srgbClr val="000000"/>
                 </a:solidFill>
-                <a:latin typeface="Century Gothic"/>
-                <a:cs typeface="Century Gothic"/>
+                <a:latin typeface="Arial"/>
+                <a:cs typeface="Arial"/>
               </a:rPr>
               <a:t>Everyone has seen every measure computed from one table</a:t>
             </a:r>
@@ -17719,7 +17617,7 @@
                     <a:lumMod val="50000"/>
                   </a:schemeClr>
                 </a:solidFill>
-                <a:latin typeface="Verdana"/>
+                <a:latin typeface="Arial"/>
               </a:rPr>
               <a:t>Neudata | #ClearDataClearImpact</a:t>
             </a:r>
@@ -17849,8 +17747,8 @@
                 <a:solidFill>
                   <a:srgbClr val="0D7377"/>
                 </a:solidFill>
-                <a:latin typeface="Century Gothic"/>
-                <a:cs typeface="Century Gothic"/>
+                <a:latin typeface="Arial"/>
+                <a:cs typeface="Arial"/>
               </a:rPr>
               <a:t>Key words of the day</a:t>
             </a:r>
@@ -17916,8 +17814,8 @@
                 <a:solidFill>
                   <a:srgbClr val="595959"/>
                 </a:solidFill>
-                <a:latin typeface="Century Gothic"/>
-                <a:cs typeface="Century Gothic"/>
+                <a:latin typeface="Arial"/>
+                <a:cs typeface="Arial"/>
               </a:rPr>
               <a:t>Today's vocabulary. Each definition comes with a picture</a:t>
             </a:r>
@@ -17959,8 +17857,8 @@
                 <a:solidFill>
                   <a:srgbClr val="FFFFFF"/>
                 </a:solidFill>
-                <a:latin typeface="Century Gothic"/>
-                <a:cs typeface="Century Gothic"/>
+                <a:latin typeface="Arial"/>
+                <a:cs typeface="Arial"/>
               </a:rPr>
               <a:t>Can we trust it?</a:t>
             </a:r>
@@ -18008,8 +17906,8 @@
                 <a:solidFill>
                   <a:srgbClr val="000000"/>
                 </a:solidFill>
-                <a:latin typeface="Century Gothic"/>
-                <a:cs typeface="Century Gothic"/>
+                <a:latin typeface="Arial"/>
+                <a:cs typeface="Arial"/>
               </a:rPr>
               <a:t>Bias, confounding</a:t>
             </a:r>
@@ -18029,8 +17927,8 @@
                 <a:solidFill>
                   <a:srgbClr val="000000"/>
                 </a:solidFill>
-                <a:latin typeface="Century Gothic"/>
-                <a:cs typeface="Century Gothic"/>
+                <a:latin typeface="Arial"/>
+                <a:cs typeface="Arial"/>
               </a:rPr>
               <a:t>Effect modification</a:t>
             </a:r>
@@ -18050,8 +17948,8 @@
                 <a:solidFill>
                   <a:srgbClr val="000000"/>
                 </a:solidFill>
-                <a:latin typeface="Century Gothic"/>
-                <a:cs typeface="Century Gothic"/>
+                <a:latin typeface="Arial"/>
+                <a:cs typeface="Arial"/>
               </a:rPr>
               <a:t>Reverse causation</a:t>
             </a:r>
@@ -18093,8 +17991,8 @@
                 <a:solidFill>
                   <a:srgbClr val="FFFFFF"/>
                 </a:solidFill>
-                <a:latin typeface="Century Gothic"/>
-                <a:cs typeface="Century Gothic"/>
+                <a:latin typeface="Arial"/>
+                <a:cs typeface="Arial"/>
               </a:rPr>
               <a:t>How big is it?</a:t>
             </a:r>
@@ -18142,8 +18040,8 @@
                 <a:solidFill>
                   <a:srgbClr val="000000"/>
                 </a:solidFill>
-                <a:latin typeface="Century Gothic"/>
-                <a:cs typeface="Century Gothic"/>
+                <a:latin typeface="Arial"/>
+                <a:cs typeface="Arial"/>
               </a:rPr>
               <a:t>Risk, risk ratio (RR)</a:t>
             </a:r>
@@ -18163,8 +18061,8 @@
                 <a:solidFill>
                   <a:srgbClr val="000000"/>
                 </a:solidFill>
-                <a:latin typeface="Century Gothic"/>
-                <a:cs typeface="Century Gothic"/>
+                <a:latin typeface="Arial"/>
+                <a:cs typeface="Arial"/>
               </a:rPr>
               <a:t>Risk difference, NNT</a:t>
             </a:r>
@@ -18184,8 +18082,8 @@
                 <a:solidFill>
                   <a:srgbClr val="000000"/>
                 </a:solidFill>
-                <a:latin typeface="Century Gothic"/>
-                <a:cs typeface="Century Gothic"/>
+                <a:latin typeface="Arial"/>
+                <a:cs typeface="Arial"/>
               </a:rPr>
               <a:t>Odds ratio (OR)</a:t>
             </a:r>
@@ -18227,8 +18125,8 @@
                 <a:solidFill>
                   <a:srgbClr val="FFFFFF"/>
                 </a:solidFill>
-                <a:latin typeface="Century Gothic"/>
-                <a:cs typeface="Century Gothic"/>
+                <a:latin typeface="Arial"/>
+                <a:cs typeface="Arial"/>
               </a:rPr>
               <a:t>Tests</a:t>
             </a:r>
@@ -18276,8 +18174,8 @@
                 <a:solidFill>
                   <a:srgbClr val="000000"/>
                 </a:solidFill>
-                <a:latin typeface="Century Gothic"/>
-                <a:cs typeface="Century Gothic"/>
+                <a:latin typeface="Arial"/>
+                <a:cs typeface="Arial"/>
               </a:rPr>
               <a:t>Sensitivity, specificity</a:t>
             </a:r>
@@ -18297,8 +18195,8 @@
                 <a:solidFill>
                   <a:srgbClr val="000000"/>
                 </a:solidFill>
-                <a:latin typeface="Century Gothic"/>
-                <a:cs typeface="Century Gothic"/>
+                <a:latin typeface="Arial"/>
+                <a:cs typeface="Arial"/>
               </a:rPr>
               <a:t>PPV, NPV, ROC curve</a:t>
             </a:r>
@@ -18340,8 +18238,8 @@
                 <a:solidFill>
                   <a:srgbClr val="FFFFFF"/>
                 </a:solidFill>
-                <a:latin typeface="Century Gothic"/>
-                <a:cs typeface="Century Gothic"/>
+                <a:latin typeface="Arial"/>
+                <a:cs typeface="Arial"/>
               </a:rPr>
               <a:t>Many studies</a:t>
             </a:r>
@@ -18389,8 +18287,8 @@
                 <a:solidFill>
                   <a:srgbClr val="000000"/>
                 </a:solidFill>
-                <a:latin typeface="Century Gothic"/>
-                <a:cs typeface="Century Gothic"/>
+                <a:latin typeface="Arial"/>
+                <a:cs typeface="Arial"/>
               </a:rPr>
               <a:t>Forest plot, I-squared</a:t>
             </a:r>
@@ -18410,8 +18308,8 @@
                 <a:solidFill>
                   <a:srgbClr val="000000"/>
                 </a:solidFill>
-                <a:latin typeface="Century Gothic"/>
-                <a:cs typeface="Century Gothic"/>
+                <a:latin typeface="Arial"/>
+                <a:cs typeface="Arial"/>
               </a:rPr>
               <a:t>Risk-of-bias tool</a:t>
             </a:r>
@@ -18455,8 +18353,8 @@
                 <a:solidFill>
                   <a:srgbClr val="FFFFFF"/>
                 </a:solidFill>
-                <a:latin typeface="Century Gothic"/>
-                <a:cs typeface="Century Gothic"/>
+                <a:latin typeface="Arial"/>
+                <a:cs typeface="Arial"/>
               </a:rPr>
               <a:t>KEY MESSAGE   </a:t>
             </a:r>
@@ -18465,8 +18363,8 @@
                 <a:solidFill>
                   <a:srgbClr val="FFFFFF"/>
                 </a:solidFill>
-                <a:latin typeface="Century Gothic"/>
-                <a:cs typeface="Century Gothic"/>
+                <a:latin typeface="Arial"/>
+                <a:cs typeface="Arial"/>
               </a:rPr>
               <a:t>Trust first, then size: a precise answer can still be a biased one.</a:t>
             </a:r>
@@ -18503,7 +18401,7 @@
                     <a:lumMod val="50000"/>
                   </a:schemeClr>
                 </a:solidFill>
-                <a:latin typeface="Verdana"/>
+                <a:latin typeface="Arial"/>
               </a:rPr>
               <a:t>Neudata | #ClearDataClearImpact</a:t>
             </a:r>
@@ -18633,8 +18531,8 @@
                 <a:solidFill>
                   <a:srgbClr val="0D7377"/>
                 </a:solidFill>
-                <a:latin typeface="Century Gothic"/>
-                <a:cs typeface="Century Gothic"/>
+                <a:latin typeface="Arial"/>
+                <a:cs typeface="Arial"/>
               </a:rPr>
               <a:t>Break</a:t>
             </a:r>
@@ -18704,8 +18602,8 @@
                 <a:solidFill>
                   <a:srgbClr val="FFFFFF"/>
                 </a:solidFill>
-                <a:latin typeface="Century Gothic"/>
-                <a:cs typeface="Century Gothic"/>
+                <a:latin typeface="Arial"/>
+                <a:cs typeface="Arial"/>
               </a:rPr>
               <a:t>BREAK   |   15 min</a:t>
             </a:r>
@@ -18742,25 +18640,19 @@
               <a:spcBef>
                 <a:spcPts val="450"/>
               </a:spcBef>
-              <a:buNone/>
-            </a:pPr>
-            <a:r>
-              <a:rPr lang="en-US" sz="1650" b="1" dirty="0">
-                <a:solidFill>
-                  <a:srgbClr val="8A99A3"/>
-                </a:solidFill>
-                <a:latin typeface="Century Gothic"/>
-                <a:cs typeface="Century Gothic"/>
-              </a:rPr>
-              <a:t>1.  </a:t>
-            </a:r>
+              <a:buClr>
+                <a:srgbClr val="8A99A3"/>
+              </a:buClr>
+              <a:buFont typeface="Arial"/>
+              <a:buChar char="•"/>
+            </a:pPr>
             <a:r>
               <a:rPr lang="en-US" sz="1650" dirty="0">
                 <a:solidFill>
                   <a:srgbClr val="000000"/>
                 </a:solidFill>
-                <a:latin typeface="Century Gothic"/>
-                <a:cs typeface="Century Gothic"/>
+                <a:latin typeface="Arial"/>
+                <a:cs typeface="Arial"/>
               </a:rPr>
               <a:t>Stretch, coffee, fresh air</a:t>
             </a:r>
@@ -18773,25 +18665,19 @@
               <a:spcBef>
                 <a:spcPts val="450"/>
               </a:spcBef>
-              <a:buNone/>
-            </a:pPr>
-            <a:r>
-              <a:rPr lang="en-US" sz="1650" b="1" dirty="0">
-                <a:solidFill>
-                  <a:srgbClr val="8A99A3"/>
-                </a:solidFill>
-                <a:latin typeface="Century Gothic"/>
-                <a:cs typeface="Century Gothic"/>
-              </a:rPr>
-              <a:t>2.  </a:t>
-            </a:r>
+              <a:buClr>
+                <a:srgbClr val="8A99A3"/>
+              </a:buClr>
+              <a:buFont typeface="Arial"/>
+              <a:buChar char="•"/>
+            </a:pPr>
             <a:r>
               <a:rPr lang="en-US" sz="1650" dirty="0">
                 <a:solidFill>
                   <a:srgbClr val="000000"/>
                 </a:solidFill>
-                <a:latin typeface="Century Gothic"/>
-                <a:cs typeface="Century Gothic"/>
+                <a:latin typeface="Arial"/>
+                <a:cs typeface="Arial"/>
               </a:rPr>
               <a:t>After the break: two 2x2 calculations, so have a pen ready</a:t>
             </a:r>
@@ -18804,25 +18690,19 @@
               <a:spcBef>
                 <a:spcPts val="450"/>
               </a:spcBef>
-              <a:buNone/>
-            </a:pPr>
-            <a:r>
-              <a:rPr lang="en-US" sz="1650" b="1" dirty="0">
-                <a:solidFill>
-                  <a:srgbClr val="8A99A3"/>
-                </a:solidFill>
-                <a:latin typeface="Century Gothic"/>
-                <a:cs typeface="Century Gothic"/>
-              </a:rPr>
-              <a:t>3.  </a:t>
-            </a:r>
+              <a:buClr>
+                <a:srgbClr val="8A99A3"/>
+              </a:buClr>
+              <a:buFont typeface="Arial"/>
+              <a:buChar char="•"/>
+            </a:pPr>
             <a:r>
               <a:rPr lang="en-US" sz="1650" dirty="0">
                 <a:solidFill>
                   <a:srgbClr val="000000"/>
                 </a:solidFill>
-                <a:latin typeface="Century Gothic"/>
-                <a:cs typeface="Century Gothic"/>
+                <a:latin typeface="Arial"/>
+                <a:cs typeface="Arial"/>
               </a:rPr>
               <a:t>Then 4.3: beyond single studies</a:t>
             </a:r>
@@ -18859,7 +18739,7 @@
                     <a:lumMod val="50000"/>
                   </a:schemeClr>
                 </a:solidFill>
-                <a:latin typeface="Verdana"/>
+                <a:latin typeface="Arial"/>
               </a:rPr>
               <a:t>Neudata | #ClearDataClearImpact</a:t>
             </a:r>
@@ -18989,8 +18869,8 @@
                 <a:solidFill>
                   <a:srgbClr val="0D7377"/>
                 </a:solidFill>
-                <a:latin typeface="Century Gothic"/>
-                <a:cs typeface="Century Gothic"/>
+                <a:latin typeface="Arial"/>
+                <a:cs typeface="Arial"/>
               </a:rPr>
               <a:t>Your turn: two 2x2 calculations</a:t>
             </a:r>
@@ -19060,8 +18940,8 @@
                 <a:solidFill>
                   <a:srgbClr val="FFFFFF"/>
                 </a:solidFill>
-                <a:latin typeface="Century Gothic"/>
-                <a:cs typeface="Century Gothic"/>
+                <a:latin typeface="Arial"/>
+                <a:cs typeface="Arial"/>
               </a:rPr>
               <a:t>INDIVIDUAL TASK   |   20 min</a:t>
             </a:r>
@@ -19098,25 +18978,19 @@
               <a:spcBef>
                 <a:spcPts val="450"/>
               </a:spcBef>
-              <a:buNone/>
-            </a:pPr>
-            <a:r>
-              <a:rPr lang="en-US" sz="1650" b="1" dirty="0">
-                <a:solidFill>
-                  <a:srgbClr val="0B376C"/>
-                </a:solidFill>
-                <a:latin typeface="Century Gothic"/>
-                <a:cs typeface="Century Gothic"/>
-              </a:rPr>
-              <a:t>1.  </a:t>
-            </a:r>
+              <a:buClr>
+                <a:srgbClr val="0B376C"/>
+              </a:buClr>
+              <a:buFont typeface="Arial"/>
+              <a:buChar char="•"/>
+            </a:pPr>
             <a:r>
               <a:rPr lang="en-US" sz="1650" dirty="0">
                 <a:solidFill>
                   <a:srgbClr val="000000"/>
                 </a:solidFill>
-                <a:latin typeface="Century Gothic"/>
-                <a:cs typeface="Century Gothic"/>
+                <a:latin typeface="Arial"/>
+                <a:cs typeface="Arial"/>
               </a:rPr>
               <a:t>Handout Part C: draw each 2x2 table first, exposure in rows</a:t>
             </a:r>
@@ -19129,25 +19003,19 @@
               <a:spcBef>
                 <a:spcPts val="450"/>
               </a:spcBef>
-              <a:buNone/>
-            </a:pPr>
-            <a:r>
-              <a:rPr lang="en-US" sz="1650" b="1" dirty="0">
-                <a:solidFill>
-                  <a:srgbClr val="0B376C"/>
-                </a:solidFill>
-                <a:latin typeface="Century Gothic"/>
-                <a:cs typeface="Century Gothic"/>
-              </a:rPr>
-              <a:t>2.  </a:t>
-            </a:r>
+              <a:buClr>
+                <a:srgbClr val="0B376C"/>
+              </a:buClr>
+              <a:buFont typeface="Arial"/>
+              <a:buChar char="•"/>
+            </a:pPr>
             <a:r>
               <a:rPr lang="en-US" sz="1650" dirty="0">
                 <a:solidFill>
                   <a:srgbClr val="000000"/>
                 </a:solidFill>
-                <a:latin typeface="Century Gothic"/>
-                <a:cs typeface="Century Gothic"/>
+                <a:latin typeface="Arial"/>
+                <a:cs typeface="Arial"/>
               </a:rPr>
               <a:t>Calculation 1 (trial): risks, RR, RD, NNT, OR, and one sentence</a:t>
             </a:r>
@@ -19160,25 +19028,19 @@
               <a:spcBef>
                 <a:spcPts val="450"/>
               </a:spcBef>
-              <a:buNone/>
-            </a:pPr>
-            <a:r>
-              <a:rPr lang="en-US" sz="1650" b="1" dirty="0">
-                <a:solidFill>
-                  <a:srgbClr val="0B376C"/>
-                </a:solidFill>
-                <a:latin typeface="Century Gothic"/>
-                <a:cs typeface="Century Gothic"/>
-              </a:rPr>
-              <a:t>3.  </a:t>
-            </a:r>
+              <a:buClr>
+                <a:srgbClr val="0B376C"/>
+              </a:buClr>
+              <a:buFont typeface="Arial"/>
+              <a:buChar char="•"/>
+            </a:pPr>
             <a:r>
               <a:rPr lang="en-US" sz="1650" dirty="0">
                 <a:solidFill>
                   <a:srgbClr val="000000"/>
                 </a:solidFill>
-                <a:latin typeface="Century Gothic"/>
-                <a:cs typeface="Century Gothic"/>
+                <a:latin typeface="Arial"/>
+                <a:cs typeface="Arial"/>
               </a:rPr>
               <a:t>Calculation 2 (case-control): OR only, and say why not RR</a:t>
             </a:r>
@@ -19191,25 +19053,19 @@
               <a:spcBef>
                 <a:spcPts val="450"/>
               </a:spcBef>
-              <a:buNone/>
-            </a:pPr>
-            <a:r>
-              <a:rPr lang="en-US" sz="1650" b="1" dirty="0">
-                <a:solidFill>
-                  <a:srgbClr val="0B376C"/>
-                </a:solidFill>
-                <a:latin typeface="Century Gothic"/>
-                <a:cs typeface="Century Gothic"/>
-              </a:rPr>
-              <a:t>4.  </a:t>
-            </a:r>
+              <a:buClr>
+                <a:srgbClr val="0B376C"/>
+              </a:buClr>
+              <a:buFont typeface="Arial"/>
+              <a:buChar char="•"/>
+            </a:pPr>
             <a:r>
               <a:rPr lang="en-US" sz="1650" dirty="0">
                 <a:solidFill>
                   <a:srgbClr val="000000"/>
                 </a:solidFill>
-                <a:latin typeface="Century Gothic"/>
-                <a:cs typeface="Century Gothic"/>
+                <a:latin typeface="Arial"/>
+                <a:cs typeface="Arial"/>
               </a:rPr>
               <a:t>Check with your neighbour, then with the calculator</a:t>
             </a:r>
@@ -19253,8 +19109,8 @@
                 <a:solidFill>
                   <a:srgbClr val="0B376C"/>
                 </a:solidFill>
-                <a:latin typeface="Century Gothic"/>
-                <a:cs typeface="Century Gothic"/>
+                <a:latin typeface="Arial"/>
+                <a:cs typeface="Arial"/>
               </a:rPr>
               <a:t>Remember</a:t>
             </a:r>
@@ -19275,8 +19131,8 @@
                 <a:solidFill>
                   <a:srgbClr val="000000"/>
                 </a:solidFill>
-                <a:latin typeface="Century Gothic"/>
-                <a:cs typeface="Century Gothic"/>
+                <a:latin typeface="Arial"/>
+                <a:cs typeface="Arial"/>
               </a:rPr>
               <a:t>Risk = a / (a + b)</a:t>
             </a:r>
@@ -19297,8 +19153,8 @@
                 <a:solidFill>
                   <a:srgbClr val="000000"/>
                 </a:solidFill>
-                <a:latin typeface="Century Gothic"/>
-                <a:cs typeface="Century Gothic"/>
+                <a:latin typeface="Arial"/>
+                <a:cs typeface="Arial"/>
               </a:rPr>
               <a:t>RR = risk / risk</a:t>
             </a:r>
@@ -19319,8 +19175,8 @@
                 <a:solidFill>
                   <a:srgbClr val="000000"/>
                 </a:solidFill>
-                <a:latin typeface="Century Gothic"/>
-                <a:cs typeface="Century Gothic"/>
+                <a:latin typeface="Arial"/>
+                <a:cs typeface="Arial"/>
               </a:rPr>
               <a:t>NNT = 1 / risk difference</a:t>
             </a:r>
@@ -19341,8 +19197,8 @@
                 <a:solidFill>
                   <a:srgbClr val="000000"/>
                 </a:solidFill>
-                <a:latin typeface="Century Gothic"/>
-                <a:cs typeface="Century Gothic"/>
+                <a:latin typeface="Arial"/>
+                <a:cs typeface="Arial"/>
               </a:rPr>
               <a:t>OR = (a x d) / (b x c)</a:t>
             </a:r>
@@ -19388,8 +19244,8 @@
                 <a:solidFill>
                   <a:srgbClr val="0B376C"/>
                 </a:solidFill>
-                <a:latin typeface="Century Gothic"/>
-                <a:cs typeface="Century Gothic"/>
+                <a:latin typeface="Arial"/>
+                <a:cs typeface="Arial"/>
               </a:rPr>
               <a:t>OUTPUT   </a:t>
             </a:r>
@@ -19398,8 +19254,8 @@
                 <a:solidFill>
                   <a:srgbClr val="000000"/>
                 </a:solidFill>
-                <a:latin typeface="Century Gothic"/>
-                <a:cs typeface="Century Gothic"/>
+                <a:latin typeface="Arial"/>
+                <a:cs typeface="Arial"/>
               </a:rPr>
               <a:t>Two completed 2x2 tables with interpreted results</a:t>
             </a:r>
@@ -19436,7 +19292,7 @@
                     <a:lumMod val="50000"/>
                   </a:schemeClr>
                 </a:solidFill>
-                <a:latin typeface="Verdana"/>
+                <a:latin typeface="Arial"/>
               </a:rPr>
               <a:t>Neudata | #ClearDataClearImpact</a:t>
             </a:r>
@@ -19566,8 +19422,8 @@
                 <a:solidFill>
                   <a:srgbClr val="0D7377"/>
                 </a:solidFill>
-                <a:latin typeface="Century Gothic"/>
-                <a:cs typeface="Century Gothic"/>
+                <a:latin typeface="Arial"/>
+                <a:cs typeface="Arial"/>
               </a:rPr>
               <a:t>4.3  Beyond single studies</a:t>
             </a:r>
@@ -19636,8 +19492,8 @@
                 <a:solidFill>
                   <a:srgbClr val="0D7377"/>
                 </a:solidFill>
-                <a:latin typeface="Century Gothic"/>
-                <a:cs typeface="Century Gothic"/>
+                <a:latin typeface="Arial"/>
+                <a:cs typeface="Arial"/>
               </a:rPr>
               <a:t>One study is rarely the answer.</a:t>
             </a:r>
@@ -19654,8 +19510,8 @@
                 <a:solidFill>
                   <a:srgbClr val="595959"/>
                 </a:solidFill>
-                <a:latin typeface="Century Gothic"/>
-                <a:cs typeface="Century Gothic"/>
+                <a:latin typeface="Arial"/>
+                <a:cs typeface="Arial"/>
               </a:rPr>
               <a:t>Diagnostic tests, systematic reviews and meta-analysis, and how to appraise them. (30 minutes)</a:t>
             </a:r>
@@ -19692,7 +19548,7 @@
                     <a:lumMod val="50000"/>
                   </a:schemeClr>
                 </a:solidFill>
-                <a:latin typeface="Verdana"/>
+                <a:latin typeface="Arial"/>
               </a:rPr>
               <a:t>Neudata | #ClearDataClearImpact</a:t>
             </a:r>
@@ -19822,8 +19678,8 @@
                 <a:solidFill>
                   <a:srgbClr val="0D7377"/>
                 </a:solidFill>
-                <a:latin typeface="Century Gothic"/>
-                <a:cs typeface="Century Gothic"/>
+                <a:latin typeface="Arial"/>
+                <a:cs typeface="Arial"/>
               </a:rPr>
               <a:t>Diagnostic accuracy: sensitivity and specificity revisited</a:t>
             </a:r>
@@ -19919,8 +19775,8 @@
                 <a:solidFill>
                   <a:srgbClr val="FFFFFF"/>
                 </a:solidFill>
-                <a:latin typeface="Century Gothic"/>
-                <a:cs typeface="Century Gothic"/>
+                <a:latin typeface="Arial"/>
+                <a:cs typeface="Arial"/>
               </a:rPr>
               <a:t>KEY MESSAGE   </a:t>
             </a:r>
@@ -19929,8 +19785,8 @@
                 <a:solidFill>
                   <a:srgbClr val="FFFFFF"/>
                 </a:solidFill>
-                <a:latin typeface="Century Gothic"/>
-                <a:cs typeface="Century Gothic"/>
+                <a:latin typeface="Arial"/>
+                <a:cs typeface="Arial"/>
               </a:rPr>
               <a:t>Sensitivity catches the sick; specificity clears the healthy.</a:t>
             </a:r>
@@ -19967,7 +19823,7 @@
                     <a:lumMod val="50000"/>
                   </a:schemeClr>
                 </a:solidFill>
-                <a:latin typeface="Verdana"/>
+                <a:latin typeface="Arial"/>
               </a:rPr>
               <a:t>Neudata | #ClearDataClearImpact</a:t>
             </a:r>
@@ -20097,8 +19953,8 @@
                 <a:solidFill>
                   <a:srgbClr val="0D7377"/>
                 </a:solidFill>
-                <a:latin typeface="Century Gothic"/>
-                <a:cs typeface="Century Gothic"/>
+                <a:latin typeface="Arial"/>
+                <a:cs typeface="Arial"/>
               </a:rPr>
               <a:t>Same test, different setting: PPV depends on prevalence</a:t>
             </a:r>
@@ -20194,8 +20050,8 @@
                 <a:solidFill>
                   <a:srgbClr val="FFFFFF"/>
                 </a:solidFill>
-                <a:latin typeface="Century Gothic"/>
-                <a:cs typeface="Century Gothic"/>
+                <a:latin typeface="Arial"/>
+                <a:cs typeface="Arial"/>
               </a:rPr>
               <a:t>KEY MESSAGE   </a:t>
             </a:r>
@@ -20204,8 +20060,8 @@
                 <a:solidFill>
                   <a:srgbClr val="FFFFFF"/>
                 </a:solidFill>
-                <a:latin typeface="Century Gothic"/>
-                <a:cs typeface="Century Gothic"/>
+                <a:latin typeface="Arial"/>
+                <a:cs typeface="Arial"/>
               </a:rPr>
               <a:t>A positive result means much less when the disease is rare.</a:t>
             </a:r>
@@ -20242,7 +20098,7 @@
                     <a:lumMod val="50000"/>
                   </a:schemeClr>
                 </a:solidFill>
-                <a:latin typeface="Verdana"/>
+                <a:latin typeface="Arial"/>
               </a:rPr>
               <a:t>Neudata | #ClearDataClearImpact</a:t>
             </a:r>
@@ -20372,8 +20228,8 @@
                 <a:solidFill>
                   <a:srgbClr val="0D7377"/>
                 </a:solidFill>
-                <a:latin typeface="Century Gothic"/>
-                <a:cs typeface="Century Gothic"/>
+                <a:latin typeface="Arial"/>
+                <a:cs typeface="Arial"/>
               </a:rPr>
               <a:t>The ROC curve and the AUC</a:t>
             </a:r>
@@ -20469,8 +20325,8 @@
                 <a:solidFill>
                   <a:srgbClr val="FFFFFF"/>
                 </a:solidFill>
-                <a:latin typeface="Century Gothic"/>
-                <a:cs typeface="Century Gothic"/>
+                <a:latin typeface="Arial"/>
+                <a:cs typeface="Arial"/>
               </a:rPr>
               <a:t>KEY MESSAGE   </a:t>
             </a:r>
@@ -20479,8 +20335,8 @@
                 <a:solidFill>
                   <a:srgbClr val="FFFFFF"/>
                 </a:solidFill>
-                <a:latin typeface="Century Gothic"/>
-                <a:cs typeface="Century Gothic"/>
+                <a:latin typeface="Arial"/>
+                <a:cs typeface="Arial"/>
               </a:rPr>
               <a:t>Each cut-off trades sensitivity for specificity; AUC sums up the whole curve.</a:t>
             </a:r>
@@ -20517,7 +20373,7 @@
                     <a:lumMod val="50000"/>
                   </a:schemeClr>
                 </a:solidFill>
-                <a:latin typeface="Verdana"/>
+                <a:latin typeface="Arial"/>
               </a:rPr>
               <a:t>Neudata | #ClearDataClearImpact</a:t>
             </a:r>
@@ -20647,8 +20503,8 @@
                 <a:solidFill>
                   <a:srgbClr val="0D7377"/>
                 </a:solidFill>
-                <a:latin typeface="Century Gothic"/>
-                <a:cs typeface="Century Gothic"/>
+                <a:latin typeface="Arial"/>
+                <a:cs typeface="Arial"/>
               </a:rPr>
               <a:t>The PRISMA flow: from 1,300 records to 9 studies</a:t>
             </a:r>
@@ -20744,8 +20600,8 @@
                 <a:solidFill>
                   <a:srgbClr val="FFFFFF"/>
                 </a:solidFill>
-                <a:latin typeface="Century Gothic"/>
-                <a:cs typeface="Century Gothic"/>
+                <a:latin typeface="Arial"/>
+                <a:cs typeface="Arial"/>
               </a:rPr>
               <a:t>KEY MESSAGE   </a:t>
             </a:r>
@@ -20754,8 +20610,8 @@
                 <a:solidFill>
                   <a:srgbClr val="FFFFFF"/>
                 </a:solidFill>
-                <a:latin typeface="Century Gothic"/>
-                <a:cs typeface="Century Gothic"/>
+                <a:latin typeface="Arial"/>
+                <a:cs typeface="Arial"/>
               </a:rPr>
               <a:t>A PRISMA flow shows how studies were found, screened and excluded, with reasons.</a:t>
             </a:r>
@@ -20792,7 +20648,7 @@
                     <a:lumMod val="50000"/>
                   </a:schemeClr>
                 </a:solidFill>
-                <a:latin typeface="Verdana"/>
+                <a:latin typeface="Arial"/>
               </a:rPr>
               <a:t>Neudata | #ClearDataClearImpact</a:t>
             </a:r>
@@ -20922,8 +20778,8 @@
                 <a:solidFill>
                   <a:srgbClr val="0D7377"/>
                 </a:solidFill>
-                <a:latin typeface="Century Gothic"/>
-                <a:cs typeface="Century Gothic"/>
+                <a:latin typeface="Arial"/>
+                <a:cs typeface="Arial"/>
               </a:rPr>
               <a:t>Reading a forest plot in four steps</a:t>
             </a:r>
@@ -21019,8 +20875,8 @@
                 <a:solidFill>
                   <a:srgbClr val="FFFFFF"/>
                 </a:solidFill>
-                <a:latin typeface="Century Gothic"/>
-                <a:cs typeface="Century Gothic"/>
+                <a:latin typeface="Arial"/>
+                <a:cs typeface="Arial"/>
               </a:rPr>
               <a:t>KEY MESSAGE   </a:t>
             </a:r>
@@ -21029,8 +20885,8 @@
                 <a:solidFill>
                   <a:srgbClr val="FFFFFF"/>
                 </a:solidFill>
-                <a:latin typeface="Century Gothic"/>
-                <a:cs typeface="Century Gothic"/>
+                <a:latin typeface="Arial"/>
+                <a:cs typeface="Arial"/>
               </a:rPr>
               <a:t>Squares = studies, lines = CIs, diamond = pooled result, vertical line = no effect.</a:t>
             </a:r>
@@ -21067,7 +20923,7 @@
                     <a:lumMod val="50000"/>
                   </a:schemeClr>
                 </a:solidFill>
-                <a:latin typeface="Verdana"/>
+                <a:latin typeface="Arial"/>
               </a:rPr>
               <a:t>Neudata | #ClearDataClearImpact</a:t>
             </a:r>
@@ -21197,8 +21053,8 @@
                 <a:solidFill>
                   <a:srgbClr val="0D7377"/>
                 </a:solidFill>
-                <a:latin typeface="Century Gothic"/>
-                <a:cs typeface="Century Gothic"/>
+                <a:latin typeface="Arial"/>
+                <a:cs typeface="Arial"/>
               </a:rPr>
               <a:t>Heterogeneity: do the studies agree?</a:t>
             </a:r>
@@ -21294,8 +21150,8 @@
                 <a:solidFill>
                   <a:srgbClr val="FFFFFF"/>
                 </a:solidFill>
-                <a:latin typeface="Century Gothic"/>
-                <a:cs typeface="Century Gothic"/>
+                <a:latin typeface="Arial"/>
+                <a:cs typeface="Arial"/>
               </a:rPr>
               <a:t>KEY MESSAGE   </a:t>
             </a:r>
@@ -21304,8 +21160,8 @@
                 <a:solidFill>
                   <a:srgbClr val="FFFFFF"/>
                 </a:solidFill>
-                <a:latin typeface="Century Gothic"/>
-                <a:cs typeface="Century Gothic"/>
+                <a:latin typeface="Arial"/>
+                <a:cs typeface="Arial"/>
               </a:rPr>
               <a:t>High I-squared means the studies disagree: find out why before trusting the diamond.</a:t>
             </a:r>
@@ -21342,7 +21198,7 @@
                     <a:lumMod val="50000"/>
                   </a:schemeClr>
                 </a:solidFill>
-                <a:latin typeface="Verdana"/>
+                <a:latin typeface="Arial"/>
               </a:rPr>
               <a:t>Neudata | #ClearDataClearImpact</a:t>
             </a:r>
@@ -21472,8 +21328,8 @@
                 <a:solidFill>
                   <a:srgbClr val="0D7377"/>
                 </a:solidFill>
-                <a:latin typeface="Century Gothic"/>
-                <a:cs typeface="Century Gothic"/>
+                <a:latin typeface="Arial"/>
+                <a:cs typeface="Arial"/>
               </a:rPr>
               <a:t>Which risk-of-bias tool for which design?</a:t>
             </a:r>
@@ -21569,8 +21425,8 @@
                 <a:solidFill>
                   <a:srgbClr val="FFFFFF"/>
                 </a:solidFill>
-                <a:latin typeface="Century Gothic"/>
-                <a:cs typeface="Century Gothic"/>
+                <a:latin typeface="Arial"/>
+                <a:cs typeface="Arial"/>
               </a:rPr>
               <a:t>KEY MESSAGE   </a:t>
             </a:r>
@@ -21579,8 +21435,8 @@
                 <a:solidFill>
                   <a:srgbClr val="FFFFFF"/>
                 </a:solidFill>
-                <a:latin typeface="Century Gothic"/>
-                <a:cs typeface="Century Gothic"/>
+                <a:latin typeface="Arial"/>
+                <a:cs typeface="Arial"/>
               </a:rPr>
               <a:t>Match the appraisal tool to the design, and the reporting guideline too.</a:t>
             </a:r>
@@ -21617,7 +21473,7 @@
                     <a:lumMod val="50000"/>
                   </a:schemeClr>
                 </a:solidFill>
-                <a:latin typeface="Verdana"/>
+                <a:latin typeface="Arial"/>
               </a:rPr>
               <a:t>Neudata | #ClearDataClearImpact</a:t>
             </a:r>
@@ -21747,8 +21603,8 @@
                 <a:solidFill>
                   <a:srgbClr val="0D7377"/>
                 </a:solidFill>
-                <a:latin typeface="Century Gothic"/>
-                <a:cs typeface="Century Gothic"/>
+                <a:latin typeface="Arial"/>
+                <a:cs typeface="Arial"/>
               </a:rPr>
               <a:t>4.1  Bias, confounding and causation</a:t>
             </a:r>
@@ -21817,8 +21673,8 @@
                 <a:solidFill>
                   <a:srgbClr val="0D7377"/>
                 </a:solidFill>
-                <a:latin typeface="Century Gothic"/>
-                <a:cs typeface="Century Gothic"/>
+                <a:latin typeface="Arial"/>
+                <a:cs typeface="Arial"/>
               </a:rPr>
               <a:t>Bias is systematic error. Size does not fix it.</a:t>
             </a:r>
@@ -21835,8 +21691,8 @@
                 <a:solidFill>
                   <a:srgbClr val="595959"/>
                 </a:solidFill>
-                <a:latin typeface="Century Gothic"/>
-                <a:cs typeface="Century Gothic"/>
+                <a:latin typeface="Arial"/>
+                <a:cs typeface="Arial"/>
               </a:rPr>
               <a:t>Selection, information, confounding, effect modification, and from association to causation. (40 minutes)</a:t>
             </a:r>
@@ -21873,7 +21729,7 @@
                     <a:lumMod val="50000"/>
                   </a:schemeClr>
                 </a:solidFill>
-                <a:latin typeface="Verdana"/>
+                <a:latin typeface="Arial"/>
               </a:rPr>
               <a:t>Neudata | #ClearDataClearImpact</a:t>
             </a:r>
@@ -22003,8 +21859,8 @@
                 <a:solidFill>
                   <a:srgbClr val="0D7377"/>
                 </a:solidFill>
-                <a:latin typeface="Century Gothic"/>
-                <a:cs typeface="Century Gothic"/>
+                <a:latin typeface="Arial"/>
+                <a:cs typeface="Arial"/>
               </a:rPr>
               <a:t>The last question: are the conclusions supported by the data?</a:t>
             </a:r>
@@ -22070,8 +21926,8 @@
                 <a:solidFill>
                   <a:srgbClr val="595959"/>
                 </a:solidFill>
-                <a:latin typeface="Century Gothic"/>
-                <a:cs typeface="Century Gothic"/>
+                <a:latin typeface="Arial"/>
+                <a:cs typeface="Arial"/>
               </a:rPr>
               <a:t>Questions 7-9 of our 10-question appraisal checklist (Session 8)</a:t>
             </a:r>
@@ -22113,8 +21969,8 @@
                 <a:solidFill>
                   <a:srgbClr val="FFFFFF"/>
                 </a:solidFill>
-                <a:latin typeface="Century Gothic"/>
-                <a:cs typeface="Century Gothic"/>
+                <a:latin typeface="Arial"/>
+                <a:cs typeface="Arial"/>
               </a:rPr>
               <a:t>Words match the design</a:t>
             </a:r>
@@ -22162,8 +22018,8 @@
                 <a:solidFill>
                   <a:srgbClr val="000000"/>
                 </a:solidFill>
-                <a:latin typeface="Century Gothic"/>
-                <a:cs typeface="Century Gothic"/>
+                <a:latin typeface="Arial"/>
+                <a:cs typeface="Arial"/>
               </a:rPr>
               <a:t>'Caused' needs randomisation</a:t>
             </a:r>
@@ -22183,8 +22039,8 @@
                 <a:solidFill>
                   <a:srgbClr val="000000"/>
                 </a:solidFill>
-                <a:latin typeface="Century Gothic"/>
-                <a:cs typeface="Century Gothic"/>
+                <a:latin typeface="Arial"/>
+                <a:cs typeface="Arial"/>
               </a:rPr>
               <a:t>Observational: 'associated with'</a:t>
             </a:r>
@@ -22204,8 +22060,8 @@
                 <a:solidFill>
                   <a:srgbClr val="000000"/>
                 </a:solidFill>
-                <a:latin typeface="Century Gothic"/>
-                <a:cs typeface="Century Gothic"/>
+                <a:latin typeface="Arial"/>
+                <a:cs typeface="Arial"/>
               </a:rPr>
               <a:t>Pilot: feasibility, not effect</a:t>
             </a:r>
@@ -22247,8 +22103,8 @@
                 <a:solidFill>
                   <a:srgbClr val="FFFFFF"/>
                 </a:solidFill>
-                <a:latin typeface="Century Gothic"/>
-                <a:cs typeface="Century Gothic"/>
+                <a:latin typeface="Arial"/>
+                <a:cs typeface="Arial"/>
               </a:rPr>
               <a:t>Numbers match the words</a:t>
             </a:r>
@@ -22296,8 +22152,8 @@
                 <a:solidFill>
                   <a:srgbClr val="000000"/>
                 </a:solidFill>
-                <a:latin typeface="Century Gothic"/>
-                <a:cs typeface="Century Gothic"/>
+                <a:latin typeface="Arial"/>
+                <a:cs typeface="Arial"/>
               </a:rPr>
               <a:t>Effect size with 95% CI</a:t>
             </a:r>
@@ -22317,8 +22173,8 @@
                 <a:solidFill>
                   <a:srgbClr val="000000"/>
                 </a:solidFill>
-                <a:latin typeface="Century Gothic"/>
-                <a:cs typeface="Century Gothic"/>
+                <a:latin typeface="Arial"/>
+                <a:cs typeface="Arial"/>
               </a:rPr>
               <a:t>Relative AND absolute</a:t>
             </a:r>
@@ -22338,8 +22194,8 @@
                 <a:solidFill>
                   <a:srgbClr val="000000"/>
                 </a:solidFill>
-                <a:latin typeface="Century Gothic"/>
-                <a:cs typeface="Century Gothic"/>
+                <a:latin typeface="Arial"/>
+                <a:cs typeface="Arial"/>
               </a:rPr>
               <a:t>No 'trend' for p = 0.42</a:t>
             </a:r>
@@ -22381,8 +22237,8 @@
                 <a:solidFill>
                   <a:srgbClr val="FFFFFF"/>
                 </a:solidFill>
-                <a:latin typeface="Century Gothic"/>
-                <a:cs typeface="Century Gothic"/>
+                <a:latin typeface="Arial"/>
+                <a:cs typeface="Arial"/>
               </a:rPr>
               <a:t>Honest limits, no spin</a:t>
             </a:r>
@@ -22430,8 +22286,8 @@
                 <a:solidFill>
                   <a:srgbClr val="000000"/>
                 </a:solidFill>
-                <a:latin typeface="Century Gothic"/>
-                <a:cs typeface="Century Gothic"/>
+                <a:latin typeface="Arial"/>
+                <a:cs typeface="Arial"/>
               </a:rPr>
               <a:t>Primary outcome reported first</a:t>
             </a:r>
@@ -22451,8 +22307,8 @@
                 <a:solidFill>
                   <a:srgbClr val="000000"/>
                 </a:solidFill>
-                <a:latin typeface="Century Gothic"/>
-                <a:cs typeface="Century Gothic"/>
+                <a:latin typeface="Arial"/>
+                <a:cs typeface="Arial"/>
               </a:rPr>
               <a:t>Main limitations stated</a:t>
             </a:r>
@@ -22472,8 +22328,8 @@
                 <a:solidFill>
                   <a:srgbClr val="000000"/>
                 </a:solidFill>
-                <a:latin typeface="Century Gothic"/>
-                <a:cs typeface="Century Gothic"/>
+                <a:latin typeface="Arial"/>
+                <a:cs typeface="Arial"/>
               </a:rPr>
               <a:t>Conclusion = the primary result</a:t>
             </a:r>
@@ -22517,8 +22373,8 @@
                 <a:solidFill>
                   <a:srgbClr val="FFFFFF"/>
                 </a:solidFill>
-                <a:latin typeface="Century Gothic"/>
-                <a:cs typeface="Century Gothic"/>
+                <a:latin typeface="Arial"/>
+                <a:cs typeface="Arial"/>
               </a:rPr>
               <a:t>KEY MESSAGE   </a:t>
             </a:r>
@@ -22527,8 +22383,8 @@
                 <a:solidFill>
                   <a:srgbClr val="FFFFFF"/>
                 </a:solidFill>
-                <a:latin typeface="Century Gothic"/>
-                <a:cs typeface="Century Gothic"/>
+                <a:latin typeface="Arial"/>
+                <a:cs typeface="Arial"/>
               </a:rPr>
               <a:t>Read the conclusion last, and check it against the design and the numbers.</a:t>
             </a:r>
@@ -22565,7 +22421,7 @@
                     <a:lumMod val="50000"/>
                   </a:schemeClr>
                 </a:solidFill>
-                <a:latin typeface="Verdana"/>
+                <a:latin typeface="Arial"/>
               </a:rPr>
               <a:t>Neudata | #ClearDataClearImpact</a:t>
             </a:r>
@@ -22695,8 +22551,8 @@
                 <a:solidFill>
                   <a:srgbClr val="0D7377"/>
                 </a:solidFill>
-                <a:latin typeface="Century Gothic"/>
-                <a:cs typeface="Century Gothic"/>
+                <a:latin typeface="Arial"/>
+                <a:cs typeface="Arial"/>
               </a:rPr>
               <a:t>Pair task: read the forest plot, pick the tool</a:t>
             </a:r>
@@ -22766,8 +22622,8 @@
                 <a:solidFill>
                   <a:srgbClr val="FFFFFF"/>
                 </a:solidFill>
-                <a:latin typeface="Century Gothic"/>
-                <a:cs typeface="Century Gothic"/>
+                <a:latin typeface="Arial"/>
+                <a:cs typeface="Arial"/>
               </a:rPr>
               <a:t>DISCUSSION   |   6 min</a:t>
             </a:r>
@@ -22804,25 +22660,19 @@
               <a:spcBef>
                 <a:spcPts val="450"/>
               </a:spcBef>
-              <a:buNone/>
-            </a:pPr>
-            <a:r>
-              <a:rPr lang="en-US" sz="1650" b="1" dirty="0">
-                <a:solidFill>
-                  <a:srgbClr val="1F5C7A"/>
-                </a:solidFill>
-                <a:latin typeface="Century Gothic"/>
-                <a:cs typeface="Century Gothic"/>
-              </a:rPr>
-              <a:t>1.  </a:t>
-            </a:r>
+              <a:buClr>
+                <a:srgbClr val="1F5C7A"/>
+              </a:buClr>
+              <a:buFont typeface="Arial"/>
+              <a:buChar char="•"/>
+            </a:pPr>
             <a:r>
               <a:rPr lang="en-US" sz="1650" dirty="0">
                 <a:solidFill>
                   <a:srgbClr val="000000"/>
                 </a:solidFill>
-                <a:latin typeface="Century Gothic"/>
-                <a:cs typeface="Century Gothic"/>
+                <a:latin typeface="Arial"/>
+                <a:cs typeface="Arial"/>
               </a:rPr>
               <a:t>Handout Part E: the forest plot of six fluid trials</a:t>
             </a:r>
@@ -22835,25 +22685,19 @@
               <a:spcBef>
                 <a:spcPts val="450"/>
               </a:spcBef>
-              <a:buNone/>
-            </a:pPr>
-            <a:r>
-              <a:rPr lang="en-US" sz="1650" b="1" dirty="0">
-                <a:solidFill>
-                  <a:srgbClr val="1F5C7A"/>
-                </a:solidFill>
-                <a:latin typeface="Century Gothic"/>
-                <a:cs typeface="Century Gothic"/>
-              </a:rPr>
-              <a:t>2.  </a:t>
-            </a:r>
+              <a:buClr>
+                <a:srgbClr val="1F5C7A"/>
+              </a:buClr>
+              <a:buFont typeface="Arial"/>
+              <a:buChar char="•"/>
+            </a:pPr>
             <a:r>
               <a:rPr lang="en-US" sz="1650" dirty="0">
                 <a:solidFill>
                   <a:srgbClr val="000000"/>
                 </a:solidFill>
-                <a:latin typeface="Century Gothic"/>
-                <a:cs typeface="Century Gothic"/>
+                <a:latin typeface="Arial"/>
+                <a:cs typeface="Arial"/>
               </a:rPr>
               <a:t>Which trial carries the most weight? Does any single trial show a clear effect?</a:t>
             </a:r>
@@ -22866,25 +22710,19 @@
               <a:spcBef>
                 <a:spcPts val="450"/>
               </a:spcBef>
-              <a:buNone/>
-            </a:pPr>
-            <a:r>
-              <a:rPr lang="en-US" sz="1650" b="1" dirty="0">
-                <a:solidFill>
-                  <a:srgbClr val="1F5C7A"/>
-                </a:solidFill>
-                <a:latin typeface="Century Gothic"/>
-                <a:cs typeface="Century Gothic"/>
-              </a:rPr>
-              <a:t>3.  </a:t>
-            </a:r>
+              <a:buClr>
+                <a:srgbClr val="1F5C7A"/>
+              </a:buClr>
+              <a:buFont typeface="Arial"/>
+              <a:buChar char="•"/>
+            </a:pPr>
             <a:r>
               <a:rPr lang="en-US" sz="1650" dirty="0">
                 <a:solidFill>
                   <a:srgbClr val="000000"/>
                 </a:solidFill>
-                <a:latin typeface="Century Gothic"/>
-                <a:cs typeface="Century Gothic"/>
+                <a:latin typeface="Arial"/>
+                <a:cs typeface="Arial"/>
               </a:rPr>
               <a:t>Does the diamond cross RR = 1? Say the result in one sentence</a:t>
             </a:r>
@@ -22897,25 +22735,19 @@
               <a:spcBef>
                 <a:spcPts val="450"/>
               </a:spcBef>
-              <a:buNone/>
-            </a:pPr>
-            <a:r>
-              <a:rPr lang="en-US" sz="1650" b="1" dirty="0">
-                <a:solidFill>
-                  <a:srgbClr val="1F5C7A"/>
-                </a:solidFill>
-                <a:latin typeface="Century Gothic"/>
-                <a:cs typeface="Century Gothic"/>
-              </a:rPr>
-              <a:t>4.  </a:t>
-            </a:r>
+              <a:buClr>
+                <a:srgbClr val="1F5C7A"/>
+              </a:buClr>
+              <a:buFont typeface="Arial"/>
+              <a:buChar char="•"/>
+            </a:pPr>
             <a:r>
               <a:rPr lang="en-US" sz="1650" dirty="0">
                 <a:solidFill>
                   <a:srgbClr val="000000"/>
                 </a:solidFill>
-                <a:latin typeface="Century Gothic"/>
-                <a:cs typeface="Century Gothic"/>
+                <a:latin typeface="Arial"/>
+                <a:cs typeface="Arial"/>
               </a:rPr>
               <a:t>Pick the risk-of-bias tool for Boulet, for Hyun and for a review of fluid trials</a:t>
             </a:r>
@@ -22959,8 +22791,8 @@
                 <a:solidFill>
                   <a:srgbClr val="1F5C7A"/>
                 </a:solidFill>
-                <a:latin typeface="Century Gothic"/>
-                <a:cs typeface="Century Gothic"/>
+                <a:latin typeface="Arial"/>
+                <a:cs typeface="Arial"/>
               </a:rPr>
               <a:t>Reminder</a:t>
             </a:r>
@@ -22981,8 +22813,8 @@
                 <a:solidFill>
                   <a:srgbClr val="000000"/>
                 </a:solidFill>
-                <a:latin typeface="Century Gothic"/>
-                <a:cs typeface="Century Gothic"/>
+                <a:latin typeface="Arial"/>
+                <a:cs typeface="Arial"/>
               </a:rPr>
               <a:t>Square = one study</a:t>
             </a:r>
@@ -23003,8 +22835,8 @@
                 <a:solidFill>
                   <a:srgbClr val="000000"/>
                 </a:solidFill>
-                <a:latin typeface="Century Gothic"/>
-                <a:cs typeface="Century Gothic"/>
+                <a:latin typeface="Arial"/>
+                <a:cs typeface="Arial"/>
               </a:rPr>
               <a:t>Line = 95% CI</a:t>
             </a:r>
@@ -23025,8 +22857,8 @@
                 <a:solidFill>
                   <a:srgbClr val="000000"/>
                 </a:solidFill>
-                <a:latin typeface="Century Gothic"/>
-                <a:cs typeface="Century Gothic"/>
+                <a:latin typeface="Arial"/>
+                <a:cs typeface="Arial"/>
               </a:rPr>
               <a:t>Diamond = pooled result</a:t>
             </a:r>
@@ -23047,8 +22879,8 @@
                 <a:solidFill>
                   <a:srgbClr val="000000"/>
                 </a:solidFill>
-                <a:latin typeface="Century Gothic"/>
-                <a:cs typeface="Century Gothic"/>
+                <a:latin typeface="Arial"/>
+                <a:cs typeface="Arial"/>
               </a:rPr>
               <a:t>RoB 2, ROBINS-I, NOS, QUADAS-2, AMSTAR 2</a:t>
             </a:r>
@@ -23094,8 +22926,8 @@
                 <a:solidFill>
                   <a:srgbClr val="1F5C7A"/>
                 </a:solidFill>
-                <a:latin typeface="Century Gothic"/>
-                <a:cs typeface="Century Gothic"/>
+                <a:latin typeface="Arial"/>
+                <a:cs typeface="Arial"/>
               </a:rPr>
               <a:t>OUTPUT   </a:t>
             </a:r>
@@ -23104,8 +22936,8 @@
                 <a:solidFill>
                   <a:srgbClr val="000000"/>
                 </a:solidFill>
-                <a:latin typeface="Century Gothic"/>
-                <a:cs typeface="Century Gothic"/>
+                <a:latin typeface="Arial"/>
+                <a:cs typeface="Arial"/>
               </a:rPr>
               <a:t>One sentence on the pooled result + three tools named</a:t>
             </a:r>
@@ -23142,7 +22974,7 @@
                     <a:lumMod val="50000"/>
                   </a:schemeClr>
                 </a:solidFill>
-                <a:latin typeface="Verdana"/>
+                <a:latin typeface="Arial"/>
               </a:rPr>
               <a:t>Neudata | #ClearDataClearImpact</a:t>
             </a:r>
@@ -23272,8 +23104,8 @@
                 <a:solidFill>
                   <a:srgbClr val="0D7377"/>
                 </a:solidFill>
-                <a:latin typeface="Century Gothic"/>
-                <a:cs typeface="Century Gothic"/>
+                <a:latin typeface="Arial"/>
+                <a:cs typeface="Arial"/>
               </a:rPr>
               <a:t>Outcomes: one primary, defined by what, how and when</a:t>
             </a:r>
@@ -23369,8 +23201,8 @@
                 <a:solidFill>
                   <a:srgbClr val="FFFFFF"/>
                 </a:solidFill>
-                <a:latin typeface="Century Gothic"/>
-                <a:cs typeface="Century Gothic"/>
+                <a:latin typeface="Arial"/>
+                <a:cs typeface="Arial"/>
               </a:rPr>
               <a:t>KEY MESSAGE   </a:t>
             </a:r>
@@ -23379,8 +23211,8 @@
                 <a:solidFill>
                   <a:srgbClr val="FFFFFF"/>
                 </a:solidFill>
-                <a:latin typeface="Century Gothic"/>
-                <a:cs typeface="Century Gothic"/>
+                <a:latin typeface="Arial"/>
+                <a:cs typeface="Arial"/>
               </a:rPr>
               <a:t>A primary outcome is not a word; it is a measurement with a method and a time point.</a:t>
             </a:r>
@@ -23417,7 +23249,7 @@
                     <a:lumMod val="50000"/>
                   </a:schemeClr>
                 </a:solidFill>
-                <a:latin typeface="Verdana"/>
+                <a:latin typeface="Arial"/>
               </a:rPr>
               <a:t>Neudata | #ClearDataClearImpact</a:t>
             </a:r>
@@ -23547,8 +23379,8 @@
                 <a:solidFill>
                   <a:srgbClr val="0D7377"/>
                 </a:solidFill>
-                <a:latin typeface="Century Gothic"/>
-                <a:cs typeface="Century Gothic"/>
+                <a:latin typeface="Arial"/>
+                <a:cs typeface="Arial"/>
               </a:rPr>
               <a:t>Proposal builder 4: exposure, outcomes and biases</a:t>
             </a:r>
@@ -23618,8 +23450,8 @@
                 <a:solidFill>
                   <a:srgbClr val="FFFFFF"/>
                 </a:solidFill>
-                <a:latin typeface="Century Gothic"/>
-                <a:cs typeface="Century Gothic"/>
+                <a:latin typeface="Arial"/>
+                <a:cs typeface="Arial"/>
               </a:rPr>
               <a:t>PROPOSAL BUILDER   |   30 min</a:t>
             </a:r>
@@ -23656,25 +23488,19 @@
               <a:spcBef>
                 <a:spcPts val="450"/>
               </a:spcBef>
-              <a:buNone/>
-            </a:pPr>
-            <a:r>
-              <a:rPr lang="en-US" sz="1650" b="1" dirty="0">
-                <a:solidFill>
-                  <a:srgbClr val="055F56"/>
-                </a:solidFill>
-                <a:latin typeface="Century Gothic"/>
-                <a:cs typeface="Century Gothic"/>
-              </a:rPr>
-              <a:t>1.  </a:t>
-            </a:r>
+              <a:buClr>
+                <a:srgbClr val="055F56"/>
+              </a:buClr>
+              <a:buFont typeface="Arial"/>
+              <a:buChar char="•"/>
+            </a:pPr>
             <a:r>
               <a:rPr lang="en-US" sz="1650" dirty="0">
                 <a:solidFill>
                   <a:srgbClr val="000000"/>
                 </a:solidFill>
-                <a:latin typeface="Century Gothic"/>
-                <a:cs typeface="Century Gothic"/>
+                <a:latin typeface="Arial"/>
+                <a:cs typeface="Arial"/>
               </a:rPr>
               <a:t>Exposure or intervention: exactly what, how much, when</a:t>
             </a:r>
@@ -23687,25 +23513,19 @@
               <a:spcBef>
                 <a:spcPts val="450"/>
               </a:spcBef>
-              <a:buNone/>
-            </a:pPr>
-            <a:r>
-              <a:rPr lang="en-US" sz="1650" b="1" dirty="0">
-                <a:solidFill>
-                  <a:srgbClr val="055F56"/>
-                </a:solidFill>
-                <a:latin typeface="Century Gothic"/>
-                <a:cs typeface="Century Gothic"/>
-              </a:rPr>
-              <a:t>2.  </a:t>
-            </a:r>
+              <a:buClr>
+                <a:srgbClr val="055F56"/>
+              </a:buClr>
+              <a:buFont typeface="Arial"/>
+              <a:buChar char="•"/>
+            </a:pPr>
             <a:r>
               <a:rPr lang="en-US" sz="1650" dirty="0">
                 <a:solidFill>
                   <a:srgbClr val="000000"/>
                 </a:solidFill>
-                <a:latin typeface="Century Gothic"/>
-                <a:cs typeface="Century Gothic"/>
+                <a:latin typeface="Arial"/>
+                <a:cs typeface="Arial"/>
               </a:rPr>
               <a:t>Comparator: who or what you compare against</a:t>
             </a:r>
@@ -23718,25 +23538,19 @@
               <a:spcBef>
                 <a:spcPts val="450"/>
               </a:spcBef>
-              <a:buNone/>
-            </a:pPr>
-            <a:r>
-              <a:rPr lang="en-US" sz="1650" b="1" dirty="0">
-                <a:solidFill>
-                  <a:srgbClr val="055F56"/>
-                </a:solidFill>
-                <a:latin typeface="Century Gothic"/>
-                <a:cs typeface="Century Gothic"/>
-              </a:rPr>
-              <a:t>3.  </a:t>
-            </a:r>
+              <a:buClr>
+                <a:srgbClr val="055F56"/>
+              </a:buClr>
+              <a:buFont typeface="Arial"/>
+              <a:buChar char="•"/>
+            </a:pPr>
             <a:r>
               <a:rPr lang="en-US" sz="1650" dirty="0">
                 <a:solidFill>
                   <a:srgbClr val="000000"/>
                 </a:solidFill>
-                <a:latin typeface="Century Gothic"/>
-                <a:cs typeface="Century Gothic"/>
+                <a:latin typeface="Arial"/>
+                <a:cs typeface="Arial"/>
               </a:rPr>
               <a:t>ONE primary outcome: what, how, when</a:t>
             </a:r>
@@ -23749,25 +23563,19 @@
               <a:spcBef>
                 <a:spcPts val="450"/>
               </a:spcBef>
-              <a:buNone/>
-            </a:pPr>
-            <a:r>
-              <a:rPr lang="en-US" sz="1650" b="1" dirty="0">
-                <a:solidFill>
-                  <a:srgbClr val="055F56"/>
-                </a:solidFill>
-                <a:latin typeface="Century Gothic"/>
-                <a:cs typeface="Century Gothic"/>
-              </a:rPr>
-              <a:t>4.  </a:t>
-            </a:r>
+              <a:buClr>
+                <a:srgbClr val="055F56"/>
+              </a:buClr>
+              <a:buFont typeface="Arial"/>
+              <a:buChar char="•"/>
+            </a:pPr>
             <a:r>
               <a:rPr lang="en-US" sz="1650" dirty="0">
                 <a:solidFill>
                   <a:srgbClr val="000000"/>
                 </a:solidFill>
-                <a:latin typeface="Century Gothic"/>
-                <a:cs typeface="Century Gothic"/>
+                <a:latin typeface="Arial"/>
+                <a:cs typeface="Arial"/>
               </a:rPr>
               <a:t>2-3 secondary outcomes, each with what, how, when</a:t>
             </a:r>
@@ -23780,25 +23588,19 @@
               <a:spcBef>
                 <a:spcPts val="450"/>
               </a:spcBef>
-              <a:buNone/>
-            </a:pPr>
-            <a:r>
-              <a:rPr lang="en-US" sz="1650" b="1" dirty="0">
-                <a:solidFill>
-                  <a:srgbClr val="055F56"/>
-                </a:solidFill>
-                <a:latin typeface="Century Gothic"/>
-                <a:cs typeface="Century Gothic"/>
-              </a:rPr>
-              <a:t>5.  </a:t>
-            </a:r>
+              <a:buClr>
+                <a:srgbClr val="055F56"/>
+              </a:buClr>
+              <a:buFont typeface="Arial"/>
+              <a:buChar char="•"/>
+            </a:pPr>
             <a:r>
               <a:rPr lang="en-US" sz="1650" dirty="0">
                 <a:solidFill>
                   <a:srgbClr val="000000"/>
                 </a:solidFill>
-                <a:latin typeface="Century Gothic"/>
-                <a:cs typeface="Century Gothic"/>
+                <a:latin typeface="Arial"/>
+                <a:cs typeface="Arial"/>
               </a:rPr>
               <a:t>Two main biases and the design step that reduces each</a:t>
             </a:r>
@@ -23811,25 +23613,19 @@
               <a:spcBef>
                 <a:spcPts val="450"/>
               </a:spcBef>
-              <a:buNone/>
-            </a:pPr>
-            <a:r>
-              <a:rPr lang="en-US" sz="1650" b="1" dirty="0">
-                <a:solidFill>
-                  <a:srgbClr val="055F56"/>
-                </a:solidFill>
-                <a:latin typeface="Century Gothic"/>
-                <a:cs typeface="Century Gothic"/>
-              </a:rPr>
-              <a:t>6.  </a:t>
-            </a:r>
+              <a:buClr>
+                <a:srgbClr val="055F56"/>
+              </a:buClr>
+              <a:buFont typeface="Arial"/>
+              <a:buChar char="•"/>
+            </a:pPr>
             <a:r>
               <a:rPr lang="en-US" sz="1650" dirty="0">
                 <a:solidFill>
                   <a:srgbClr val="000000"/>
                 </a:solidFill>
-                <a:latin typeface="Century Gothic"/>
-                <a:cs typeface="Century Gothic"/>
+                <a:latin typeface="Arial"/>
+                <a:cs typeface="Arial"/>
               </a:rPr>
               <a:t>Write one sentence: will you claim 'caused' or 'associated'?</a:t>
             </a:r>
@@ -23873,8 +23669,8 @@
                 <a:solidFill>
                   <a:srgbClr val="055F56"/>
                 </a:solidFill>
-                <a:latin typeface="Century Gothic"/>
-                <a:cs typeface="Century Gothic"/>
+                <a:latin typeface="Arial"/>
+                <a:cs typeface="Arial"/>
               </a:rPr>
               <a:t>Facilitator check</a:t>
             </a:r>
@@ -23895,8 +23691,8 @@
                 <a:solidFill>
                   <a:srgbClr val="000000"/>
                 </a:solidFill>
-                <a:latin typeface="Century Gothic"/>
-                <a:cs typeface="Century Gothic"/>
+                <a:latin typeface="Arial"/>
+                <a:cs typeface="Arial"/>
               </a:rPr>
               <a:t>Comparator stated?</a:t>
             </a:r>
@@ -23917,8 +23713,8 @@
                 <a:solidFill>
                   <a:srgbClr val="000000"/>
                 </a:solidFill>
-                <a:latin typeface="Century Gothic"/>
-                <a:cs typeface="Century Gothic"/>
+                <a:latin typeface="Arial"/>
+                <a:cs typeface="Arial"/>
               </a:rPr>
               <a:t>Only ONE primary outcome?</a:t>
             </a:r>
@@ -23939,8 +23735,8 @@
                 <a:solidFill>
                   <a:srgbClr val="000000"/>
                 </a:solidFill>
-                <a:latin typeface="Century Gothic"/>
-                <a:cs typeface="Century Gothic"/>
+                <a:latin typeface="Arial"/>
+                <a:cs typeface="Arial"/>
               </a:rPr>
               <a:t>Outcome has a time point?</a:t>
             </a:r>
@@ -23961,8 +23757,8 @@
                 <a:solidFill>
                   <a:srgbClr val="000000"/>
                 </a:solidFill>
-                <a:latin typeface="Century Gothic"/>
-                <a:cs typeface="Century Gothic"/>
+                <a:latin typeface="Arial"/>
+                <a:cs typeface="Arial"/>
               </a:rPr>
               <a:t>Confounding by indication?</a:t>
             </a:r>
@@ -23983,8 +23779,8 @@
                 <a:solidFill>
                   <a:srgbClr val="000000"/>
                 </a:solidFill>
-                <a:latin typeface="Century Gothic"/>
-                <a:cs typeface="Century Gothic"/>
+                <a:latin typeface="Arial"/>
+                <a:cs typeface="Arial"/>
               </a:rPr>
               <a:t>A concrete fix for each bias?</a:t>
             </a:r>
@@ -24030,8 +23826,8 @@
                 <a:solidFill>
                   <a:srgbClr val="055F56"/>
                 </a:solidFill>
-                <a:latin typeface="Century Gothic"/>
-                <a:cs typeface="Century Gothic"/>
+                <a:latin typeface="Arial"/>
+                <a:cs typeface="Arial"/>
               </a:rPr>
               <a:t>OUTPUT   </a:t>
             </a:r>
@@ -24040,8 +23836,8 @@
                 <a:solidFill>
                   <a:srgbClr val="000000"/>
                 </a:solidFill>
-                <a:latin typeface="Century Gothic"/>
-                <a:cs typeface="Century Gothic"/>
+                <a:latin typeface="Arial"/>
+                <a:cs typeface="Arial"/>
               </a:rPr>
               <a:t>Proposal Part 2 complete (2a from Session 3 + 2b today)</a:t>
             </a:r>
@@ -24078,7 +23874,7 @@
                     <a:lumMod val="50000"/>
                   </a:schemeClr>
                 </a:solidFill>
-                <a:latin typeface="Verdana"/>
+                <a:latin typeface="Arial"/>
               </a:rPr>
               <a:t>Neudata | #ClearDataClearImpact</a:t>
             </a:r>
@@ -24208,8 +24004,8 @@
                 <a:solidFill>
                   <a:srgbClr val="0D7377"/>
                 </a:solidFill>
-                <a:latin typeface="Century Gothic"/>
-                <a:cs typeface="Century Gothic"/>
+                <a:latin typeface="Arial"/>
+                <a:cs typeface="Arial"/>
               </a:rPr>
               <a:t>Session 4 in one slide</a:t>
             </a:r>
@@ -24279,8 +24075,8 @@
                 <a:solidFill>
                   <a:srgbClr val="FFFFFF"/>
                 </a:solidFill>
-                <a:latin typeface="Century Gothic"/>
-                <a:cs typeface="Century Gothic"/>
+                <a:latin typeface="Arial"/>
+                <a:cs typeface="Arial"/>
               </a:rPr>
               <a:t>4.1 Trust</a:t>
             </a:r>
@@ -24328,8 +24124,8 @@
                 <a:solidFill>
                   <a:srgbClr val="000000"/>
                 </a:solidFill>
-                <a:latin typeface="Century Gothic"/>
-                <a:cs typeface="Century Gothic"/>
+                <a:latin typeface="Arial"/>
+                <a:cs typeface="Arial"/>
               </a:rPr>
               <a:t>Bias: size does not fix it</a:t>
             </a:r>
@@ -24349,8 +24145,8 @@
                 <a:solidFill>
                   <a:srgbClr val="000000"/>
                 </a:solidFill>
-                <a:latin typeface="Century Gothic"/>
-                <a:cs typeface="Century Gothic"/>
+                <a:latin typeface="Arial"/>
+                <a:cs typeface="Arial"/>
               </a:rPr>
               <a:t>Confounding: remove it</a:t>
             </a:r>
@@ -24370,8 +24166,8 @@
                 <a:solidFill>
                   <a:srgbClr val="000000"/>
                 </a:solidFill>
-                <a:latin typeface="Century Gothic"/>
-                <a:cs typeface="Century Gothic"/>
+                <a:latin typeface="Arial"/>
+                <a:cs typeface="Arial"/>
               </a:rPr>
               <a:t>Effect modification: report it</a:t>
             </a:r>
@@ -24413,8 +24209,8 @@
                 <a:solidFill>
                   <a:srgbClr val="FFFFFF"/>
                 </a:solidFill>
-                <a:latin typeface="Century Gothic"/>
-                <a:cs typeface="Century Gothic"/>
+                <a:latin typeface="Arial"/>
+                <a:cs typeface="Arial"/>
               </a:rPr>
               <a:t>4.2 Size</a:t>
             </a:r>
@@ -24462,8 +24258,8 @@
                 <a:solidFill>
                   <a:srgbClr val="000000"/>
                 </a:solidFill>
-                <a:latin typeface="Century Gothic"/>
-                <a:cs typeface="Century Gothic"/>
+                <a:latin typeface="Arial"/>
+                <a:cs typeface="Arial"/>
               </a:rPr>
               <a:t>Relative: RR, OR</a:t>
             </a:r>
@@ -24483,8 +24279,8 @@
                 <a:solidFill>
                   <a:srgbClr val="000000"/>
                 </a:solidFill>
-                <a:latin typeface="Century Gothic"/>
-                <a:cs typeface="Century Gothic"/>
+                <a:latin typeface="Arial"/>
+                <a:cs typeface="Arial"/>
               </a:rPr>
               <a:t>Absolute: RD, NNT</a:t>
             </a:r>
@@ -24504,8 +24300,8 @@
                 <a:solidFill>
                   <a:srgbClr val="000000"/>
                 </a:solidFill>
-                <a:latin typeface="Century Gothic"/>
-                <a:cs typeface="Century Gothic"/>
+                <a:latin typeface="Arial"/>
+                <a:cs typeface="Arial"/>
               </a:rPr>
               <a:t>OR = RR only if rare</a:t>
             </a:r>
@@ -24547,8 +24343,8 @@
                 <a:solidFill>
                   <a:srgbClr val="FFFFFF"/>
                 </a:solidFill>
-                <a:latin typeface="Century Gothic"/>
-                <a:cs typeface="Century Gothic"/>
+                <a:latin typeface="Arial"/>
+                <a:cs typeface="Arial"/>
               </a:rPr>
               <a:t>4.3 Many studies</a:t>
             </a:r>
@@ -24596,8 +24392,8 @@
                 <a:solidFill>
                   <a:srgbClr val="000000"/>
                 </a:solidFill>
-                <a:latin typeface="Century Gothic"/>
-                <a:cs typeface="Century Gothic"/>
+                <a:latin typeface="Arial"/>
+                <a:cs typeface="Arial"/>
               </a:rPr>
               <a:t>PPV depends on prevalence</a:t>
             </a:r>
@@ -24617,8 +24413,8 @@
                 <a:solidFill>
                   <a:srgbClr val="000000"/>
                 </a:solidFill>
-                <a:latin typeface="Century Gothic"/>
-                <a:cs typeface="Century Gothic"/>
+                <a:latin typeface="Arial"/>
+                <a:cs typeface="Arial"/>
               </a:rPr>
               <a:t>Forest plot: read the diamond</a:t>
             </a:r>
@@ -24638,8 +24434,8 @@
                 <a:solidFill>
                   <a:srgbClr val="000000"/>
                 </a:solidFill>
-                <a:latin typeface="Century Gothic"/>
-                <a:cs typeface="Century Gothic"/>
+                <a:latin typeface="Arial"/>
+                <a:cs typeface="Arial"/>
               </a:rPr>
               <a:t>Right tool for the design</a:t>
             </a:r>
@@ -24681,8 +24477,8 @@
                 <a:solidFill>
                   <a:srgbClr val="FFFFFF"/>
                 </a:solidFill>
-                <a:latin typeface="Century Gothic"/>
-                <a:cs typeface="Century Gothic"/>
+                <a:latin typeface="Arial"/>
+                <a:cs typeface="Arial"/>
               </a:rPr>
               <a:t>Your proposal</a:t>
             </a:r>
@@ -24730,8 +24526,8 @@
                 <a:solidFill>
                   <a:srgbClr val="000000"/>
                 </a:solidFill>
-                <a:latin typeface="Century Gothic"/>
-                <a:cs typeface="Century Gothic"/>
+                <a:latin typeface="Arial"/>
+                <a:cs typeface="Arial"/>
               </a:rPr>
               <a:t>Part 2 complete</a:t>
             </a:r>
@@ -24751,8 +24547,8 @@
                 <a:solidFill>
                   <a:srgbClr val="000000"/>
                 </a:solidFill>
-                <a:latin typeface="Century Gothic"/>
-                <a:cs typeface="Century Gothic"/>
+                <a:latin typeface="Arial"/>
+                <a:cs typeface="Arial"/>
               </a:rPr>
               <a:t>Caused or associated?</a:t>
             </a:r>
@@ -24796,8 +24592,8 @@
                 <a:solidFill>
                   <a:srgbClr val="FFFFFF"/>
                 </a:solidFill>
-                <a:latin typeface="Century Gothic"/>
-                <a:cs typeface="Century Gothic"/>
+                <a:latin typeface="Arial"/>
+                <a:cs typeface="Arial"/>
               </a:rPr>
               <a:t>KEY MESSAGE   </a:t>
             </a:r>
@@ -24806,8 +24602,8 @@
                 <a:solidFill>
                   <a:srgbClr val="FFFFFF"/>
                 </a:solidFill>
-                <a:latin typeface="Century Gothic"/>
-                <a:cs typeface="Century Gothic"/>
+                <a:latin typeface="Arial"/>
+                <a:cs typeface="Arial"/>
               </a:rPr>
               <a:t>Trust first, then size, and check that the words match the design.</a:t>
             </a:r>
@@ -24844,7 +24640,7 @@
                     <a:lumMod val="50000"/>
                   </a:schemeClr>
                 </a:solidFill>
-                <a:latin typeface="Verdana"/>
+                <a:latin typeface="Arial"/>
               </a:rPr>
               <a:t>Neudata | #ClearDataClearImpact</a:t>
             </a:r>
@@ -24974,8 +24770,8 @@
                 <a:solidFill>
                   <a:srgbClr val="0D7377"/>
                 </a:solidFill>
-                <a:latin typeface="Century Gothic"/>
-                <a:cs typeface="Century Gothic"/>
+                <a:latin typeface="Arial"/>
+                <a:cs typeface="Arial"/>
               </a:rPr>
               <a:t>Wrap-up and homework</a:t>
             </a:r>
@@ -25045,8 +24841,8 @@
                 <a:solidFill>
                   <a:srgbClr val="FFFFFF"/>
                 </a:solidFill>
-                <a:latin typeface="Century Gothic"/>
-                <a:cs typeface="Century Gothic"/>
+                <a:latin typeface="Arial"/>
+                <a:cs typeface="Arial"/>
               </a:rPr>
               <a:t>DISCUSSION   |   5 min</a:t>
             </a:r>
@@ -25083,25 +24879,19 @@
               <a:spcBef>
                 <a:spcPts val="450"/>
               </a:spcBef>
-              <a:buNone/>
-            </a:pPr>
-            <a:r>
-              <a:rPr lang="en-US" sz="1650" b="1" dirty="0">
-                <a:solidFill>
-                  <a:srgbClr val="1F5C7A"/>
-                </a:solidFill>
-                <a:latin typeface="Century Gothic"/>
-                <a:cs typeface="Century Gothic"/>
-              </a:rPr>
-              <a:t>1.  </a:t>
-            </a:r>
+              <a:buClr>
+                <a:srgbClr val="1F5C7A"/>
+              </a:buClr>
+              <a:buFont typeface="Arial"/>
+              <a:buChar char="•"/>
+            </a:pPr>
             <a:r>
               <a:rPr lang="en-US" sz="1650" dirty="0">
                 <a:solidFill>
                   <a:srgbClr val="000000"/>
                 </a:solidFill>
-                <a:latin typeface="Century Gothic"/>
-                <a:cs typeface="Century Gothic"/>
+                <a:latin typeface="Arial"/>
+                <a:cs typeface="Arial"/>
               </a:rPr>
               <a:t>Exit question: ICU patients who received more fluid died more often. Give one reason other than the fluid</a:t>
             </a:r>
@@ -25114,25 +24904,19 @@
               <a:spcBef>
                 <a:spcPts val="450"/>
               </a:spcBef>
-              <a:buNone/>
-            </a:pPr>
-            <a:r>
-              <a:rPr lang="en-US" sz="1650" b="1" dirty="0">
-                <a:solidFill>
-                  <a:srgbClr val="1F5C7A"/>
-                </a:solidFill>
-                <a:latin typeface="Century Gothic"/>
-                <a:cs typeface="Century Gothic"/>
-              </a:rPr>
-              <a:t>2.  </a:t>
-            </a:r>
+              <a:buClr>
+                <a:srgbClr val="1F5C7A"/>
+              </a:buClr>
+              <a:buFont typeface="Arial"/>
+              <a:buChar char="•"/>
+            </a:pPr>
             <a:r>
               <a:rPr lang="en-US" sz="1650" dirty="0">
                 <a:solidFill>
                   <a:srgbClr val="000000"/>
                 </a:solidFill>
-                <a:latin typeface="Century Gothic"/>
-                <a:cs typeface="Century Gothic"/>
+                <a:latin typeface="Arial"/>
+                <a:cs typeface="Arial"/>
               </a:rPr>
               <a:t>Homework: finish Proposal Part 2 (exposure, comparator, outcomes, biases)</a:t>
             </a:r>
@@ -25145,25 +24929,19 @@
               <a:spcBef>
                 <a:spcPts val="450"/>
               </a:spcBef>
-              <a:buNone/>
-            </a:pPr>
-            <a:r>
-              <a:rPr lang="en-US" sz="1650" b="1" dirty="0">
-                <a:solidFill>
-                  <a:srgbClr val="1F5C7A"/>
-                </a:solidFill>
-                <a:latin typeface="Century Gothic"/>
-                <a:cs typeface="Century Gothic"/>
-              </a:rPr>
-              <a:t>3.  </a:t>
-            </a:r>
+              <a:buClr>
+                <a:srgbClr val="1F5C7A"/>
+              </a:buClr>
+              <a:buFont typeface="Arial"/>
+              <a:buChar char="•"/>
+            </a:pPr>
             <a:r>
               <a:rPr lang="en-US" sz="1650" dirty="0">
                 <a:solidFill>
                   <a:srgbClr val="000000"/>
                 </a:solidFill>
-                <a:latin typeface="Century Gothic"/>
-                <a:cs typeface="Century Gothic"/>
+                <a:latin typeface="Arial"/>
+                <a:cs typeface="Arial"/>
               </a:rPr>
               <a:t>Optional: handout Parts B and D (effect modification, PPV in two settings)</a:t>
             </a:r>
@@ -25176,25 +24954,19 @@
               <a:spcBef>
                 <a:spcPts val="450"/>
               </a:spcBef>
-              <a:buNone/>
-            </a:pPr>
-            <a:r>
-              <a:rPr lang="en-US" sz="1650" b="1" dirty="0">
-                <a:solidFill>
-                  <a:srgbClr val="1F5C7A"/>
-                </a:solidFill>
-                <a:latin typeface="Century Gothic"/>
-                <a:cs typeface="Century Gothic"/>
-              </a:rPr>
-              <a:t>4.  </a:t>
-            </a:r>
+              <a:buClr>
+                <a:srgbClr val="1F5C7A"/>
+              </a:buClr>
+              <a:buFont typeface="Arial"/>
+              <a:buChar char="•"/>
+            </a:pPr>
             <a:r>
               <a:rPr lang="en-US" sz="1650" dirty="0">
                 <a:solidFill>
                   <a:srgbClr val="000000"/>
                 </a:solidFill>
-                <a:latin typeface="Century Gothic"/>
-                <a:cs typeface="Century Gothic"/>
+                <a:latin typeface="Arial"/>
+                <a:cs typeface="Arial"/>
               </a:rPr>
               <a:t>Next two Saturdays (Sessions 5-6): data and the FLUID-ICU course dataset</a:t>
             </a:r>
@@ -25240,8 +25012,8 @@
                 <a:solidFill>
                   <a:srgbClr val="1F5C7A"/>
                 </a:solidFill>
-                <a:latin typeface="Century Gothic"/>
-                <a:cs typeface="Century Gothic"/>
+                <a:latin typeface="Arial"/>
+                <a:cs typeface="Arial"/>
               </a:rPr>
               <a:t>OUTPUT   </a:t>
             </a:r>
@@ -25250,8 +25022,8 @@
                 <a:solidFill>
                   <a:srgbClr val="000000"/>
                 </a:solidFill>
-                <a:latin typeface="Century Gothic"/>
-                <a:cs typeface="Century Gothic"/>
+                <a:latin typeface="Arial"/>
+                <a:cs typeface="Arial"/>
               </a:rPr>
               <a:t>Exit answer on a sticky note</a:t>
             </a:r>
@@ -25288,7 +25060,7 @@
                     <a:lumMod val="50000"/>
                   </a:schemeClr>
                 </a:solidFill>
-                <a:latin typeface="Verdana"/>
+                <a:latin typeface="Arial"/>
               </a:rPr>
               <a:t>Neudata | #ClearDataClearImpact</a:t>
             </a:r>
@@ -25418,8 +25190,8 @@
                 <a:solidFill>
                   <a:srgbClr val="0D7377"/>
                 </a:solidFill>
-                <a:latin typeface="Century Gothic"/>
-                <a:cs typeface="Century Gothic"/>
+                <a:latin typeface="Arial"/>
+                <a:cs typeface="Arial"/>
               </a:rPr>
               <a:t>Extra slides: Session 4</a:t>
             </a:r>
@@ -25488,8 +25260,8 @@
                 <a:solidFill>
                   <a:srgbClr val="0D7377"/>
                 </a:solidFill>
-                <a:latin typeface="Century Gothic"/>
-                <a:cs typeface="Century Gothic"/>
+                <a:latin typeface="Arial"/>
+                <a:cs typeface="Arial"/>
               </a:rPr>
               <a:t>Extra slides: Session 4</a:t>
             </a:r>
@@ -25506,8 +25278,8 @@
                 <a:solidFill>
                   <a:srgbClr val="595959"/>
                 </a:solidFill>
-                <a:latin typeface="Century Gothic"/>
-                <a:cs typeface="Century Gothic"/>
+                <a:latin typeface="Arial"/>
+                <a:cs typeface="Arial"/>
               </a:rPr>
               <a:t>Use if time allows, or for self-study</a:t>
             </a:r>
@@ -25544,7 +25316,7 @@
                     <a:lumMod val="50000"/>
                   </a:schemeClr>
                 </a:solidFill>
-                <a:latin typeface="Verdana"/>
+                <a:latin typeface="Arial"/>
               </a:rPr>
               <a:t>Neudata | #ClearDataClearImpact</a:t>
             </a:r>
@@ -25674,8 +25446,8 @@
                 <a:solidFill>
                   <a:srgbClr val="0D7377"/>
                 </a:solidFill>
-                <a:latin typeface="Century Gothic"/>
-                <a:cs typeface="Century Gothic"/>
+                <a:latin typeface="Arial"/>
+                <a:cs typeface="Arial"/>
               </a:rPr>
               <a:t>Likelihood ratios and reporting diagnostic studies</a:t>
             </a:r>
@@ -25741,8 +25513,8 @@
                 <a:solidFill>
                   <a:srgbClr val="595959"/>
                 </a:solidFill>
-                <a:latin typeface="Century Gothic"/>
-                <a:cs typeface="Century Gothic"/>
+                <a:latin typeface="Arial"/>
+                <a:cs typeface="Arial"/>
               </a:rPr>
               <a:t>Same test: sensitivity 90%, specificity 80%</a:t>
             </a:r>
@@ -25784,8 +25556,8 @@
                 <a:solidFill>
                   <a:srgbClr val="FFFFFF"/>
                 </a:solidFill>
-                <a:latin typeface="Century Gothic"/>
-                <a:cs typeface="Century Gothic"/>
+                <a:latin typeface="Arial"/>
+                <a:cs typeface="Arial"/>
               </a:rPr>
               <a:t>LR+ (positive test)</a:t>
             </a:r>
@@ -25833,8 +25605,8 @@
                 <a:solidFill>
                   <a:srgbClr val="000000"/>
                 </a:solidFill>
-                <a:latin typeface="Century Gothic"/>
-                <a:cs typeface="Century Gothic"/>
+                <a:latin typeface="Arial"/>
+                <a:cs typeface="Arial"/>
               </a:rPr>
               <a:t>sensitivity / (1 - specificity)</a:t>
             </a:r>
@@ -25854,8 +25626,8 @@
                 <a:solidFill>
                   <a:srgbClr val="000000"/>
                 </a:solidFill>
-                <a:latin typeface="Century Gothic"/>
-                <a:cs typeface="Century Gothic"/>
+                <a:latin typeface="Arial"/>
+                <a:cs typeface="Arial"/>
               </a:rPr>
               <a:t>0.90 / 0.20 = 4.5</a:t>
             </a:r>
@@ -25875,8 +25647,8 @@
                 <a:solidFill>
                   <a:srgbClr val="000000"/>
                 </a:solidFill>
-                <a:latin typeface="Century Gothic"/>
-                <a:cs typeface="Century Gothic"/>
+                <a:latin typeface="Arial"/>
+                <a:cs typeface="Arial"/>
               </a:rPr>
               <a:t>a positive result is 4.5 times as likely in the sick</a:t>
             </a:r>
@@ -25918,8 +25690,8 @@
                 <a:solidFill>
                   <a:srgbClr val="FFFFFF"/>
                 </a:solidFill>
-                <a:latin typeface="Century Gothic"/>
-                <a:cs typeface="Century Gothic"/>
+                <a:latin typeface="Arial"/>
+                <a:cs typeface="Arial"/>
               </a:rPr>
               <a:t>LR- (negative test)</a:t>
             </a:r>
@@ -25967,8 +25739,8 @@
                 <a:solidFill>
                   <a:srgbClr val="000000"/>
                 </a:solidFill>
-                <a:latin typeface="Century Gothic"/>
-                <a:cs typeface="Century Gothic"/>
+                <a:latin typeface="Arial"/>
+                <a:cs typeface="Arial"/>
               </a:rPr>
               <a:t>(1 - sensitivity) / specificity</a:t>
             </a:r>
@@ -25988,8 +25760,8 @@
                 <a:solidFill>
                   <a:srgbClr val="000000"/>
                 </a:solidFill>
-                <a:latin typeface="Century Gothic"/>
-                <a:cs typeface="Century Gothic"/>
+                <a:latin typeface="Arial"/>
+                <a:cs typeface="Arial"/>
               </a:rPr>
               <a:t>0.10 / 0.80 = 0.13</a:t>
             </a:r>
@@ -26009,8 +25781,8 @@
                 <a:solidFill>
                   <a:srgbClr val="000000"/>
                 </a:solidFill>
-                <a:latin typeface="Century Gothic"/>
-                <a:cs typeface="Century Gothic"/>
+                <a:latin typeface="Arial"/>
+                <a:cs typeface="Arial"/>
               </a:rPr>
               <a:t>LR above 10 or below 0.1 changes decisions most</a:t>
             </a:r>
@@ -26052,8 +25824,8 @@
                 <a:solidFill>
                   <a:srgbClr val="FFFFFF"/>
                 </a:solidFill>
-                <a:latin typeface="Century Gothic"/>
-                <a:cs typeface="Century Gothic"/>
+                <a:latin typeface="Arial"/>
+                <a:cs typeface="Arial"/>
               </a:rPr>
               <a:t>Report and appraise</a:t>
             </a:r>
@@ -26101,8 +25873,8 @@
                 <a:solidFill>
                   <a:srgbClr val="000000"/>
                 </a:solidFill>
-                <a:latin typeface="Century Gothic"/>
-                <a:cs typeface="Century Gothic"/>
+                <a:latin typeface="Arial"/>
+                <a:cs typeface="Arial"/>
               </a:rPr>
               <a:t>STARD: 30-item checklist + flow diagram</a:t>
             </a:r>
@@ -26122,8 +25894,8 @@
                 <a:solidFill>
                   <a:srgbClr val="000000"/>
                 </a:solidFill>
-                <a:latin typeface="Century Gothic"/>
-                <a:cs typeface="Century Gothic"/>
+                <a:latin typeface="Arial"/>
+                <a:cs typeface="Arial"/>
               </a:rPr>
               <a:t>QUADAS-2: risk of bias</a:t>
             </a:r>
@@ -26143,8 +25915,8 @@
                 <a:solidFill>
                   <a:srgbClr val="000000"/>
                 </a:solidFill>
-                <a:latin typeface="Century Gothic"/>
-                <a:cs typeface="Century Gothic"/>
+                <a:latin typeface="Arial"/>
+                <a:cs typeface="Arial"/>
               </a:rPr>
               <a:t>Test it on the patients who will use it</a:t>
             </a:r>
@@ -26188,8 +25960,8 @@
                 <a:solidFill>
                   <a:srgbClr val="FFFFFF"/>
                 </a:solidFill>
-                <a:latin typeface="Century Gothic"/>
-                <a:cs typeface="Century Gothic"/>
+                <a:latin typeface="Arial"/>
+                <a:cs typeface="Arial"/>
               </a:rPr>
               <a:t>KEY MESSAGE   </a:t>
             </a:r>
@@ -26198,8 +25970,8 @@
                 <a:solidFill>
                   <a:srgbClr val="FFFFFF"/>
                 </a:solidFill>
-                <a:latin typeface="Century Gothic"/>
-                <a:cs typeface="Century Gothic"/>
+                <a:latin typeface="Arial"/>
+                <a:cs typeface="Arial"/>
               </a:rPr>
               <a:t>Likelihood ratios do not change with prevalence; predictive values do.</a:t>
             </a:r>
@@ -26236,7 +26008,7 @@
                     <a:lumMod val="50000"/>
                   </a:schemeClr>
                 </a:solidFill>
-                <a:latin typeface="Verdana"/>
+                <a:latin typeface="Arial"/>
               </a:rPr>
               <a:t>Neudata | #ClearDataClearImpact</a:t>
             </a:r>
@@ -26366,8 +26138,8 @@
                 <a:solidFill>
                   <a:srgbClr val="0D7377"/>
                 </a:solidFill>
-                <a:latin typeface="Century Gothic"/>
-                <a:cs typeface="Century Gothic"/>
+                <a:latin typeface="Arial"/>
+                <a:cs typeface="Arial"/>
               </a:rPr>
               <a:t>The RoB 2 traffic-light plot</a:t>
             </a:r>
@@ -26463,8 +26235,8 @@
                 <a:solidFill>
                   <a:srgbClr val="FFFFFF"/>
                 </a:solidFill>
-                <a:latin typeface="Century Gothic"/>
-                <a:cs typeface="Century Gothic"/>
+                <a:latin typeface="Arial"/>
+                <a:cs typeface="Arial"/>
               </a:rPr>
               <a:t>KEY MESSAGE   </a:t>
             </a:r>
@@ -26473,8 +26245,8 @@
                 <a:solidFill>
                   <a:srgbClr val="FFFFFF"/>
                 </a:solidFill>
-                <a:latin typeface="Century Gothic"/>
-                <a:cs typeface="Century Gothic"/>
+                <a:latin typeface="Arial"/>
+                <a:cs typeface="Arial"/>
               </a:rPr>
               <a:t>Judge each domain; the overall risk is set by the worst domain.</a:t>
             </a:r>
@@ -26511,7 +26283,7 @@
                     <a:lumMod val="50000"/>
                   </a:schemeClr>
                 </a:solidFill>
-                <a:latin typeface="Verdana"/>
+                <a:latin typeface="Arial"/>
               </a:rPr>
               <a:t>Neudata | #ClearDataClearImpact</a:t>
             </a:r>
@@ -26641,8 +26413,8 @@
                 <a:solidFill>
                   <a:srgbClr val="0D7377"/>
                 </a:solidFill>
-                <a:latin typeface="Century Gothic"/>
-                <a:cs typeface="Century Gothic"/>
+                <a:latin typeface="Arial"/>
+                <a:cs typeface="Arial"/>
               </a:rPr>
               <a:t>Worked example: prevalence or incidence?</a:t>
             </a:r>
@@ -26714,10 +26486,10 @@
                 <a:solidFill>
                   <a:srgbClr val="FFFFFF"/>
                 </a:solidFill>
-                <a:latin typeface="Century Gothic"/>
-                <a:cs typeface="Century Gothic"/>
-              </a:rPr>
-              <a:t>1. Today</a:t>
+                <a:latin typeface="Arial"/>
+                <a:cs typeface="Arial"/>
+              </a:rPr>
+              <a:t>Today</a:t>
             </a:r>
           </a:p>
         </p:txBody>
@@ -26763,8 +26535,8 @@
                 <a:solidFill>
                   <a:srgbClr val="000000"/>
                 </a:solidFill>
-                <a:latin typeface="Century Gothic"/>
-                <a:cs typeface="Century Gothic"/>
+                <a:latin typeface="Arial"/>
+                <a:cs typeface="Arial"/>
               </a:rPr>
               <a:t>200 ward patients; 20 have a pressure injury</a:t>
             </a:r>
@@ -26784,8 +26556,8 @@
                 <a:solidFill>
                   <a:srgbClr val="000000"/>
                 </a:solidFill>
-                <a:latin typeface="Century Gothic"/>
-                <a:cs typeface="Century Gothic"/>
+                <a:latin typeface="Arial"/>
+                <a:cs typeface="Arial"/>
               </a:rPr>
               <a:t>Prevalence 10%</a:t>
             </a:r>
@@ -26829,10 +26601,10 @@
                 <a:solidFill>
                   <a:srgbClr val="FFFFFF"/>
                 </a:solidFill>
-                <a:latin typeface="Century Gothic"/>
-                <a:cs typeface="Century Gothic"/>
-              </a:rPr>
-              <a:t>2. At risk</a:t>
+                <a:latin typeface="Arial"/>
+                <a:cs typeface="Arial"/>
+              </a:rPr>
+              <a:t>At risk</a:t>
             </a:r>
           </a:p>
         </p:txBody>
@@ -26878,8 +26650,8 @@
                 <a:solidFill>
                   <a:srgbClr val="000000"/>
                 </a:solidFill>
-                <a:latin typeface="Century Gothic"/>
-                <a:cs typeface="Century Gothic"/>
+                <a:latin typeface="Arial"/>
+                <a:cs typeface="Arial"/>
               </a:rPr>
               <a:t>180 patients without an injury</a:t>
             </a:r>
@@ -26923,10 +26695,10 @@
                 <a:solidFill>
                   <a:srgbClr val="FFFFFF"/>
                 </a:solidFill>
-                <a:latin typeface="Century Gothic"/>
-                <a:cs typeface="Century Gothic"/>
-              </a:rPr>
-              <a:t>3. One week</a:t>
+                <a:latin typeface="Arial"/>
+                <a:cs typeface="Arial"/>
+              </a:rPr>
+              <a:t>One week</a:t>
             </a:r>
           </a:p>
         </p:txBody>
@@ -26972,8 +26744,8 @@
                 <a:solidFill>
                   <a:srgbClr val="000000"/>
                 </a:solidFill>
-                <a:latin typeface="Century Gothic"/>
-                <a:cs typeface="Century Gothic"/>
+                <a:latin typeface="Arial"/>
+                <a:cs typeface="Arial"/>
               </a:rPr>
               <a:t>9 develop a new injury</a:t>
             </a:r>
@@ -27017,10 +26789,10 @@
                 <a:solidFill>
                   <a:srgbClr val="FFFFFF"/>
                 </a:solidFill>
-                <a:latin typeface="Century Gothic"/>
-                <a:cs typeface="Century Gothic"/>
-              </a:rPr>
-              <a:t>4. Incidence</a:t>
+                <a:latin typeface="Arial"/>
+                <a:cs typeface="Arial"/>
+              </a:rPr>
+              <a:t>Incidence</a:t>
             </a:r>
           </a:p>
         </p:txBody>
@@ -27066,8 +26838,8 @@
                 <a:solidFill>
                   <a:srgbClr val="000000"/>
                 </a:solidFill>
-                <a:latin typeface="Century Gothic"/>
-                <a:cs typeface="Century Gothic"/>
+                <a:latin typeface="Arial"/>
+                <a:cs typeface="Arial"/>
               </a:rPr>
               <a:t>9 / 180 = 5% per week</a:t>
             </a:r>
@@ -27087,8 +26859,8 @@
                 <a:solidFill>
                   <a:srgbClr val="000000"/>
                 </a:solidFill>
-                <a:latin typeface="Century Gothic"/>
-                <a:cs typeface="Century Gothic"/>
+                <a:latin typeface="Arial"/>
+                <a:cs typeface="Arial"/>
               </a:rPr>
               <a:t>(denominator = at risk)</a:t>
             </a:r>
@@ -27132,8 +26904,8 @@
                 <a:solidFill>
                   <a:srgbClr val="FFFFFF"/>
                 </a:solidFill>
-                <a:latin typeface="Century Gothic"/>
-                <a:cs typeface="Century Gothic"/>
+                <a:latin typeface="Arial"/>
+                <a:cs typeface="Arial"/>
               </a:rPr>
               <a:t>KEY MESSAGE   </a:t>
             </a:r>
@@ -27142,8 +26914,8 @@
                 <a:solidFill>
                   <a:srgbClr val="FFFFFF"/>
                 </a:solidFill>
-                <a:latin typeface="Century Gothic"/>
-                <a:cs typeface="Century Gothic"/>
+                <a:latin typeface="Arial"/>
+                <a:cs typeface="Arial"/>
               </a:rPr>
               <a:t>Incidence always has a time period and only counts people at risk.</a:t>
             </a:r>
@@ -27180,7 +26952,7 @@
                     <a:lumMod val="50000"/>
                   </a:schemeClr>
                 </a:solidFill>
-                <a:latin typeface="Verdana"/>
+                <a:latin typeface="Arial"/>
               </a:rPr>
               <a:t>Neudata | #ClearDataClearImpact</a:t>
             </a:r>
@@ -27310,8 +27082,8 @@
                 <a:solidFill>
                   <a:srgbClr val="0D7377"/>
                 </a:solidFill>
-                <a:latin typeface="Century Gothic"/>
-                <a:cs typeface="Century Gothic"/>
+                <a:latin typeface="Arial"/>
+                <a:cs typeface="Arial"/>
               </a:rPr>
               <a:t>Random error versus bias</a:t>
             </a:r>
@@ -27407,8 +27179,8 @@
                 <a:solidFill>
                   <a:srgbClr val="FFFFFF"/>
                 </a:solidFill>
-                <a:latin typeface="Century Gothic"/>
-                <a:cs typeface="Century Gothic"/>
+                <a:latin typeface="Arial"/>
+                <a:cs typeface="Arial"/>
               </a:rPr>
               <a:t>KEY MESSAGE   </a:t>
             </a:r>
@@ -27417,8 +27189,8 @@
                 <a:solidFill>
                   <a:srgbClr val="FFFFFF"/>
                 </a:solidFill>
-                <a:latin typeface="Century Gothic"/>
-                <a:cs typeface="Century Gothic"/>
+                <a:latin typeface="Arial"/>
+                <a:cs typeface="Arial"/>
               </a:rPr>
               <a:t>A bigger sample shrinks random error but leaves bias untouched.</a:t>
             </a:r>
@@ -27455,7 +27227,7 @@
                     <a:lumMod val="50000"/>
                   </a:schemeClr>
                 </a:solidFill>
-                <a:latin typeface="Verdana"/>
+                <a:latin typeface="Arial"/>
               </a:rPr>
               <a:t>Neudata | #ClearDataClearImpact</a:t>
             </a:r>
@@ -27609,8 +27381,8 @@
                 <a:solidFill>
                   <a:srgbClr val="4472C4"/>
                 </a:solidFill>
-                <a:latin typeface="Century Gothic"/>
-                <a:cs typeface="Century Gothic"/>
+                <a:latin typeface="Arial"/>
+                <a:cs typeface="Arial"/>
               </a:rPr>
               <a:t>Copyright © Neudata, 2026</a:t>
             </a:r>
@@ -27755,7 +27527,7 @@
                     <a:lumMod val="50000"/>
                   </a:schemeClr>
                 </a:solidFill>
-                <a:latin typeface="Verdana"/>
+                <a:latin typeface="Arial"/>
               </a:rPr>
               <a:t>Neudata | #ClearDataClearImpact</a:t>
             </a:r>
@@ -27861,8 +27633,8 @@
                 <a:solidFill>
                   <a:srgbClr val="0D7377"/>
                 </a:solidFill>
-                <a:latin typeface="Century Gothic"/>
-                <a:cs typeface="Century Gothic"/>
+                <a:latin typeface="Arial"/>
+                <a:cs typeface="Arial"/>
               </a:rPr>
               <a:t>Selection bias: who got into the study?</a:t>
             </a:r>
@@ -27958,8 +27730,8 @@
                 <a:solidFill>
                   <a:srgbClr val="FFFFFF"/>
                 </a:solidFill>
-                <a:latin typeface="Century Gothic"/>
-                <a:cs typeface="Century Gothic"/>
+                <a:latin typeface="Arial"/>
+                <a:cs typeface="Arial"/>
               </a:rPr>
               <a:t>KEY MESSAGE   </a:t>
             </a:r>
@@ -27968,8 +27740,8 @@
                 <a:solidFill>
                   <a:srgbClr val="FFFFFF"/>
                 </a:solidFill>
-                <a:latin typeface="Century Gothic"/>
-                <a:cs typeface="Century Gothic"/>
+                <a:latin typeface="Arial"/>
+                <a:cs typeface="Arial"/>
               </a:rPr>
               <a:t>If the sample differs from the target population, results may not transfer.</a:t>
             </a:r>
@@ -28006,7 +27778,7 @@
                     <a:lumMod val="50000"/>
                   </a:schemeClr>
                 </a:solidFill>
-                <a:latin typeface="Verdana"/>
+                <a:latin typeface="Arial"/>
               </a:rPr>
               <a:t>Neudata | #ClearDataClearImpact</a:t>
             </a:r>
@@ -28136,8 +27908,8 @@
                 <a:solidFill>
                   <a:srgbClr val="0D7377"/>
                 </a:solidFill>
-                <a:latin typeface="Century Gothic"/>
-                <a:cs typeface="Century Gothic"/>
+                <a:latin typeface="Arial"/>
+                <a:cs typeface="Arial"/>
               </a:rPr>
               <a:t>Information bias: how things were measured</a:t>
             </a:r>
@@ -28233,8 +28005,8 @@
                 <a:solidFill>
                   <a:srgbClr val="FFFFFF"/>
                 </a:solidFill>
-                <a:latin typeface="Century Gothic"/>
-                <a:cs typeface="Century Gothic"/>
+                <a:latin typeface="Arial"/>
+                <a:cs typeface="Arial"/>
               </a:rPr>
               <a:t>KEY MESSAGE   </a:t>
             </a:r>
@@ -28243,8 +28015,8 @@
                 <a:solidFill>
                   <a:srgbClr val="FFFFFF"/>
                 </a:solidFill>
-                <a:latin typeface="Century Gothic"/>
-                <a:cs typeface="Century Gothic"/>
+                <a:latin typeface="Arial"/>
+                <a:cs typeface="Arial"/>
               </a:rPr>
               <a:t>Measure exposure and outcome the same way in every group.</a:t>
             </a:r>
@@ -28281,7 +28053,7 @@
                     <a:lumMod val="50000"/>
                   </a:schemeClr>
                 </a:solidFill>
-                <a:latin typeface="Verdana"/>
+                <a:latin typeface="Arial"/>
               </a:rPr>
               <a:t>Neudata | #ClearDataClearImpact</a:t>
             </a:r>
@@ -28411,8 +28183,8 @@
                 <a:solidFill>
                   <a:srgbClr val="0D7377"/>
                 </a:solidFill>
-                <a:latin typeface="Century Gothic"/>
-                <a:cs typeface="Century Gothic"/>
+                <a:latin typeface="Arial"/>
+                <a:cs typeface="Arial"/>
               </a:rPr>
               <a:t>Check your understanding: which bias?</a:t>
             </a:r>
@@ -28482,8 +28254,8 @@
                 <a:solidFill>
                   <a:srgbClr val="FFFFFF"/>
                 </a:solidFill>
-                <a:latin typeface="Century Gothic"/>
-                <a:cs typeface="Century Gothic"/>
+                <a:latin typeface="Arial"/>
+                <a:cs typeface="Arial"/>
               </a:rPr>
               <a:t>QUICK QUIZ   |   2 min</a:t>
             </a:r>
@@ -28520,25 +28292,19 @@
               <a:spcBef>
                 <a:spcPts val="450"/>
               </a:spcBef>
-              <a:buNone/>
-            </a:pPr>
-            <a:r>
-              <a:rPr lang="en-US" sz="1650" b="1" dirty="0">
-                <a:solidFill>
-                  <a:srgbClr val="6C3483"/>
-                </a:solidFill>
-                <a:latin typeface="Century Gothic"/>
-                <a:cs typeface="Century Gothic"/>
-              </a:rPr>
-              <a:t>1.  </a:t>
-            </a:r>
+              <a:buClr>
+                <a:srgbClr val="6C3483"/>
+              </a:buClr>
+              <a:buFont typeface="Arial"/>
+              <a:buChar char="•"/>
+            </a:pPr>
             <a:r>
               <a:rPr lang="en-US" sz="1650" dirty="0">
                 <a:solidFill>
                   <a:srgbClr val="000000"/>
                 </a:solidFill>
-                <a:latin typeface="Century Gothic"/>
-                <a:cs typeface="Century Gothic"/>
+                <a:latin typeface="Arial"/>
+                <a:cs typeface="Arial"/>
               </a:rPr>
               <a:t>A. Only patients who survived to hospital discharge are interviewed about their ICU care</a:t>
             </a:r>
@@ -28551,25 +28317,19 @@
               <a:spcBef>
                 <a:spcPts val="450"/>
               </a:spcBef>
-              <a:buNone/>
-            </a:pPr>
-            <a:r>
-              <a:rPr lang="en-US" sz="1650" b="1" dirty="0">
-                <a:solidFill>
-                  <a:srgbClr val="6C3483"/>
-                </a:solidFill>
-                <a:latin typeface="Century Gothic"/>
-                <a:cs typeface="Century Gothic"/>
-              </a:rPr>
-              <a:t>2.  </a:t>
-            </a:r>
+              <a:buClr>
+                <a:srgbClr val="6C3483"/>
+              </a:buClr>
+              <a:buFont typeface="Arial"/>
+              <a:buChar char="•"/>
+            </a:pPr>
             <a:r>
               <a:rPr lang="en-US" sz="1650" dirty="0">
                 <a:solidFill>
                   <a:srgbClr val="000000"/>
                 </a:solidFill>
-                <a:latin typeface="Century Gothic"/>
-                <a:cs typeface="Century Gothic"/>
+                <a:latin typeface="Arial"/>
+                <a:cs typeface="Arial"/>
               </a:rPr>
               <a:t>B. The nurse who knows each patient's group scores their pain</a:t>
             </a:r>
@@ -28582,25 +28342,19 @@
               <a:spcBef>
                 <a:spcPts val="450"/>
               </a:spcBef>
-              <a:buNone/>
-            </a:pPr>
-            <a:r>
-              <a:rPr lang="en-US" sz="1650" b="1" dirty="0">
-                <a:solidFill>
-                  <a:srgbClr val="6C3483"/>
-                </a:solidFill>
-                <a:latin typeface="Century Gothic"/>
-                <a:cs typeface="Century Gothic"/>
-              </a:rPr>
-              <a:t>3.  </a:t>
-            </a:r>
+              <a:buClr>
+                <a:srgbClr val="6C3483"/>
+              </a:buClr>
+              <a:buFont typeface="Arial"/>
+              <a:buChar char="•"/>
+            </a:pPr>
             <a:r>
               <a:rPr lang="en-US" sz="1650" dirty="0">
                 <a:solidFill>
                   <a:srgbClr val="000000"/>
                 </a:solidFill>
-                <a:latin typeface="Century Gothic"/>
-                <a:cs typeface="Century Gothic"/>
+                <a:latin typeface="Arial"/>
+                <a:cs typeface="Arial"/>
               </a:rPr>
               <a:t>C. A scale that always reads 0.5 kg too high is used on one ward only</a:t>
             </a:r>
@@ -28644,8 +28398,8 @@
                 <a:solidFill>
                   <a:srgbClr val="6C3483"/>
                 </a:solidFill>
-                <a:latin typeface="Century Gothic"/>
-                <a:cs typeface="Century Gothic"/>
+                <a:latin typeface="Arial"/>
+                <a:cs typeface="Arial"/>
               </a:rPr>
               <a:t>Choose</a:t>
             </a:r>
@@ -28666,8 +28420,8 @@
                 <a:solidFill>
                   <a:srgbClr val="000000"/>
                 </a:solidFill>
-                <a:latin typeface="Century Gothic"/>
-                <a:cs typeface="Century Gothic"/>
+                <a:latin typeface="Arial"/>
+                <a:cs typeface="Arial"/>
               </a:rPr>
               <a:t>Selection bias</a:t>
             </a:r>
@@ -28688,8 +28442,8 @@
                 <a:solidFill>
                   <a:srgbClr val="000000"/>
                 </a:solidFill>
-                <a:latin typeface="Century Gothic"/>
-                <a:cs typeface="Century Gothic"/>
+                <a:latin typeface="Arial"/>
+                <a:cs typeface="Arial"/>
               </a:rPr>
               <a:t>Observer bias</a:t>
             </a:r>
@@ -28710,8 +28464,8 @@
                 <a:solidFill>
                   <a:srgbClr val="000000"/>
                 </a:solidFill>
-                <a:latin typeface="Century Gothic"/>
-                <a:cs typeface="Century Gothic"/>
+                <a:latin typeface="Arial"/>
+                <a:cs typeface="Arial"/>
               </a:rPr>
               <a:t>Measurement bias</a:t>
             </a:r>
@@ -28757,8 +28511,8 @@
                 <a:solidFill>
                   <a:srgbClr val="6C3483"/>
                 </a:solidFill>
-                <a:latin typeface="Century Gothic"/>
-                <a:cs typeface="Century Gothic"/>
+                <a:latin typeface="Arial"/>
+                <a:cs typeface="Arial"/>
               </a:rPr>
               <a:t>OUTPUT   </a:t>
             </a:r>
@@ -28767,8 +28521,8 @@
                 <a:solidFill>
                   <a:srgbClr val="000000"/>
                 </a:solidFill>
-                <a:latin typeface="Century Gothic"/>
-                <a:cs typeface="Century Gothic"/>
+                <a:latin typeface="Arial"/>
+                <a:cs typeface="Arial"/>
               </a:rPr>
               <a:t>One bias for each (answers in the notes)</a:t>
             </a:r>
@@ -28805,7 +28559,7 @@
                     <a:lumMod val="50000"/>
                   </a:schemeClr>
                 </a:solidFill>
-                <a:latin typeface="Verdana"/>
+                <a:latin typeface="Arial"/>
               </a:rPr>
               <a:t>Neudata | #ClearDataClearImpact</a:t>
             </a:r>
@@ -28935,8 +28689,8 @@
                 <a:solidFill>
                   <a:srgbClr val="0D7377"/>
                 </a:solidFill>
-                <a:latin typeface="Century Gothic"/>
-                <a:cs typeface="Century Gothic"/>
+                <a:latin typeface="Arial"/>
+                <a:cs typeface="Arial"/>
               </a:rPr>
               <a:t>Confounding by indication: the ICU fluid example</a:t>
             </a:r>
@@ -29032,8 +28786,8 @@
                 <a:solidFill>
                   <a:srgbClr val="FFFFFF"/>
                 </a:solidFill>
-                <a:latin typeface="Century Gothic"/>
-                <a:cs typeface="Century Gothic"/>
+                <a:latin typeface="Arial"/>
+                <a:cs typeface="Arial"/>
               </a:rPr>
               <a:t>KEY MESSAGE   </a:t>
             </a:r>
@@ -29042,8 +28796,8 @@
                 <a:solidFill>
                   <a:srgbClr val="FFFFFF"/>
                 </a:solidFill>
-                <a:latin typeface="Century Gothic"/>
-                <a:cs typeface="Century Gothic"/>
+                <a:latin typeface="Arial"/>
+                <a:cs typeface="Arial"/>
               </a:rPr>
               <a:t>A confounder is linked to the exposure AND causes the outcome.</a:t>
             </a:r>
@@ -29080,7 +28834,7 @@
                     <a:lumMod val="50000"/>
                   </a:schemeClr>
                 </a:solidFill>
-                <a:latin typeface="Verdana"/>
+                <a:latin typeface="Arial"/>
               </a:rPr>
               <a:t>Neudata | #ClearDataClearImpact</a:t>
             </a:r>
@@ -29197,7 +28951,7 @@
     </a:clrScheme>
     <a:fontScheme name="Office">
       <a:majorFont>
-        <a:latin typeface="Calibri"/>
+        <a:latin typeface="Arial"/>
         <a:ea typeface=""/>
         <a:cs typeface=""/>
         <a:font script="Jpan" typeface="ＭＳ Ｐゴシック"/>
@@ -29232,7 +28986,7 @@
         <a:font script="Geor" typeface="Sylfaen"/>
       </a:majorFont>
       <a:minorFont>
-        <a:latin typeface="Calibri"/>
+        <a:latin typeface="Arial"/>
         <a:ea typeface=""/>
         <a:cs typeface=""/>
         <a:font script="Jpan" typeface="ＭＳ Ｐゴシック"/>
@@ -29517,7 +29271,7 @@
     </a:clrScheme>
     <a:fontScheme name="Office">
       <a:majorFont>
-        <a:latin typeface="Calibri Light" panose="020F0302020204030204"/>
+        <a:latin typeface="Arial" panose="020F0302020204030204"/>
         <a:ea typeface=""/>
         <a:cs typeface=""/>
         <a:font script="Jpan" typeface="游ゴシック Light"/>
@@ -29552,7 +29306,7 @@
         <a:font script="Geor" typeface="Sylfaen"/>
       </a:majorFont>
       <a:minorFont>
-        <a:latin typeface="Calibri" panose="020F0502020204030204"/>
+        <a:latin typeface="Arial" panose="020F0502020204030204"/>
         <a:ea typeface=""/>
         <a:cs typeface=""/>
         <a:font script="Jpan" typeface="游ゴシック"/>
@@ -29778,7 +29532,7 @@
     </a:clrScheme>
     <a:fontScheme name="Office">
       <a:majorFont>
-        <a:latin typeface="Calibri Light" panose="020F0302020204030204"/>
+        <a:latin typeface="Arial" panose="020F0302020204030204"/>
         <a:ea typeface=""/>
         <a:cs typeface=""/>
         <a:font script="Jpan" typeface="游ゴシック Light"/>
@@ -29813,7 +29567,7 @@
         <a:font script="Geor" typeface="Sylfaen"/>
       </a:majorFont>
       <a:minorFont>
-        <a:latin typeface="Calibri" panose="020F0502020204030204"/>
+        <a:latin typeface="Arial" panose="020F0502020204030204"/>
         <a:ea typeface=""/>
         <a:cs typeface=""/>
         <a:font script="Jpan" typeface="游ゴシック"/>

--- a/en/files/slides/Session_4_EN.pptx
+++ b/en/files/slides/Session_4_EN.pptx
@@ -743,7 +743,7 @@
           <a:p>
             <a:r>
               <a:rPr lang="en-US" sz="1400" b="0" dirty="0"/>
-              <a:t>Open with the exit question from Session 3: show three of the answers you received in the chat or the form (anonymously). The question was about doctors choosing restrictive fluids for some patients: a cohort, so 'associated'. It leads straight into confounding.</a:t>
+              <a:t>Open with the exit question from Session 3: show three of the answers you received in the chat. The question was about doctors choosing restrictive fluids for some patients: a cohort, so 'associated'. It leads straight into confounding.</a:t>
             </a:r>
           </a:p>
           <a:p>
@@ -9797,12 +9797,12 @@
           </a:ln>
         </p:spPr>
         <p:txBody>
-          <a:bodyPr wrap="square" lIns="137160" tIns="91440" rIns="137160" bIns="91440" rtlCol="0" anchor="t">
+          <a:bodyPr wrap="square" lIns="137160" tIns="91440" rIns="137160" bIns="91440" rtlCol="0" anchor="ctr">
             <a:normAutofit/>
           </a:bodyPr>
           <a:lstStyle/>
           <a:p>
-            <a:pPr marL="0" indent="0" algn="l">
+            <a:pPr marL="0" indent="0" algn="ctr">
               <a:lnSpc>
                 <a:spcPct val="104000"/>
               </a:lnSpc>
@@ -9823,7 +9823,7 @@
             </a:r>
           </a:p>
           <a:p>
-            <a:pPr marL="0" indent="0" algn="l">
+            <a:pPr marL="0" indent="0" algn="ctr">
               <a:lnSpc>
                 <a:spcPct val="104000"/>
               </a:lnSpc>
@@ -9844,7 +9844,7 @@
             </a:r>
           </a:p>
           <a:p>
-            <a:pPr marL="0" indent="0" algn="l">
+            <a:pPr marL="0" indent="0" algn="ctr">
               <a:lnSpc>
                 <a:spcPct val="104000"/>
               </a:lnSpc>
@@ -9931,12 +9931,12 @@
           </a:ln>
         </p:spPr>
         <p:txBody>
-          <a:bodyPr wrap="square" lIns="137160" tIns="91440" rIns="137160" bIns="91440" rtlCol="0" anchor="t">
+          <a:bodyPr wrap="square" lIns="137160" tIns="91440" rIns="137160" bIns="91440" rtlCol="0" anchor="ctr">
             <a:normAutofit/>
           </a:bodyPr>
           <a:lstStyle/>
           <a:p>
-            <a:pPr marL="0" indent="0" algn="l">
+            <a:pPr marL="0" indent="0" algn="ctr">
               <a:lnSpc>
                 <a:spcPct val="104000"/>
               </a:lnSpc>
@@ -9957,7 +9957,7 @@
             </a:r>
           </a:p>
           <a:p>
-            <a:pPr marL="0" indent="0" algn="l">
+            <a:pPr marL="0" indent="0" algn="ctr">
               <a:lnSpc>
                 <a:spcPct val="104000"/>
               </a:lnSpc>
@@ -9978,7 +9978,7 @@
             </a:r>
           </a:p>
           <a:p>
-            <a:pPr marL="0" indent="0" algn="l">
+            <a:pPr marL="0" indent="0" algn="ctr">
               <a:lnSpc>
                 <a:spcPct val="104000"/>
               </a:lnSpc>
@@ -10065,12 +10065,12 @@
           </a:ln>
         </p:spPr>
         <p:txBody>
-          <a:bodyPr wrap="square" lIns="137160" tIns="91440" rIns="137160" bIns="91440" rtlCol="0" anchor="t">
+          <a:bodyPr wrap="square" lIns="137160" tIns="91440" rIns="137160" bIns="91440" rtlCol="0" anchor="ctr">
             <a:normAutofit/>
           </a:bodyPr>
           <a:lstStyle/>
           <a:p>
-            <a:pPr marL="0" indent="0" algn="l">
+            <a:pPr marL="0" indent="0" algn="ctr">
               <a:lnSpc>
                 <a:spcPct val="104000"/>
               </a:lnSpc>
@@ -10091,7 +10091,7 @@
             </a:r>
           </a:p>
           <a:p>
-            <a:pPr marL="0" indent="0" algn="l">
+            <a:pPr marL="0" indent="0" algn="ctr">
               <a:lnSpc>
                 <a:spcPct val="104000"/>
               </a:lnSpc>
@@ -10112,7 +10112,7 @@
             </a:r>
           </a:p>
           <a:p>
-            <a:pPr marL="0" indent="0" algn="l">
+            <a:pPr marL="0" indent="0" algn="ctr">
               <a:lnSpc>
                 <a:spcPct val="104000"/>
               </a:lnSpc>
@@ -10133,7 +10133,7 @@
             </a:r>
           </a:p>
           <a:p>
-            <a:pPr marL="0" indent="0" algn="l">
+            <a:pPr marL="0" indent="0" algn="ctr">
               <a:lnSpc>
                 <a:spcPct val="104000"/>
               </a:lnSpc>
@@ -10785,12 +10785,12 @@
           </a:ln>
         </p:spPr>
         <p:txBody>
-          <a:bodyPr wrap="square" lIns="137160" tIns="91440" rIns="137160" bIns="91440" rtlCol="0" anchor="t">
+          <a:bodyPr wrap="square" lIns="137160" tIns="91440" rIns="137160" bIns="91440" rtlCol="0" anchor="ctr">
             <a:normAutofit/>
           </a:bodyPr>
           <a:lstStyle/>
           <a:p>
-            <a:pPr marL="0" indent="0" algn="l">
+            <a:pPr marL="0" indent="0" algn="ctr">
               <a:lnSpc>
                 <a:spcPct val="104000"/>
               </a:lnSpc>
@@ -10811,7 +10811,7 @@
             </a:r>
           </a:p>
           <a:p>
-            <a:pPr marL="0" indent="0" algn="l">
+            <a:pPr marL="0" indent="0" algn="ctr">
               <a:lnSpc>
                 <a:spcPct val="104000"/>
               </a:lnSpc>
@@ -10832,7 +10832,7 @@
             </a:r>
           </a:p>
           <a:p>
-            <a:pPr marL="0" indent="0" algn="l">
+            <a:pPr marL="0" indent="0" algn="ctr">
               <a:lnSpc>
                 <a:spcPct val="104000"/>
               </a:lnSpc>
@@ -10853,7 +10853,7 @@
             </a:r>
           </a:p>
           <a:p>
-            <a:pPr marL="0" indent="0" algn="l">
+            <a:pPr marL="0" indent="0" algn="ctr">
               <a:lnSpc>
                 <a:spcPct val="104000"/>
               </a:lnSpc>
@@ -10940,12 +10940,12 @@
           </a:ln>
         </p:spPr>
         <p:txBody>
-          <a:bodyPr wrap="square" lIns="137160" tIns="91440" rIns="137160" bIns="91440" rtlCol="0" anchor="t">
+          <a:bodyPr wrap="square" lIns="137160" tIns="91440" rIns="137160" bIns="91440" rtlCol="0" anchor="ctr">
             <a:normAutofit/>
           </a:bodyPr>
           <a:lstStyle/>
           <a:p>
-            <a:pPr marL="0" indent="0" algn="l">
+            <a:pPr marL="0" indent="0" algn="ctr">
               <a:lnSpc>
                 <a:spcPct val="104000"/>
               </a:lnSpc>
@@ -10966,7 +10966,7 @@
             </a:r>
           </a:p>
           <a:p>
-            <a:pPr marL="0" indent="0" algn="l">
+            <a:pPr marL="0" indent="0" algn="ctr">
               <a:lnSpc>
                 <a:spcPct val="104000"/>
               </a:lnSpc>
@@ -10987,7 +10987,7 @@
             </a:r>
           </a:p>
           <a:p>
-            <a:pPr marL="0" indent="0" algn="l">
+            <a:pPr marL="0" indent="0" algn="ctr">
               <a:lnSpc>
                 <a:spcPct val="104000"/>
               </a:lnSpc>
@@ -11008,7 +11008,7 @@
             </a:r>
           </a:p>
           <a:p>
-            <a:pPr marL="0" indent="0" algn="l">
+            <a:pPr marL="0" indent="0" algn="ctr">
               <a:lnSpc>
                 <a:spcPct val="104000"/>
               </a:lnSpc>
@@ -11385,12 +11385,12 @@
           </a:ln>
         </p:spPr>
         <p:txBody>
-          <a:bodyPr wrap="square" lIns="137160" tIns="91440" rIns="137160" bIns="91440" rtlCol="0" anchor="t">
+          <a:bodyPr wrap="square" lIns="137160" tIns="91440" rIns="137160" bIns="91440" rtlCol="0" anchor="ctr">
             <a:normAutofit/>
           </a:bodyPr>
           <a:lstStyle/>
           <a:p>
-            <a:pPr marL="0" indent="0" algn="l">
+            <a:pPr marL="0" indent="0" algn="ctr">
               <a:lnSpc>
                 <a:spcPct val="104000"/>
               </a:lnSpc>
@@ -11411,7 +11411,7 @@
             </a:r>
           </a:p>
           <a:p>
-            <a:pPr marL="0" indent="0" algn="l">
+            <a:pPr marL="0" indent="0" algn="ctr">
               <a:lnSpc>
                 <a:spcPct val="104000"/>
               </a:lnSpc>
@@ -11498,12 +11498,12 @@
           </a:ln>
         </p:spPr>
         <p:txBody>
-          <a:bodyPr wrap="square" lIns="137160" tIns="91440" rIns="137160" bIns="91440" rtlCol="0" anchor="t">
+          <a:bodyPr wrap="square" lIns="137160" tIns="91440" rIns="137160" bIns="91440" rtlCol="0" anchor="ctr">
             <a:normAutofit/>
           </a:bodyPr>
           <a:lstStyle/>
           <a:p>
-            <a:pPr marL="0" indent="0" algn="l">
+            <a:pPr marL="0" indent="0" algn="ctr">
               <a:lnSpc>
                 <a:spcPct val="104000"/>
               </a:lnSpc>
@@ -11524,7 +11524,7 @@
             </a:r>
           </a:p>
           <a:p>
-            <a:pPr marL="0" indent="0" algn="l">
+            <a:pPr marL="0" indent="0" algn="ctr">
               <a:lnSpc>
                 <a:spcPct val="104000"/>
               </a:lnSpc>
@@ -11545,7 +11545,7 @@
             </a:r>
           </a:p>
           <a:p>
-            <a:pPr marL="0" indent="0" algn="l">
+            <a:pPr marL="0" indent="0" algn="ctr">
               <a:lnSpc>
                 <a:spcPct val="104000"/>
               </a:lnSpc>
@@ -11632,12 +11632,12 @@
           </a:ln>
         </p:spPr>
         <p:txBody>
-          <a:bodyPr wrap="square" lIns="137160" tIns="91440" rIns="137160" bIns="91440" rtlCol="0" anchor="t">
+          <a:bodyPr wrap="square" lIns="137160" tIns="91440" rIns="137160" bIns="91440" rtlCol="0" anchor="ctr">
             <a:normAutofit/>
           </a:bodyPr>
           <a:lstStyle/>
           <a:p>
-            <a:pPr marL="0" indent="0" algn="l">
+            <a:pPr marL="0" indent="0" algn="ctr">
               <a:lnSpc>
                 <a:spcPct val="104000"/>
               </a:lnSpc>
@@ -11658,7 +11658,7 @@
             </a:r>
           </a:p>
           <a:p>
-            <a:pPr marL="0" indent="0" algn="l">
+            <a:pPr marL="0" indent="0" algn="ctr">
               <a:lnSpc>
                 <a:spcPct val="104000"/>
               </a:lnSpc>
@@ -11679,7 +11679,7 @@
             </a:r>
           </a:p>
           <a:p>
-            <a:pPr marL="0" indent="0" algn="l">
+            <a:pPr marL="0" indent="0" algn="ctr">
               <a:lnSpc>
                 <a:spcPct val="104000"/>
               </a:lnSpc>
@@ -12017,12 +12017,12 @@
           </a:ln>
         </p:spPr>
         <p:txBody>
-          <a:bodyPr wrap="square" lIns="137160" tIns="91440" rIns="137160" bIns="91440" rtlCol="0" anchor="t">
+          <a:bodyPr wrap="square" lIns="137160" tIns="91440" rIns="137160" bIns="91440" rtlCol="0" anchor="ctr">
             <a:normAutofit/>
           </a:bodyPr>
           <a:lstStyle/>
           <a:p>
-            <a:pPr marL="0" indent="0" algn="l">
+            <a:pPr marL="0" indent="0" algn="ctr">
               <a:lnSpc>
                 <a:spcPct val="104000"/>
               </a:lnSpc>
@@ -12043,7 +12043,7 @@
             </a:r>
           </a:p>
           <a:p>
-            <a:pPr marL="0" indent="0" algn="l">
+            <a:pPr marL="0" indent="0" algn="ctr">
               <a:lnSpc>
                 <a:spcPct val="104000"/>
               </a:lnSpc>
@@ -12064,7 +12064,7 @@
             </a:r>
           </a:p>
           <a:p>
-            <a:pPr marL="0" indent="0" algn="l">
+            <a:pPr marL="0" indent="0" algn="ctr">
               <a:lnSpc>
                 <a:spcPct val="104000"/>
               </a:lnSpc>
@@ -12085,7 +12085,7 @@
             </a:r>
           </a:p>
           <a:p>
-            <a:pPr marL="0" indent="0" algn="l">
+            <a:pPr marL="0" indent="0" algn="ctr">
               <a:lnSpc>
                 <a:spcPct val="104000"/>
               </a:lnSpc>
@@ -12106,7 +12106,7 @@
             </a:r>
           </a:p>
           <a:p>
-            <a:pPr marL="0" indent="0" algn="l">
+            <a:pPr marL="0" indent="0" algn="ctr">
               <a:lnSpc>
                 <a:spcPct val="104000"/>
               </a:lnSpc>
@@ -12193,12 +12193,12 @@
           </a:ln>
         </p:spPr>
         <p:txBody>
-          <a:bodyPr wrap="square" lIns="137160" tIns="91440" rIns="137160" bIns="91440" rtlCol="0" anchor="t">
+          <a:bodyPr wrap="square" lIns="137160" tIns="91440" rIns="137160" bIns="91440" rtlCol="0" anchor="ctr">
             <a:normAutofit/>
           </a:bodyPr>
           <a:lstStyle/>
           <a:p>
-            <a:pPr marL="0" indent="0" algn="l">
+            <a:pPr marL="0" indent="0" algn="ctr">
               <a:lnSpc>
                 <a:spcPct val="104000"/>
               </a:lnSpc>
@@ -12219,7 +12219,7 @@
             </a:r>
           </a:p>
           <a:p>
-            <a:pPr marL="0" indent="0" algn="l">
+            <a:pPr marL="0" indent="0" algn="ctr">
               <a:lnSpc>
                 <a:spcPct val="104000"/>
               </a:lnSpc>
@@ -12240,7 +12240,7 @@
             </a:r>
           </a:p>
           <a:p>
-            <a:pPr marL="0" indent="0" algn="l">
+            <a:pPr marL="0" indent="0" algn="ctr">
               <a:lnSpc>
                 <a:spcPct val="104000"/>
               </a:lnSpc>
@@ -12261,7 +12261,7 @@
             </a:r>
           </a:p>
           <a:p>
-            <a:pPr marL="0" indent="0" algn="l">
+            <a:pPr marL="0" indent="0" algn="ctr">
               <a:lnSpc>
                 <a:spcPct val="104000"/>
               </a:lnSpc>
@@ -12282,7 +12282,7 @@
             </a:r>
           </a:p>
           <a:p>
-            <a:pPr marL="0" indent="0" algn="l">
+            <a:pPr marL="0" indent="0" algn="ctr">
               <a:lnSpc>
                 <a:spcPct val="104000"/>
               </a:lnSpc>
@@ -12620,12 +12620,12 @@
           </a:ln>
         </p:spPr>
         <p:txBody>
-          <a:bodyPr wrap="square" lIns="137160" tIns="91440" rIns="137160" bIns="91440" rtlCol="0" anchor="t">
+          <a:bodyPr wrap="square" lIns="137160" tIns="91440" rIns="137160" bIns="91440" rtlCol="0" anchor="ctr">
             <a:normAutofit/>
           </a:bodyPr>
           <a:lstStyle/>
           <a:p>
-            <a:pPr marL="0" indent="0" algn="l">
+            <a:pPr marL="0" indent="0" algn="ctr">
               <a:lnSpc>
                 <a:spcPct val="104000"/>
               </a:lnSpc>
@@ -12646,7 +12646,7 @@
             </a:r>
           </a:p>
           <a:p>
-            <a:pPr marL="0" indent="0" algn="l">
+            <a:pPr marL="0" indent="0" algn="ctr">
               <a:lnSpc>
                 <a:spcPct val="104000"/>
               </a:lnSpc>
@@ -12733,12 +12733,12 @@
           </a:ln>
         </p:spPr>
         <p:txBody>
-          <a:bodyPr wrap="square" lIns="137160" tIns="91440" rIns="137160" bIns="91440" rtlCol="0" anchor="t">
+          <a:bodyPr wrap="square" lIns="137160" tIns="91440" rIns="137160" bIns="91440" rtlCol="0" anchor="ctr">
             <a:normAutofit/>
           </a:bodyPr>
           <a:lstStyle/>
           <a:p>
-            <a:pPr marL="0" indent="0" algn="l">
+            <a:pPr marL="0" indent="0" algn="ctr">
               <a:lnSpc>
                 <a:spcPct val="104000"/>
               </a:lnSpc>
@@ -12759,7 +12759,7 @@
             </a:r>
           </a:p>
           <a:p>
-            <a:pPr marL="0" indent="0" algn="l">
+            <a:pPr marL="0" indent="0" algn="ctr">
               <a:lnSpc>
                 <a:spcPct val="104000"/>
               </a:lnSpc>
@@ -12780,7 +12780,7 @@
             </a:r>
           </a:p>
           <a:p>
-            <a:pPr marL="0" indent="0" algn="l">
+            <a:pPr marL="0" indent="0" algn="ctr">
               <a:lnSpc>
                 <a:spcPct val="104000"/>
               </a:lnSpc>
@@ -12867,12 +12867,12 @@
           </a:ln>
         </p:spPr>
         <p:txBody>
-          <a:bodyPr wrap="square" lIns="137160" tIns="91440" rIns="137160" bIns="91440" rtlCol="0" anchor="t">
+          <a:bodyPr wrap="square" lIns="137160" tIns="91440" rIns="137160" bIns="91440" rtlCol="0" anchor="ctr">
             <a:normAutofit/>
           </a:bodyPr>
           <a:lstStyle/>
           <a:p>
-            <a:pPr marL="0" indent="0" algn="l">
+            <a:pPr marL="0" indent="0" algn="ctr">
               <a:lnSpc>
                 <a:spcPct val="104000"/>
               </a:lnSpc>
@@ -12893,7 +12893,7 @@
             </a:r>
           </a:p>
           <a:p>
-            <a:pPr marL="0" indent="0" algn="l">
+            <a:pPr marL="0" indent="0" algn="ctr">
               <a:lnSpc>
                 <a:spcPct val="104000"/>
               </a:lnSpc>
@@ -12914,7 +12914,7 @@
             </a:r>
           </a:p>
           <a:p>
-            <a:pPr marL="0" indent="0" algn="l">
+            <a:pPr marL="0" indent="0" algn="ctr">
               <a:lnSpc>
                 <a:spcPct val="104000"/>
               </a:lnSpc>
@@ -12935,7 +12935,7 @@
             </a:r>
           </a:p>
           <a:p>
-            <a:pPr marL="0" indent="0" algn="l">
+            <a:pPr marL="0" indent="0" algn="ctr">
               <a:lnSpc>
                 <a:spcPct val="104000"/>
               </a:lnSpc>
@@ -14399,12 +14399,12 @@
           </a:ln>
         </p:spPr>
         <p:txBody>
-          <a:bodyPr wrap="square" lIns="137160" tIns="91440" rIns="137160" bIns="91440" rtlCol="0" anchor="t">
+          <a:bodyPr wrap="square" lIns="137160" tIns="91440" rIns="137160" bIns="91440" rtlCol="0" anchor="ctr">
             <a:normAutofit/>
           </a:bodyPr>
           <a:lstStyle/>
           <a:p>
-            <a:pPr marL="0" indent="0" algn="l">
+            <a:pPr marL="0" indent="0" algn="ctr">
               <a:buNone/>
             </a:pPr>
             <a:r>
@@ -14419,15 +14419,14 @@
             </a:r>
           </a:p>
           <a:p>
-            <a:pPr marL="274320" indent="-274320" algn="l">
+            <a:pPr marL="0" indent="0" algn="ctr">
               <a:lnSpc>
                 <a:spcPct val="104000"/>
               </a:lnSpc>
               <a:spcBef>
                 <a:spcPts val="300"/>
               </a:spcBef>
-              <a:buFont typeface="Arial"/>
-              <a:buChar char="•"/>
+              <a:buNone/>
             </a:pPr>
             <a:r>
               <a:rPr lang="en-US" sz="1500" dirty="0">
@@ -14441,15 +14440,14 @@
             </a:r>
           </a:p>
           <a:p>
-            <a:pPr marL="274320" indent="-274320" algn="l">
+            <a:pPr marL="0" indent="0" algn="ctr">
               <a:lnSpc>
                 <a:spcPct val="104000"/>
               </a:lnSpc>
               <a:spcBef>
                 <a:spcPts val="300"/>
               </a:spcBef>
-              <a:buFont typeface="Arial"/>
-              <a:buChar char="•"/>
+              <a:buNone/>
             </a:pPr>
             <a:r>
               <a:rPr lang="en-US" sz="1500" dirty="0">
@@ -14463,15 +14461,14 @@
             </a:r>
           </a:p>
           <a:p>
-            <a:pPr marL="274320" indent="-274320" algn="l">
+            <a:pPr marL="0" indent="0" algn="ctr">
               <a:lnSpc>
                 <a:spcPct val="104000"/>
               </a:lnSpc>
               <a:spcBef>
                 <a:spcPts val="300"/>
               </a:spcBef>
-              <a:buFont typeface="Arial"/>
-              <a:buChar char="•"/>
+              <a:buNone/>
             </a:pPr>
             <a:r>
               <a:rPr lang="en-US" sz="1500" dirty="0">
@@ -14485,15 +14482,14 @@
             </a:r>
           </a:p>
           <a:p>
-            <a:pPr marL="274320" indent="-274320" algn="l">
+            <a:pPr marL="0" indent="0" algn="ctr">
               <a:lnSpc>
                 <a:spcPct val="104000"/>
               </a:lnSpc>
               <a:spcBef>
                 <a:spcPts val="300"/>
               </a:spcBef>
-              <a:buFont typeface="Arial"/>
-              <a:buChar char="•"/>
+              <a:buNone/>
             </a:pPr>
             <a:r>
               <a:rPr lang="en-US" sz="1500" dirty="0">
@@ -15208,12 +15204,12 @@
           </a:ln>
         </p:spPr>
         <p:txBody>
-          <a:bodyPr wrap="square" lIns="137160" tIns="91440" rIns="137160" bIns="91440" rtlCol="0" anchor="t">
+          <a:bodyPr wrap="square" lIns="137160" tIns="91440" rIns="137160" bIns="91440" rtlCol="0" anchor="ctr">
             <a:normAutofit/>
           </a:bodyPr>
           <a:lstStyle/>
           <a:p>
-            <a:pPr marL="0" indent="0" algn="l">
+            <a:pPr marL="0" indent="0" algn="ctr">
               <a:buNone/>
             </a:pPr>
             <a:r>
@@ -15228,15 +15224,14 @@
             </a:r>
           </a:p>
           <a:p>
-            <a:pPr marL="274320" indent="-274320" algn="l">
+            <a:pPr marL="0" indent="0" algn="ctr">
               <a:lnSpc>
                 <a:spcPct val="104000"/>
               </a:lnSpc>
               <a:spcBef>
                 <a:spcPts val="300"/>
               </a:spcBef>
-              <a:buFont typeface="Arial"/>
-              <a:buChar char="•"/>
+              <a:buNone/>
             </a:pPr>
             <a:r>
               <a:rPr lang="en-US" sz="1500" dirty="0">
@@ -15250,15 +15245,14 @@
             </a:r>
           </a:p>
           <a:p>
-            <a:pPr marL="274320" indent="-274320" algn="l">
+            <a:pPr marL="0" indent="0" algn="ctr">
               <a:lnSpc>
                 <a:spcPct val="104000"/>
               </a:lnSpc>
               <a:spcBef>
                 <a:spcPts val="300"/>
               </a:spcBef>
-              <a:buFont typeface="Arial"/>
-              <a:buChar char="•"/>
+              <a:buNone/>
             </a:pPr>
             <a:r>
               <a:rPr lang="en-US" sz="1500" dirty="0">
@@ -15272,15 +15266,14 @@
             </a:r>
           </a:p>
           <a:p>
-            <a:pPr marL="274320" indent="-274320" algn="l">
+            <a:pPr marL="0" indent="0" algn="ctr">
               <a:lnSpc>
                 <a:spcPct val="104000"/>
               </a:lnSpc>
               <a:spcBef>
                 <a:spcPts val="300"/>
               </a:spcBef>
-              <a:buFont typeface="Arial"/>
-              <a:buChar char="•"/>
+              <a:buNone/>
             </a:pPr>
             <a:r>
               <a:rPr lang="en-US" sz="1500" dirty="0">
@@ -16869,12 +16862,12 @@
           </a:ln>
         </p:spPr>
         <p:txBody>
-          <a:bodyPr wrap="square" lIns="137160" tIns="91440" rIns="137160" bIns="91440" rtlCol="0" anchor="t">
+          <a:bodyPr wrap="square" lIns="137160" tIns="91440" rIns="137160" bIns="91440" rtlCol="0" anchor="ctr">
             <a:normAutofit/>
           </a:bodyPr>
           <a:lstStyle/>
           <a:p>
-            <a:pPr marL="0" indent="0" algn="l">
+            <a:pPr marL="0" indent="0" algn="ctr">
               <a:lnSpc>
                 <a:spcPct val="104000"/>
               </a:lnSpc>
@@ -16895,7 +16888,7 @@
             </a:r>
           </a:p>
           <a:p>
-            <a:pPr marL="0" indent="0" algn="l">
+            <a:pPr marL="0" indent="0" algn="ctr">
               <a:lnSpc>
                 <a:spcPct val="104000"/>
               </a:lnSpc>
@@ -16916,7 +16909,7 @@
             </a:r>
           </a:p>
           <a:p>
-            <a:pPr marL="0" indent="0" algn="l">
+            <a:pPr marL="0" indent="0" algn="ctr">
               <a:lnSpc>
                 <a:spcPct val="104000"/>
               </a:lnSpc>
@@ -17003,12 +16996,12 @@
           </a:ln>
         </p:spPr>
         <p:txBody>
-          <a:bodyPr wrap="square" lIns="137160" tIns="91440" rIns="137160" bIns="91440" rtlCol="0" anchor="t">
+          <a:bodyPr wrap="square" lIns="137160" tIns="91440" rIns="137160" bIns="91440" rtlCol="0" anchor="ctr">
             <a:normAutofit/>
           </a:bodyPr>
           <a:lstStyle/>
           <a:p>
-            <a:pPr marL="0" indent="0" algn="l">
+            <a:pPr marL="0" indent="0" algn="ctr">
               <a:lnSpc>
                 <a:spcPct val="104000"/>
               </a:lnSpc>
@@ -17029,7 +17022,7 @@
             </a:r>
           </a:p>
           <a:p>
-            <a:pPr marL="0" indent="0" algn="l">
+            <a:pPr marL="0" indent="0" algn="ctr">
               <a:lnSpc>
                 <a:spcPct val="104000"/>
               </a:lnSpc>
@@ -17050,7 +17043,7 @@
             </a:r>
           </a:p>
           <a:p>
-            <a:pPr marL="0" indent="0" algn="l">
+            <a:pPr marL="0" indent="0" algn="ctr">
               <a:lnSpc>
                 <a:spcPct val="104000"/>
               </a:lnSpc>
@@ -17137,12 +17130,12 @@
           </a:ln>
         </p:spPr>
         <p:txBody>
-          <a:bodyPr wrap="square" lIns="137160" tIns="91440" rIns="137160" bIns="91440" rtlCol="0" anchor="t">
+          <a:bodyPr wrap="square" lIns="137160" tIns="91440" rIns="137160" bIns="91440" rtlCol="0" anchor="ctr">
             <a:normAutofit/>
           </a:bodyPr>
           <a:lstStyle/>
           <a:p>
-            <a:pPr marL="0" indent="0" algn="l">
+            <a:pPr marL="0" indent="0" algn="ctr">
               <a:lnSpc>
                 <a:spcPct val="104000"/>
               </a:lnSpc>
@@ -17163,7 +17156,7 @@
             </a:r>
           </a:p>
           <a:p>
-            <a:pPr marL="0" indent="0" algn="l">
+            <a:pPr marL="0" indent="0" algn="ctr">
               <a:lnSpc>
                 <a:spcPct val="104000"/>
               </a:lnSpc>
@@ -17184,7 +17177,7 @@
             </a:r>
           </a:p>
           <a:p>
-            <a:pPr marL="0" indent="0" algn="l">
+            <a:pPr marL="0" indent="0" algn="ctr">
               <a:lnSpc>
                 <a:spcPct val="104000"/>
               </a:lnSpc>
@@ -17271,12 +17264,12 @@
           </a:ln>
         </p:spPr>
         <p:txBody>
-          <a:bodyPr wrap="square" lIns="137160" tIns="91440" rIns="137160" bIns="91440" rtlCol="0" anchor="t">
+          <a:bodyPr wrap="square" lIns="137160" tIns="91440" rIns="137160" bIns="91440" rtlCol="0" anchor="ctr">
             <a:normAutofit/>
           </a:bodyPr>
           <a:lstStyle/>
           <a:p>
-            <a:pPr marL="0" indent="0" algn="l">
+            <a:pPr marL="0" indent="0" algn="ctr">
               <a:lnSpc>
                 <a:spcPct val="104000"/>
               </a:lnSpc>
@@ -17297,7 +17290,7 @@
             </a:r>
           </a:p>
           <a:p>
-            <a:pPr marL="0" indent="0" algn="l">
+            <a:pPr marL="0" indent="0" algn="ctr">
               <a:lnSpc>
                 <a:spcPct val="104000"/>
               </a:lnSpc>
@@ -17318,7 +17311,7 @@
             </a:r>
           </a:p>
           <a:p>
-            <a:pPr marL="0" indent="0" algn="l">
+            <a:pPr marL="0" indent="0" algn="ctr">
               <a:lnSpc>
                 <a:spcPct val="104000"/>
               </a:lnSpc>
@@ -18357,12 +18350,12 @@
           </a:ln>
         </p:spPr>
         <p:txBody>
-          <a:bodyPr wrap="square" lIns="137160" tIns="91440" rIns="137160" bIns="91440" rtlCol="0" anchor="t">
+          <a:bodyPr wrap="square" lIns="137160" tIns="91440" rIns="137160" bIns="91440" rtlCol="0" anchor="ctr">
             <a:normAutofit/>
           </a:bodyPr>
           <a:lstStyle/>
           <a:p>
-            <a:pPr marL="0" indent="0" algn="l">
+            <a:pPr marL="0" indent="0" algn="ctr">
               <a:buNone/>
             </a:pPr>
             <a:r>
@@ -18377,15 +18370,14 @@
             </a:r>
           </a:p>
           <a:p>
-            <a:pPr marL="274320" indent="-274320" algn="l">
+            <a:pPr marL="0" indent="0" algn="ctr">
               <a:lnSpc>
                 <a:spcPct val="104000"/>
               </a:lnSpc>
               <a:spcBef>
                 <a:spcPts val="300"/>
               </a:spcBef>
-              <a:buFont typeface="Arial"/>
-              <a:buChar char="•"/>
+              <a:buNone/>
             </a:pPr>
             <a:r>
               <a:rPr lang="en-US" sz="1500" dirty="0">
@@ -18399,15 +18391,14 @@
             </a:r>
           </a:p>
           <a:p>
-            <a:pPr marL="274320" indent="-274320" algn="l">
+            <a:pPr marL="0" indent="0" algn="ctr">
               <a:lnSpc>
                 <a:spcPct val="104000"/>
               </a:lnSpc>
               <a:spcBef>
                 <a:spcPts val="300"/>
               </a:spcBef>
-              <a:buFont typeface="Arial"/>
-              <a:buChar char="•"/>
+              <a:buNone/>
             </a:pPr>
             <a:r>
               <a:rPr lang="en-US" sz="1500" dirty="0">
@@ -18421,15 +18412,14 @@
             </a:r>
           </a:p>
           <a:p>
-            <a:pPr marL="274320" indent="-274320" algn="l">
+            <a:pPr marL="0" indent="0" algn="ctr">
               <a:lnSpc>
                 <a:spcPct val="104000"/>
               </a:lnSpc>
               <a:spcBef>
                 <a:spcPts val="300"/>
               </a:spcBef>
-              <a:buFont typeface="Arial"/>
-              <a:buChar char="•"/>
+              <a:buNone/>
             </a:pPr>
             <a:r>
               <a:rPr lang="en-US" sz="1500" dirty="0">
@@ -19383,12 +19373,12 @@
           </a:ln>
         </p:spPr>
         <p:txBody>
-          <a:bodyPr wrap="square" lIns="137160" tIns="91440" rIns="137160" bIns="91440" rtlCol="0" anchor="t">
+          <a:bodyPr wrap="square" lIns="137160" tIns="91440" rIns="137160" bIns="91440" rtlCol="0" anchor="ctr">
             <a:normAutofit/>
           </a:bodyPr>
           <a:lstStyle/>
           <a:p>
-            <a:pPr marL="0" indent="0" algn="l">
+            <a:pPr marL="0" indent="0" algn="ctr">
               <a:buNone/>
             </a:pPr>
             <a:r>
@@ -19403,15 +19393,14 @@
             </a:r>
           </a:p>
           <a:p>
-            <a:pPr marL="274320" indent="-274320" algn="l">
+            <a:pPr marL="0" indent="0" algn="ctr">
               <a:lnSpc>
                 <a:spcPct val="104000"/>
               </a:lnSpc>
               <a:spcBef>
                 <a:spcPts val="300"/>
               </a:spcBef>
-              <a:buFont typeface="Arial"/>
-              <a:buChar char="•"/>
+              <a:buNone/>
             </a:pPr>
             <a:r>
               <a:rPr lang="en-US" sz="1500" dirty="0">
@@ -19425,15 +19414,14 @@
             </a:r>
           </a:p>
           <a:p>
-            <a:pPr marL="274320" indent="-274320" algn="l">
+            <a:pPr marL="0" indent="0" algn="ctr">
               <a:lnSpc>
                 <a:spcPct val="104000"/>
               </a:lnSpc>
               <a:spcBef>
                 <a:spcPts val="300"/>
               </a:spcBef>
-              <a:buFont typeface="Arial"/>
-              <a:buChar char="•"/>
+              <a:buNone/>
             </a:pPr>
             <a:r>
               <a:rPr lang="en-US" sz="1500" dirty="0">
@@ -19447,15 +19435,14 @@
             </a:r>
           </a:p>
           <a:p>
-            <a:pPr marL="274320" indent="-274320" algn="l">
+            <a:pPr marL="0" indent="0" algn="ctr">
               <a:lnSpc>
                 <a:spcPct val="104000"/>
               </a:lnSpc>
               <a:spcBef>
                 <a:spcPts val="300"/>
               </a:spcBef>
-              <a:buFont typeface="Arial"/>
-              <a:buChar char="•"/>
+              <a:buNone/>
             </a:pPr>
             <a:r>
               <a:rPr lang="en-US" sz="1500" dirty="0">
@@ -19469,15 +19456,14 @@
             </a:r>
           </a:p>
           <a:p>
-            <a:pPr marL="274320" indent="-274320" algn="l">
+            <a:pPr marL="0" indent="0" algn="ctr">
               <a:lnSpc>
                 <a:spcPct val="104000"/>
               </a:lnSpc>
               <a:spcBef>
                 <a:spcPts val="300"/>
               </a:spcBef>
-              <a:buFont typeface="Arial"/>
-              <a:buChar char="•"/>
+              <a:buNone/>
             </a:pPr>
             <a:r>
               <a:rPr lang="en-US" sz="1500" dirty="0">
@@ -20105,12 +20091,12 @@
           </a:ln>
         </p:spPr>
         <p:txBody>
-          <a:bodyPr wrap="square" lIns="137160" tIns="91440" rIns="137160" bIns="91440" rtlCol="0" anchor="t">
+          <a:bodyPr wrap="square" lIns="137160" tIns="91440" rIns="137160" bIns="91440" rtlCol="0" anchor="ctr">
             <a:normAutofit/>
           </a:bodyPr>
           <a:lstStyle/>
           <a:p>
-            <a:pPr marL="0" indent="0" algn="l">
+            <a:pPr marL="0" indent="0" algn="ctr">
               <a:lnSpc>
                 <a:spcPct val="104000"/>
               </a:lnSpc>
@@ -20131,7 +20117,7 @@
             </a:r>
           </a:p>
           <a:p>
-            <a:pPr marL="0" indent="0" algn="l">
+            <a:pPr marL="0" indent="0" algn="ctr">
               <a:lnSpc>
                 <a:spcPct val="104000"/>
               </a:lnSpc>
@@ -20152,7 +20138,7 @@
             </a:r>
           </a:p>
           <a:p>
-            <a:pPr marL="0" indent="0" algn="l">
+            <a:pPr marL="0" indent="0" algn="ctr">
               <a:lnSpc>
                 <a:spcPct val="104000"/>
               </a:lnSpc>
@@ -20239,12 +20225,12 @@
           </a:ln>
         </p:spPr>
         <p:txBody>
-          <a:bodyPr wrap="square" lIns="137160" tIns="91440" rIns="137160" bIns="91440" rtlCol="0" anchor="t">
+          <a:bodyPr wrap="square" lIns="137160" tIns="91440" rIns="137160" bIns="91440" rtlCol="0" anchor="ctr">
             <a:normAutofit/>
           </a:bodyPr>
           <a:lstStyle/>
           <a:p>
-            <a:pPr marL="0" indent="0" algn="l">
+            <a:pPr marL="0" indent="0" algn="ctr">
               <a:lnSpc>
                 <a:spcPct val="104000"/>
               </a:lnSpc>
@@ -20265,7 +20251,7 @@
             </a:r>
           </a:p>
           <a:p>
-            <a:pPr marL="0" indent="0" algn="l">
+            <a:pPr marL="0" indent="0" algn="ctr">
               <a:lnSpc>
                 <a:spcPct val="104000"/>
               </a:lnSpc>
@@ -20286,7 +20272,7 @@
             </a:r>
           </a:p>
           <a:p>
-            <a:pPr marL="0" indent="0" algn="l">
+            <a:pPr marL="0" indent="0" algn="ctr">
               <a:lnSpc>
                 <a:spcPct val="104000"/>
               </a:lnSpc>
@@ -20373,12 +20359,12 @@
           </a:ln>
         </p:spPr>
         <p:txBody>
-          <a:bodyPr wrap="square" lIns="137160" tIns="91440" rIns="137160" bIns="91440" rtlCol="0" anchor="t">
+          <a:bodyPr wrap="square" lIns="137160" tIns="91440" rIns="137160" bIns="91440" rtlCol="0" anchor="ctr">
             <a:normAutofit/>
           </a:bodyPr>
           <a:lstStyle/>
           <a:p>
-            <a:pPr marL="0" indent="0" algn="l">
+            <a:pPr marL="0" indent="0" algn="ctr">
               <a:lnSpc>
                 <a:spcPct val="104000"/>
               </a:lnSpc>
@@ -20399,7 +20385,7 @@
             </a:r>
           </a:p>
           <a:p>
-            <a:pPr marL="0" indent="0" algn="l">
+            <a:pPr marL="0" indent="0" algn="ctr">
               <a:lnSpc>
                 <a:spcPct val="104000"/>
               </a:lnSpc>
@@ -20420,7 +20406,7 @@
             </a:r>
           </a:p>
           <a:p>
-            <a:pPr marL="0" indent="0" algn="l">
+            <a:pPr marL="0" indent="0" algn="ctr">
               <a:lnSpc>
                 <a:spcPct val="104000"/>
               </a:lnSpc>
@@ -20507,12 +20493,12 @@
           </a:ln>
         </p:spPr>
         <p:txBody>
-          <a:bodyPr wrap="square" lIns="137160" tIns="91440" rIns="137160" bIns="91440" rtlCol="0" anchor="t">
+          <a:bodyPr wrap="square" lIns="137160" tIns="91440" rIns="137160" bIns="91440" rtlCol="0" anchor="ctr">
             <a:normAutofit/>
           </a:bodyPr>
           <a:lstStyle/>
           <a:p>
-            <a:pPr marL="0" indent="0" algn="l">
+            <a:pPr marL="0" indent="0" algn="ctr">
               <a:lnSpc>
                 <a:spcPct val="104000"/>
               </a:lnSpc>
@@ -20533,7 +20519,7 @@
             </a:r>
           </a:p>
           <a:p>
-            <a:pPr marL="0" indent="0" algn="l">
+            <a:pPr marL="0" indent="0" algn="ctr">
               <a:lnSpc>
                 <a:spcPct val="104000"/>
               </a:lnSpc>
@@ -23604,12 +23590,12 @@
           </a:ln>
         </p:spPr>
         <p:txBody>
-          <a:bodyPr wrap="square" lIns="137160" tIns="91440" rIns="137160" bIns="91440" rtlCol="0" anchor="t">
+          <a:bodyPr wrap="square" lIns="137160" tIns="91440" rIns="137160" bIns="91440" rtlCol="0" anchor="ctr">
             <a:normAutofit/>
           </a:bodyPr>
           <a:lstStyle/>
           <a:p>
-            <a:pPr marL="0" indent="0" algn="l">
+            <a:pPr marL="0" indent="0" algn="ctr">
               <a:lnSpc>
                 <a:spcPct val="104000"/>
               </a:lnSpc>
@@ -23630,7 +23616,7 @@
             </a:r>
           </a:p>
           <a:p>
-            <a:pPr marL="0" indent="0" algn="l">
+            <a:pPr marL="0" indent="0" algn="ctr">
               <a:lnSpc>
                 <a:spcPct val="104000"/>
               </a:lnSpc>
@@ -23651,7 +23637,7 @@
             </a:r>
           </a:p>
           <a:p>
-            <a:pPr marL="0" indent="0" algn="l">
+            <a:pPr marL="0" indent="0" algn="ctr">
               <a:lnSpc>
                 <a:spcPct val="104000"/>
               </a:lnSpc>
@@ -23738,12 +23724,12 @@
           </a:ln>
         </p:spPr>
         <p:txBody>
-          <a:bodyPr wrap="square" lIns="137160" tIns="91440" rIns="137160" bIns="91440" rtlCol="0" anchor="t">
+          <a:bodyPr wrap="square" lIns="137160" tIns="91440" rIns="137160" bIns="91440" rtlCol="0" anchor="ctr">
             <a:normAutofit/>
           </a:bodyPr>
           <a:lstStyle/>
           <a:p>
-            <a:pPr marL="0" indent="0" algn="l">
+            <a:pPr marL="0" indent="0" algn="ctr">
               <a:lnSpc>
                 <a:spcPct val="104000"/>
               </a:lnSpc>
@@ -23764,7 +23750,7 @@
             </a:r>
           </a:p>
           <a:p>
-            <a:pPr marL="0" indent="0" algn="l">
+            <a:pPr marL="0" indent="0" algn="ctr">
               <a:lnSpc>
                 <a:spcPct val="104000"/>
               </a:lnSpc>
@@ -23785,7 +23771,7 @@
             </a:r>
           </a:p>
           <a:p>
-            <a:pPr marL="0" indent="0" algn="l">
+            <a:pPr marL="0" indent="0" algn="ctr">
               <a:lnSpc>
                 <a:spcPct val="104000"/>
               </a:lnSpc>
@@ -23872,12 +23858,12 @@
           </a:ln>
         </p:spPr>
         <p:txBody>
-          <a:bodyPr wrap="square" lIns="137160" tIns="91440" rIns="137160" bIns="91440" rtlCol="0" anchor="t">
+          <a:bodyPr wrap="square" lIns="137160" tIns="91440" rIns="137160" bIns="91440" rtlCol="0" anchor="ctr">
             <a:normAutofit/>
           </a:bodyPr>
           <a:lstStyle/>
           <a:p>
-            <a:pPr marL="0" indent="0" algn="l">
+            <a:pPr marL="0" indent="0" algn="ctr">
               <a:lnSpc>
                 <a:spcPct val="104000"/>
               </a:lnSpc>
@@ -23898,7 +23884,7 @@
             </a:r>
           </a:p>
           <a:p>
-            <a:pPr marL="0" indent="0" algn="l">
+            <a:pPr marL="0" indent="0" algn="ctr">
               <a:lnSpc>
                 <a:spcPct val="104000"/>
               </a:lnSpc>
@@ -23919,7 +23905,7 @@
             </a:r>
           </a:p>
           <a:p>
-            <a:pPr marL="0" indent="0" algn="l">
+            <a:pPr marL="0" indent="0" algn="ctr">
               <a:lnSpc>
                 <a:spcPct val="104000"/>
               </a:lnSpc>
@@ -24408,12 +24394,12 @@
           </a:ln>
         </p:spPr>
         <p:txBody>
-          <a:bodyPr wrap="square" lIns="137160" tIns="91440" rIns="137160" bIns="91440" rtlCol="0" anchor="t">
+          <a:bodyPr wrap="square" lIns="137160" tIns="91440" rIns="137160" bIns="91440" rtlCol="0" anchor="ctr">
             <a:normAutofit/>
           </a:bodyPr>
           <a:lstStyle/>
           <a:p>
-            <a:pPr marL="0" indent="0" algn="l">
+            <a:pPr marL="0" indent="0" algn="ctr">
               <a:buNone/>
             </a:pPr>
             <a:r>
@@ -24428,15 +24414,14 @@
             </a:r>
           </a:p>
           <a:p>
-            <a:pPr marL="274320" indent="-274320" algn="l">
+            <a:pPr marL="0" indent="0" algn="ctr">
               <a:lnSpc>
                 <a:spcPct val="104000"/>
               </a:lnSpc>
               <a:spcBef>
                 <a:spcPts val="300"/>
               </a:spcBef>
-              <a:buFont typeface="Arial"/>
-              <a:buChar char="•"/>
+              <a:buNone/>
             </a:pPr>
             <a:r>
               <a:rPr lang="en-US" sz="1500" dirty="0">
@@ -24450,15 +24435,14 @@
             </a:r>
           </a:p>
           <a:p>
-            <a:pPr marL="274320" indent="-274320" algn="l">
+            <a:pPr marL="0" indent="0" algn="ctr">
               <a:lnSpc>
                 <a:spcPct val="104000"/>
               </a:lnSpc>
               <a:spcBef>
                 <a:spcPts val="300"/>
               </a:spcBef>
-              <a:buFont typeface="Arial"/>
-              <a:buChar char="•"/>
+              <a:buNone/>
             </a:pPr>
             <a:r>
               <a:rPr lang="en-US" sz="1500" dirty="0">
@@ -24472,15 +24456,14 @@
             </a:r>
           </a:p>
           <a:p>
-            <a:pPr marL="274320" indent="-274320" algn="l">
+            <a:pPr marL="0" indent="0" algn="ctr">
               <a:lnSpc>
                 <a:spcPct val="104000"/>
               </a:lnSpc>
               <a:spcBef>
                 <a:spcPts val="300"/>
               </a:spcBef>
-              <a:buFont typeface="Arial"/>
-              <a:buChar char="•"/>
+              <a:buNone/>
             </a:pPr>
             <a:r>
               <a:rPr lang="en-US" sz="1500" dirty="0">
@@ -24494,15 +24477,14 @@
             </a:r>
           </a:p>
           <a:p>
-            <a:pPr marL="274320" indent="-274320" algn="l">
+            <a:pPr marL="0" indent="0" algn="ctr">
               <a:lnSpc>
                 <a:spcPct val="104000"/>
               </a:lnSpc>
               <a:spcBef>
                 <a:spcPts val="300"/>
               </a:spcBef>
-              <a:buFont typeface="Arial"/>
-              <a:buChar char="•"/>
+              <a:buNone/>
             </a:pPr>
             <a:r>
               <a:rPr lang="en-US" sz="1500" dirty="0">
@@ -24874,12 +24856,12 @@
           </a:ln>
         </p:spPr>
         <p:txBody>
-          <a:bodyPr wrap="square" lIns="137160" tIns="91440" rIns="137160" bIns="91440" rtlCol="0" anchor="t">
+          <a:bodyPr wrap="square" lIns="137160" tIns="91440" rIns="137160" bIns="91440" rtlCol="0" anchor="ctr">
             <a:normAutofit/>
           </a:bodyPr>
           <a:lstStyle/>
           <a:p>
-            <a:pPr marL="0" indent="0" algn="l">
+            <a:pPr marL="0" indent="0" algn="ctr">
               <a:lnSpc>
                 <a:spcPct val="104000"/>
               </a:lnSpc>
@@ -24900,7 +24882,7 @@
             </a:r>
           </a:p>
           <a:p>
-            <a:pPr marL="0" indent="0" algn="l">
+            <a:pPr marL="0" indent="0" algn="ctr">
               <a:lnSpc>
                 <a:spcPct val="104000"/>
               </a:lnSpc>
@@ -24987,12 +24969,12 @@
           </a:ln>
         </p:spPr>
         <p:txBody>
-          <a:bodyPr wrap="square" lIns="137160" tIns="91440" rIns="137160" bIns="91440" rtlCol="0" anchor="t">
+          <a:bodyPr wrap="square" lIns="137160" tIns="91440" rIns="137160" bIns="91440" rtlCol="0" anchor="ctr">
             <a:normAutofit/>
           </a:bodyPr>
           <a:lstStyle/>
           <a:p>
-            <a:pPr marL="0" indent="0" algn="l">
+            <a:pPr marL="0" indent="0" algn="ctr">
               <a:lnSpc>
                 <a:spcPct val="104000"/>
               </a:lnSpc>
@@ -25013,7 +24995,7 @@
             </a:r>
           </a:p>
           <a:p>
-            <a:pPr marL="0" indent="0" algn="l">
+            <a:pPr marL="0" indent="0" algn="ctr">
               <a:lnSpc>
                 <a:spcPct val="104000"/>
               </a:lnSpc>
@@ -25100,12 +25082,12 @@
           </a:ln>
         </p:spPr>
         <p:txBody>
-          <a:bodyPr wrap="square" lIns="137160" tIns="91440" rIns="137160" bIns="91440" rtlCol="0" anchor="t">
+          <a:bodyPr wrap="square" lIns="137160" tIns="91440" rIns="137160" bIns="91440" rtlCol="0" anchor="ctr">
             <a:normAutofit/>
           </a:bodyPr>
           <a:lstStyle/>
           <a:p>
-            <a:pPr marL="0" indent="0" algn="l">
+            <a:pPr marL="0" indent="0" algn="ctr">
               <a:lnSpc>
                 <a:spcPct val="104000"/>
               </a:lnSpc>
@@ -25126,7 +25108,7 @@
             </a:r>
           </a:p>
           <a:p>
-            <a:pPr marL="0" indent="0" algn="l">
+            <a:pPr marL="0" indent="0" algn="ctr">
               <a:lnSpc>
                 <a:spcPct val="104000"/>
               </a:lnSpc>
@@ -25213,12 +25195,12 @@
           </a:ln>
         </p:spPr>
         <p:txBody>
-          <a:bodyPr wrap="square" lIns="137160" tIns="91440" rIns="137160" bIns="91440" rtlCol="0" anchor="t">
+          <a:bodyPr wrap="square" lIns="137160" tIns="91440" rIns="137160" bIns="91440" rtlCol="0" anchor="ctr">
             <a:normAutofit/>
           </a:bodyPr>
           <a:lstStyle/>
           <a:p>
-            <a:pPr marL="0" indent="0" algn="l">
+            <a:pPr marL="0" indent="0" algn="ctr">
               <a:lnSpc>
                 <a:spcPct val="104000"/>
               </a:lnSpc>
@@ -25239,7 +25221,7 @@
             </a:r>
           </a:p>
           <a:p>
-            <a:pPr marL="0" indent="0" algn="l">
+            <a:pPr marL="0" indent="0" algn="ctr">
               <a:lnSpc>
                 <a:spcPct val="104000"/>
               </a:lnSpc>
@@ -25260,7 +25242,7 @@
             </a:r>
           </a:p>
           <a:p>
-            <a:pPr marL="0" indent="0" algn="l">
+            <a:pPr marL="0" indent="0" algn="ctr">
               <a:lnSpc>
                 <a:spcPct val="104000"/>
               </a:lnSpc>
@@ -26030,12 +26012,12 @@
           </a:ln>
         </p:spPr>
         <p:txBody>
-          <a:bodyPr wrap="square" lIns="137160" tIns="91440" rIns="137160" bIns="91440" rtlCol="0" anchor="t">
+          <a:bodyPr wrap="square" lIns="137160" tIns="91440" rIns="137160" bIns="91440" rtlCol="0" anchor="ctr">
             <a:normAutofit/>
           </a:bodyPr>
           <a:lstStyle/>
           <a:p>
-            <a:pPr marL="0" indent="0" algn="l">
+            <a:pPr marL="0" indent="0" algn="ctr">
               <a:buNone/>
             </a:pPr>
             <a:r>
@@ -26050,15 +26032,14 @@
             </a:r>
           </a:p>
           <a:p>
-            <a:pPr marL="274320" indent="-274320" algn="l">
+            <a:pPr marL="0" indent="0" algn="ctr">
               <a:lnSpc>
                 <a:spcPct val="104000"/>
               </a:lnSpc>
               <a:spcBef>
                 <a:spcPts val="300"/>
               </a:spcBef>
-              <a:buFont typeface="Arial"/>
-              <a:buChar char="•"/>
+              <a:buNone/>
             </a:pPr>
             <a:r>
               <a:rPr lang="en-US" sz="1500" dirty="0">
@@ -26072,15 +26053,14 @@
             </a:r>
           </a:p>
           <a:p>
-            <a:pPr marL="274320" indent="-274320" algn="l">
+            <a:pPr marL="0" indent="0" algn="ctr">
               <a:lnSpc>
                 <a:spcPct val="104000"/>
               </a:lnSpc>
               <a:spcBef>
                 <a:spcPts val="300"/>
               </a:spcBef>
-              <a:buFont typeface="Arial"/>
-              <a:buChar char="•"/>
+              <a:buNone/>
             </a:pPr>
             <a:r>
               <a:rPr lang="en-US" sz="1500" dirty="0">
@@ -26094,15 +26074,14 @@
             </a:r>
           </a:p>
           <a:p>
-            <a:pPr marL="274320" indent="-274320" algn="l">
+            <a:pPr marL="0" indent="0" algn="ctr">
               <a:lnSpc>
                 <a:spcPct val="104000"/>
               </a:lnSpc>
               <a:spcBef>
                 <a:spcPts val="300"/>
               </a:spcBef>
-              <a:buFont typeface="Arial"/>
-              <a:buChar char="•"/>
+              <a:buNone/>
             </a:pPr>
             <a:r>
               <a:rPr lang="en-US" sz="1500" dirty="0">
@@ -26116,15 +26095,14 @@
             </a:r>
           </a:p>
           <a:p>
-            <a:pPr marL="274320" indent="-274320" algn="l">
+            <a:pPr marL="0" indent="0" algn="ctr">
               <a:lnSpc>
                 <a:spcPct val="104000"/>
               </a:lnSpc>
               <a:spcBef>
                 <a:spcPts val="300"/>
               </a:spcBef>
-              <a:buFont typeface="Arial"/>
-              <a:buChar char="•"/>
+              <a:buNone/>
             </a:pPr>
             <a:r>
               <a:rPr lang="en-US" sz="1500" dirty="0">
@@ -26138,15 +26116,14 @@
             </a:r>
           </a:p>
           <a:p>
-            <a:pPr marL="274320" indent="-274320" algn="l">
+            <a:pPr marL="0" indent="0" algn="ctr">
               <a:lnSpc>
                 <a:spcPct val="104000"/>
               </a:lnSpc>
               <a:spcBef>
                 <a:spcPts val="300"/>
               </a:spcBef>
-              <a:buFont typeface="Arial"/>
-              <a:buChar char="•"/>
+              <a:buNone/>
             </a:pPr>
             <a:r>
               <a:rPr lang="en-US" sz="1500" dirty="0">
@@ -26479,12 +26456,12 @@
           </a:ln>
         </p:spPr>
         <p:txBody>
-          <a:bodyPr wrap="square" lIns="137160" tIns="91440" rIns="137160" bIns="91440" rtlCol="0" anchor="t">
+          <a:bodyPr wrap="square" lIns="137160" tIns="91440" rIns="137160" bIns="91440" rtlCol="0" anchor="ctr">
             <a:normAutofit/>
           </a:bodyPr>
           <a:lstStyle/>
           <a:p>
-            <a:pPr marL="0" indent="0" algn="l">
+            <a:pPr marL="0" indent="0" algn="ctr">
               <a:lnSpc>
                 <a:spcPct val="104000"/>
               </a:lnSpc>
@@ -26505,7 +26482,7 @@
             </a:r>
           </a:p>
           <a:p>
-            <a:pPr marL="0" indent="0" algn="l">
+            <a:pPr marL="0" indent="0" algn="ctr">
               <a:lnSpc>
                 <a:spcPct val="104000"/>
               </a:lnSpc>
@@ -26526,7 +26503,7 @@
             </a:r>
           </a:p>
           <a:p>
-            <a:pPr marL="0" indent="0" algn="l">
+            <a:pPr marL="0" indent="0" algn="ctr">
               <a:lnSpc>
                 <a:spcPct val="104000"/>
               </a:lnSpc>
@@ -26613,12 +26590,12 @@
           </a:ln>
         </p:spPr>
         <p:txBody>
-          <a:bodyPr wrap="square" lIns="137160" tIns="91440" rIns="137160" bIns="91440" rtlCol="0" anchor="t">
+          <a:bodyPr wrap="square" lIns="137160" tIns="91440" rIns="137160" bIns="91440" rtlCol="0" anchor="ctr">
             <a:normAutofit/>
           </a:bodyPr>
           <a:lstStyle/>
           <a:p>
-            <a:pPr marL="0" indent="0" algn="l">
+            <a:pPr marL="0" indent="0" algn="ctr">
               <a:lnSpc>
                 <a:spcPct val="104000"/>
               </a:lnSpc>
@@ -26639,7 +26616,7 @@
             </a:r>
           </a:p>
           <a:p>
-            <a:pPr marL="0" indent="0" algn="l">
+            <a:pPr marL="0" indent="0" algn="ctr">
               <a:lnSpc>
                 <a:spcPct val="104000"/>
               </a:lnSpc>
@@ -26660,7 +26637,7 @@
             </a:r>
           </a:p>
           <a:p>
-            <a:pPr marL="0" indent="0" algn="l">
+            <a:pPr marL="0" indent="0" algn="ctr">
               <a:lnSpc>
                 <a:spcPct val="104000"/>
               </a:lnSpc>
@@ -26747,12 +26724,12 @@
           </a:ln>
         </p:spPr>
         <p:txBody>
-          <a:bodyPr wrap="square" lIns="137160" tIns="91440" rIns="137160" bIns="91440" rtlCol="0" anchor="t">
+          <a:bodyPr wrap="square" lIns="137160" tIns="91440" rIns="137160" bIns="91440" rtlCol="0" anchor="ctr">
             <a:normAutofit/>
           </a:bodyPr>
           <a:lstStyle/>
           <a:p>
-            <a:pPr marL="0" indent="0" algn="l">
+            <a:pPr marL="0" indent="0" algn="ctr">
               <a:lnSpc>
                 <a:spcPct val="104000"/>
               </a:lnSpc>
@@ -26773,7 +26750,7 @@
             </a:r>
           </a:p>
           <a:p>
-            <a:pPr marL="0" indent="0" algn="l">
+            <a:pPr marL="0" indent="0" algn="ctr">
               <a:lnSpc>
                 <a:spcPct val="104000"/>
               </a:lnSpc>
@@ -26794,7 +26771,7 @@
             </a:r>
           </a:p>
           <a:p>
-            <a:pPr marL="0" indent="0" algn="l">
+            <a:pPr marL="0" indent="0" algn="ctr">
               <a:lnSpc>
                 <a:spcPct val="104000"/>
               </a:lnSpc>
@@ -26881,12 +26858,12 @@
           </a:ln>
         </p:spPr>
         <p:txBody>
-          <a:bodyPr wrap="square" lIns="137160" tIns="91440" rIns="137160" bIns="91440" rtlCol="0" anchor="t">
+          <a:bodyPr wrap="square" lIns="137160" tIns="91440" rIns="137160" bIns="91440" rtlCol="0" anchor="ctr">
             <a:normAutofit/>
           </a:bodyPr>
           <a:lstStyle/>
           <a:p>
-            <a:pPr marL="0" indent="0" algn="l">
+            <a:pPr marL="0" indent="0" algn="ctr">
               <a:lnSpc>
                 <a:spcPct val="104000"/>
               </a:lnSpc>
@@ -26907,7 +26884,7 @@
             </a:r>
           </a:p>
           <a:p>
-            <a:pPr marL="0" indent="0" algn="l">
+            <a:pPr marL="0" indent="0" algn="ctr">
               <a:lnSpc>
                 <a:spcPct val="104000"/>
               </a:lnSpc>
@@ -27267,7 +27244,7 @@
                 <a:latin typeface="Arial"/>
                 <a:cs typeface="Arial"/>
               </a:rPr>
-              <a:t>Exit question (chat or 1-question form): ICU patients who received more fluid died more often. Give one reason other than the fluid</a:t>
+              <a:t>Exit question (in the chat): ICU patients who received more fluid died more often. Give one reason other than the fluid</a:t>
             </a:r>
           </a:p>
           <a:p>
@@ -28047,12 +28024,12 @@
           </a:ln>
         </p:spPr>
         <p:txBody>
-          <a:bodyPr wrap="square" lIns="137160" tIns="91440" rIns="137160" bIns="91440" rtlCol="0" anchor="t">
+          <a:bodyPr wrap="square" lIns="137160" tIns="91440" rIns="137160" bIns="91440" rtlCol="0" anchor="ctr">
             <a:normAutofit/>
           </a:bodyPr>
           <a:lstStyle/>
           <a:p>
-            <a:pPr marL="0" indent="0" algn="l">
+            <a:pPr marL="0" indent="0" algn="ctr">
               <a:buNone/>
             </a:pPr>
             <a:r>
@@ -28067,15 +28044,14 @@
             </a:r>
           </a:p>
           <a:p>
-            <a:pPr marL="274320" indent="-274320" algn="l">
+            <a:pPr marL="0" indent="0" algn="ctr">
               <a:lnSpc>
                 <a:spcPct val="104000"/>
               </a:lnSpc>
               <a:spcBef>
                 <a:spcPts val="300"/>
               </a:spcBef>
-              <a:buFont typeface="Arial"/>
-              <a:buChar char="•"/>
+              <a:buNone/>
             </a:pPr>
             <a:r>
               <a:rPr lang="en-US" sz="1500" dirty="0">
@@ -28089,15 +28065,14 @@
             </a:r>
           </a:p>
           <a:p>
-            <a:pPr marL="274320" indent="-274320" algn="l">
+            <a:pPr marL="0" indent="0" algn="ctr">
               <a:lnSpc>
                 <a:spcPct val="104000"/>
               </a:lnSpc>
               <a:spcBef>
                 <a:spcPts val="300"/>
               </a:spcBef>
-              <a:buFont typeface="Arial"/>
-              <a:buChar char="•"/>
+              <a:buNone/>
             </a:pPr>
             <a:r>
               <a:rPr lang="en-US" sz="1500" dirty="0">
@@ -28111,15 +28086,14 @@
             </a:r>
           </a:p>
           <a:p>
-            <a:pPr marL="274320" indent="-274320" algn="l">
+            <a:pPr marL="0" indent="0" algn="ctr">
               <a:lnSpc>
                 <a:spcPct val="104000"/>
               </a:lnSpc>
               <a:spcBef>
                 <a:spcPts val="300"/>
               </a:spcBef>
-              <a:buFont typeface="Arial"/>
-              <a:buChar char="•"/>
+              <a:buNone/>
             </a:pPr>
             <a:r>
               <a:rPr lang="en-US" sz="1500" dirty="0">
@@ -28491,12 +28465,12 @@
           </a:ln>
         </p:spPr>
         <p:txBody>
-          <a:bodyPr wrap="square" lIns="137160" tIns="91440" rIns="137160" bIns="91440" rtlCol="0" anchor="t">
+          <a:bodyPr wrap="square" lIns="137160" tIns="91440" rIns="137160" bIns="91440" rtlCol="0" anchor="ctr">
             <a:normAutofit/>
           </a:bodyPr>
           <a:lstStyle/>
           <a:p>
-            <a:pPr marL="0" indent="0" algn="l">
+            <a:pPr marL="0" indent="0" algn="ctr">
               <a:lnSpc>
                 <a:spcPct val="104000"/>
               </a:lnSpc>
@@ -28517,7 +28491,7 @@
             </a:r>
           </a:p>
           <a:p>
-            <a:pPr marL="0" indent="0" algn="l">
+            <a:pPr marL="0" indent="0" algn="ctr">
               <a:lnSpc>
                 <a:spcPct val="104000"/>
               </a:lnSpc>
@@ -28538,7 +28512,7 @@
             </a:r>
           </a:p>
           <a:p>
-            <a:pPr marL="0" indent="0" algn="l">
+            <a:pPr marL="0" indent="0" algn="ctr">
               <a:lnSpc>
                 <a:spcPct val="104000"/>
               </a:lnSpc>
@@ -28625,12 +28599,12 @@
           </a:ln>
         </p:spPr>
         <p:txBody>
-          <a:bodyPr wrap="square" lIns="137160" tIns="91440" rIns="137160" bIns="91440" rtlCol="0" anchor="t">
+          <a:bodyPr wrap="square" lIns="137160" tIns="91440" rIns="137160" bIns="91440" rtlCol="0" anchor="ctr">
             <a:normAutofit/>
           </a:bodyPr>
           <a:lstStyle/>
           <a:p>
-            <a:pPr marL="0" indent="0" algn="l">
+            <a:pPr marL="0" indent="0" algn="ctr">
               <a:lnSpc>
                 <a:spcPct val="104000"/>
               </a:lnSpc>
@@ -28651,7 +28625,7 @@
             </a:r>
           </a:p>
           <a:p>
-            <a:pPr marL="0" indent="0" algn="l">
+            <a:pPr marL="0" indent="0" algn="ctr">
               <a:lnSpc>
                 <a:spcPct val="104000"/>
               </a:lnSpc>
@@ -28672,7 +28646,7 @@
             </a:r>
           </a:p>
           <a:p>
-            <a:pPr marL="0" indent="0" algn="l">
+            <a:pPr marL="0" indent="0" algn="ctr">
               <a:lnSpc>
                 <a:spcPct val="104000"/>
               </a:lnSpc>
@@ -28759,12 +28733,12 @@
           </a:ln>
         </p:spPr>
         <p:txBody>
-          <a:bodyPr wrap="square" lIns="137160" tIns="91440" rIns="137160" bIns="91440" rtlCol="0" anchor="t">
+          <a:bodyPr wrap="square" lIns="137160" tIns="91440" rIns="137160" bIns="91440" rtlCol="0" anchor="ctr">
             <a:normAutofit/>
           </a:bodyPr>
           <a:lstStyle/>
           <a:p>
-            <a:pPr marL="0" indent="0" algn="l">
+            <a:pPr marL="0" indent="0" algn="ctr">
               <a:lnSpc>
                 <a:spcPct val="104000"/>
               </a:lnSpc>
@@ -28785,7 +28759,7 @@
             </a:r>
           </a:p>
           <a:p>
-            <a:pPr marL="0" indent="0" algn="l">
+            <a:pPr marL="0" indent="0" algn="ctr">
               <a:lnSpc>
                 <a:spcPct val="104000"/>
               </a:lnSpc>
@@ -28806,7 +28780,7 @@
             </a:r>
           </a:p>
           <a:p>
-            <a:pPr marL="0" indent="0" algn="l">
+            <a:pPr marL="0" indent="0" algn="ctr">
               <a:lnSpc>
                 <a:spcPct val="104000"/>
               </a:lnSpc>
@@ -29183,12 +29157,12 @@
           </a:ln>
         </p:spPr>
         <p:txBody>
-          <a:bodyPr wrap="square" lIns="137160" tIns="91440" rIns="137160" bIns="91440" rtlCol="0" anchor="t">
+          <a:bodyPr wrap="square" lIns="137160" tIns="91440" rIns="137160" bIns="91440" rtlCol="0" anchor="ctr">
             <a:normAutofit/>
           </a:bodyPr>
           <a:lstStyle/>
           <a:p>
-            <a:pPr marL="0" indent="0" algn="l">
+            <a:pPr marL="0" indent="0" algn="ctr">
               <a:lnSpc>
                 <a:spcPct val="104000"/>
               </a:lnSpc>
@@ -29209,7 +29183,7 @@
             </a:r>
           </a:p>
           <a:p>
-            <a:pPr marL="0" indent="0" algn="l">
+            <a:pPr marL="0" indent="0" algn="ctr">
               <a:lnSpc>
                 <a:spcPct val="104000"/>
               </a:lnSpc>
@@ -29230,7 +29204,7 @@
             </a:r>
           </a:p>
           <a:p>
-            <a:pPr marL="0" indent="0" algn="l">
+            <a:pPr marL="0" indent="0" algn="ctr">
               <a:lnSpc>
                 <a:spcPct val="104000"/>
               </a:lnSpc>
@@ -29317,12 +29291,12 @@
           </a:ln>
         </p:spPr>
         <p:txBody>
-          <a:bodyPr wrap="square" lIns="137160" tIns="91440" rIns="137160" bIns="91440" rtlCol="0" anchor="t">
+          <a:bodyPr wrap="square" lIns="137160" tIns="91440" rIns="137160" bIns="91440" rtlCol="0" anchor="ctr">
             <a:normAutofit/>
           </a:bodyPr>
           <a:lstStyle/>
           <a:p>
-            <a:pPr marL="0" indent="0" algn="l">
+            <a:pPr marL="0" indent="0" algn="ctr">
               <a:lnSpc>
                 <a:spcPct val="104000"/>
               </a:lnSpc>
@@ -29343,7 +29317,7 @@
             </a:r>
           </a:p>
           <a:p>
-            <a:pPr marL="0" indent="0" algn="l">
+            <a:pPr marL="0" indent="0" algn="ctr">
               <a:lnSpc>
                 <a:spcPct val="104000"/>
               </a:lnSpc>
@@ -29364,7 +29338,7 @@
             </a:r>
           </a:p>
           <a:p>
-            <a:pPr marL="0" indent="0" algn="l">
+            <a:pPr marL="0" indent="0" algn="ctr">
               <a:lnSpc>
                 <a:spcPct val="104000"/>
               </a:lnSpc>
@@ -29451,12 +29425,12 @@
           </a:ln>
         </p:spPr>
         <p:txBody>
-          <a:bodyPr wrap="square" lIns="137160" tIns="91440" rIns="137160" bIns="91440" rtlCol="0" anchor="t">
+          <a:bodyPr wrap="square" lIns="137160" tIns="91440" rIns="137160" bIns="91440" rtlCol="0" anchor="ctr">
             <a:normAutofit/>
           </a:bodyPr>
           <a:lstStyle/>
           <a:p>
-            <a:pPr marL="0" indent="0" algn="l">
+            <a:pPr marL="0" indent="0" algn="ctr">
               <a:lnSpc>
                 <a:spcPct val="104000"/>
               </a:lnSpc>
@@ -29477,7 +29451,7 @@
             </a:r>
           </a:p>
           <a:p>
-            <a:pPr marL="0" indent="0" algn="l">
+            <a:pPr marL="0" indent="0" algn="ctr">
               <a:lnSpc>
                 <a:spcPct val="104000"/>
               </a:lnSpc>
@@ -29498,7 +29472,7 @@
             </a:r>
           </a:p>
           <a:p>
-            <a:pPr marL="0" indent="0" algn="l">
+            <a:pPr marL="0" indent="0" algn="ctr">
               <a:lnSpc>
                 <a:spcPct val="104000"/>
               </a:lnSpc>
@@ -30152,12 +30126,12 @@
           </a:ln>
         </p:spPr>
         <p:txBody>
-          <a:bodyPr wrap="square" lIns="110000" tIns="91440" rIns="110000" bIns="91440" rtlCol="0" anchor="t">
+          <a:bodyPr wrap="square" lIns="110000" tIns="91440" rIns="110000" bIns="91440" rtlCol="0" anchor="ctr">
             <a:normAutofit/>
           </a:bodyPr>
           <a:lstStyle/>
           <a:p>
-            <a:pPr marL="0" indent="0" algn="l">
+            <a:pPr marL="0" indent="0" algn="ctr">
               <a:lnSpc>
                 <a:spcPct val="104000"/>
               </a:lnSpc>
@@ -30178,7 +30152,7 @@
             </a:r>
           </a:p>
           <a:p>
-            <a:pPr marL="0" indent="0" algn="l">
+            <a:pPr marL="0" indent="0" algn="ctr">
               <a:lnSpc>
                 <a:spcPct val="104000"/>
               </a:lnSpc>
@@ -30267,12 +30241,12 @@
           </a:ln>
         </p:spPr>
         <p:txBody>
-          <a:bodyPr wrap="square" lIns="110000" tIns="91440" rIns="110000" bIns="91440" rtlCol="0" anchor="t">
+          <a:bodyPr wrap="square" lIns="110000" tIns="91440" rIns="110000" bIns="91440" rtlCol="0" anchor="ctr">
             <a:normAutofit/>
           </a:bodyPr>
           <a:lstStyle/>
           <a:p>
-            <a:pPr marL="0" indent="0" algn="l">
+            <a:pPr marL="0" indent="0" algn="ctr">
               <a:lnSpc>
                 <a:spcPct val="104000"/>
               </a:lnSpc>
@@ -30361,12 +30335,12 @@
           </a:ln>
         </p:spPr>
         <p:txBody>
-          <a:bodyPr wrap="square" lIns="110000" tIns="91440" rIns="110000" bIns="91440" rtlCol="0" anchor="t">
+          <a:bodyPr wrap="square" lIns="110000" tIns="91440" rIns="110000" bIns="91440" rtlCol="0" anchor="ctr">
             <a:normAutofit/>
           </a:bodyPr>
           <a:lstStyle/>
           <a:p>
-            <a:pPr marL="0" indent="0" algn="l">
+            <a:pPr marL="0" indent="0" algn="ctr">
               <a:lnSpc>
                 <a:spcPct val="104000"/>
               </a:lnSpc>
@@ -30455,12 +30429,12 @@
           </a:ln>
         </p:spPr>
         <p:txBody>
-          <a:bodyPr wrap="square" lIns="110000" tIns="91440" rIns="110000" bIns="91440" rtlCol="0" anchor="t">
+          <a:bodyPr wrap="square" lIns="110000" tIns="91440" rIns="110000" bIns="91440" rtlCol="0" anchor="ctr">
             <a:normAutofit/>
           </a:bodyPr>
           <a:lstStyle/>
           <a:p>
-            <a:pPr marL="0" indent="0" algn="l">
+            <a:pPr marL="0" indent="0" algn="ctr">
               <a:lnSpc>
                 <a:spcPct val="104000"/>
               </a:lnSpc>
@@ -30481,7 +30455,7 @@
             </a:r>
           </a:p>
           <a:p>
-            <a:pPr marL="0" indent="0" algn="l">
+            <a:pPr marL="0" indent="0" algn="ctr">
               <a:lnSpc>
                 <a:spcPct val="104000"/>
               </a:lnSpc>
@@ -31645,12 +31619,12 @@
           </a:ln>
         </p:spPr>
         <p:txBody>
-          <a:bodyPr wrap="square" lIns="137160" tIns="91440" rIns="137160" bIns="91440" rtlCol="0" anchor="t">
+          <a:bodyPr wrap="square" lIns="137160" tIns="91440" rIns="137160" bIns="91440" rtlCol="0" anchor="ctr">
             <a:normAutofit/>
           </a:bodyPr>
           <a:lstStyle/>
           <a:p>
-            <a:pPr marL="0" indent="0" algn="l">
+            <a:pPr marL="0" indent="0" algn="ctr">
               <a:lnSpc>
                 <a:spcPct val="104000"/>
               </a:lnSpc>
@@ -31671,7 +31645,7 @@
             </a:r>
           </a:p>
           <a:p>
-            <a:pPr marL="0" indent="0" algn="l">
+            <a:pPr marL="0" indent="0" algn="ctr">
               <a:lnSpc>
                 <a:spcPct val="104000"/>
               </a:lnSpc>
@@ -31692,7 +31666,7 @@
             </a:r>
           </a:p>
           <a:p>
-            <a:pPr marL="0" indent="0" algn="l">
+            <a:pPr marL="0" indent="0" algn="ctr">
               <a:lnSpc>
                 <a:spcPct val="104000"/>
               </a:lnSpc>
@@ -31779,12 +31753,12 @@
           </a:ln>
         </p:spPr>
         <p:txBody>
-          <a:bodyPr wrap="square" lIns="137160" tIns="91440" rIns="137160" bIns="91440" rtlCol="0" anchor="t">
+          <a:bodyPr wrap="square" lIns="137160" tIns="91440" rIns="137160" bIns="91440" rtlCol="0" anchor="ctr">
             <a:normAutofit/>
           </a:bodyPr>
           <a:lstStyle/>
           <a:p>
-            <a:pPr marL="0" indent="0" algn="l">
+            <a:pPr marL="0" indent="0" algn="ctr">
               <a:lnSpc>
                 <a:spcPct val="104000"/>
               </a:lnSpc>
@@ -31805,7 +31779,7 @@
             </a:r>
           </a:p>
           <a:p>
-            <a:pPr marL="0" indent="0" algn="l">
+            <a:pPr marL="0" indent="0" algn="ctr">
               <a:lnSpc>
                 <a:spcPct val="104000"/>
               </a:lnSpc>
@@ -31826,7 +31800,7 @@
             </a:r>
           </a:p>
           <a:p>
-            <a:pPr marL="0" indent="0" algn="l">
+            <a:pPr marL="0" indent="0" algn="ctr">
               <a:lnSpc>
                 <a:spcPct val="104000"/>
               </a:lnSpc>
@@ -31913,12 +31887,12 @@
           </a:ln>
         </p:spPr>
         <p:txBody>
-          <a:bodyPr wrap="square" lIns="137160" tIns="91440" rIns="137160" bIns="91440" rtlCol="0" anchor="t">
+          <a:bodyPr wrap="square" lIns="137160" tIns="91440" rIns="137160" bIns="91440" rtlCol="0" anchor="ctr">
             <a:normAutofit/>
           </a:bodyPr>
           <a:lstStyle/>
           <a:p>
-            <a:pPr marL="0" indent="0" algn="l">
+            <a:pPr marL="0" indent="0" algn="ctr">
               <a:lnSpc>
                 <a:spcPct val="104000"/>
               </a:lnSpc>
@@ -31939,7 +31913,7 @@
             </a:r>
           </a:p>
           <a:p>
-            <a:pPr marL="0" indent="0" algn="l">
+            <a:pPr marL="0" indent="0" algn="ctr">
               <a:lnSpc>
                 <a:spcPct val="104000"/>
               </a:lnSpc>
@@ -31960,7 +31934,7 @@
             </a:r>
           </a:p>
           <a:p>
-            <a:pPr marL="0" indent="0" algn="l">
+            <a:pPr marL="0" indent="0" algn="ctr">
               <a:lnSpc>
                 <a:spcPct val="104000"/>
               </a:lnSpc>

--- a/en/files/slides/Session_4_EN.pptx
+++ b/en/files/slides/Session_4_EN.pptx
@@ -2699,7 +2699,7 @@
           <a:p>
             <a:r>
               <a:rPr lang="en-US" sz="1400" b="0" dirty="0"/>
-              <a:t>Script: Course/Demos/s4_demo.md. File: Course/Resources/tools/2x2_calculator.xlsx (pre-filled with the worked example). Participants only watch. They can download the file from the course folder afterwards.</a:t>
+              <a:t>Script: Course/Demos/s4_demo.md. File: Course/Resources/tools/2x2_calculator.xlsx (pre-filled with the worked example). Participants only watch. We email the file afterwards.</a:t>
             </a:r>
           </a:p>
           <a:p>

--- a/en/files/slides/Session_4_EN.pptx
+++ b/en/files/slides/Session_4_EN.pptx
@@ -737,31 +737,25 @@
           <a:p>
             <a:r>
               <a:rPr lang="en-US" sz="1400" b="0" dirty="0"/>
-              <a:t>Session 4 opening (19:30). Last Saturday we chose how to answer a question. Today two questions about any result: can we trust it (bias, confounding, causation) and how big is it (risk, risk ratio, odds ratio, risk difference, number needed to treat)? Then we look beyond single studies: diagnostic tests, meta-analysis and appraisal tools.</a:t>
+              <a:t>Start 19:30. Show three answers to the Session 3 exit question: a cohort, so 'associated'. It leads into confounding.</a:t>
             </a:r>
           </a:p>
           <a:p>
             <a:r>
               <a:rPr lang="en-US" sz="1400" b="0" dirty="0"/>
-              <a:t>Open with the exit question from Session 3: show three of the answers you received in the chat. The question was about doctors choosing restrictive fluids for some patients: a cohort, so 'associated'. It leads straight into confounding.</a:t>
+              <a:t>The only arithmetic today is division in a 2x2 table.</a:t>
             </a:r>
           </a:p>
           <a:p>
             <a:r>
               <a:rPr lang="en-US" sz="1400" b="0" dirty="0"/>
-              <a:t>How we work online (repeat briefly): quick answers in the poll, other answers from two or three people called on with the microphone on, 'raise hand' to speak, every exercise done by the whole class together.</a:t>
+              <a:t>Clock: 19:30 recap, 19:40 4.1, 20:20 4.2 with demo, 20:45 break, 21:00 two calculations, 21:15 4.3, 21:45 proposal builder 4, 22:25 wrap-up.</a:t>
             </a:r>
           </a:p>
           <a:p>
             <a:r>
               <a:rPr lang="en-US" sz="1400" b="0" dirty="0"/>
-              <a:t>Pace: the only arithmetic is division in a 2x2 table, and the spreadsheet checks every answer.</a:t>
-            </a:r>
-          </a:p>
-          <a:p>
-            <a:r>
-              <a:rPr lang="en-US" sz="1400" b="0" dirty="0"/>
-              <a:t>Timing: 1 minute. Clock: 19:30 recap quiz (10), 19:40 section 4.1 (40), 20:20 section 4.2 with the demo (25), 20:45 break (15), 21:00 two calculations together (15), 21:15 section 4.3 (30), 21:45 proposal builder 4 (40), 22:25 wrap-up (5), 22:30 end.</a:t>
+              <a:t>Timing: 1 minute.</a:t>
             </a:r>
           </a:p>
         </p:txBody>
@@ -842,37 +836,13 @@
           <a:p>
             <a:r>
               <a:rPr lang="en-US" sz="1400" b="0" dirty="0"/>
-              <a:t>Both appear when we split the data into strata, but they mean opposite things.</a:t>
+              <a:t>Strata alike but different from the crude: confounding, adjust. Strata different from each other: effect modification, report each.</a:t>
             </a:r>
           </a:p>
           <a:p>
             <a:r>
               <a:rPr lang="en-US" sz="1400" b="0" dirty="0"/>
-              <a:t>On the left, confounding (our fluid example): the strata agree with each other (RR 1.0 and 1.0) but differ from the crude result (2.33). The third factor (severity) created a false association. Fix: adjust, and report the adjusted estimate.</a:t>
-            </a:r>
-          </a:p>
-          <a:p>
-            <a:r>
-              <a:rPr lang="en-US" sz="1400" b="0" dirty="0"/>
-              <a:t>On the right, effect modification, also called interaction (hypothetical): a restrictive strategy might help patients with ARDS (RR 0.60) but make no difference without ARDS (RR 1.00). The strata differ from each other. This is real biology, not bias: report each subgroup. Do not average it away.</a:t>
-            </a:r>
-          </a:p>
-          <a:p>
-            <a:r>
-              <a:rPr lang="en-US" sz="1400" b="0" dirty="0"/>
-              <a:t>Rule of thumb: strata similar to each other but different from the crude = confounding. Strata different from each other = effect modification.</a:t>
-            </a:r>
-          </a:p>
-          <a:p>
-            <a:r>
-              <a:rPr lang="en-US" sz="1400" b="0" dirty="0"/>
-              <a:t>Misconception: 'every subgroup difference is real'. Subgroups must be pre-specified and few. With many subgroups, some differ by chance. Session 6 shows interaction in a model.</a:t>
-            </a:r>
-          </a:p>
-          <a:p>
-            <a:r>
-              <a:rPr lang="en-US" sz="1400" b="0" dirty="0"/>
-              <a:t>Ask the class (poll): restrictive fluids, RR 0.95 in patients with normal kidneys and 0.60 in patients with kidney injury. Confounding or effect modification? Expected answer: effect modification (the strata differ from each other).</a:t>
+              <a:t>Poll: 'RR 0.95 with normal kidneys, 0.60 with kidney injury?' Expected: effect modification.</a:t>
             </a:r>
           </a:p>
           <a:p>
@@ -959,31 +929,13 @@
           <a:p>
             <a:r>
               <a:rPr lang="en-US" sz="1400" b="0" dirty="0"/>
-              <a:t>This slide is the toolbox. The next three slides show each tool.</a:t>
+              <a:t>Only randomisation balances what was not measured.</a:t>
             </a:r>
           </a:p>
           <a:p>
             <a:r>
               <a:rPr lang="en-US" sz="1400" b="0" dirty="0"/>
-              <a:t>Design stage (prevention): randomisation, allocation concealment, blinding, restriction, matching. Analysis stage (repair): stratification, regression adjustment, propensity scores.</a:t>
-            </a:r>
-          </a:p>
-          <a:p>
-            <a:r>
-              <a:rPr lang="en-US" sz="1400" b="0" dirty="0"/>
-              <a:t>Teaching point: the bold red line is the key message. Every observational tool works only on what you measured. Randomisation is the only tool that also balances what you did not measure.</a:t>
-            </a:r>
-          </a:p>
-          <a:p>
-            <a:r>
-              <a:rPr lang="en-US" sz="1400" b="0" dirty="0"/>
-              <a:t>Misconception: 'propensity score matching is as good as randomisation'. It is matching on measured factors: clever, but still limited to the measured ones.</a:t>
-            </a:r>
-          </a:p>
-          <a:p>
-            <a:r>
-              <a:rPr lang="en-US" sz="1400" b="0" dirty="0"/>
-              <a:t>Ask the class (poll): which tools did Paper 2 (Hyun) use? Expected answer: restriction (adults with sepsis, ICU stay of 3 days or more) and 1:1 propensity score matching.</a:t>
+              <a:t>Poll: 'Which tools did Hyun use?' Expected: restriction and propensity score matching.</a:t>
             </a:r>
           </a:p>
           <a:p>
@@ -1070,31 +1022,13 @@
           <a:p>
             <a:r>
               <a:rPr lang="en-US" sz="1400" b="0" dirty="0"/>
-              <a:t>The red figures are severely ill patients (a known confounder). The gold stars are a hidden factor nobody measured: a genetic trait, frailty, a clinician's gut feeling.</a:t>
+              <a:t>Balance is on average. Boulet had higher baseline creatinine in one group: with 24 per arm, not surprising.</a:t>
             </a:r>
           </a:p>
           <a:p>
             <a:r>
               <a:rPr lang="en-US" sz="1400" b="0" dirty="0"/>
-              <a:t>Randomisation sends patients to group A or B by chance, so on average both groups receive the same mix of severe patients and of stars. Here each group gets 5 severe and 3 starred patients.</a:t>
-            </a:r>
-          </a:p>
-          <a:p>
-            <a:r>
-              <a:rPr lang="en-US" sz="1400" b="0" dirty="0"/>
-              <a:t>Teaching point: balance is on average. With very small trials chance imbalances happen. Boulet found baseline creatinine higher in the intervention group. With 24 per arm that is not surprising.</a:t>
-            </a:r>
-          </a:p>
-          <a:p>
-            <a:r>
-              <a:rPr lang="en-US" sz="1400" b="0" dirty="0"/>
-              <a:t>Misconception: 'randomised means the groups are identical'. They are similar on average. Table 1 of the paper lets you check.</a:t>
-            </a:r>
-          </a:p>
-          <a:p>
-            <a:r>
-              <a:rPr lang="en-US" sz="1400" b="0" dirty="0"/>
-              <a:t>Ask the class (call on two or three people, microphone on): why does this work better with 500 patients than with 50? Expected answer: with larger numbers, chance imbalances average out.</a:t>
+              <a:t>Ask: 'Why does this work better with 500 than 50?' Expected: chance imbalances average out.</a:t>
             </a:r>
           </a:p>
           <a:p>
@@ -1181,31 +1115,13 @@
           <a:p>
             <a:r>
               <a:rPr lang="en-US" sz="1400" b="0" dirty="0"/>
-              <a:t>Allocation concealment happens before randomisation: the person recruiting cannot know or predict the next allocation (central computer, not envelopes on the desk). Without it, a clinician could steer sicker patients away from the new treatment: selection bias inside a trial.</a:t>
+              <a:t>In Boulet, patients and statisticians were blinded, clinicians were not. When clinicians cannot be blinded, blind the assessor and use an objective outcome.</a:t>
             </a:r>
           </a:p>
           <a:p>
             <a:r>
               <a:rPr lang="en-US" sz="1400" b="0" dirty="0"/>
-              <a:t>Blinding happens after: who knows the group? In Boulet the patients and the statisticians were blinded, the clinicians and investigators were not, hence 'single-blind'.</a:t>
-            </a:r>
-          </a:p>
-          <a:p>
-            <a:r>
-              <a:rPr lang="en-US" sz="1400" b="0" dirty="0"/>
-              <a:t>Teaching point: in fluid and many ICU trials, blinding the clinician is often impossible. Then blind the outcome assessor and choose an objective outcome.</a:t>
-            </a:r>
-          </a:p>
-          <a:p>
-            <a:r>
-              <a:rPr lang="en-US" sz="1400" b="0" dirty="0"/>
-              <a:t>Misconception: 'single, double, triple blind' have fixed meanings. They do not. Papers should state exactly who was blinded.</a:t>
-            </a:r>
-          </a:p>
-          <a:p>
-            <a:r>
-              <a:rPr lang="en-US" sz="1400" b="0" dirty="0"/>
-              <a:t>Ask the class (poll): is concealment possible when blinding is not? Expected answer: yes. Concealment is always possible and always required.</a:t>
+              <a:t>Poll: 'Is concealment possible when blinding is not?' Expected: yes, always.</a:t>
             </a:r>
           </a:p>
           <a:p>
@@ -1292,31 +1208,13 @@
           <a:p>
             <a:r>
               <a:rPr lang="en-US" sz="1400" b="0" dirty="0"/>
-              <a:t>Hyun matched each positive-balance patient to a negative-balance patient with a similar propensity score, built from measured factors: age, sex, SOFA score, septic shock, comorbidities, infection site, fluid output and others. This gave 483, 373 and 392 matched pairs for the day-1, day-2 and day-3 analyses.</a:t>
+              <a:t>Hyun did not measure fluid type or nutrition. What is left is residual confounding, so a cohort still says 'associated with'.</a:t>
             </a:r>
           </a:p>
           <a:p>
             <a:r>
               <a:rPr lang="en-US" sz="1400" b="0" dirty="0"/>
-              <a:t>The authors themselves list what was not measured: type of fluid and nutritional support. The clinician's bedside judgement of how sick a patient looks is never fully captured. Whatever is left is called residual confounding.</a:t>
-            </a:r>
-          </a:p>
-          <a:p>
-            <a:r>
-              <a:rPr lang="en-US" sz="1400" b="0" dirty="0"/>
-              <a:t>Teaching point: this is why a cohort, however well matched, says 'associated with', and why the question 'does restriction save lives?' still needs a large RCT.</a:t>
-            </a:r>
-          </a:p>
-          <a:p>
-            <a:r>
-              <a:rPr lang="en-US" sz="1400" b="0" dirty="0"/>
-              <a:t>Misconception: 'matched groups are as good as randomised groups'. Check Table 1, then ask what is not in Table 1.</a:t>
-            </a:r>
-          </a:p>
-          <a:p>
-            <a:r>
-              <a:rPr lang="en-US" sz="1400" b="0" dirty="0"/>
-              <a:t>Ask the class (call on two or three people, microphone on): name one unmeasured factor that might push clinicians to give more fluid and predict death. Expected answer: clinical impression of shock, mottled skin, a failing heart, a goals-of-care discussion.</a:t>
+              <a:t>Ask: 'One unmeasured factor that drives more fluid and predicts death?' Expected: clinical impression of shock, a failing heart, goals-of-care discussion.</a:t>
             </a:r>
           </a:p>
           <a:p>
@@ -1403,31 +1301,13 @@
           <a:p>
             <a:r>
               <a:rPr lang="en-US" sz="1400" b="0" dirty="0"/>
-              <a:t>Internal validity: is the answer correct for the people who were in the study? This is what randomisation, concealment, blinding, complete follow-up and good measurement protect.</a:t>
+              <a:t>A biased result applies nowhere. A valid trial in selected patients may not apply to your unit.</a:t>
             </a:r>
           </a:p>
           <a:p>
             <a:r>
               <a:rPr lang="en-US" sz="1400" b="0" dirty="0"/>
-              <a:t>External validity (generalisability): does the answer apply to my patients in my setting? Compare the trial population with yours. Paper 1 (Boulet) included adults aged 18-85 without dialysis or severe malnutrition, in 3 ICUs of one country, and only about 4% of screened patients.</a:t>
-            </a:r>
-          </a:p>
-          <a:p>
-            <a:r>
-              <a:rPr lang="en-US" sz="1400" b="0" dirty="0"/>
-              <a:t>Teaching point: internal validity comes first. A biased result generalises nowhere. But a perfectly valid trial in highly selected patients may not help your unit.</a:t>
-            </a:r>
-          </a:p>
-          <a:p>
-            <a:r>
-              <a:rPr lang="en-US" sz="1400" b="0" dirty="0"/>
-              <a:t>Misconception: 'an RCT applies to everyone'. It applies most clearly to patients like those enrolled.</a:t>
-            </a:r>
-          </a:p>
-          <a:p>
-            <a:r>
-              <a:rPr lang="en-US" sz="1400" b="0" dirty="0"/>
-              <a:t>Ask the class (call on two or three people, microphone on): name one patient group in your ICU who would not have entered Boulet's trial. Expected answer: patients over 85, patients on chronic dialysis, those admitted more than 24 h after starting vasopressors.</a:t>
+              <a:t>Ask: 'One patient group in your ICU who would not have entered Boulet?' Expected: over 85, chronic dialysis, more than 24 h on vasopressors.</a:t>
             </a:r>
           </a:p>
           <a:p>
@@ -1514,37 +1394,13 @@
           <a:p>
             <a:r>
               <a:rPr lang="en-US" sz="1400" b="0" dirty="0"/>
-              <a:t>Reverse causation: the 'outcome' actually causes the 'exposure'.</a:t>
+              <a:t>Failing kidneys make less urine, so the balance becomes positive. That is why Hyun matched on fluid output.</a:t>
             </a:r>
           </a:p>
           <a:p>
             <a:r>
               <a:rPr lang="en-US" sz="1400" b="0" dirty="0"/>
-              <a:t>ICU example: we assume a positive fluid balance causes kidney injury and death. But failing kidneys produce less urine, and less urine out means a more positive balance. The arrow may run the other way. This is why Hyun matched patients on fluid output as well as input.</a:t>
-            </a:r>
-          </a:p>
-          <a:p>
-            <a:r>
-              <a:rPr lang="en-US" sz="1400" b="0" dirty="0"/>
-              <a:t>Other examples: people with early, undiagnosed illness stop exercising (so inactivity looks harmful). Patients who are deteriorating get more tests and more drugs.</a:t>
-            </a:r>
-          </a:p>
-          <a:p>
-            <a:r>
-              <a:rPr lang="en-US" sz="1400" b="0" dirty="0"/>
-              <a:t>How to check: make sure the exposure was measured before the outcome began, use a time lag, prefer cohort or trial designs over cross-sectional ones.</a:t>
-            </a:r>
-          </a:p>
-          <a:p>
-            <a:r>
-              <a:rPr lang="en-US" sz="1400" b="0" dirty="0"/>
-              <a:t>Misconception: 'reverse causation only matters in cross-sectional studies'. It can affect cohorts too when the exposure is measured while the outcome is already developing.</a:t>
-            </a:r>
-          </a:p>
-          <a:p>
-            <a:r>
-              <a:rPr lang="en-US" sz="1400" b="0" dirty="0"/>
-              <a:t>Ask the class (call on two or three people, microphone on): patients in shock receive more vasopressors and die more often. Which way could the arrow run? Expected answer: both ways. The drugs might cause harm, but deepening shock is the reason they are increased.</a:t>
+              <a:t>Ask: 'Shock patients get more vasopressors and die more. Which way could the arrow run?' Expected: both ways.</a:t>
             </a:r>
           </a:p>
           <a:p>
@@ -1631,31 +1487,19 @@
           <a:p>
             <a:r>
               <a:rPr lang="en-US" sz="1400" b="0" dirty="0"/>
-              <a:t>In 1965 Austin Bradford Hill listed nine viewpoints to judge whether an association is likely to be causal. They are not a checklist to score. They are clues.</a:t>
+              <a:t>Viewpoints are clues, not a score. Stop at temporality (essential) and experiment (given by an RCT).</a:t>
             </a:r>
           </a:p>
           <a:p>
             <a:r>
               <a:rPr lang="en-US" sz="1400" b="0" dirty="0"/>
-              <a:t>Go down the table quickly. Stop at temporality (the only essential one) and experiment (the strongest, given by an RCT).</a:t>
+              <a:t>For Hyun: possible, not proven.</a:t>
             </a:r>
           </a:p>
           <a:p>
             <a:r>
               <a:rPr lang="en-US" sz="1400" b="0" dirty="0"/>
-              <a:t>Apply to Hyun (right-hand column): strength moderate (hazard ratio, HR, about 1.6-2.1). Consistency with other cohorts yes. Temporality: balance measured before death, but reverse causation is possible. Dose-response not shown. Experiment: trials such as Boulet have not shown a mortality effect. Conclusion: possible, not proven.</a:t>
-            </a:r>
-          </a:p>
-          <a:p>
-            <a:r>
-              <a:rPr lang="en-US" sz="1400" b="0" dirty="0"/>
-              <a:t>Misconception: 'if most criteria are met, causation is proven'. They raise or lower our confidence. They never prove.</a:t>
-            </a:r>
-          </a:p>
-          <a:p>
-            <a:r>
-              <a:rPr lang="en-US" sz="1400" b="0" dirty="0"/>
-              <a:t>Ask the class (poll): which viewpoint does the RCT provide that no cohort can? Expected answer: experiment.</a:t>
+              <a:t>Poll: 'Which viewpoint does an RCT give that no cohort can?' Expected: experiment.</a:t>
             </a:r>
           </a:p>
           <a:p>
@@ -1742,19 +1586,19 @@
           <a:p>
             <a:r>
               <a:rPr lang="en-US" sz="1400" b="0" dirty="0"/>
-              <a:t>Run it as a four-question poll (one per scenario). After each result, call on one or two people to suggest a fix, microphone on. The same four scenarios are in the Session 4 exercise sheet (PDF), Part A.</a:t>
+              <a:t>Four-question poll. After each, ask one or two people for a fix.</a:t>
             </a:r>
           </a:p>
           <a:p>
             <a:r>
               <a:rPr lang="en-US" sz="1400" b="0" dirty="0"/>
-              <a:t>Answers. 1: recall bias. Fix: use exposure data recorded before the outcome was known (charts, prescription records). Ask both groups the same structured questions. 2: observer bias. Fix: blinded assessor, objective discharge criteria. 3: selection bias (the sickest, who died early, are missing). Fix: include all eligible patients from admission and report how many were excluded and why. 4: confounding by indication. Fix: randomise, or measure lactate and other severity markers and adjust or match.</a:t>
+              <a:t>Answers: 1 recall bias (use records made before the outcome). 2 observer bias (blinded assessor). 3 selection bias (include all from admission, report exclusions). 4 confounding by indication (randomise, or measure severity and adjust).</a:t>
             </a:r>
           </a:p>
           <a:p>
             <a:r>
               <a:rPr lang="en-US" sz="1400" b="0" dirty="0"/>
-              <a:t>Timing: 5 minutes. Keep it fast: this is a check, not a lecture. This closes the 40 minutes of 4.1.</a:t>
+              <a:t>Timing: 5 minutes. 4.1 ends here.</a:t>
             </a:r>
           </a:p>
         </p:txBody>
@@ -1835,13 +1679,7 @@
           <a:p>
             <a:r>
               <a:rPr lang="en-US" sz="1400" b="0" dirty="0"/>
-              <a:t>Section marker for 4.2 (25 minutes: about 17 minutes of slides, then the 8-minute live demo, the calculations come after the break). RR: risk ratio, OR: odds ratio, RD: risk difference. NNT: number needed to treat. Each is defined on the slide that teaches it.</a:t>
-            </a:r>
-          </a:p>
-          <a:p>
-            <a:r>
-              <a:rPr lang="en-US" sz="1400" b="0" dirty="0"/>
-              <a:t>Reassure the class: the only arithmetic today is division with a 2x2 table, and the spreadsheet will check every answer.</a:t>
+              <a:t>4.2: about 17 minutes of slides, then the 8-minute demo.</a:t>
             </a:r>
           </a:p>
           <a:p>
@@ -1928,25 +1766,25 @@
           <a:p>
             <a:r>
               <a:rPr lang="en-US" sz="1400" b="0" dirty="0"/>
-              <a:t>Run it as three poll questions. CI = confidence interval (Session 3, non-inferiority slide).</a:t>
+              <a:t>Three poll questions.</a:t>
             </a:r>
           </a:p>
           <a:p>
             <a:r>
               <a:rPr lang="en-US" sz="1400" b="0" dirty="0"/>
-              <a:t>Answers. Q1: case-control (chosen by outcome, death, look back for the exposure, fluid). Q2: a cluster randomised trial. Q3: non-inferior. The whole CI stays below the +4 margin (it crosses 0, so it is not superior).</a:t>
+              <a:t>Answers: Q1 case-control (chosen by outcome). Q2 cluster randomised trial. Q3 non-inferior: the whole CI stays below the +4 margin.</a:t>
             </a:r>
           </a:p>
           <a:p>
             <a:r>
               <a:rPr lang="en-US" sz="1400" b="0" dirty="0"/>
-              <a:t>Misconception to catch in Q1: 'it uses records, so it is a cohort'. Ask: were people chosen by what happened to them (death) or by what they received?</a:t>
+              <a:t>If someone says 'records, so cohort', ask: chosen by what happened to them or by what they received?</a:t>
             </a:r>
           </a:p>
           <a:p>
             <a:r>
               <a:rPr lang="en-US" sz="1400" b="0" dirty="0"/>
-              <a:t>Timing: 9 minutes (about 6 for the questions, 3 for re-reading Part 2a, the homework from Session 3). Together with the opening slide this is the 10-minute recap. Today's proposal builder completes Part 2.</a:t>
+              <a:t>Timing: 9 minutes.</a:t>
             </a:r>
           </a:p>
         </p:txBody>
@@ -2027,31 +1865,13 @@
           <a:p>
             <a:r>
               <a:rPr lang="en-US" sz="1400" b="0" dirty="0"/>
-              <a:t>Water flowing in from the tap = new cases = incidence. Water in the tub at this moment = existing cases = prevalence. Water leaving through the drain = patients who recover or die.</a:t>
+              <a:t>Incidence needs a time period and only people at risk in the denominator.</a:t>
             </a:r>
           </a:p>
           <a:p>
             <a:r>
               <a:rPr lang="en-US" sz="1400" b="0" dirty="0"/>
-              <a:t>Worked example on the right (another example, from a ward): 20 of 200 ward patients have a pressure injury today, prevalence 10%. Of the 180 without one, 9 develop a new injury over the next week, incidence 5% per week. Note the denominator for incidence: only people at risk (those without the condition at the start).</a:t>
-            </a:r>
-          </a:p>
-          <a:p>
-            <a:r>
-              <a:rPr lang="en-US" sz="1400" b="0" dirty="0"/>
-              <a:t>Teaching point: a long-lasting condition can have a high prevalence with a low incidence (diabetes). A short one can have a high incidence but low prevalence (common cold, short delirium episodes).</a:t>
-            </a:r>
-          </a:p>
-          <a:p>
-            <a:r>
-              <a:rPr lang="en-US" sz="1400" b="0" dirty="0"/>
-              <a:t>Misconception: using prevalence and incidence interchangeably. Incidence always has a time period attached.</a:t>
-            </a:r>
-          </a:p>
-          <a:p>
-            <a:r>
-              <a:rPr lang="en-US" sz="1400" b="0" dirty="0"/>
-              <a:t>Ask the class (call on two or three people, microphone on): in our ICU, 'how many patients have a positive fluid balance today' is prevalence or incidence? And 'how many develop kidney injury in their first week'? Expected answer: prevalence, incidence.</a:t>
+              <a:t>Ask: 'Positive fluid balance today: prevalence or incidence? Kidney injury in the first week?' Expected: prevalence, incidence.</a:t>
             </a:r>
           </a:p>
           <a:p>
@@ -2138,31 +1958,13 @@
           <a:p>
             <a:r>
               <a:rPr lang="en-US" sz="1400" b="0" dirty="0"/>
-              <a:t>A hypothetical, larger trial of our running question, not Boulet's data. 100 patients per arm. Restrictive: 20 die by day 28. Usual care: 30 die.</a:t>
+              <a:t>Hypothetical trial, not Boulet. Always ask 'out of how many?'.</a:t>
             </a:r>
           </a:p>
           <a:p>
             <a:r>
               <a:rPr lang="en-US" sz="1400" b="0" dirty="0"/>
-              <a:t>Risk is the simplest measure: 20/100 = 20% and 30/100 = 30%. Pictures like this (icon arrays) are also the best way to explain risk to patients and families.</a:t>
-            </a:r>
-          </a:p>
-          <a:p>
-            <a:r>
-              <a:rPr lang="en-US" sz="1400" b="0" dirty="0"/>
-              <a:t>Teaching point: always ask 'out of how many?' A headline of '10 more deaths' means nothing without the denominator.</a:t>
-            </a:r>
-          </a:p>
-          <a:p>
-            <a:r>
-              <a:rPr lang="en-US" sz="1400" b="0" dirty="0"/>
-              <a:t>Misconception: risk versus odds. Risk is out of everyone in the group (20 of 100). Odds compare those with the outcome to those without (20 to 80). We need both in a moment.</a:t>
-            </a:r>
-          </a:p>
-          <a:p>
-            <a:r>
-              <a:rPr lang="en-US" sz="1400" b="0" dirty="0"/>
-              <a:t>Ask the class (call on two or three people, microphone on): what are the odds of dying in the restrictive group? Expected answer: 20 to 80, i.e. 0.25.</a:t>
+              <a:t>Ask: 'Odds of dying with restriction?' Expected: 20 to 80, 0.25.</a:t>
             </a:r>
           </a:p>
           <a:p>
@@ -2249,31 +2051,13 @@
           <a:p>
             <a:r>
               <a:rPr lang="en-US" sz="1400" b="0" dirty="0"/>
-              <a:t>Insist on one layout and keep it forever: exposure (or treatment) in rows, with exposed on top. Outcome in columns, with 'outcome yes' on the left. Then a, b, c, d always mean the same thing.</a:t>
+              <a:t>Keep one layout: exposure in rows (exposed on top), outcome yes on the left. Most errors come from a table drawn the other way.</a:t>
             </a:r>
           </a:p>
           <a:p>
             <a:r>
               <a:rPr lang="en-US" sz="1400" b="0" dirty="0"/>
-              <a:t>Worked example: a = 20, b = 80, c = 30, d = 70. Row totals 100 and 100.</a:t>
-            </a:r>
-          </a:p>
-          <a:p>
-            <a:r>
-              <a:rPr lang="en-US" sz="1400" b="0" dirty="0"/>
-              <a:t>Teaching point: almost every measure of association for a yes/no outcome comes from these four numbers. The spreadsheet in the demo uses the same layout.</a:t>
-            </a:r>
-          </a:p>
-          <a:p>
-            <a:r>
-              <a:rPr lang="en-US" sz="1400" b="0" dirty="0"/>
-              <a:t>Misconception: swapping rows and columns. Many errors in student work come from a table drawn the other way round. Check the layout before calculating.</a:t>
-            </a:r>
-          </a:p>
-          <a:p>
-            <a:r>
-              <a:rPr lang="en-US" sz="1400" b="0" dirty="0"/>
-              <a:t>Ask the class (call on two or three people, microphone on): in Paper 1 (Boulet), for death by day 28, what are a, b, c and d? Expected answer: a = 6, b = 18, c = 6, d = 18 (6 of 24 died in each arm).</a:t>
+              <a:t>Ask: 'Boulet, death by day 28: a, b, c, d?' Expected: 6, 18, 6, 18.</a:t>
             </a:r>
           </a:p>
           <a:p>
@@ -2360,43 +2144,13 @@
           <a:p>
             <a:r>
               <a:rPr lang="en-US" sz="1400" b="0" dirty="0"/>
-              <a:t>Go card by card, always back to the 2x2 table.</a:t>
+              <a:t>Go card by card, back to the table each time. 'One third lower' and '10 fewer per 100' are the same result.</a:t>
             </a:r>
           </a:p>
           <a:p>
             <a:r>
               <a:rPr lang="en-US" sz="1400" b="0" dirty="0"/>
-              <a:t>RR = 0.20 / 0.30 = 0.67: the risk of death is one third lower with restriction. RR = 1 means no difference. Below 1 protective, above 1 harmful.</a:t>
-            </a:r>
-          </a:p>
-          <a:p>
-            <a:r>
-              <a:rPr lang="en-US" sz="1400" b="0" dirty="0"/>
-              <a:t>RD = 0.20 - 0.30 = -0.10: 10 fewer deaths per 100 patients treated. Also called absolute risk reduction (ARR = 10%).</a:t>
-            </a:r>
-          </a:p>
-          <a:p>
-            <a:r>
-              <a:rPr lang="en-US" sz="1400" b="0" dirty="0"/>
-              <a:t>NNT = 1 / 0.10 = 10: treat 10 patients to prevent one death. If the exposure is harmful the same calculation gives the number needed to harm (NNH).</a:t>
-            </a:r>
-          </a:p>
-          <a:p>
-            <a:r>
-              <a:rPr lang="en-US" sz="1400" b="0" dirty="0"/>
-              <a:t>OR = (20 x 70) / (80 x 30) = 1400 / 2400 = 0.58. Further from 1 than the RR. The next slides explain why.</a:t>
-            </a:r>
-          </a:p>
-          <a:p>
-            <a:r>
-              <a:rPr lang="en-US" sz="1400" b="0" dirty="0"/>
-              <a:t>Misconception: a relative effect sounds bigger. 'One third lower' and '10 fewer per 100' are the same result. Patients and policymakers need the absolute version.</a:t>
-            </a:r>
-          </a:p>
-          <a:p>
-            <a:r>
-              <a:rPr lang="en-US" sz="1400" b="0" dirty="0"/>
-              <a:t>Ask the class (call on two or three people, microphone on): if the baseline risk were 3% instead of 30%, with the same RR of 0.67, what would the NNT be? Expected answer: risk 2% vs 3%, difference 1%, NNT = 100.</a:t>
+              <a:t>Ask: 'Baseline risk 3%, same RR 0.67: NNT?' Expected: 2% vs 3%, NNT = 100.</a:t>
             </a:r>
           </a:p>
           <a:p>
@@ -2483,25 +2237,13 @@
           <a:p>
             <a:r>
               <a:rPr lang="en-US" sz="1400" b="0" dirty="0"/>
-              <a:t>Scale the 100 patients down to 10. Under usual care 3 of 10 die. With the restrictive strategy 2 of 10 die. The one green person is the patient who, on average, avoided death because of the treatment. So we treat 10 patients for one to benefit: NNT = 10.</a:t>
+              <a:t>The other 9 survived or died anyway. NNT is an average, not a prediction for one patient.</a:t>
             </a:r>
           </a:p>
           <a:p>
             <a:r>
               <a:rPr lang="en-US" sz="1400" b="0" dirty="0"/>
-              <a:t>Teaching point: the other 9 either survived anyway or died anyway. They bore the burden of the treatment without benefit. That is why NNT is a useful conversation tool with patients, families and managers.</a:t>
-            </a:r>
-          </a:p>
-          <a:p>
-            <a:r>
-              <a:rPr lang="en-US" sz="1400" b="0" dirty="0"/>
-              <a:t>Misconception: 'NNT of 10 means 1 in 10 patients respond'. It is an average across the group, not a prediction for one patient.</a:t>
-            </a:r>
-          </a:p>
-          <a:p>
-            <a:r>
-              <a:rPr lang="en-US" sz="1400" b="0" dirty="0"/>
-              <a:t>Ask the class (poll): which is better, an NNT of 5 or of 50? Expected answer: 5. Fewer patients need treating for one to benefit (but always weigh against harms and cost).</a:t>
+              <a:t>Poll: 'NNT 5 or 50?' Expected: 5.</a:t>
             </a:r>
           </a:p>
           <a:p>
@@ -2588,31 +2330,13 @@
           <a:p>
             <a:r>
               <a:rPr lang="en-US" sz="1400" b="0" dirty="0"/>
-              <a:t>Here the exposure truly doubles the risk (RR = 2, green line). The red line is the OR for the same data as the outcome becomes more common.</a:t>
+              <a:t>The OR is close to the RR only for rare outcomes. ICU mortality is common.</a:t>
             </a:r>
           </a:p>
           <a:p>
             <a:r>
               <a:rPr lang="en-US" sz="1400" b="0" dirty="0"/>
-              <a:t>When the outcome is rare (left, shaded), OR is about 2.1, practically the same as RR. At a baseline risk of 20%, OR = 2.7. At 40%, OR = 6. The OR always lies further from 1 than the RR.</a:t>
-            </a:r>
-          </a:p>
-          <a:p>
-            <a:r>
-              <a:rPr lang="en-US" sz="1400" b="0" dirty="0"/>
-              <a:t>Teaching point: case-control studies and logistic regression give ORs. When a paper reports an OR for a common outcome, such as ICU mortality of 20-40%, do not read it as 'X times the risk'.</a:t>
-            </a:r>
-          </a:p>
-          <a:p>
-            <a:r>
-              <a:rPr lang="en-US" sz="1400" b="0" dirty="0"/>
-              <a:t>Misconception: 'OR 2 means twice the risk'. Only for rare outcomes.</a:t>
-            </a:r>
-          </a:p>
-          <a:p>
-            <a:r>
-              <a:rPr lang="en-US" sz="1400" b="0" dirty="0"/>
-              <a:t>Ask the class (call on two or three people, microphone on): in our worked example (deaths of 20% and 30%), OR was 0.58 and RR 0.67. Why do they differ? Expected answer: death is common in this population, so the OR exaggerates the effect.</a:t>
+              <a:t>Ask: 'Our OR was 0.58 and RR 0.67. Why?' Expected: death is common, so the OR exaggerates.</a:t>
             </a:r>
           </a:p>
           <a:p>
@@ -2699,37 +2423,31 @@
           <a:p>
             <a:r>
               <a:rPr lang="en-US" sz="1400" b="0" dirty="0"/>
-              <a:t>Script: Course/Demos/s4_demo.md. File: Course/Resources/tools/2x2_calculator.xlsx (pre-filled with the worked example). Participants only watch. We email the file afterwards.</a:t>
+              <a:t>Script: s4_demo.md. File: 2x2_calculator.xlsx, pre-filled. Participants watch. Email the file afterwards.</a:t>
             </a:r>
           </a:p>
           <a:p>
             <a:r>
               <a:rPr lang="en-US" sz="1400" b="0" dirty="0"/>
-              <a:t>Teaching point: the spreadsheet does the arithmetic. The human does the interpretation. Read the plain-language cells aloud.</a:t>
+              <a:t>Key moment: a = 2, c = 3. RR stays 0.67, OR becomes 0.66, NNT jumps to 100.</a:t>
             </a:r>
           </a:p>
           <a:p>
             <a:r>
               <a:rPr lang="en-US" sz="1400" b="0" dirty="0"/>
-              <a:t>Key moment: change a to 2 and c to 3 (b = 98, d = 97). RR stays 0.67 but OR is now 0.66, almost identical. The NNT jumps to 100. Same relative effect, very different absolute effect.</a:t>
+              <a:t>The calculator gives a 'risk' for case-control data, but only the OR is valid.</a:t>
             </a:r>
           </a:p>
           <a:p>
             <a:r>
               <a:rPr lang="en-US" sz="1400" b="0" dirty="0"/>
-              <a:t>Fallback if screen sharing fails: type the 2x2 table into the chat or a shared document and calculate RR and NNT by hand with the class. The numbers are chosen to be easy.</a:t>
+              <a:t>If sharing fails, do RR and NNT by hand.</a:t>
             </a:r>
           </a:p>
           <a:p>
             <a:r>
               <a:rPr lang="en-US" sz="1400" b="0" dirty="0"/>
-              <a:t>Misconception to raise: the calculator will happily give a 'risk' for case-control data. It is meaningless there: only the OR is valid.</a:t>
-            </a:r>
-          </a:p>
-          <a:p>
-            <a:r>
-              <a:rPr lang="en-US" sz="1400" b="0" dirty="0"/>
-              <a:t>Timing: 8 minutes. The Diagnostic sheet is shown briefly in 4.3. Then the break. This closes the 25 minutes of 4.2.</a:t>
+              <a:t>Timing: 8 minutes. Then the break.</a:t>
             </a:r>
           </a:p>
         </p:txBody>
@@ -2810,19 +2528,7 @@
           <a:p>
             <a:r>
               <a:rPr lang="en-US" sz="1400" b="0" dirty="0"/>
-              <a:t>The slide is only a picture on purpose. Before the break, say: after the break we do two 2x2 calculations together, so have a pen, paper and a calculator ready. Then 4.3, beyond single studies.</a:t>
-            </a:r>
-          </a:p>
-          <a:p>
-            <a:r>
-              <a:rPr lang="en-US" sz="1400" b="0" dirty="0"/>
-              <a:t>15-minute break (20:45-21:00). Put a countdown timer on the shared screen and leave the session open.</a:t>
-            </a:r>
-          </a:p>
-          <a:p>
-            <a:r>
-              <a:rPr lang="en-US" sz="1400" b="0" dirty="0"/>
-              <a:t>Restart on time.</a:t>
+              <a:t>Break 20:45-21:00. Ask people to have pen, paper and a calculator ready. Put a countdown timer on screen.</a:t>
             </a:r>
           </a:p>
         </p:txBody>
@@ -2903,31 +2609,25 @@
           <a:p>
             <a:r>
               <a:rPr lang="en-US" sz="1400" b="0" dirty="0"/>
-              <a:t>Whole-class exercise. Sheet: Course/Practicals/s4_exercises.md, Part C (PDF). Key: Course/Solutions/s4_solutions.md, Part C.</a:t>
+              <a:t>7 minutes per calculation. Poll each step and type the table into the calculator.</a:t>
             </a:r>
           </a:p>
           <a:p>
             <a:r>
               <a:rPr lang="en-US" sz="1400" b="0" dirty="0"/>
-              <a:t>Calculation 1 (hypothetical trial of restrictive vs usual fluids, 200 patients per group): 20 vs 30 deaths by day 28. Poll each step: risks 10% and 15%, RR = 0.67. RD = -5 percentage points. NNT = 20. OR = (20 x 170) / (180 x 30) = 0.63. Teaching point: the same RR (0.67) as the worked example, but the baseline risk is lower (15% instead of 30%), so the NNT doubles from 10 to 20.</a:t>
+              <a:t>Calculation 1: risks 10% and 15%, RR 0.67, RD -5 points, NNT 20, OR 0.63. Same RR as before, lower baseline risk, so NNT doubles.</a:t>
             </a:r>
           </a:p>
           <a:p>
             <a:r>
               <a:rPr lang="en-US" sz="1400" b="0" dirty="0"/>
-              <a:t>Calculation 2 (hypothetical case-control study): 40 patients with sepsis who needed new dialysis (cases) and 80 who did not (controls), same ICUs. Positive fluid balance on day 3 in 24 of 40 cases and 16 of 80 controls. OR = (24 x 64) / (16 x 16) = 6.0. RR cannot be calculated because the investigators chose the number of cases and controls. Then ask (call on two or three people, microphone on): could the arrow run the other way here? Yes: failing kidneys make less urine, so the balance becomes positive (reverse causation, slide 16).</a:t>
+              <a:t>Calculation 2: OR = (24 x 64) / (16 x 16) = 6.0. No RR: the investigators chose the numbers of cases and controls. Ask about reverse causation (failing kidneys).</a:t>
             </a:r>
           </a:p>
           <a:p>
             <a:r>
               <a:rPr lang="en-US" sz="1400" b="0" dirty="0"/>
-              <a:t>Rhythm: 7 minutes per calculation (poll each answer, type the table into the calculator on the shared screen), 1 minute to close. Most mistakes are layout, not arithmetic: check that everyone drew exposure in rows.</a:t>
-            </a:r>
-          </a:p>
-          <a:p>
-            <a:r>
-              <a:rPr lang="en-US" sz="1400" b="0" dirty="0"/>
-              <a:t>If the class is quick: the sheet has one more calculation on another topic (Part C, extra practice) for self-study.</a:t>
+              <a:t>Most mistakes are layout. Key: s4_solutions, Part C.</a:t>
             </a:r>
           </a:p>
         </p:txBody>
@@ -3008,25 +2708,13 @@
           <a:p>
             <a:r>
               <a:rPr lang="en-US" sz="1400" b="0" dirty="0"/>
-              <a:t>Section marker for 4.3 (30 minutes, including the 8-minute whole-class forest-plot task).</a:t>
+              <a:t>4.3: 30 minutes including the 8-minute forest-plot task. About 2.5 minutes per slide.</a:t>
             </a:r>
           </a:p>
           <a:p>
             <a:r>
               <a:rPr lang="en-US" sz="1400" b="0" dirty="0"/>
-              <a:t>Three blocks: diagnostic accuracy (sensitivity, specificity, predictive values, ROC curve), systematic reviews and meta-analysis (PRISMA flow, forest plots, heterogeneity), and risk-of-bias tools (which tool for which design).</a:t>
-            </a:r>
-          </a:p>
-          <a:p>
-            <a:r>
-              <a:rPr lang="en-US" sz="1400" b="0" dirty="0"/>
-              <a:t>Teaching point: everything here is about judging evidence, the skills participants will use in Session 8 in 'Be the reviewer'.</a:t>
-            </a:r>
-          </a:p>
-          <a:p>
-            <a:r>
-              <a:rPr lang="en-US" sz="1400" b="0" dirty="0"/>
-              <a:t>Timing: 30 seconds. Keep a brisk pace: about 2.5 minutes per slide.</a:t>
+              <a:t>Timing: 30 seconds.</a:t>
             </a:r>
           </a:p>
         </p:txBody>
@@ -3107,25 +2795,13 @@
           <a:p>
             <a:r>
               <a:rPr lang="en-US" sz="1400" b="0" dirty="0"/>
-              <a:t>Section 4.1 starts here (40 minutes in all, this slide to the 'Spot the bias' poll).</a:t>
+              <a:t>4.1 starts here (40 minutes). We judge whether a result can be trusted before we ask how big it is.</a:t>
             </a:r>
           </a:p>
           <a:p>
             <a:r>
               <a:rPr lang="en-US" sz="1400" b="0" dirty="0"/>
-              <a:t>Read the four headings. Tell the class the glossary is at the top of the Session 4 exercise sheet (PDF sent before the session).</a:t>
-            </a:r>
-          </a:p>
-          <a:p>
-            <a:r>
-              <a:rPr lang="en-US" sz="1400" b="0" dirty="0"/>
-              <a:t>Teaching point: the order matters. We judge whether a result can be trusted before we care how big it is.</a:t>
-            </a:r>
-          </a:p>
-          <a:p>
-            <a:r>
-              <a:rPr lang="en-US" sz="1400" b="0" dirty="0"/>
-              <a:t>Ask the class (call on two or three people, microphone on): which of these words have you seen in a paper this month? Expected: OR, RR, 95% CI, forest plot.</a:t>
+              <a:t>Ask: 'Which of these words have you seen in a paper this month?' Expected: OR, RR, 95% CI, forest plot.</a:t>
             </a:r>
           </a:p>
           <a:p>
@@ -3212,37 +2888,13 @@
           <a:p>
             <a:r>
               <a:rPr lang="en-US" sz="1400" b="0" dirty="0"/>
-              <a:t>Back to the 2x2 table, now for a test. 100 patients, 20 truly have the disease.</a:t>
+              <a:t>A sensitive test rules out. A specific test rules in. PPV here is only 53%.</a:t>
             </a:r>
           </a:p>
           <a:p>
             <a:r>
               <a:rPr lang="en-US" sz="1400" b="0" dirty="0"/>
-              <a:t>Sensitivity: of the 20 who have the disease, the test finds 18 = 90%. A highly sensitive test rarely misses disease, so a negative result helps rule it out.</a:t>
-            </a:r>
-          </a:p>
-          <a:p>
-            <a:r>
-              <a:rPr lang="en-US" sz="1400" b="0" dirty="0"/>
-              <a:t>Specificity: of the 80 who do not have it, 64 test negative = 80%. A highly specific test rarely raises false alarms, so a positive result helps rule it in.</a:t>
-            </a:r>
-          </a:p>
-          <a:p>
-            <a:r>
-              <a:rPr lang="en-US" sz="1400" b="0" dirty="0"/>
-              <a:t>Preview of the next slide: of the 34 positive tests, only 18 truly have the disease, a positive predictive value of 53%. It depends on how common the disease is.</a:t>
-            </a:r>
-          </a:p>
-          <a:p>
-            <a:r>
-              <a:rPr lang="en-US" sz="1400" b="0" dirty="0"/>
-              <a:t>Misconception: 'a 90% sensitive test means a positive patient has a 90% chance of disease'. No. That is the positive predictive value, which here is only 53%.</a:t>
-            </a:r>
-          </a:p>
-          <a:p>
-            <a:r>
-              <a:rPr lang="en-US" sz="1400" b="0" dirty="0"/>
-              <a:t>Ask the class (poll): for a screening test that must not miss sepsis, which comes first: sensitivity or specificity? Expected answer: sensitivity.</a:t>
+              <a:t>Poll: 'Screening must not miss sepsis: sensitivity or specificity first?' Expected: sensitivity.</a:t>
             </a:r>
           </a:p>
           <a:p>
@@ -3329,43 +2981,19 @@
           <a:p>
             <a:r>
               <a:rPr lang="en-US" sz="1400" b="0" dirty="0"/>
-              <a:t>The same test (sensitivity 90%, specificity 80%) used on 500 people in two settings.</a:t>
+              <a:t>PPV and NPV depend on prevalence. Never borrow a PPV from a different setting.</a:t>
             </a:r>
           </a:p>
           <a:p>
             <a:r>
               <a:rPr lang="en-US" sz="1400" b="0" dirty="0"/>
-              <a:t>ICU, where 20% have the disease: 90 true positives, 80 false positives, so a positive result is right 90 / 170 = 53% of the time (positive predictive value, PPV).</a:t>
+              <a:t>Ask: 'Why do screening programmes use a second, more specific test?' Expected: to remove false positives.</a:t>
             </a:r>
           </a:p>
           <a:p>
             <a:r>
               <a:rPr lang="en-US" sz="1400" b="0" dirty="0"/>
-              <a:t>Screening, where 2% have it: 9 true positives but 98 false positives: PPV 9 / 107 = 8%. More than 9 in 10 positives are false alarms. Meanwhile the negative predictive value (NPV) rises to 99.7%.</a:t>
-            </a:r>
-          </a:p>
-          <a:p>
-            <a:r>
-              <a:rPr lang="en-US" sz="1400" b="0" dirty="0"/>
-              <a:t>Teaching point: sensitivity and specificity belong to the test. PPV and NPV belong to the test in A population. Never borrow a PPV from a study done in a different setting.</a:t>
-            </a:r>
-          </a:p>
-          <a:p>
-            <a:r>
-              <a:rPr lang="en-US" sz="1400" b="0" dirty="0"/>
-              <a:t>Misconception: 'a good test is good everywhere'. Screening healthy populations with a moderately specific test creates many false positives and many unnecessary investigations.</a:t>
-            </a:r>
-          </a:p>
-          <a:p>
-            <a:r>
-              <a:rPr lang="en-US" sz="1400" b="0" dirty="0"/>
-              <a:t>Ask the class (call on two or three people, microphone on): why do screening programmes use a second, more specific test before acting? Expected answer: to remove the false positives created by low prevalence.</a:t>
-            </a:r>
-          </a:p>
-          <a:p>
-            <a:r>
-              <a:rPr lang="en-US" sz="1400" b="0" dirty="0"/>
-              <a:t>Optional (1 minute): on the shared screen, show the 'PPV at another prevalence' box on the Diagnostic sheet of the 2x2 calculator, then type 2% and 20% (Course/Demos/s4_demo.md, Part 2).</a:t>
+              <a:t>Optional: show the 'PPV at another prevalence' box (s4_demo.md, Part 2).</a:t>
             </a:r>
           </a:p>
           <a:p>
@@ -3452,31 +3080,13 @@
           <a:p>
             <a:r>
               <a:rPr lang="en-US" sz="1400" b="0" dirty="0"/>
-              <a:t>Many tests give a number (lactate, procalcitonin, a risk score). Every cut-off gives one pair of sensitivity and specificity. The ROC curve plots all of them: sensitivity up, false-positive rate (1 - specificity) across.</a:t>
+              <a:t>The best cut-off depends on the cost of a miss versus a false alarm. AUC does not choose the cut-off.</a:t>
             </a:r>
           </a:p>
           <a:p>
             <a:r>
               <a:rPr lang="en-US" sz="1400" b="0" dirty="0"/>
-              <a:t>A low cut-off catches almost every case but raises many false alarms (top right). A high cut-off gives few false alarms but misses cases (bottom left). The best cut-off depends on the cost of missing a case versus the cost of a false alarm.</a:t>
-            </a:r>
-          </a:p>
-          <a:p>
-            <a:r>
-              <a:rPr lang="en-US" sz="1400" b="0" dirty="0"/>
-              <a:t>The area under the curve (AUC, also called the c-statistic) summarises discrimination: 0.5 = coin toss (the dashed line), 1.0 = perfect. This simulated test has AUC 0.80.</a:t>
-            </a:r>
-          </a:p>
-          <a:p>
-            <a:r>
-              <a:rPr lang="en-US" sz="1400" b="0" dirty="0"/>
-              <a:t>Misconception: 'AUC tells you which cut-off to use'. It does not. It describes the whole curve. The same AUC appears again in Session 6 for prediction models.</a:t>
-            </a:r>
-          </a:p>
-          <a:p>
-            <a:r>
-              <a:rPr lang="en-US" sz="1400" b="0" dirty="0"/>
-              <a:t>Ask the class (poll): for ruling out sepsis at triage, would you choose a low or high lactate cut-off? Expected answer: low, for high sensitivity, accepting more false alarms.</a:t>
+              <a:t>Poll: 'Ruling out sepsis at triage: low or high lactate cut-off?' Expected: low.</a:t>
             </a:r>
           </a:p>
           <a:p>
@@ -3563,43 +3173,13 @@
           <a:p>
             <a:r>
               <a:rPr lang="en-US" sz="1400" b="0" dirty="0"/>
-              <a:t>Illustrative numbers. Every systematic review should show this diagram (PRISMA 2020).</a:t>
+              <a:t>Illustrative numbers. Two reviewers screen independently. The protocol is registered in PROSPERO.</a:t>
             </a:r>
           </a:p>
           <a:p>
             <a:r>
               <a:rPr lang="en-US" sz="1400" b="0" dirty="0"/>
-              <a:t>Identification: 1,240 database records plus 60 from trial registers = 1,300, 300 duplicates removed.</a:t>
-            </a:r>
-          </a:p>
-          <a:p>
-            <a:r>
-              <a:rPr lang="en-US" sz="1400" b="0" dirty="0"/>
-              <a:t>Screening: 1,000 titles and abstracts screened, 920 excluded, 80 full texts read, 71 excluded with reasons (38 not RCTs, 21 wrong population, 12 no mortality data, which add up to 71).</a:t>
-            </a:r>
-          </a:p>
-          <a:p>
-            <a:r>
-              <a:rPr lang="en-US" sz="1400" b="0" dirty="0"/>
-              <a:t>Included: 9 studies, all in the meta-analysis.</a:t>
-            </a:r>
-          </a:p>
-          <a:p>
-            <a:r>
-              <a:rPr lang="en-US" sz="1400" b="0" dirty="0"/>
-              <a:t>Teaching point: two reviewers screen independently, and the protocol is registered beforehand (PROSPERO, the international register of systematic review protocols). The diagram lets a reader judge whether relevant studies were lost.</a:t>
-            </a:r>
-          </a:p>
-          <a:p>
-            <a:r>
-              <a:rPr lang="en-US" sz="1400" b="0" dirty="0"/>
-              <a:t>Misconception: 'more included studies = a better review'. Strict, explicit inclusion criteria matter more than numbers.</a:t>
-            </a:r>
-          </a:p>
-          <a:p>
-            <a:r>
-              <a:rPr lang="en-US" sz="1400" b="0" dirty="0"/>
-              <a:t>Ask the class (call on two or three people, microphone on): why search trial registers and not only PubMed? Expected answer: to find unpublished or negative trials, because of publication bias (Session 2, grey literature).</a:t>
+              <a:t>Ask: 'Why search trial registers too?' Expected: unpublished or negative trials (publication bias).</a:t>
             </a:r>
           </a:p>
           <a:p>
@@ -3686,25 +3266,19 @@
           <a:p>
             <a:r>
               <a:rPr lang="en-US" sz="1400" b="0" dirty="0"/>
-              <a:t>Hypothetical trials, fixed-effect (inverse-variance) pooling. Read it in four steps. (1) Find the vertical line of no effect: RR = 1. Left of it favours restrictive fluids. Right favours usual care. (2) Each square is one study's RR. Its size shows its weight (Trial 4 is largest, 38%). (3) Each horizontal line is that study's 95% CI. If it crosses 1, that study alone is inconclusive. Here every single trial crosses 1. (4) The diamond is the pooled estimate: RR 0.79 (95% CI 0.64-0.98). Its width is the CI. It does not cross 1.</a:t>
+              <a:t>Four steps: line of no effect, squares (weight), lines (CI), diamond: RR 0.79 (0.64-0.98).</a:t>
             </a:r>
           </a:p>
           <a:p>
             <a:r>
               <a:rPr lang="en-US" sz="1400" b="0" dirty="0"/>
-              <a:t>Teaching point: pooling several inconclusive trials can give a precise answer. That is the strength of meta-analysis. In words: about 21% lower relative risk of death, though the upper limit (0.98) is close to no effect.</a:t>
+              <a:t>Every single trial crosses 1, but the pooled result does not. A CI crossing 1 shows uncertainty, not no effect.</a:t>
             </a:r>
           </a:p>
           <a:p>
             <a:r>
               <a:rPr lang="en-US" sz="1400" b="0" dirty="0"/>
-              <a:t>Misconception: 'a trial whose CI crosses 1 shows no effect'. It shows uncertainty, not absence of an effect.</a:t>
-            </a:r>
-          </a:p>
-          <a:p>
-            <a:r>
-              <a:rPr lang="en-US" sz="1400" b="0" dirty="0"/>
-              <a:t>Do not ask questions yet: the whole-class task at the end of 4.3 uses this same plot.</a:t>
+              <a:t>No questions yet: the task at the end of 4.3 uses this plot.</a:t>
             </a:r>
           </a:p>
           <a:p>
@@ -3791,37 +3365,13 @@
           <a:p>
             <a:r>
               <a:rPr lang="en-US" sz="1400" b="0" dirty="0"/>
-              <a:t>Left: the six trials from the previous slide point the same way. Their CIs overlap, I-squared = 0%. Pooling is sensible.</a:t>
+              <a:t>With high heterogeneity ask why: patients, doses, timing, definitions or risk of bias. Random effects only widen the CI.</a:t>
             </a:r>
           </a:p>
           <a:p>
             <a:r>
               <a:rPr lang="en-US" sz="1400" b="0" dirty="0"/>
-              <a:t>Right: six other hypothetical trials disagree. Some clearly favour restriction, others point the other way. I-squared = 80%: about 80% of the variation between studies reflects real differences rather than chance. The random-effects diamond is wide and crosses 1 (RR 0.74, 95% CI 0.47-1.15).</a:t>
-            </a:r>
-          </a:p>
-          <a:p>
-            <a:r>
-              <a:rPr lang="en-US" sz="1400" b="0" dirty="0"/>
-              <a:t>Rough guide (Cochrane): I-squared around 0-40% might not be important, 30-60% moderate, 50-90% substantial, 75-100% considerable. The ranges overlap on purpose: judge it with the plot.</a:t>
-            </a:r>
-          </a:p>
-          <a:p>
-            <a:r>
-              <a:rPr lang="en-US" sz="1400" b="0" dirty="0"/>
-              <a:t>Teaching point: with high heterogeneity the most useful question is why: different patients, doses, timing, outcome definitions or risk of bias? A single pooled number may hide this.</a:t>
-            </a:r>
-          </a:p>
-          <a:p>
-            <a:r>
-              <a:rPr lang="en-US" sz="1400" b="0" dirty="0"/>
-              <a:t>Misconception: 'a random-effects model fixes heterogeneity'. It only widens the CI. It does not explain anything.</a:t>
-            </a:r>
-          </a:p>
-          <a:p>
-            <a:r>
-              <a:rPr lang="en-US" sz="1400" b="0" dirty="0"/>
-              <a:t>Ask the class (call on two or three people, microphone on): give one reason fluid-restriction trials might disagree. Expected answer: different populations (sepsis vs surgery), different restriction protocols, different timing.</a:t>
+              <a:t>Ask: 'One reason fluid trials might disagree?' Expected: different populations, protocols or timing.</a:t>
             </a:r>
           </a:p>
           <a:p>
@@ -3908,37 +3458,19 @@
           <a:p>
             <a:r>
               <a:rPr lang="en-US" sz="1400" b="0" dirty="0"/>
-              <a:t>Risk-of-bias tools are structured ways to ask 'could the design or conduct have distorted this result?'. Each design has its own tool. A one-page version of this table is in the course folder: Course/Resources/Risk_of_Bias_Tool_Chooser.pdf.</a:t>
+              <a:t>Reporting guidelines check what was reported. Risk-of-bias tools judge trust. Judge by domain, do not add up stars.</a:t>
             </a:r>
           </a:p>
           <a:p>
             <a:r>
               <a:rPr lang="en-US" sz="1400" b="0" dirty="0"/>
-              <a:t>Randomised trials: RoB 2 (Cochrane), used for Paper 1 (Boulet). Non-randomised studies of interventions (before-after, cohorts comparing treatments): ROBINS-I. Cohort and case-control studies of exposures: the Newcastle-Ottawa Scale is still widely used. ROBINS-E is its newer, more rigorous alternative (used for Paper 2, Hyun). Diagnostic accuracy studies: QUADAS-2. Systematic reviews themselves: AMSTAR 2.</a:t>
+              <a:t>One-page version: Risk_of_Bias_Tool_Chooser.pdf.</a:t>
             </a:r>
           </a:p>
           <a:p>
             <a:r>
               <a:rPr lang="en-US" sz="1400" b="0" dirty="0"/>
-              <a:t>The third column links forward: each design also has a reporting guideline (CONSORT for trials, TREND or STROBE, STROBE for observational studies, STARD for diagnostic accuracy, PRISMA for reviews), covered in Session 8.</a:t>
-            </a:r>
-          </a:p>
-          <a:p>
-            <a:r>
-              <a:rPr lang="en-US" sz="1400" b="0" dirty="0"/>
-              <a:t>Teaching point: reporting guidelines check what was reported. Risk-of-bias tools judge how trustworthy the result is. A well-reported study can still be at high risk of bias.</a:t>
-            </a:r>
-          </a:p>
-          <a:p>
-            <a:r>
-              <a:rPr lang="en-US" sz="1400" b="0" dirty="0"/>
-              <a:t>Misconception: 'add up the stars and you get quality'. Scores hide which domain failed. Judgements by domain are more useful.</a:t>
-            </a:r>
-          </a:p>
-          <a:p>
-            <a:r>
-              <a:rPr lang="en-US" sz="1400" b="0" dirty="0"/>
-              <a:t>Ask the class (poll): you are appraising a before-after quality-improvement study of a sepsis bundle. Which tool? Expected answer: ROBINS-I.</a:t>
+              <a:t>Poll: 'Before-after QI study of a sepsis bundle: which tool?' Expected: ROBINS-I.</a:t>
             </a:r>
           </a:p>
           <a:p>
@@ -4025,31 +3557,13 @@
           <a:p>
             <a:r>
               <a:rPr lang="en-US" sz="1400" b="0" dirty="0"/>
-              <a:t>This closes the appraisal block and links to the 10-question checklist used in Session 8 ('Be the reviewer'): Course/Resources/Critical_Appraisal_Checklist.pdf.</a:t>
+              <a:t>Links to the 10-question checklist in Session 8 (Critical_Appraisal_Checklist.pdf).</a:t>
             </a:r>
           </a:p>
           <a:p>
             <a:r>
               <a:rPr lang="en-US" sz="1400" b="0" dirty="0"/>
-              <a:t>Words vs design: Boulet's conclusion ('did not reduce the overall fluid balance at day 5') matches its pilot RCT design. Hyun's abstract says 'associated', but its title says 'Impact', a stronger word than a cohort supports.</a:t>
-            </a:r>
-          </a:p>
-          <a:p>
-            <a:r>
-              <a:rPr lang="en-US" sz="1400" b="0" dirty="0"/>
-              <a:t>Numbers vs words: is the main result given as an effect size with a 95% CI? Is a non-significant result (p = 0.42) described honestly, without 'a trend towards'?</a:t>
-            </a:r>
-          </a:p>
-          <a:p>
-            <a:r>
-              <a:rPr lang="en-US" sz="1400" b="0" dirty="0"/>
-              <a:t>Spin: is the primary outcome reported first and the conclusion based on it, rather than on a favourable secondary outcome or subgroup?</a:t>
-            </a:r>
-          </a:p>
-          <a:p>
-            <a:r>
-              <a:rPr lang="en-US" sz="1400" b="0" dirty="0"/>
-              <a:t>Ask the class (call on two or three people, microphone on): find one word in a title or abstract that overclaims. Expected answer: 'impact', 'effect', 'reduces' or 'prevents' in an observational study.</a:t>
+              <a:t>Ask: 'Find one word in a title or abstract that overclaims.' Expected: 'impact', 'effect', 'reduces' in an observational study.</a:t>
             </a:r>
           </a:p>
           <a:p>
@@ -4136,31 +3650,31 @@
           <a:p>
             <a:r>
               <a:rPr lang="en-US" sz="1400" b="0" dirty="0"/>
-              <a:t>Whole-class exercise. Sheet: Course/Practicals/s4_exercises.md, Part E (PDF). Key: Course/Solutions/s4_solutions.md, Part E. Go back to the forest-plot slide on the shared screen while the class answers.</a:t>
+              <a:t>Show the forest-plot slide again while the class answers.</a:t>
             </a:r>
           </a:p>
           <a:p>
             <a:r>
               <a:rPr lang="en-US" sz="1400" b="0" dirty="0"/>
-              <a:t>Answers: Trial 4 has the most weight (38%). No single trial excludes RR = 1: all CIs cross it. The diamond (RR 0.79, 95% CI 0.64-0.98) does not cross 1: pooled, restriction was associated with about 21% lower relative risk of death in these (hypothetical) trials, with the upper limit close to no effect. Call on two or three people, then type the best sentence on the shared screen. Tools: RoB 2 for Boulet. Newcastle-Ottawa (or ROBINS-E) for Hyun. AMSTAR 2 for a review.</a:t>
+              <a:t>Answers: Trial 4 has most weight (38%). Every trial crosses 1. The diamond does not: about 21% lower relative risk, upper limit near no effect. Tools: RoB 2 for Boulet, Newcastle-Ottawa or ROBINS-E for Hyun, AMSTAR 2 for a review.</a:t>
             </a:r>
           </a:p>
           <a:p>
             <a:r>
               <a:rPr lang="en-US" sz="1400" b="0" dirty="0"/>
-              <a:t>If time is short, do the diamond sentence and the tools only.</a:t>
+              <a:t>Always say the CI with the diamond. If short of time, do the diamond sentence and the tools only.</a:t>
             </a:r>
           </a:p>
           <a:p>
             <a:r>
               <a:rPr lang="en-US" sz="1400" b="0" dirty="0"/>
-              <a:t>Common error: reading the diamond's centre without its width. Always say the CI.</a:t>
+              <a:t>Key: s4_solutions, Part E.</a:t>
             </a:r>
           </a:p>
           <a:p>
             <a:r>
               <a:rPr lang="en-US" sz="1400" b="0" dirty="0"/>
-              <a:t>Timing: 8 minutes. This closes the 30 minutes of 4.3. Then move to the proposal builder.</a:t>
+              <a:t>Timing: 8 minutes. 4.3 ends here.</a:t>
             </a:r>
           </a:p>
         </p:txBody>
@@ -4241,31 +3755,19 @@
           <a:p>
             <a:r>
               <a:rPr lang="en-US" sz="1400" b="0" dirty="0"/>
-              <a:t>Proposal builder 4 starts here (40 minutes in all, the figure shown on the builder banner and in the agenda: this slide 2 minutes, then 38 minutes of builder work).</a:t>
+              <a:t>Proposal builder 4 starts here (2 minutes on this slide, then 38).</a:t>
             </a:r>
           </a:p>
           <a:p>
             <a:r>
               <a:rPr lang="en-US" sz="1400" b="0" dirty="0"/>
-              <a:t>The primary outcome is the one result the study is designed and sized for. Define it three ways: what (death from any cause, not 'mortality improved'), how (hospital record, a phone call if discharged), when (day 28 after ICU admission). Secondary outcomes get the same three parts (e.g. acute kidney injury by day 7 using the standard KDIGO criteria, Kidney Disease: Improving Global Outcomes).</a:t>
+              <a:t>Several primary outcomes invite cherry-picking.</a:t>
             </a:r>
           </a:p>
           <a:p>
             <a:r>
               <a:rPr lang="en-US" sz="1400" b="0" dirty="0"/>
-              <a:t>Paper 1's primary outcome (Boulet): cumulative fluid balance (ml/kg) at day 5: clear what, how and when. Paper 2's (Hyun): mortality at day 28.</a:t>
-            </a:r>
-          </a:p>
-          <a:p>
-            <a:r>
-              <a:rPr lang="en-US" sz="1400" b="0" dirty="0"/>
-              <a:t>Misconception: 'more primary outcomes = more chances of a result'. That is exactly the problem: multiple primaries invite cherry-picking (spin, Session 2).</a:t>
-            </a:r>
-          </a:p>
-          <a:p>
-            <a:r>
-              <a:rPr lang="en-US" sz="1400" b="0" dirty="0"/>
-              <a:t>Ask the class (call on two or three people, microphone on): rewrite 'improve patient outcomes' as a primary outcome for the fluid question. Expected: e.g. 'new dialysis by day 28 after ICU admission, from the ICU chart'.</a:t>
+              <a:t>Ask: 'Rewrite improve patient outcomes as a primary outcome.' Expected: e.g. new dialysis by day 28 after ICU admission, from the ICU chart.</a:t>
             </a:r>
           </a:p>
           <a:p>
@@ -4352,18 +3854,6 @@
           <a:p>
             <a:r>
               <a:rPr lang="en-US" sz="1400" b="0" dirty="0"/>
-              <a:t>Section marker for 4.1. The 40 minutes run from the key-words slide to the 'Spot the bias' poll.</a:t>
-            </a:r>
-          </a:p>
-          <a:p>
-            <a:r>
-              <a:rPr lang="en-US" sz="1400" b="0" dirty="0"/>
-              <a:t>Three families of bias: who got into the study (selection), how things were measured (information), and mixing of effects (confounding). Then how designs fight bias, and four ideas for judging a result: effect modification, internal vs external validity, reverse causation and the Bradford Hill viewpoints.</a:t>
-            </a:r>
-          </a:p>
-          <a:p>
-            <a:r>
-              <a:rPr lang="en-US" sz="1400" b="0" dirty="0"/>
               <a:t>Timing: 30 seconds.</a:t>
             </a:r>
           </a:p>
@@ -4445,31 +3935,25 @@
           <a:p>
             <a:r>
               <a:rPr lang="en-US" sz="1400" b="0" dirty="0"/>
-              <a:t>Worksheet: Session 4 exercise sheet (PDF), Part F, and the proposal template (Course/Templates/Research_Proposal_Template.docx, Part 2). Everyone writes their own proposal. There are no groups.</a:t>
+              <a:t>15 minutes: fill in Part 2b for the running example on screen. 16 minutes: everyone drafts alone. 7 minutes: three volunteers read one bias and its fix.</a:t>
             </a:r>
           </a:p>
           <a:p>
             <a:r>
               <a:rPr lang="en-US" sz="1400" b="0" dirty="0"/>
-              <a:t>Rhythm (38 minutes): 15 minutes in which the instructor fills in Part 2b for the running example on the shared screen, thinking aloud, 16 minutes in which participants draft their own Part 2b quietly (cameras optional, questions in the chat), 7 minutes in which three volunteers read one bias and its fix aloud and the instructor comments.</a:t>
+              <a:t>Model: exposure positive balance at 72 h, comparator zero or negative, primary outcome death by day 28. Biases: severity (adjust or match), selection (consecutive patients), information (check 10% of charts). Full model in s4_solutions, Part F.</a:t>
             </a:r>
           </a:p>
           <a:p>
             <a:r>
               <a:rPr lang="en-US" sz="1400" b="0" dirty="0"/>
-              <a:t>Model answer for the running example (observational version), to write live: exposure: positive cumulative fluid balance (ml/kg) at 72 h after ICU admission. Comparator: zero or negative balance. Primary outcome: death from any cause by day 28 (hospital record). Secondary: acute kidney injury (KDIGO) by day 7, ventilator-free days to day 28, ICU length of stay. Biases: confounding by severity (record SOFA score, lactate, vasopressor dose and adjust or match), selection (consecutive patients, report exclusions), information (pre-defined fluid definitions, double-check 10% of charts). Claim: 'associated with'. Full model in Course/Solutions/s4_solutions.md, Part F.</a:t>
+              <a:t>Watch for: no comparator, three primary outcomes, 'we will be careful' as a mitigation.</a:t>
             </a:r>
           </a:p>
           <a:p>
             <a:r>
               <a:rPr lang="en-US" sz="1400" b="0" dirty="0"/>
-              <a:t>Common problems: no comparator, three primary outcomes. A bias named without a concrete mitigation ('we will be careful' is not a mitigation).</a:t>
-            </a:r>
-          </a:p>
-          <a:p>
-            <a:r>
-              <a:rPr lang="en-US" sz="1400" b="0" dirty="0"/>
-              <a:t>Timing: warn at 10 minutes and 2 minutes before the end of the individual slot.</a:t>
+              <a:t>Warn at 10 and 2 minutes before the end.</a:t>
             </a:r>
           </a:p>
         </p:txBody>
@@ -4550,19 +4034,13 @@
           <a:p>
             <a:r>
               <a:rPr lang="en-US" sz="1400" b="0" dirty="0"/>
-              <a:t>Session recap (22:25). Ask four volunteers (raise hand) to explain one card each. RR, OR, RD, NNT and PPV were each defined earlier today.</a:t>
+              <a:t>Ask four volunteers to explain one card each. Each proposal now has Parts 1 and 2.</a:t>
             </a:r>
           </a:p>
           <a:p>
             <a:r>
               <a:rPr lang="en-US" sz="1400" b="0" dirty="0"/>
-              <a:t>This also closes Weeks 3-4: each participant's proposal now has its question (Part 1) and its design (Part 2).</a:t>
-            </a:r>
-          </a:p>
-          <a:p>
-            <a:r>
-              <a:rPr lang="en-US" sz="1400" b="0" dirty="0"/>
-              <a:t>Timing: 2 minutes. With the wrap-up slide (3 minutes) this is the 5-minute close.</a:t>
+              <a:t>Timing: 2 minutes.</a:t>
             </a:r>
           </a:p>
         </p:txBody>
@@ -4643,25 +4121,25 @@
           <a:p>
             <a:r>
               <a:rPr lang="en-US" sz="1400" b="0" dirty="0"/>
-              <a:t>Exit question answers: confounding by indication (sicker patients receive more fluid and die more), or reverse causation (failing kidneys make less urine, so the balance becomes positive).</a:t>
+              <a:t>Exit answers: confounding by indication, or reverse causation (failing kidneys).</a:t>
             </a:r>
           </a:p>
           <a:p>
             <a:r>
               <a:rPr lang="en-US" sz="1400" b="0" dirty="0"/>
-              <a:t>Purpose: it checks whether the two main ideas of 4.1 landed. Read all the answers before Session 5 and open Session 5 by showing three of them (anonymously).</a:t>
+              <a:t>Open Session 5 with three anonymous answers.</a:t>
             </a:r>
           </a:p>
           <a:p>
             <a:r>
               <a:rPr lang="en-US" sz="1400" b="0" dirty="0"/>
-              <a:t>Preview: in Weeks 5-6 we turn the design into data (variables, data collection forms) and meet the course dataset FLUID-ICU, a simulated cohort that answers the observational version of our fluid question. Each participant later chooses one of its five questions (Q1-Q5) for their own manuscript.</a:t>
+              <a:t>Preview: Weeks 5-6 turn the design into data and introduce FLUID-ICU. In Session 6 each person chooses one of its questions (Q1-Q5) for their Results section.</a:t>
             </a:r>
           </a:p>
           <a:p>
             <a:r>
               <a:rPr lang="en-US" sz="1400" b="0" dirty="0"/>
-              <a:t>Timing: 3 minutes after the 2-minute recap slide (5 minutes in all, as on the banner and in the agenda). Finish at 22:30.</a:t>
+              <a:t>Timing: 3 minutes. Finish at 22:30.</a:t>
             </a:r>
           </a:p>
         </p:txBody>
@@ -4742,13 +4220,7 @@
           <a:p>
             <a:r>
               <a:rPr lang="en-US" sz="1400" b="0" dirty="0"/>
-              <a:t>Extra: the slides after this point are optional. Use them if the class is quick, for questions, or for self-study (the deck is shared as a PDF after the session).</a:t>
-            </a:r>
-          </a:p>
-          <a:p>
-            <a:r>
-              <a:rPr lang="en-US" sz="1400" b="0" dirty="0"/>
-              <a:t>Timing: skip in the live session unless time allows.</a:t>
+              <a:t>Optional. Use if time allows, or for self-study.</a:t>
             </a:r>
           </a:p>
         </p:txBody>
@@ -4829,13 +4301,7 @@
           <a:p>
             <a:r>
               <a:rPr lang="en-US" sz="1400" b="0" dirty="0"/>
-              <a:t>Extra: three more scenarios from other settings, for a quick poll or for self-study.</a:t>
-            </a:r>
-          </a:p>
-          <a:p>
-            <a:r>
-              <a:rPr lang="en-US" sz="1400" b="0" dirty="0"/>
-              <a:t>Answers. A: selection bias. The sickest patients (who died) are missing, so the sample is not the population. B: observer bias (information bias): a subjective score assessed by someone who knows the group. C: measurement bias (information bias). Because it affects one ward only, it distorts the comparison between wards.</a:t>
+              <a:t>Answers: A selection bias. B observer bias. C measurement bias, which distorts the comparison because it affects one ward only.</a:t>
             </a:r>
           </a:p>
           <a:p>
@@ -4922,25 +4388,7 @@
           <a:p>
             <a:r>
               <a:rPr lang="en-US" sz="1400" b="0" dirty="0"/>
-              <a:t>Extra: three more examples of confounding by indication, to make the idea stick.</a:t>
-            </a:r>
-          </a:p>
-          <a:p>
-            <a:r>
-              <a:rPr lang="en-US" sz="1400" b="0" dirty="0"/>
-              <a:t>For each card, read the apparent association, then ask for the third factor before revealing it.</a:t>
-            </a:r>
-          </a:p>
-          <a:p>
-            <a:r>
-              <a:rPr lang="en-US" sz="1400" b="0" dirty="0"/>
-              <a:t>Card 3 is deliberately mixed: vasopressors can cause arrhythmia, and shock severity drives both. Real associations are often a mixture of a true effect and confounding. That is why adjustment, or randomisation, is needed to separate them.</a:t>
-            </a:r>
-          </a:p>
-          <a:p>
-            <a:r>
-              <a:rPr lang="en-US" sz="1400" b="0" dirty="0"/>
-              <a:t>Misconception: 'a confounder is any difference between groups'. It must be linked to the exposure and cause the outcome.</a:t>
+              <a:t>Ask for the third factor before revealing it. Card 3 mixes a true effect and confounding.</a:t>
             </a:r>
           </a:p>
           <a:p>
@@ -5027,37 +4475,13 @@
           <a:p>
             <a:r>
               <a:rPr lang="en-US" sz="1400" b="0" dirty="0"/>
-              <a:t>Extra: Concept only. Likelihood ratios combine sensitivity and specificity into one number that tells you how much a result should change your suspicion.</a:t>
+              <a:t>Concept only. LR+ 4.5, LR- 0.13. LRs do not depend on prevalence. Reporting: STARD. Appraisal: QUADAS-2.</a:t>
             </a:r>
           </a:p>
           <a:p>
             <a:r>
               <a:rPr lang="en-US" sz="1400" b="0" dirty="0"/>
-              <a:t>LR+ = 0.90 / 0.20 = 4.5: a positive result is 4.5 times as likely in someone with the disease as in someone without. LR- = 0.10 / 0.80 = 0.13: a negative result is about 8 times less likely in the sick. Rough rule: LR+ above 10 or LR- below 0.1 changes decisions a lot. Values near 1 change little.</a:t>
-            </a:r>
-          </a:p>
-          <a:p>
-            <a:r>
-              <a:rPr lang="en-US" sz="1400" b="0" dirty="0"/>
-              <a:t>Unlike PPV, likelihood ratios do not depend on prevalence, so they travel between settings better.</a:t>
-            </a:r>
-          </a:p>
-          <a:p>
-            <a:r>
-              <a:rPr lang="en-US" sz="1400" b="0" dirty="0"/>
-              <a:t>Reporting: STARD (Standards for Reporting Diagnostic accuracy studies: 30 items and a participant flow diagram). Appraisal: QUADAS-2 (Quality Assessment of Diagnostic Accuracy Studies). Watch for spectrum bias: a test evaluated in very sick patients versus healthy volunteers looks better than it will in real, mixed patients.</a:t>
-            </a:r>
-          </a:p>
-          <a:p>
-            <a:r>
-              <a:rPr lang="en-US" sz="1400" b="0" dirty="0"/>
-              <a:t>Misconception: 'diagnostic accuracy studies are just a 2x2 table'. The design questions (who was tested, was the reference standard applied to everyone, was it read blind) matter as much as the numbers.</a:t>
-            </a:r>
-          </a:p>
-          <a:p>
-            <a:r>
-              <a:rPr lang="en-US" sz="1400" b="0" dirty="0"/>
-              <a:t>Timing: 1.5 minutes. The Advanced Modules offer diagnostic-accuracy analysis hands-on.</a:t>
+              <a:t>Timing: 1.5 minutes if used.</a:t>
             </a:r>
           </a:p>
         </p:txBody>
@@ -5138,37 +4562,19 @@
           <a:p>
             <a:r>
               <a:rPr lang="en-US" sz="1400" b="0" dirty="0"/>
-              <a:t>Extra: Illustrative judgements. RoB 2 asks signalling questions in five domains: D1 randomisation process (sequence and concealment), D2 deviations from intended interventions (blinding, adherence), D3 missing outcome data, D4 measurement of the outcome, D5 selection of the reported result.</a:t>
+              <a:t>Illustrative. The worst domain drives the overall judgement. Boulet: D1 likely low, D2 some concerns, D4 low for fluid balance.</a:t>
             </a:r>
           </a:p>
           <a:p>
             <a:r>
               <a:rPr lang="en-US" sz="1400" b="0" dirty="0"/>
-              <a:t>Each domain is judged low risk (green +), some concerns (yellow -) or high risk (red x). The overall judgement is driven by the worst domain: Trial C is high risk because of D2.</a:t>
+              <a:t>Unblinded is not automatically high risk.</a:t>
             </a:r>
           </a:p>
           <a:p>
             <a:r>
               <a:rPr lang="en-US" sz="1400" b="0" dirty="0"/>
-              <a:t>Reviews show this plot so readers can see which trials drive the pooled result and whether excluding high-risk trials changes it (a sensitivity analysis).</a:t>
-            </a:r>
-          </a:p>
-          <a:p>
-            <a:r>
-              <a:rPr lang="en-US" sz="1400" b="0" dirty="0"/>
-              <a:t>Apply to Paper 1, Boulet (discuss, do not score formally): D1 likely low (central computer). D2 some concerns, as clinicians knew the group. D4 low for an objective outcome such as fluid balance.</a:t>
-            </a:r>
-          </a:p>
-          <a:p>
-            <a:r>
-              <a:rPr lang="en-US" sz="1400" b="0" dirty="0"/>
-              <a:t>Misconception: 'unblinded = high risk'. Not if the outcome is objective and the deviations are small. It depends on the domain questions.</a:t>
-            </a:r>
-          </a:p>
-          <a:p>
-            <a:r>
-              <a:rPr lang="en-US" sz="1400" b="0" dirty="0"/>
-              <a:t>Timing: 1.5 minutes. Session 8 uses our simplified 10-question checklist. The Advanced Modules practise the full tools.</a:t>
+              <a:t>Timing: 1.5 minutes if used.</a:t>
             </a:r>
           </a:p>
         </p:txBody>
@@ -5249,13 +4655,7 @@
           <a:p>
             <a:r>
               <a:rPr lang="en-US" sz="1400" b="0" dirty="0"/>
-              <a:t>Extra: the bathtub numbers again, as steps, for participants who found the picture too fast.</a:t>
-            </a:r>
-          </a:p>
-          <a:p>
-            <a:r>
-              <a:rPr lang="en-US" sz="1400" b="0" dirty="0"/>
-              <a:t>The key difference is the denominator: prevalence uses everyone today (200). Incidence uses only those who could become new cases (180) and needs a time period.</a:t>
+              <a:t>The difference is the denominator: everyone today (200) vs those at risk (180) over a time period.</a:t>
             </a:r>
           </a:p>
           <a:p>
@@ -5342,7 +4742,7 @@
           <a:p>
             <a:r>
               <a:rPr lang="en-US" sz="1400" b="0" dirty="0"/>
-              <a:t>Copyright slide. Leave it on screen while participants leave the meeting.</a:t>
+              <a:t>Leave on screen while people leave the meeting.</a:t>
             </a:r>
           </a:p>
         </p:txBody>
@@ -5423,25 +4823,13 @@
           <a:p>
             <a:r>
               <a:rPr lang="en-US" sz="1400" b="0" dirty="0"/>
-              <a:t>Use the dartboard. Left: what we want, close to the truth and tightly grouped. Middle: random error, centred on the truth but scattered. A larger sample pulls the darts together. Right: bias, tightly grouped but in the wrong place. A larger sample just makes us more confident in the wrong answer.</a:t>
+              <a:t>A larger sample reduces random error, not bias. A narrow CI says nothing about bias.</a:t>
             </a:r>
           </a:p>
           <a:p>
             <a:r>
               <a:rPr lang="en-US" sz="1400" b="0" dirty="0"/>
-              <a:t>Teaching point: confidence intervals (Session 6) describe random error only. A narrow CI says nothing about bias.</a:t>
-            </a:r>
-          </a:p>
-          <a:p>
-            <a:r>
-              <a:rPr lang="en-US" sz="1400" b="0" dirty="0"/>
-              <a:t>Misconception: 'a study of 10,000 patients cannot be biased'. Large registry studies can be very precise and still biased.</a:t>
-            </a:r>
-          </a:p>
-          <a:p>
-            <a:r>
-              <a:rPr lang="en-US" sz="1400" b="0" dirty="0"/>
-              <a:t>Ask the class (poll): which of our two papers is more at risk of random error, and which of bias? Expected answer: Paper 1, Boulet 2024 (48 patients) for random error. Paper 2, Hyun 2023 (observational) for bias, especially confounding. Both are in the course folder, Course/Papers.</a:t>
+              <a:t>Poll: 'Which paper risks random error, which bias?' Expected: Boulet (48 patients) random error, Hyun (observational) bias.</a:t>
             </a:r>
           </a:p>
           <a:p>
@@ -5528,31 +4916,13 @@
           <a:p>
             <a:r>
               <a:rPr lang="en-US" sz="1400" b="0" dirty="0"/>
-              <a:t>Selection bias happens when the people who enter (or stay in) a study differ systematically from the people we want to learn about.</a:t>
+              <a:t>Hyun included only patients still in the ICU on day 3 (2,516 of 11,981). The result applies to them, not to all sepsis patients.</a:t>
             </a:r>
           </a:p>
           <a:p>
             <a:r>
               <a:rPr lang="en-US" sz="1400" b="0" dirty="0"/>
-              <a:t>Example from Paper 2 (Hyun): only patients who stayed at least three days in the ICU with fluid data were included (2,516 of 11,981 registry patients). The sickest patients who died early, and the mildest who left early, were left out. The result applies to 'patients still in the ICU on day 3', not to all sepsis patients.</a:t>
-            </a:r>
-          </a:p>
-          <a:p>
-            <a:r>
-              <a:rPr lang="en-US" sz="1400" b="0" dirty="0"/>
-              <a:t>Other common sources: volunteers, patients who refuse consent, loss to follow-up, single referral centres.</a:t>
-            </a:r>
-          </a:p>
-          <a:p>
-            <a:r>
-              <a:rPr lang="en-US" sz="1400" b="0" dirty="0"/>
-              <a:t>Misconception: 'selection bias only matters in surveys'. It affects every design, including RCTs (strict exclusion criteria limit who the result applies to).</a:t>
-            </a:r>
-          </a:p>
-          <a:p>
-            <a:r>
-              <a:rPr lang="en-US" sz="1400" b="0" dirty="0"/>
-              <a:t>Ask the class (call on two or three people, microphone on): in Paper 1 (Boulet), 1,201 patients were screened and 50 included. What does that tell you? Expected answer: trial patients were highly selected. Check whether they look like your patients before applying the result.</a:t>
+              <a:t>Ask: 'Boulet screened 1,201 and included 50. What does that tell you?' Expected: highly selected patients. Check they look like yours.</a:t>
             </a:r>
           </a:p>
           <a:p>
@@ -5639,37 +5009,13 @@
           <a:p>
             <a:r>
               <a:rPr lang="en-US" sz="1400" b="0" dirty="0"/>
-              <a:t>Information (measurement) bias: the data are wrong in a systematic way.</a:t>
+              <a:t>For our question: under-recorded urine output makes the balance look more positive. If it differs between groups, it distorts the comparison.</a:t>
             </a:r>
           </a:p>
           <a:p>
             <a:r>
               <a:rPr lang="en-US" sz="1400" b="0" dirty="0"/>
-              <a:t>Recall bias: in a case-control study, cases (or their families) search their memory harder than controls, so exposures look more common in cases.</a:t>
-            </a:r>
-          </a:p>
-          <a:p>
-            <a:r>
-              <a:rPr lang="en-US" sz="1400" b="0" dirty="0"/>
-              <a:t>Observer bias: an assessor who knows the group may judge a soft outcome differently, for example 'ready for discharge' or 'delirium present'. In Boulet clinicians knew the allocation.</a:t>
-            </a:r>
-          </a:p>
-          <a:p>
-            <a:r>
-              <a:rPr lang="en-US" sz="1400" b="0" dirty="0"/>
-              <a:t>Measurement bias: a scale that always reads 0.5 kg high, or urine output that is under-recorded on night shifts. For our fluid question this matters directly: missing urine output makes the fluid balance look more positive than it is. If it differs between groups, it distorts the comparison.</a:t>
-            </a:r>
-          </a:p>
-          <a:p>
-            <a:r>
-              <a:rPr lang="en-US" sz="1400" b="0" dirty="0"/>
-              <a:t>Misconception: 'hard outcomes like death are immune'. Death is reliably recorded, but the timing and cause of death can still be misclassified.</a:t>
-            </a:r>
-          </a:p>
-          <a:p>
-            <a:r>
-              <a:rPr lang="en-US" sz="1400" b="0" dirty="0"/>
-              <a:t>Ask the class (call on two or three people, microphone on): how would you reduce observer bias in an unblinded ICU fluid trial? Expected answer: an objective outcome, a blinded outcome assessor, standard definitions and training.</a:t>
+              <a:t>Ask: 'How would you reduce observer bias in an unblinded fluid trial?' Expected: objective outcome, blinded assessor, standard definitions.</a:t>
             </a:r>
           </a:p>
           <a:p>
@@ -5756,37 +5102,13 @@
           <a:p>
             <a:r>
               <a:rPr lang="en-US" sz="1400" b="0" dirty="0"/>
-              <a:t>This is the most important slide of 4.1. Point to each arrow with the cursor.</a:t>
+              <a:t>The key slide of 4.1. Point to each arrow. A confounder is linked to the exposure, causes the outcome and is not on the pathway.</a:t>
             </a:r>
           </a:p>
           <a:p>
             <a:r>
               <a:rPr lang="en-US" sz="1400" b="0" dirty="0"/>
-              <a:t>Severity of illness pushes clinicians to give more fluid (left arrow). Severity also causes death (right arrow). So patients who got more fluid die more often, even if the fluid itself did nothing.</a:t>
-            </a:r>
-          </a:p>
-          <a:p>
-            <a:r>
-              <a:rPr lang="en-US" sz="1400" b="0" dirty="0"/>
-              <a:t>This special case is called confounding by indication: the reason for giving a treatment is itself linked to the outcome.</a:t>
-            </a:r>
-          </a:p>
-          <a:p>
-            <a:r>
-              <a:rPr lang="en-US" sz="1400" b="0" dirty="0"/>
-              <a:t>Three conditions for a confounder: associated with the exposure, a cause of the outcome, and not on the causal pathway between them.</a:t>
-            </a:r>
-          </a:p>
-          <a:p>
-            <a:r>
-              <a:rPr lang="en-US" sz="1400" b="0" dirty="0"/>
-              <a:t>Misconception: 'a confounder is any variable that differs between groups'. It must also affect the outcome.</a:t>
-            </a:r>
-          </a:p>
-          <a:p>
-            <a:r>
-              <a:rPr lang="en-US" sz="1400" b="0" dirty="0"/>
-              <a:t>Ask the class (call on two or three people, microphone on): which bedside signs make you give more fluid and predict death? Expected answer: low blood pressure, high lactate, high vasopressor dose, mottled skin. Each one is a candidate confounder.</a:t>
+              <a:t>Ask: 'Which bedside signs make you give more fluid and predict death?' Expected: low blood pressure, high lactate, high vasopressor dose, mottled skin.</a:t>
             </a:r>
           </a:p>
           <a:p>
@@ -5873,43 +5195,25 @@
           <a:p>
             <a:r>
               <a:rPr lang="en-US" sz="1400" b="0" dirty="0"/>
-              <a:t>Hypothetical numbers, chosen to make the point. All patients together: 42% of high-fluid patients die versus 18% of low-fluid patients, a crude risk ratio (RR) of 2.33. It looks as if fluid kills.</a:t>
+              <a:t>Hypothetical numbers. Crude RR 2.33. Within each severity level RR 1.0. 80 of 100 high-fluid patients were severe, but only 20 of 100 low-fluid.</a:t>
             </a:r>
           </a:p>
           <a:p>
             <a:r>
               <a:rPr lang="en-US" sz="1400" b="0" dirty="0"/>
-              <a:t>Now split by severity. Mild illness: 10% versus 10%. Severe illness: 50% versus 50%. Within each level the RR is 1.0.</a:t>
+              <a:t>Check aloud: 2 + 40 = 42 deaths, 8 + 10 = 18.</a:t>
             </a:r>
           </a:p>
           <a:p>
             <a:r>
               <a:rPr lang="en-US" sz="1400" b="0" dirty="0"/>
-              <a:t>The reason: 80 of the 100 high-fluid patients were severely ill, but only 20 of the 100 low-fluid patients. Severity, not fluid, explained the crude difference.</a:t>
+              <a:t>Ask: 'What would you measure at baseline to do this?' Expected: SOFA, lactate, vasopressor dose, age, comorbidity.</a:t>
             </a:r>
           </a:p>
           <a:p>
             <a:r>
               <a:rPr lang="en-US" sz="1400" b="0" dirty="0"/>
-              <a:t>Teaching point: this is what 'adjusting for severity' does: it compares like with like. Session 6 shows how papers and models report it. Next slide: what it means when the strata do NOT agree.</a:t>
-            </a:r>
-          </a:p>
-          <a:p>
-            <a:r>
-              <a:rPr lang="en-US" sz="1400" b="0" dirty="0"/>
-              <a:t>Misconception: 'after adjustment the remaining association is causal'. Only if every important confounder was measured well, which is never guaranteed in observational data.</a:t>
-            </a:r>
-          </a:p>
-          <a:p>
-            <a:r>
-              <a:rPr lang="en-US" sz="1400" b="0" dirty="0"/>
-              <a:t>Ask the class (call on two or three people, microphone on): what would you need to measure at baseline in an observational fluid study to do this? Expected answer: the main severity markers: SOFA score, lactate, vasopressor dose, age, comorbidity.</a:t>
-            </a:r>
-          </a:p>
-          <a:p>
-            <a:r>
-              <a:rPr lang="en-US" sz="1400" b="0" dirty="0"/>
-              <a:t>Timing: 3.5 minutes. Check the arithmetic aloud: 2 + 40 = 42 deaths of 100, 8 + 10 = 18 of 100.</a:t>
+              <a:t>Timing: 3.5 minutes.</a:t>
             </a:r>
           </a:p>
         </p:txBody>
@@ -18221,7 +17525,7 @@
                 <a:latin typeface="Arial"/>
                 <a:cs typeface="Arial"/>
               </a:rPr>
-              <a:t>The instructor shares the screen: Course/Resources/tools/2x2_calculator.xlsx, sheet Association</a:t>
+              <a:t>The instructor shares the screen: 2x2_calculator.xlsx, sheet Association</a:t>
             </a:r>
           </a:p>
           <a:p>
@@ -23520,7 +22824,7 @@
                 <a:latin typeface="Arial"/>
                 <a:cs typeface="Arial"/>
               </a:rPr>
-              <a:t>Questions 7-9 of the 10-question appraisal checklist used in Session 8 (Course/Resources)</a:t>
+              <a:t>Questions 7-9 of the 10-question appraisal checklist used in Session 8</a:t>
             </a:r>
           </a:p>
         </p:txBody>
@@ -27269,7 +26573,7 @@
                 <a:latin typeface="Arial"/>
                 <a:cs typeface="Arial"/>
               </a:rPr>
-              <a:t>Why: it checks today's key idea. The instructor reads every answer and opens Session 5 with them</a:t>
+              <a:t>Homework: finish your own Proposal Part 2 (exposure, comparator, outcomes, biases)</a:t>
             </a:r>
           </a:p>
           <a:p>
@@ -27294,7 +26598,7 @@
                 <a:latin typeface="Arial"/>
                 <a:cs typeface="Arial"/>
               </a:rPr>
-              <a:t>Homework: finish your own Proposal Part 2 (exposure, comparator, outcomes, biases)</a:t>
+              <a:t>Optional: exercise sheet Parts B and D (effect modification, PPV in two settings)</a:t>
             </a:r>
           </a:p>
           <a:p>
@@ -27319,31 +26623,6 @@
                 <a:latin typeface="Arial"/>
                 <a:cs typeface="Arial"/>
               </a:rPr>
-              <a:t>Optional: exercise sheet Parts B and D (effect modification, PPV in two settings)</a:t>
-            </a:r>
-          </a:p>
-          <a:p>
-            <a:pPr marL="380000" indent="-380000" algn="l">
-              <a:lnSpc>
-                <a:spcPct val="104000"/>
-              </a:lnSpc>
-              <a:spcBef>
-                <a:spcPts val="450"/>
-              </a:spcBef>
-              <a:buClr>
-                <a:srgbClr val="1F5C7A"/>
-              </a:buClr>
-              <a:buFont typeface="Arial"/>
-              <a:buChar char="•"/>
-            </a:pPr>
-            <a:r>
-              <a:rPr lang="en-US" sz="1650" dirty="0">
-                <a:solidFill>
-                  <a:srgbClr val="000000"/>
-                </a:solidFill>
-                <a:latin typeface="Arial"/>
-                <a:cs typeface="Arial"/>
-              </a:rPr>
               <a:t>Next Saturday (Session 5): data, and the course dataset FLUID-ICU</a:t>
             </a:r>
           </a:p>
@@ -27401,7 +26680,7 @@
                 <a:latin typeface="Arial"/>
                 <a:cs typeface="Arial"/>
               </a:rPr>
-              <a:t>One exit answer per person, in the chat or the form</a:t>
+              <a:t>One exit answer per person, in the chat</a:t>
             </a:r>
           </a:p>
         </p:txBody>
